--- a/Project Deliverables/CS 25-330_Poster.pptx
+++ b/Project Deliverables/CS 25-330_Poster.pptx
@@ -1,19 +1,19 @@
 
 <file path=ppt/presentation.xml><?xml version="1.0" encoding="utf-8"?>
-<p:presentation xmlns:a="http://schemas.openxmlformats.org/drawingml/2006/main" xmlns:r="http://schemas.openxmlformats.org/officeDocument/2006/relationships" xmlns:p="http://schemas.openxmlformats.org/presentationml/2006/main" strictFirstAndLastChars="0" saveSubsetFonts="1" autoCompressPictures="0">
+<p:presentation xmlns:a="http://schemas.openxmlformats.org/drawingml/2006/main" xmlns:r="http://schemas.openxmlformats.org/officeDocument/2006/relationships" xmlns:mc="http://schemas.openxmlformats.org/markup-compatibility/2006" xmlns:mv="urn:schemas-microsoft-com:mac:vml" xmlns:p="http://schemas.openxmlformats.org/presentationml/2006/main" xmlns:c="http://schemas.openxmlformats.org/drawingml/2006/chart" xmlns:dgm="http://schemas.openxmlformats.org/drawingml/2006/diagram" xmlns:o="urn:schemas-microsoft-com:office:office" xmlns:v="urn:schemas-microsoft-com:vml" xmlns:pvml="urn:schemas-microsoft-com:office:powerpoint" xmlns:com="http://schemas.openxmlformats.org/drawingml/2006/compatibility" xmlns:p14="http://schemas.microsoft.com/office/powerpoint/2010/main" xmlns:p15="http://schemas.microsoft.com/office/powerpoint/2012/main" xmlns:ahyp="http://schemas.microsoft.com/office/drawing/2018/hyperlinkcolor" autoCompressPictures="0" strictFirstAndLastChars="0" saveSubsetFonts="1">
   <p:sldMasterIdLst>
-    <p:sldMasterId id="2147483648" r:id="rId1"/>
+    <p:sldMasterId id="2147483648" r:id="rId4"/>
   </p:sldMasterIdLst>
   <p:notesMasterIdLst>
-    <p:notesMasterId r:id="rId3"/>
+    <p:notesMasterId r:id="rId5"/>
   </p:notesMasterIdLst>
   <p:sldIdLst>
-    <p:sldId id="256" r:id="rId2"/>
+    <p:sldId id="256" r:id="rId6"/>
   </p:sldIdLst>
-  <p:sldSz cx="43891200" cy="32918400"/>
+  <p:sldSz cy="32918400" cx="43891200"/>
   <p:notesSz cx="6858000" cy="9144000"/>
   <p:defaultTextStyle>
-    <a:defPPr marR="0" lvl="0" algn="l" rtl="0">
+    <a:defPPr lvl="0" marR="0" rtl="0" algn="l">
       <a:lnSpc>
         <a:spcPct val="100000"/>
       </a:lnSpc>
@@ -24,7 +24,7 @@
         <a:spcPts val="0"/>
       </a:spcAft>
     </a:defPPr>
-    <a:lvl1pPr marR="0" lvl="0" algn="l" rtl="0">
+    <a:lvl1pPr lvl="0" marR="0" rtl="0" algn="l">
       <a:lnSpc>
         <a:spcPct val="100000"/>
       </a:lnSpc>
@@ -38,7 +38,7 @@
         <a:srgbClr val="000000"/>
       </a:buClr>
       <a:buFont typeface="Arial"/>
-      <a:defRPr sz="1400" b="0" i="0" u="none" strike="noStrike" cap="none">
+      <a:defRPr b="0" i="0" sz="1400" u="none" cap="none" strike="noStrike">
         <a:solidFill>
           <a:srgbClr val="000000"/>
         </a:solidFill>
@@ -48,7 +48,7 @@
         <a:sym typeface="Arial"/>
       </a:defRPr>
     </a:lvl1pPr>
-    <a:lvl2pPr marR="0" lvl="1" algn="l" rtl="0">
+    <a:lvl2pPr lvl="1" marR="0" rtl="0" algn="l">
       <a:lnSpc>
         <a:spcPct val="100000"/>
       </a:lnSpc>
@@ -62,7 +62,7 @@
         <a:srgbClr val="000000"/>
       </a:buClr>
       <a:buFont typeface="Arial"/>
-      <a:defRPr sz="1400" b="0" i="0" u="none" strike="noStrike" cap="none">
+      <a:defRPr b="0" i="0" sz="1400" u="none" cap="none" strike="noStrike">
         <a:solidFill>
           <a:srgbClr val="000000"/>
         </a:solidFill>
@@ -72,7 +72,7 @@
         <a:sym typeface="Arial"/>
       </a:defRPr>
     </a:lvl2pPr>
-    <a:lvl3pPr marR="0" lvl="2" algn="l" rtl="0">
+    <a:lvl3pPr lvl="2" marR="0" rtl="0" algn="l">
       <a:lnSpc>
         <a:spcPct val="100000"/>
       </a:lnSpc>
@@ -86,7 +86,7 @@
         <a:srgbClr val="000000"/>
       </a:buClr>
       <a:buFont typeface="Arial"/>
-      <a:defRPr sz="1400" b="0" i="0" u="none" strike="noStrike" cap="none">
+      <a:defRPr b="0" i="0" sz="1400" u="none" cap="none" strike="noStrike">
         <a:solidFill>
           <a:srgbClr val="000000"/>
         </a:solidFill>
@@ -96,7 +96,7 @@
         <a:sym typeface="Arial"/>
       </a:defRPr>
     </a:lvl3pPr>
-    <a:lvl4pPr marR="0" lvl="3" algn="l" rtl="0">
+    <a:lvl4pPr lvl="3" marR="0" rtl="0" algn="l">
       <a:lnSpc>
         <a:spcPct val="100000"/>
       </a:lnSpc>
@@ -110,7 +110,7 @@
         <a:srgbClr val="000000"/>
       </a:buClr>
       <a:buFont typeface="Arial"/>
-      <a:defRPr sz="1400" b="0" i="0" u="none" strike="noStrike" cap="none">
+      <a:defRPr b="0" i="0" sz="1400" u="none" cap="none" strike="noStrike">
         <a:solidFill>
           <a:srgbClr val="000000"/>
         </a:solidFill>
@@ -120,7 +120,7 @@
         <a:sym typeface="Arial"/>
       </a:defRPr>
     </a:lvl4pPr>
-    <a:lvl5pPr marR="0" lvl="4" algn="l" rtl="0">
+    <a:lvl5pPr lvl="4" marR="0" rtl="0" algn="l">
       <a:lnSpc>
         <a:spcPct val="100000"/>
       </a:lnSpc>
@@ -134,7 +134,7 @@
         <a:srgbClr val="000000"/>
       </a:buClr>
       <a:buFont typeface="Arial"/>
-      <a:defRPr sz="1400" b="0" i="0" u="none" strike="noStrike" cap="none">
+      <a:defRPr b="0" i="0" sz="1400" u="none" cap="none" strike="noStrike">
         <a:solidFill>
           <a:srgbClr val="000000"/>
         </a:solidFill>
@@ -144,7 +144,7 @@
         <a:sym typeface="Arial"/>
       </a:defRPr>
     </a:lvl5pPr>
-    <a:lvl6pPr marR="0" lvl="5" algn="l" rtl="0">
+    <a:lvl6pPr lvl="5" marR="0" rtl="0" algn="l">
       <a:lnSpc>
         <a:spcPct val="100000"/>
       </a:lnSpc>
@@ -158,7 +158,7 @@
         <a:srgbClr val="000000"/>
       </a:buClr>
       <a:buFont typeface="Arial"/>
-      <a:defRPr sz="1400" b="0" i="0" u="none" strike="noStrike" cap="none">
+      <a:defRPr b="0" i="0" sz="1400" u="none" cap="none" strike="noStrike">
         <a:solidFill>
           <a:srgbClr val="000000"/>
         </a:solidFill>
@@ -168,7 +168,7 @@
         <a:sym typeface="Arial"/>
       </a:defRPr>
     </a:lvl6pPr>
-    <a:lvl7pPr marR="0" lvl="6" algn="l" rtl="0">
+    <a:lvl7pPr lvl="6" marR="0" rtl="0" algn="l">
       <a:lnSpc>
         <a:spcPct val="100000"/>
       </a:lnSpc>
@@ -182,7 +182,7 @@
         <a:srgbClr val="000000"/>
       </a:buClr>
       <a:buFont typeface="Arial"/>
-      <a:defRPr sz="1400" b="0" i="0" u="none" strike="noStrike" cap="none">
+      <a:defRPr b="0" i="0" sz="1400" u="none" cap="none" strike="noStrike">
         <a:solidFill>
           <a:srgbClr val="000000"/>
         </a:solidFill>
@@ -192,7 +192,7 @@
         <a:sym typeface="Arial"/>
       </a:defRPr>
     </a:lvl7pPr>
-    <a:lvl8pPr marR="0" lvl="7" algn="l" rtl="0">
+    <a:lvl8pPr lvl="7" marR="0" rtl="0" algn="l">
       <a:lnSpc>
         <a:spcPct val="100000"/>
       </a:lnSpc>
@@ -206,7 +206,7 @@
         <a:srgbClr val="000000"/>
       </a:buClr>
       <a:buFont typeface="Arial"/>
-      <a:defRPr sz="1400" b="0" i="0" u="none" strike="noStrike" cap="none">
+      <a:defRPr b="0" i="0" sz="1400" u="none" cap="none" strike="noStrike">
         <a:solidFill>
           <a:srgbClr val="000000"/>
         </a:solidFill>
@@ -216,7 +216,7 @@
         <a:sym typeface="Arial"/>
       </a:defRPr>
     </a:lvl8pPr>
-    <a:lvl9pPr marR="0" lvl="8" algn="l" rtl="0">
+    <a:lvl9pPr lvl="8" marR="0" rtl="0" algn="l">
       <a:lnSpc>
         <a:spcPct val="100000"/>
       </a:lnSpc>
@@ -230,7 +230,7 @@
         <a:srgbClr val="000000"/>
       </a:buClr>
       <a:buFont typeface="Arial"/>
-      <a:defRPr sz="1400" b="0" i="0" u="none" strike="noStrike" cap="none">
+      <a:defRPr b="0" i="0" sz="1400" u="none" cap="none" strike="noStrike">
         <a:solidFill>
           <a:srgbClr val="000000"/>
         </a:solidFill>
@@ -243,7 +243,7 @@
   </p:defaultTextStyle>
   <p:extLst>
     <p:ext uri="{EFAFB233-063F-42B5-8137-9DF3F51BA10A}">
-      <p15:sldGuideLst xmlns:p15="http://schemas.microsoft.com/office/powerpoint/2012/main">
+      <p15:sldGuideLst>
         <p15:guide id="1" orient="horz" pos="10368">
           <p15:clr>
             <a:srgbClr val="A4A3A4"/>
@@ -257,26 +257,25 @@
       </p15:sldGuideLst>
     </p:ext>
     <p:ext uri="GoogleSlidesCustomDataVersion2">
-      <go:slidesCustomData xmlns:go="http://customooxmlschemas.google.com/" xmlns:ahyp="http://schemas.microsoft.com/office/drawing/2018/hyperlinkcolor" xmlns:p15="http://schemas.microsoft.com/office/powerpoint/2012/main" xmlns:p14="http://schemas.microsoft.com/office/powerpoint/2010/main" xmlns:com="http://schemas.openxmlformats.org/drawingml/2006/compatibility" xmlns:pvml="urn:schemas-microsoft-com:office:powerpoint" xmlns:v="urn:schemas-microsoft-com:vml" xmlns:o="urn:schemas-microsoft-com:office:office" xmlns:dgm="http://schemas.openxmlformats.org/drawingml/2006/diagram" xmlns:c="http://schemas.openxmlformats.org/drawingml/2006/chart" xmlns:mv="urn:schemas-microsoft-com:mac:vml" xmlns:mc="http://schemas.openxmlformats.org/markup-compatibility/2006" xmlns="" r:id="rId7" roundtripDataSignature="AMtx7mhFS9UmdnKeSPCo6w+kD/N9mRhl+w=="/>
+      <go:slidesCustomData xmlns:go="http://customooxmlschemas.google.com/" r:id="rId7" roundtripDataSignature="AMtx7mg4VnWZgeQysFpR7RfydoWN53A/oQ=="/>
     </p:ext>
   </p:extLst>
 </p:presentation>
 </file>
 
 <file path=ppt/notesMasters/notesMaster1.xml><?xml version="1.0" encoding="utf-8"?>
-<p:notesMaster xmlns:a="http://schemas.openxmlformats.org/drawingml/2006/main" xmlns:r="http://schemas.openxmlformats.org/officeDocument/2006/relationships" xmlns:p="http://schemas.openxmlformats.org/presentationml/2006/main">
+<p:notesMaster xmlns:a="http://schemas.openxmlformats.org/drawingml/2006/main" xmlns:r="http://schemas.openxmlformats.org/officeDocument/2006/relationships" xmlns:mc="http://schemas.openxmlformats.org/markup-compatibility/2006" xmlns:mv="urn:schemas-microsoft-com:mac:vml" xmlns:p="http://schemas.openxmlformats.org/presentationml/2006/main" xmlns:c="http://schemas.openxmlformats.org/drawingml/2006/chart" xmlns:dgm="http://schemas.openxmlformats.org/drawingml/2006/diagram" xmlns:o="urn:schemas-microsoft-com:office:office" xmlns:v="urn:schemas-microsoft-com:vml" xmlns:pvml="urn:schemas-microsoft-com:office:powerpoint" xmlns:com="http://schemas.openxmlformats.org/drawingml/2006/compatibility" xmlns:p14="http://schemas.microsoft.com/office/powerpoint/2010/main" xmlns:p15="http://schemas.microsoft.com/office/powerpoint/2012/main" xmlns:ahyp="http://schemas.microsoft.com/office/drawing/2018/hyperlinkcolor">
   <p:cSld>
     <p:bg>
       <p:bgPr>
         <a:solidFill>
           <a:schemeClr val="lt1"/>
         </a:solidFill>
-        <a:effectLst/>
       </p:bgPr>
     </p:bg>
     <p:spTree>
       <p:nvGrpSpPr>
-        <p:cNvPr id="1" name="Shape 2"/>
+        <p:cNvPr id="2" name="Shape 2"/>
         <p:cNvGrpSpPr/>
         <p:nvPr/>
       </p:nvGrpSpPr>
@@ -291,11 +290,9 @@
       <p:sp>
         <p:nvSpPr>
           <p:cNvPr id="3" name="Google Shape;3;n"/>
-          <p:cNvSpPr>
-            <a:spLocks noGrp="1" noRot="1" noChangeAspect="1"/>
-          </p:cNvSpPr>
+          <p:cNvSpPr/>
           <p:nvPr>
-            <p:ph type="sldImg" idx="2"/>
+            <p:ph idx="2" type="sldImg"/>
           </p:nvPr>
         </p:nvSpPr>
         <p:spPr>
@@ -304,13 +301,9 @@
             <a:ext cx="4572225" cy="3429000"/>
           </a:xfrm>
           <a:custGeom>
-            <a:avLst/>
-            <a:gdLst/>
-            <a:ahLst/>
-            <a:cxnLst/>
-            <a:rect l="l" t="t" r="r" b="b"/>
+            <a:rect b="b" l="l" r="r" t="t"/>
             <a:pathLst>
-              <a:path w="120000" h="120000" extrusionOk="0">
+              <a:path extrusionOk="0" h="120000" w="120000">
                 <a:moveTo>
                   <a:pt x="0" y="0"/>
                 </a:moveTo>
@@ -328,25 +321,23 @@
             </a:pathLst>
           </a:custGeom>
           <a:noFill/>
-          <a:ln w="9525" cap="flat" cmpd="sng">
+          <a:ln cap="flat" cmpd="sng" w="9525">
             <a:solidFill>
               <a:srgbClr val="000000"/>
             </a:solidFill>
             <a:prstDash val="solid"/>
             <a:round/>
-            <a:headEnd type="none" w="sm" len="sm"/>
-            <a:tailEnd type="none" w="sm" len="sm"/>
+            <a:headEnd len="sm" w="sm" type="none"/>
+            <a:tailEnd len="sm" w="sm" type="none"/>
           </a:ln>
         </p:spPr>
       </p:sp>
       <p:sp>
         <p:nvSpPr>
           <p:cNvPr id="4" name="Google Shape;4;n"/>
-          <p:cNvSpPr txBox="1">
-            <a:spLocks noGrp="1"/>
-          </p:cNvSpPr>
+          <p:cNvSpPr txBox="1"/>
           <p:nvPr>
-            <p:ph type="body" idx="1"/>
+            <p:ph idx="1" type="body"/>
           </p:nvPr>
         </p:nvSpPr>
         <p:spPr>
@@ -363,11 +354,11 @@
           </a:ln>
         </p:spPr>
         <p:txBody>
-          <a:bodyPr spcFirstLastPara="1" wrap="square" lIns="91425" tIns="91425" rIns="91425" bIns="91425" anchor="t" anchorCtr="0">
+          <a:bodyPr anchorCtr="0" anchor="t" bIns="91425" lIns="91425" spcFirstLastPara="1" rIns="91425" wrap="square" tIns="91425">
             <a:noAutofit/>
           </a:bodyPr>
           <a:lstStyle>
-            <a:lvl1pPr marL="457200" marR="0" lvl="0" indent="-298450" algn="l" rtl="0">
+            <a:lvl1pPr indent="-298450" lvl="0" marL="457200" marR="0" rtl="0" algn="l">
               <a:lnSpc>
                 <a:spcPct val="100000"/>
               </a:lnSpc>
@@ -383,7 +374,7 @@
               <a:buSzPts val="1100"/>
               <a:buFont typeface="Arial"/>
               <a:buChar char="●"/>
-              <a:defRPr sz="1100" b="0" i="0" u="none" strike="noStrike" cap="none">
+              <a:defRPr b="0" i="0" sz="1100" u="none" cap="none" strike="noStrike">
                 <a:solidFill>
                   <a:srgbClr val="000000"/>
                 </a:solidFill>
@@ -393,7 +384,7 @@
                 <a:sym typeface="Arial"/>
               </a:defRPr>
             </a:lvl1pPr>
-            <a:lvl2pPr marL="914400" marR="0" lvl="1" indent="-298450" algn="l" rtl="0">
+            <a:lvl2pPr indent="-298450" lvl="1" marL="914400" marR="0" rtl="0" algn="l">
               <a:lnSpc>
                 <a:spcPct val="100000"/>
               </a:lnSpc>
@@ -409,7 +400,7 @@
               <a:buSzPts val="1100"/>
               <a:buFont typeface="Arial"/>
               <a:buChar char="○"/>
-              <a:defRPr sz="1100" b="0" i="0" u="none" strike="noStrike" cap="none">
+              <a:defRPr b="0" i="0" sz="1100" u="none" cap="none" strike="noStrike">
                 <a:solidFill>
                   <a:srgbClr val="000000"/>
                 </a:solidFill>
@@ -419,7 +410,7 @@
                 <a:sym typeface="Arial"/>
               </a:defRPr>
             </a:lvl2pPr>
-            <a:lvl3pPr marL="1371600" marR="0" lvl="2" indent="-298450" algn="l" rtl="0">
+            <a:lvl3pPr indent="-298450" lvl="2" marL="1371600" marR="0" rtl="0" algn="l">
               <a:lnSpc>
                 <a:spcPct val="100000"/>
               </a:lnSpc>
@@ -435,7 +426,7 @@
               <a:buSzPts val="1100"/>
               <a:buFont typeface="Arial"/>
               <a:buChar char="■"/>
-              <a:defRPr sz="1100" b="0" i="0" u="none" strike="noStrike" cap="none">
+              <a:defRPr b="0" i="0" sz="1100" u="none" cap="none" strike="noStrike">
                 <a:solidFill>
                   <a:srgbClr val="000000"/>
                 </a:solidFill>
@@ -445,7 +436,7 @@
                 <a:sym typeface="Arial"/>
               </a:defRPr>
             </a:lvl3pPr>
-            <a:lvl4pPr marL="1828800" marR="0" lvl="3" indent="-298450" algn="l" rtl="0">
+            <a:lvl4pPr indent="-298450" lvl="3" marL="1828800" marR="0" rtl="0" algn="l">
               <a:lnSpc>
                 <a:spcPct val="100000"/>
               </a:lnSpc>
@@ -461,7 +452,7 @@
               <a:buSzPts val="1100"/>
               <a:buFont typeface="Arial"/>
               <a:buChar char="●"/>
-              <a:defRPr sz="1100" b="0" i="0" u="none" strike="noStrike" cap="none">
+              <a:defRPr b="0" i="0" sz="1100" u="none" cap="none" strike="noStrike">
                 <a:solidFill>
                   <a:srgbClr val="000000"/>
                 </a:solidFill>
@@ -471,7 +462,7 @@
                 <a:sym typeface="Arial"/>
               </a:defRPr>
             </a:lvl4pPr>
-            <a:lvl5pPr marL="2286000" marR="0" lvl="4" indent="-298450" algn="l" rtl="0">
+            <a:lvl5pPr indent="-298450" lvl="4" marL="2286000" marR="0" rtl="0" algn="l">
               <a:lnSpc>
                 <a:spcPct val="100000"/>
               </a:lnSpc>
@@ -487,7 +478,7 @@
               <a:buSzPts val="1100"/>
               <a:buFont typeface="Arial"/>
               <a:buChar char="○"/>
-              <a:defRPr sz="1100" b="0" i="0" u="none" strike="noStrike" cap="none">
+              <a:defRPr b="0" i="0" sz="1100" u="none" cap="none" strike="noStrike">
                 <a:solidFill>
                   <a:srgbClr val="000000"/>
                 </a:solidFill>
@@ -497,7 +488,7 @@
                 <a:sym typeface="Arial"/>
               </a:defRPr>
             </a:lvl5pPr>
-            <a:lvl6pPr marL="2743200" marR="0" lvl="5" indent="-298450" algn="l" rtl="0">
+            <a:lvl6pPr indent="-298450" lvl="5" marL="2743200" marR="0" rtl="0" algn="l">
               <a:lnSpc>
                 <a:spcPct val="100000"/>
               </a:lnSpc>
@@ -513,7 +504,7 @@
               <a:buSzPts val="1100"/>
               <a:buFont typeface="Arial"/>
               <a:buChar char="■"/>
-              <a:defRPr sz="1100" b="0" i="0" u="none" strike="noStrike" cap="none">
+              <a:defRPr b="0" i="0" sz="1100" u="none" cap="none" strike="noStrike">
                 <a:solidFill>
                   <a:srgbClr val="000000"/>
                 </a:solidFill>
@@ -523,7 +514,7 @@
                 <a:sym typeface="Arial"/>
               </a:defRPr>
             </a:lvl6pPr>
-            <a:lvl7pPr marL="3200400" marR="0" lvl="6" indent="-298450" algn="l" rtl="0">
+            <a:lvl7pPr indent="-298450" lvl="6" marL="3200400" marR="0" rtl="0" algn="l">
               <a:lnSpc>
                 <a:spcPct val="100000"/>
               </a:lnSpc>
@@ -539,7 +530,7 @@
               <a:buSzPts val="1100"/>
               <a:buFont typeface="Arial"/>
               <a:buChar char="●"/>
-              <a:defRPr sz="1100" b="0" i="0" u="none" strike="noStrike" cap="none">
+              <a:defRPr b="0" i="0" sz="1100" u="none" cap="none" strike="noStrike">
                 <a:solidFill>
                   <a:srgbClr val="000000"/>
                 </a:solidFill>
@@ -549,7 +540,7 @@
                 <a:sym typeface="Arial"/>
               </a:defRPr>
             </a:lvl7pPr>
-            <a:lvl8pPr marL="3657600" marR="0" lvl="7" indent="-298450" algn="l" rtl="0">
+            <a:lvl8pPr indent="-298450" lvl="7" marL="3657600" marR="0" rtl="0" algn="l">
               <a:lnSpc>
                 <a:spcPct val="100000"/>
               </a:lnSpc>
@@ -565,7 +556,7 @@
               <a:buSzPts val="1100"/>
               <a:buFont typeface="Arial"/>
               <a:buChar char="○"/>
-              <a:defRPr sz="1100" b="0" i="0" u="none" strike="noStrike" cap="none">
+              <a:defRPr b="0" i="0" sz="1100" u="none" cap="none" strike="noStrike">
                 <a:solidFill>
                   <a:srgbClr val="000000"/>
                 </a:solidFill>
@@ -575,7 +566,7 @@
                 <a:sym typeface="Arial"/>
               </a:defRPr>
             </a:lvl8pPr>
-            <a:lvl9pPr marL="4114800" marR="0" lvl="8" indent="-298450" algn="l" rtl="0">
+            <a:lvl9pPr indent="-298450" lvl="8" marL="4114800" marR="0" rtl="0" algn="l">
               <a:lnSpc>
                 <a:spcPct val="100000"/>
               </a:lnSpc>
@@ -591,7 +582,7 @@
               <a:buSzPts val="1100"/>
               <a:buFont typeface="Arial"/>
               <a:buChar char="■"/>
-              <a:defRPr sz="1100" b="0" i="0" u="none" strike="noStrike" cap="none">
+              <a:defRPr b="0" i="0" sz="1100" u="none" cap="none" strike="noStrike">
                 <a:solidFill>
                   <a:srgbClr val="000000"/>
                 </a:solidFill>
@@ -602,16 +593,14 @@
               </a:defRPr>
             </a:lvl9pPr>
           </a:lstStyle>
-          <a:p>
-            <a:endParaRPr/>
-          </a:p>
+          <a:p/>
         </p:txBody>
       </p:sp>
     </p:spTree>
   </p:cSld>
-  <p:clrMap bg1="lt1" tx1="dk1" bg2="dk2" tx2="lt2" accent1="accent1" accent2="accent2" accent3="accent3" accent4="accent4" accent5="accent5" accent6="accent6" hlink="hlink" folHlink="folHlink"/>
+  <p:clrMap accent1="accent1" accent2="accent2" accent3="accent3" accent4="accent4" accent5="accent5" accent6="accent6" bg1="lt1" bg2="dk2" tx1="dk1" tx2="lt2" folHlink="folHlink" hlink="hlink"/>
   <p:notesStyle>
-    <a:defPPr marR="0" lvl="0" algn="l" rtl="0">
+    <a:defPPr lvl="0" marR="0" rtl="0" algn="l">
       <a:lnSpc>
         <a:spcPct val="100000"/>
       </a:lnSpc>
@@ -622,7 +611,7 @@
         <a:spcPts val="0"/>
       </a:spcAft>
     </a:defPPr>
-    <a:lvl1pPr marR="0" lvl="0" algn="l" rtl="0">
+    <a:lvl1pPr lvl="0" marR="0" rtl="0" algn="l">
       <a:lnSpc>
         <a:spcPct val="100000"/>
       </a:lnSpc>
@@ -636,7 +625,7 @@
         <a:srgbClr val="000000"/>
       </a:buClr>
       <a:buFont typeface="Arial"/>
-      <a:defRPr sz="1400" b="0" i="0" u="none" strike="noStrike" cap="none">
+      <a:defRPr b="0" i="0" sz="1400" u="none" cap="none" strike="noStrike">
         <a:solidFill>
           <a:srgbClr val="000000"/>
         </a:solidFill>
@@ -646,7 +635,7 @@
         <a:sym typeface="Arial"/>
       </a:defRPr>
     </a:lvl1pPr>
-    <a:lvl2pPr marR="0" lvl="1" algn="l" rtl="0">
+    <a:lvl2pPr lvl="1" marR="0" rtl="0" algn="l">
       <a:lnSpc>
         <a:spcPct val="100000"/>
       </a:lnSpc>
@@ -660,7 +649,7 @@
         <a:srgbClr val="000000"/>
       </a:buClr>
       <a:buFont typeface="Arial"/>
-      <a:defRPr sz="1400" b="0" i="0" u="none" strike="noStrike" cap="none">
+      <a:defRPr b="0" i="0" sz="1400" u="none" cap="none" strike="noStrike">
         <a:solidFill>
           <a:srgbClr val="000000"/>
         </a:solidFill>
@@ -670,7 +659,7 @@
         <a:sym typeface="Arial"/>
       </a:defRPr>
     </a:lvl2pPr>
-    <a:lvl3pPr marR="0" lvl="2" algn="l" rtl="0">
+    <a:lvl3pPr lvl="2" marR="0" rtl="0" algn="l">
       <a:lnSpc>
         <a:spcPct val="100000"/>
       </a:lnSpc>
@@ -684,7 +673,7 @@
         <a:srgbClr val="000000"/>
       </a:buClr>
       <a:buFont typeface="Arial"/>
-      <a:defRPr sz="1400" b="0" i="0" u="none" strike="noStrike" cap="none">
+      <a:defRPr b="0" i="0" sz="1400" u="none" cap="none" strike="noStrike">
         <a:solidFill>
           <a:srgbClr val="000000"/>
         </a:solidFill>
@@ -694,7 +683,7 @@
         <a:sym typeface="Arial"/>
       </a:defRPr>
     </a:lvl3pPr>
-    <a:lvl4pPr marR="0" lvl="3" algn="l" rtl="0">
+    <a:lvl4pPr lvl="3" marR="0" rtl="0" algn="l">
       <a:lnSpc>
         <a:spcPct val="100000"/>
       </a:lnSpc>
@@ -708,7 +697,7 @@
         <a:srgbClr val="000000"/>
       </a:buClr>
       <a:buFont typeface="Arial"/>
-      <a:defRPr sz="1400" b="0" i="0" u="none" strike="noStrike" cap="none">
+      <a:defRPr b="0" i="0" sz="1400" u="none" cap="none" strike="noStrike">
         <a:solidFill>
           <a:srgbClr val="000000"/>
         </a:solidFill>
@@ -718,7 +707,7 @@
         <a:sym typeface="Arial"/>
       </a:defRPr>
     </a:lvl4pPr>
-    <a:lvl5pPr marR="0" lvl="4" algn="l" rtl="0">
+    <a:lvl5pPr lvl="4" marR="0" rtl="0" algn="l">
       <a:lnSpc>
         <a:spcPct val="100000"/>
       </a:lnSpc>
@@ -732,7 +721,7 @@
         <a:srgbClr val="000000"/>
       </a:buClr>
       <a:buFont typeface="Arial"/>
-      <a:defRPr sz="1400" b="0" i="0" u="none" strike="noStrike" cap="none">
+      <a:defRPr b="0" i="0" sz="1400" u="none" cap="none" strike="noStrike">
         <a:solidFill>
           <a:srgbClr val="000000"/>
         </a:solidFill>
@@ -742,7 +731,7 @@
         <a:sym typeface="Arial"/>
       </a:defRPr>
     </a:lvl5pPr>
-    <a:lvl6pPr marR="0" lvl="5" algn="l" rtl="0">
+    <a:lvl6pPr lvl="5" marR="0" rtl="0" algn="l">
       <a:lnSpc>
         <a:spcPct val="100000"/>
       </a:lnSpc>
@@ -756,7 +745,7 @@
         <a:srgbClr val="000000"/>
       </a:buClr>
       <a:buFont typeface="Arial"/>
-      <a:defRPr sz="1400" b="0" i="0" u="none" strike="noStrike" cap="none">
+      <a:defRPr b="0" i="0" sz="1400" u="none" cap="none" strike="noStrike">
         <a:solidFill>
           <a:srgbClr val="000000"/>
         </a:solidFill>
@@ -766,7 +755,7 @@
         <a:sym typeface="Arial"/>
       </a:defRPr>
     </a:lvl6pPr>
-    <a:lvl7pPr marR="0" lvl="6" algn="l" rtl="0">
+    <a:lvl7pPr lvl="6" marR="0" rtl="0" algn="l">
       <a:lnSpc>
         <a:spcPct val="100000"/>
       </a:lnSpc>
@@ -780,7 +769,7 @@
         <a:srgbClr val="000000"/>
       </a:buClr>
       <a:buFont typeface="Arial"/>
-      <a:defRPr sz="1400" b="0" i="0" u="none" strike="noStrike" cap="none">
+      <a:defRPr b="0" i="0" sz="1400" u="none" cap="none" strike="noStrike">
         <a:solidFill>
           <a:srgbClr val="000000"/>
         </a:solidFill>
@@ -790,7 +779,7 @@
         <a:sym typeface="Arial"/>
       </a:defRPr>
     </a:lvl7pPr>
-    <a:lvl8pPr marR="0" lvl="7" algn="l" rtl="0">
+    <a:lvl8pPr lvl="7" marR="0" rtl="0" algn="l">
       <a:lnSpc>
         <a:spcPct val="100000"/>
       </a:lnSpc>
@@ -804,7 +793,7 @@
         <a:srgbClr val="000000"/>
       </a:buClr>
       <a:buFont typeface="Arial"/>
-      <a:defRPr sz="1400" b="0" i="0" u="none" strike="noStrike" cap="none">
+      <a:defRPr b="0" i="0" sz="1400" u="none" cap="none" strike="noStrike">
         <a:solidFill>
           <a:srgbClr val="000000"/>
         </a:solidFill>
@@ -814,7 +803,7 @@
         <a:sym typeface="Arial"/>
       </a:defRPr>
     </a:lvl8pPr>
-    <a:lvl9pPr marR="0" lvl="8" algn="l" rtl="0">
+    <a:lvl9pPr lvl="8" marR="0" rtl="0" algn="l">
       <a:lnSpc>
         <a:spcPct val="100000"/>
       </a:lnSpc>
@@ -828,7 +817,7 @@
         <a:srgbClr val="000000"/>
       </a:buClr>
       <a:buFont typeface="Arial"/>
-      <a:defRPr sz="1400" b="0" i="0" u="none" strike="noStrike" cap="none">
+      <a:defRPr b="0" i="0" sz="1400" u="none" cap="none" strike="noStrike">
         <a:solidFill>
           <a:srgbClr val="000000"/>
         </a:solidFill>
@@ -843,11 +832,11 @@
 </file>
 
 <file path=ppt/notesSlides/notesSlide1.xml><?xml version="1.0" encoding="utf-8"?>
-<p:notes xmlns:a="http://schemas.openxmlformats.org/drawingml/2006/main" xmlns:r="http://schemas.openxmlformats.org/officeDocument/2006/relationships" xmlns:p="http://schemas.openxmlformats.org/presentationml/2006/main" showMasterSp="0" showMasterPhAnim="0">
+<p:notes xmlns:a="http://schemas.openxmlformats.org/drawingml/2006/main" xmlns:r="http://schemas.openxmlformats.org/officeDocument/2006/relationships" xmlns:mc="http://schemas.openxmlformats.org/markup-compatibility/2006" xmlns:mv="urn:schemas-microsoft-com:mac:vml" xmlns:p="http://schemas.openxmlformats.org/presentationml/2006/main" xmlns:c="http://schemas.openxmlformats.org/drawingml/2006/chart" xmlns:dgm="http://schemas.openxmlformats.org/drawingml/2006/diagram" xmlns:o="urn:schemas-microsoft-com:office:office" xmlns:v="urn:schemas-microsoft-com:vml" xmlns:pvml="urn:schemas-microsoft-com:office:powerpoint" xmlns:com="http://schemas.openxmlformats.org/drawingml/2006/compatibility" xmlns:p14="http://schemas.microsoft.com/office/powerpoint/2010/main" xmlns:p15="http://schemas.microsoft.com/office/powerpoint/2012/main" xmlns:ahyp="http://schemas.microsoft.com/office/drawing/2018/hyperlinkcolor" showMasterPhAnim="0" showMasterSp="0">
   <p:cSld>
     <p:spTree>
       <p:nvGrpSpPr>
-        <p:cNvPr id="1" name="Shape 83"/>
+        <p:cNvPr id="83" name="Shape 83"/>
         <p:cNvGrpSpPr/>
         <p:nvPr/>
       </p:nvGrpSpPr>
@@ -862,11 +851,9 @@
       <p:sp>
         <p:nvSpPr>
           <p:cNvPr id="84" name="Google Shape;84;g3141e128008_0_0:notes"/>
-          <p:cNvSpPr txBox="1">
-            <a:spLocks noGrp="1"/>
-          </p:cNvSpPr>
+          <p:cNvSpPr txBox="1"/>
           <p:nvPr>
-            <p:ph type="body" idx="1"/>
+            <p:ph idx="1" type="body"/>
           </p:nvPr>
         </p:nvSpPr>
         <p:spPr>
@@ -883,12 +870,12 @@
           </a:ln>
         </p:spPr>
         <p:txBody>
-          <a:bodyPr spcFirstLastPara="1" wrap="square" lIns="91425" tIns="91425" rIns="91425" bIns="91425" anchor="t" anchorCtr="0">
+          <a:bodyPr anchorCtr="0" anchor="t" bIns="91425" lIns="91425" spcFirstLastPara="1" rIns="91425" wrap="square" tIns="91425">
             <a:noAutofit/>
           </a:bodyPr>
           <a:lstStyle/>
           <a:p>
-            <a:pPr marL="0" lvl="0" indent="0" algn="l" rtl="0">
+            <a:pPr indent="0" lvl="0" marL="0" rtl="0" algn="l">
               <a:lnSpc>
                 <a:spcPct val="100000"/>
               </a:lnSpc>
@@ -901,6 +888,9 @@
               <a:buSzPts val="1100"/>
               <a:buNone/>
             </a:pPr>
+            <a:r>
+              <a:t/>
+            </a:r>
             <a:endParaRPr/>
           </a:p>
         </p:txBody>
@@ -908,11 +898,9 @@
       <p:sp>
         <p:nvSpPr>
           <p:cNvPr id="85" name="Google Shape;85;g3141e128008_0_0:notes"/>
-          <p:cNvSpPr>
-            <a:spLocks noGrp="1" noRot="1" noChangeAspect="1"/>
-          </p:cNvSpPr>
+          <p:cNvSpPr/>
           <p:nvPr>
-            <p:ph type="sldImg" idx="2"/>
+            <p:ph idx="2" type="sldImg"/>
           </p:nvPr>
         </p:nvSpPr>
         <p:spPr>
@@ -921,13 +909,9 @@
             <a:ext cx="4572000" cy="3429000"/>
           </a:xfrm>
           <a:custGeom>
-            <a:avLst/>
-            <a:gdLst/>
-            <a:ahLst/>
-            <a:cxnLst/>
-            <a:rect l="l" t="t" r="r" b="b"/>
+            <a:rect b="b" l="l" r="r" t="t"/>
             <a:pathLst>
-              <a:path w="120000" h="120000" extrusionOk="0">
+              <a:path extrusionOk="0" h="120000" w="120000">
                 <a:moveTo>
                   <a:pt x="0" y="0"/>
                 </a:moveTo>
@@ -945,14 +929,14 @@
             </a:pathLst>
           </a:custGeom>
           <a:noFill/>
-          <a:ln w="9525" cap="flat" cmpd="sng">
+          <a:ln cap="flat" cmpd="sng" w="9525">
             <a:solidFill>
               <a:srgbClr val="000000"/>
             </a:solidFill>
             <a:prstDash val="solid"/>
             <a:round/>
-            <a:headEnd type="none" w="sm" len="sm"/>
-            <a:tailEnd type="none" w="sm" len="sm"/>
+            <a:headEnd len="sm" w="sm" type="none"/>
+            <a:tailEnd len="sm" w="sm" type="none"/>
           </a:ln>
         </p:spPr>
       </p:sp>
@@ -965,11 +949,11 @@
 </file>
 
 <file path=ppt/slideLayouts/slideLayout1.xml><?xml version="1.0" encoding="utf-8"?>
-<p:sldLayout xmlns:a="http://schemas.openxmlformats.org/drawingml/2006/main" xmlns:r="http://schemas.openxmlformats.org/officeDocument/2006/relationships" xmlns:p="http://schemas.openxmlformats.org/presentationml/2006/main" matchingName="1_Title Slide">
+<p:sldLayout xmlns:a="http://schemas.openxmlformats.org/drawingml/2006/main" xmlns:r="http://schemas.openxmlformats.org/officeDocument/2006/relationships" xmlns:mc="http://schemas.openxmlformats.org/markup-compatibility/2006" xmlns:mv="urn:schemas-microsoft-com:mac:vml" xmlns:p="http://schemas.openxmlformats.org/presentationml/2006/main" xmlns:c="http://schemas.openxmlformats.org/drawingml/2006/chart" xmlns:dgm="http://schemas.openxmlformats.org/drawingml/2006/diagram" xmlns:o="urn:schemas-microsoft-com:office:office" xmlns:v="urn:schemas-microsoft-com:vml" xmlns:pvml="urn:schemas-microsoft-com:office:powerpoint" xmlns:com="http://schemas.openxmlformats.org/drawingml/2006/compatibility" xmlns:p14="http://schemas.microsoft.com/office/powerpoint/2010/main" xmlns:p15="http://schemas.microsoft.com/office/powerpoint/2012/main" xmlns:ahyp="http://schemas.microsoft.com/office/drawing/2018/hyperlinkcolor" matchingName="1_Title Slide">
   <p:cSld name="1_Title Slide">
     <p:spTree>
       <p:nvGrpSpPr>
-        <p:cNvPr id="1" name="Shape 11"/>
+        <p:cNvPr id="11" name="Shape 11"/>
         <p:cNvGrpSpPr/>
         <p:nvPr/>
       </p:nvGrpSpPr>
@@ -983,7 +967,7 @@
       </p:grpSpPr>
       <p:pic>
         <p:nvPicPr>
-          <p:cNvPr id="12" name="Google Shape;12;p3" descr="A yellow rectangular object with black background&#10;&#10;Description automatically generated"/>
+          <p:cNvPr descr="A yellow rectangular object with black background&#10;&#10;Description automatically generated" id="12" name="Google Shape;12;p3"/>
           <p:cNvPicPr preferRelativeResize="0"/>
           <p:nvPr/>
         </p:nvPicPr>
@@ -991,7 +975,7 @@
           <a:blip r:embed="rId2">
             <a:alphaModFix/>
           </a:blip>
-          <a:srcRect/>
+          <a:srcRect b="0" l="0" r="0" t="0"/>
           <a:stretch/>
         </p:blipFill>
         <p:spPr>
@@ -1018,7 +1002,7 @@
           <a:blip r:embed="rId3">
             <a:alphaModFix/>
           </a:blip>
-          <a:srcRect/>
+          <a:srcRect b="0" l="0" r="0" t="0"/>
           <a:stretch/>
         </p:blipFill>
         <p:spPr>
@@ -1044,11 +1028,11 @@
 </file>
 
 <file path=ppt/slideLayouts/slideLayout10.xml><?xml version="1.0" encoding="utf-8"?>
-<p:sldLayout xmlns:a="http://schemas.openxmlformats.org/drawingml/2006/main" xmlns:r="http://schemas.openxmlformats.org/officeDocument/2006/relationships" xmlns:p="http://schemas.openxmlformats.org/presentationml/2006/main" matchingName="Picture with Caption" type="picTx">
+<p:sldLayout xmlns:a="http://schemas.openxmlformats.org/drawingml/2006/main" xmlns:r="http://schemas.openxmlformats.org/officeDocument/2006/relationships" xmlns:mc="http://schemas.openxmlformats.org/markup-compatibility/2006" xmlns:mv="urn:schemas-microsoft-com:mac:vml" xmlns:p="http://schemas.openxmlformats.org/presentationml/2006/main" xmlns:c="http://schemas.openxmlformats.org/drawingml/2006/chart" xmlns:dgm="http://schemas.openxmlformats.org/drawingml/2006/diagram" xmlns:o="urn:schemas-microsoft-com:office:office" xmlns:v="urn:schemas-microsoft-com:vml" xmlns:pvml="urn:schemas-microsoft-com:office:powerpoint" xmlns:com="http://schemas.openxmlformats.org/drawingml/2006/compatibility" xmlns:p14="http://schemas.microsoft.com/office/powerpoint/2010/main" xmlns:p15="http://schemas.microsoft.com/office/powerpoint/2012/main" xmlns:ahyp="http://schemas.microsoft.com/office/drawing/2018/hyperlinkcolor" matchingName="Picture with Caption" type="picTx">
   <p:cSld name="PICTURE_WITH_CAPTION_TEXT">
     <p:spTree>
       <p:nvGrpSpPr>
-        <p:cNvPr id="1" name="Shape 64"/>
+        <p:cNvPr id="64" name="Shape 64"/>
         <p:cNvGrpSpPr/>
         <p:nvPr/>
       </p:nvGrpSpPr>
@@ -1063,9 +1047,7 @@
       <p:sp>
         <p:nvSpPr>
           <p:cNvPr id="65" name="Google Shape;65;p12"/>
-          <p:cNvSpPr txBox="1">
-            <a:spLocks noGrp="1"/>
-          </p:cNvSpPr>
+          <p:cNvSpPr txBox="1"/>
           <p:nvPr>
             <p:ph type="title"/>
           </p:nvPr>
@@ -1084,7 +1066,7 @@
           </a:ln>
         </p:spPr>
         <p:txBody>
-          <a:bodyPr spcFirstLastPara="1" wrap="square" lIns="91425" tIns="45700" rIns="91425" bIns="45700" anchor="b" anchorCtr="0">
+          <a:bodyPr anchorCtr="0" anchor="b" bIns="45700" lIns="91425" spcFirstLastPara="1" rIns="91425" wrap="square" tIns="45700">
             <a:normAutofit/>
           </a:bodyPr>
           <a:lstStyle>
@@ -1219,19 +1201,15 @@
               <a:defRPr/>
             </a:lvl9pPr>
           </a:lstStyle>
-          <a:p>
-            <a:endParaRPr/>
-          </a:p>
+          <a:p/>
         </p:txBody>
       </p:sp>
       <p:sp>
         <p:nvSpPr>
           <p:cNvPr id="66" name="Google Shape;66;p12"/>
-          <p:cNvSpPr>
-            <a:spLocks noGrp="1"/>
-          </p:cNvSpPr>
+          <p:cNvSpPr/>
           <p:nvPr>
-            <p:ph type="pic" idx="2"/>
+            <p:ph idx="2" type="pic"/>
           </p:nvPr>
         </p:nvSpPr>
         <p:spPr>
@@ -1251,11 +1229,9 @@
       <p:sp>
         <p:nvSpPr>
           <p:cNvPr id="67" name="Google Shape;67;p12"/>
-          <p:cNvSpPr txBox="1">
-            <a:spLocks noGrp="1"/>
-          </p:cNvSpPr>
+          <p:cNvSpPr txBox="1"/>
           <p:nvPr>
-            <p:ph type="body" idx="1"/>
+            <p:ph idx="1" type="body"/>
           </p:nvPr>
         </p:nvSpPr>
         <p:spPr>
@@ -1272,11 +1248,11 @@
           </a:ln>
         </p:spPr>
         <p:txBody>
-          <a:bodyPr spcFirstLastPara="1" wrap="square" lIns="91425" tIns="45700" rIns="91425" bIns="45700" anchor="t" anchorCtr="0">
+          <a:bodyPr anchorCtr="0" anchor="t" bIns="45700" lIns="91425" spcFirstLastPara="1" rIns="91425" wrap="square" tIns="45700">
             <a:normAutofit/>
           </a:bodyPr>
           <a:lstStyle>
-            <a:lvl1pPr marL="457200" lvl="0" indent="-228600" algn="l">
+            <a:lvl1pPr indent="-228600" lvl="0" marL="457200" algn="l">
               <a:lnSpc>
                 <a:spcPct val="90000"/>
               </a:lnSpc>
@@ -1293,7 +1269,7 @@
               <a:buNone/>
               <a:defRPr sz="7680"/>
             </a:lvl1pPr>
-            <a:lvl2pPr marL="914400" lvl="1" indent="-228600" algn="l">
+            <a:lvl2pPr indent="-228600" lvl="1" marL="914400" algn="l">
               <a:lnSpc>
                 <a:spcPct val="90000"/>
               </a:lnSpc>
@@ -1310,7 +1286,7 @@
               <a:buNone/>
               <a:defRPr sz="6719"/>
             </a:lvl2pPr>
-            <a:lvl3pPr marL="1371600" lvl="2" indent="-228600" algn="l">
+            <a:lvl3pPr indent="-228600" lvl="2" marL="1371600" algn="l">
               <a:lnSpc>
                 <a:spcPct val="90000"/>
               </a:lnSpc>
@@ -1327,7 +1303,7 @@
               <a:buNone/>
               <a:defRPr sz="5760"/>
             </a:lvl3pPr>
-            <a:lvl4pPr marL="1828800" lvl="3" indent="-228600" algn="l">
+            <a:lvl4pPr indent="-228600" lvl="3" marL="1828800" algn="l">
               <a:lnSpc>
                 <a:spcPct val="90000"/>
               </a:lnSpc>
@@ -1344,7 +1320,7 @@
               <a:buNone/>
               <a:defRPr sz="4800"/>
             </a:lvl4pPr>
-            <a:lvl5pPr marL="2286000" lvl="4" indent="-228600" algn="l">
+            <a:lvl5pPr indent="-228600" lvl="4" marL="2286000" algn="l">
               <a:lnSpc>
                 <a:spcPct val="90000"/>
               </a:lnSpc>
@@ -1361,7 +1337,7 @@
               <a:buNone/>
               <a:defRPr sz="4800"/>
             </a:lvl5pPr>
-            <a:lvl6pPr marL="2743200" lvl="5" indent="-228600" algn="l">
+            <a:lvl6pPr indent="-228600" lvl="5" marL="2743200" algn="l">
               <a:lnSpc>
                 <a:spcPct val="90000"/>
               </a:lnSpc>
@@ -1378,7 +1354,7 @@
               <a:buNone/>
               <a:defRPr sz="4800"/>
             </a:lvl6pPr>
-            <a:lvl7pPr marL="3200400" lvl="6" indent="-228600" algn="l">
+            <a:lvl7pPr indent="-228600" lvl="6" marL="3200400" algn="l">
               <a:lnSpc>
                 <a:spcPct val="90000"/>
               </a:lnSpc>
@@ -1395,7 +1371,7 @@
               <a:buNone/>
               <a:defRPr sz="4800"/>
             </a:lvl7pPr>
-            <a:lvl8pPr marL="3657600" lvl="7" indent="-228600" algn="l">
+            <a:lvl8pPr indent="-228600" lvl="7" marL="3657600" algn="l">
               <a:lnSpc>
                 <a:spcPct val="90000"/>
               </a:lnSpc>
@@ -1412,7 +1388,7 @@
               <a:buNone/>
               <a:defRPr sz="4800"/>
             </a:lvl8pPr>
-            <a:lvl9pPr marL="4114800" lvl="8" indent="-228600" algn="l">
+            <a:lvl9pPr indent="-228600" lvl="8" marL="4114800" algn="l">
               <a:lnSpc>
                 <a:spcPct val="90000"/>
               </a:lnSpc>
@@ -1430,19 +1406,15 @@
               <a:defRPr sz="4800"/>
             </a:lvl9pPr>
           </a:lstStyle>
-          <a:p>
-            <a:endParaRPr/>
-          </a:p>
+          <a:p/>
         </p:txBody>
       </p:sp>
       <p:sp>
         <p:nvSpPr>
           <p:cNvPr id="68" name="Google Shape;68;p12"/>
-          <p:cNvSpPr txBox="1">
-            <a:spLocks noGrp="1"/>
-          </p:cNvSpPr>
+          <p:cNvSpPr txBox="1"/>
           <p:nvPr>
-            <p:ph type="dt" idx="10"/>
+            <p:ph idx="10" type="dt"/>
           </p:nvPr>
         </p:nvSpPr>
         <p:spPr>
@@ -1459,7 +1431,7 @@
           </a:ln>
         </p:spPr>
         <p:txBody>
-          <a:bodyPr spcFirstLastPara="1" wrap="square" lIns="91425" tIns="45700" rIns="91425" bIns="45700" anchor="ctr" anchorCtr="0">
+          <a:bodyPr anchorCtr="0" anchor="ctr" bIns="45700" lIns="91425" spcFirstLastPara="1" rIns="91425" wrap="square" tIns="45700">
             <a:noAutofit/>
           </a:bodyPr>
           <a:lstStyle>
@@ -1590,19 +1562,15 @@
               <a:defRPr/>
             </a:lvl9pPr>
           </a:lstStyle>
-          <a:p>
-            <a:endParaRPr/>
-          </a:p>
+          <a:p/>
         </p:txBody>
       </p:sp>
       <p:sp>
         <p:nvSpPr>
           <p:cNvPr id="69" name="Google Shape;69;p12"/>
-          <p:cNvSpPr txBox="1">
-            <a:spLocks noGrp="1"/>
-          </p:cNvSpPr>
+          <p:cNvSpPr txBox="1"/>
           <p:nvPr>
-            <p:ph type="ftr" idx="11"/>
+            <p:ph idx="11" type="ftr"/>
           </p:nvPr>
         </p:nvSpPr>
         <p:spPr>
@@ -1619,7 +1587,7 @@
           </a:ln>
         </p:spPr>
         <p:txBody>
-          <a:bodyPr spcFirstLastPara="1" wrap="square" lIns="91425" tIns="45700" rIns="91425" bIns="45700" anchor="ctr" anchorCtr="0">
+          <a:bodyPr anchorCtr="0" anchor="ctr" bIns="45700" lIns="91425" spcFirstLastPara="1" rIns="91425" wrap="square" tIns="45700">
             <a:noAutofit/>
           </a:bodyPr>
           <a:lstStyle>
@@ -1750,19 +1718,15 @@
               <a:defRPr/>
             </a:lvl9pPr>
           </a:lstStyle>
-          <a:p>
-            <a:endParaRPr/>
-          </a:p>
+          <a:p/>
         </p:txBody>
       </p:sp>
       <p:sp>
         <p:nvSpPr>
           <p:cNvPr id="70" name="Google Shape;70;p12"/>
-          <p:cNvSpPr txBox="1">
-            <a:spLocks noGrp="1"/>
-          </p:cNvSpPr>
+          <p:cNvSpPr txBox="1"/>
           <p:nvPr>
-            <p:ph type="sldNum" idx="12"/>
+            <p:ph idx="12" type="sldNum"/>
           </p:nvPr>
         </p:nvSpPr>
         <p:spPr>
@@ -1779,11 +1743,11 @@
           </a:ln>
         </p:spPr>
         <p:txBody>
-          <a:bodyPr spcFirstLastPara="1" wrap="square" lIns="91425" tIns="45700" rIns="91425" bIns="45700" anchor="ctr" anchorCtr="0">
+          <a:bodyPr anchorCtr="0" anchor="ctr" bIns="45700" lIns="91425" spcFirstLastPara="1" rIns="91425" wrap="square" tIns="45700">
             <a:noAutofit/>
           </a:bodyPr>
           <a:lstStyle>
-            <a:lvl1pPr marL="0" marR="0" lvl="0" indent="0" algn="r">
+            <a:lvl1pPr indent="0" lvl="0" marL="0" marR="0" algn="r">
               <a:lnSpc>
                 <a:spcPct val="100000"/>
               </a:lnSpc>
@@ -1799,7 +1763,7 @@
               <a:buSzPts val="5760"/>
               <a:buFont typeface="Arial"/>
               <a:buNone/>
-              <a:defRPr sz="5760" b="0" i="0" u="none" strike="noStrike" cap="none">
+              <a:defRPr b="0" i="0" sz="5760" u="none" cap="none" strike="noStrike">
                 <a:solidFill>
                   <a:srgbClr val="888888"/>
                 </a:solidFill>
@@ -1809,7 +1773,7 @@
                 <a:sym typeface="Calibri"/>
               </a:defRPr>
             </a:lvl1pPr>
-            <a:lvl2pPr marL="0" marR="0" lvl="1" indent="0" algn="r">
+            <a:lvl2pPr indent="0" lvl="1" marL="0" marR="0" algn="r">
               <a:lnSpc>
                 <a:spcPct val="100000"/>
               </a:lnSpc>
@@ -1825,7 +1789,7 @@
               <a:buSzPts val="5760"/>
               <a:buFont typeface="Arial"/>
               <a:buNone/>
-              <a:defRPr sz="5760" b="0" i="0" u="none" strike="noStrike" cap="none">
+              <a:defRPr b="0" i="0" sz="5760" u="none" cap="none" strike="noStrike">
                 <a:solidFill>
                   <a:srgbClr val="888888"/>
                 </a:solidFill>
@@ -1835,7 +1799,7 @@
                 <a:sym typeface="Calibri"/>
               </a:defRPr>
             </a:lvl2pPr>
-            <a:lvl3pPr marL="0" marR="0" lvl="2" indent="0" algn="r">
+            <a:lvl3pPr indent="0" lvl="2" marL="0" marR="0" algn="r">
               <a:lnSpc>
                 <a:spcPct val="100000"/>
               </a:lnSpc>
@@ -1851,7 +1815,7 @@
               <a:buSzPts val="5760"/>
               <a:buFont typeface="Arial"/>
               <a:buNone/>
-              <a:defRPr sz="5760" b="0" i="0" u="none" strike="noStrike" cap="none">
+              <a:defRPr b="0" i="0" sz="5760" u="none" cap="none" strike="noStrike">
                 <a:solidFill>
                   <a:srgbClr val="888888"/>
                 </a:solidFill>
@@ -1861,7 +1825,7 @@
                 <a:sym typeface="Calibri"/>
               </a:defRPr>
             </a:lvl3pPr>
-            <a:lvl4pPr marL="0" marR="0" lvl="3" indent="0" algn="r">
+            <a:lvl4pPr indent="0" lvl="3" marL="0" marR="0" algn="r">
               <a:lnSpc>
                 <a:spcPct val="100000"/>
               </a:lnSpc>
@@ -1877,7 +1841,7 @@
               <a:buSzPts val="5760"/>
               <a:buFont typeface="Arial"/>
               <a:buNone/>
-              <a:defRPr sz="5760" b="0" i="0" u="none" strike="noStrike" cap="none">
+              <a:defRPr b="0" i="0" sz="5760" u="none" cap="none" strike="noStrike">
                 <a:solidFill>
                   <a:srgbClr val="888888"/>
                 </a:solidFill>
@@ -1887,7 +1851,7 @@
                 <a:sym typeface="Calibri"/>
               </a:defRPr>
             </a:lvl4pPr>
-            <a:lvl5pPr marL="0" marR="0" lvl="4" indent="0" algn="r">
+            <a:lvl5pPr indent="0" lvl="4" marL="0" marR="0" algn="r">
               <a:lnSpc>
                 <a:spcPct val="100000"/>
               </a:lnSpc>
@@ -1903,7 +1867,7 @@
               <a:buSzPts val="5760"/>
               <a:buFont typeface="Arial"/>
               <a:buNone/>
-              <a:defRPr sz="5760" b="0" i="0" u="none" strike="noStrike" cap="none">
+              <a:defRPr b="0" i="0" sz="5760" u="none" cap="none" strike="noStrike">
                 <a:solidFill>
                   <a:srgbClr val="888888"/>
                 </a:solidFill>
@@ -1913,7 +1877,7 @@
                 <a:sym typeface="Calibri"/>
               </a:defRPr>
             </a:lvl5pPr>
-            <a:lvl6pPr marL="0" marR="0" lvl="5" indent="0" algn="r">
+            <a:lvl6pPr indent="0" lvl="5" marL="0" marR="0" algn="r">
               <a:lnSpc>
                 <a:spcPct val="100000"/>
               </a:lnSpc>
@@ -1929,7 +1893,7 @@
               <a:buSzPts val="5760"/>
               <a:buFont typeface="Arial"/>
               <a:buNone/>
-              <a:defRPr sz="5760" b="0" i="0" u="none" strike="noStrike" cap="none">
+              <a:defRPr b="0" i="0" sz="5760" u="none" cap="none" strike="noStrike">
                 <a:solidFill>
                   <a:srgbClr val="888888"/>
                 </a:solidFill>
@@ -1939,7 +1903,7 @@
                 <a:sym typeface="Calibri"/>
               </a:defRPr>
             </a:lvl6pPr>
-            <a:lvl7pPr marL="0" marR="0" lvl="6" indent="0" algn="r">
+            <a:lvl7pPr indent="0" lvl="6" marL="0" marR="0" algn="r">
               <a:lnSpc>
                 <a:spcPct val="100000"/>
               </a:lnSpc>
@@ -1955,7 +1919,7 @@
               <a:buSzPts val="5760"/>
               <a:buFont typeface="Arial"/>
               <a:buNone/>
-              <a:defRPr sz="5760" b="0" i="0" u="none" strike="noStrike" cap="none">
+              <a:defRPr b="0" i="0" sz="5760" u="none" cap="none" strike="noStrike">
                 <a:solidFill>
                   <a:srgbClr val="888888"/>
                 </a:solidFill>
@@ -1965,7 +1929,7 @@
                 <a:sym typeface="Calibri"/>
               </a:defRPr>
             </a:lvl7pPr>
-            <a:lvl8pPr marL="0" marR="0" lvl="7" indent="0" algn="r">
+            <a:lvl8pPr indent="0" lvl="7" marL="0" marR="0" algn="r">
               <a:lnSpc>
                 <a:spcPct val="100000"/>
               </a:lnSpc>
@@ -1981,7 +1945,7 @@
               <a:buSzPts val="5760"/>
               <a:buFont typeface="Arial"/>
               <a:buNone/>
-              <a:defRPr sz="5760" b="0" i="0" u="none" strike="noStrike" cap="none">
+              <a:defRPr b="0" i="0" sz="5760" u="none" cap="none" strike="noStrike">
                 <a:solidFill>
                   <a:srgbClr val="888888"/>
                 </a:solidFill>
@@ -1991,7 +1955,7 @@
                 <a:sym typeface="Calibri"/>
               </a:defRPr>
             </a:lvl8pPr>
-            <a:lvl9pPr marL="0" marR="0" lvl="8" indent="0" algn="r">
+            <a:lvl9pPr indent="0" lvl="8" marL="0" marR="0" algn="r">
               <a:lnSpc>
                 <a:spcPct val="100000"/>
               </a:lnSpc>
@@ -2007,7 +1971,7 @@
               <a:buSzPts val="5760"/>
               <a:buFont typeface="Arial"/>
               <a:buNone/>
-              <a:defRPr sz="5760" b="0" i="0" u="none" strike="noStrike" cap="none">
+              <a:defRPr b="0" i="0" sz="5760" u="none" cap="none" strike="noStrike">
                 <a:solidFill>
                   <a:srgbClr val="888888"/>
                 </a:solidFill>
@@ -2019,7 +1983,7 @@
             </a:lvl9pPr>
           </a:lstStyle>
           <a:p>
-            <a:pPr marL="0" lvl="0" indent="0" algn="r" rtl="0">
+            <a:pPr indent="0" lvl="0" marL="0" rtl="0" algn="r">
               <a:spcBef>
                 <a:spcPts val="0"/>
               </a:spcBef>
@@ -2045,11 +2009,11 @@
 </file>
 
 <file path=ppt/slideLayouts/slideLayout11.xml><?xml version="1.0" encoding="utf-8"?>
-<p:sldLayout xmlns:a="http://schemas.openxmlformats.org/drawingml/2006/main" xmlns:r="http://schemas.openxmlformats.org/officeDocument/2006/relationships" xmlns:p="http://schemas.openxmlformats.org/presentationml/2006/main" matchingName="Title and Vertical Text" type="vertTx">
+<p:sldLayout xmlns:a="http://schemas.openxmlformats.org/drawingml/2006/main" xmlns:r="http://schemas.openxmlformats.org/officeDocument/2006/relationships" xmlns:mc="http://schemas.openxmlformats.org/markup-compatibility/2006" xmlns:mv="urn:schemas-microsoft-com:mac:vml" xmlns:p="http://schemas.openxmlformats.org/presentationml/2006/main" xmlns:c="http://schemas.openxmlformats.org/drawingml/2006/chart" xmlns:dgm="http://schemas.openxmlformats.org/drawingml/2006/diagram" xmlns:o="urn:schemas-microsoft-com:office:office" xmlns:v="urn:schemas-microsoft-com:vml" xmlns:pvml="urn:schemas-microsoft-com:office:powerpoint" xmlns:com="http://schemas.openxmlformats.org/drawingml/2006/compatibility" xmlns:p14="http://schemas.microsoft.com/office/powerpoint/2010/main" xmlns:p15="http://schemas.microsoft.com/office/powerpoint/2012/main" xmlns:ahyp="http://schemas.microsoft.com/office/drawing/2018/hyperlinkcolor" matchingName="Title and Vertical Text" type="vertTx">
   <p:cSld name="VERTICAL_TEXT">
     <p:spTree>
       <p:nvGrpSpPr>
-        <p:cNvPr id="1" name="Shape 71"/>
+        <p:cNvPr id="71" name="Shape 71"/>
         <p:cNvGrpSpPr/>
         <p:nvPr/>
       </p:nvGrpSpPr>
@@ -2064,9 +2028,7 @@
       <p:sp>
         <p:nvSpPr>
           <p:cNvPr id="72" name="Google Shape;72;p13"/>
-          <p:cNvSpPr txBox="1">
-            <a:spLocks noGrp="1"/>
-          </p:cNvSpPr>
+          <p:cNvSpPr txBox="1"/>
           <p:nvPr>
             <p:ph type="title"/>
           </p:nvPr>
@@ -2085,7 +2047,7 @@
           </a:ln>
         </p:spPr>
         <p:txBody>
-          <a:bodyPr spcFirstLastPara="1" wrap="square" lIns="91425" tIns="45700" rIns="91425" bIns="45700" anchor="ctr" anchorCtr="0">
+          <a:bodyPr anchorCtr="0" anchor="ctr" bIns="45700" lIns="91425" spcFirstLastPara="1" rIns="91425" wrap="square" tIns="45700">
             <a:normAutofit/>
           </a:bodyPr>
           <a:lstStyle>
@@ -2219,19 +2181,15 @@
               <a:defRPr/>
             </a:lvl9pPr>
           </a:lstStyle>
-          <a:p>
-            <a:endParaRPr/>
-          </a:p>
+          <a:p/>
         </p:txBody>
       </p:sp>
       <p:sp>
         <p:nvSpPr>
           <p:cNvPr id="73" name="Google Shape;73;p13"/>
-          <p:cNvSpPr txBox="1">
-            <a:spLocks noGrp="1"/>
-          </p:cNvSpPr>
+          <p:cNvSpPr txBox="1"/>
           <p:nvPr>
-            <p:ph type="body" idx="1"/>
+            <p:ph idx="1" type="body"/>
           </p:nvPr>
         </p:nvSpPr>
         <p:spPr>
@@ -2248,11 +2206,11 @@
           </a:ln>
         </p:spPr>
         <p:txBody>
-          <a:bodyPr spcFirstLastPara="1" wrap="square" lIns="91425" tIns="45700" rIns="91425" bIns="45700" anchor="t" anchorCtr="0">
+          <a:bodyPr anchorCtr="0" anchor="t" bIns="45700" lIns="91425" spcFirstLastPara="1" rIns="91425" wrap="square" tIns="45700">
             <a:normAutofit/>
           </a:bodyPr>
           <a:lstStyle>
-            <a:lvl1pPr marL="457200" lvl="0" indent="-342900" algn="l">
+            <a:lvl1pPr indent="-342900" lvl="0" marL="457200" algn="l">
               <a:lnSpc>
                 <a:spcPct val="90000"/>
               </a:lnSpc>
@@ -2269,7 +2227,7 @@
               <a:buChar char="•"/>
               <a:defRPr/>
             </a:lvl1pPr>
-            <a:lvl2pPr marL="914400" lvl="1" indent="-342900" algn="l">
+            <a:lvl2pPr indent="-342900" lvl="1" marL="914400" algn="l">
               <a:lnSpc>
                 <a:spcPct val="90000"/>
               </a:lnSpc>
@@ -2286,7 +2244,7 @@
               <a:buChar char="•"/>
               <a:defRPr/>
             </a:lvl2pPr>
-            <a:lvl3pPr marL="1371600" lvl="2" indent="-342900" algn="l">
+            <a:lvl3pPr indent="-342900" lvl="2" marL="1371600" algn="l">
               <a:lnSpc>
                 <a:spcPct val="90000"/>
               </a:lnSpc>
@@ -2303,7 +2261,7 @@
               <a:buChar char="•"/>
               <a:defRPr/>
             </a:lvl3pPr>
-            <a:lvl4pPr marL="1828800" lvl="3" indent="-342900" algn="l">
+            <a:lvl4pPr indent="-342900" lvl="3" marL="1828800" algn="l">
               <a:lnSpc>
                 <a:spcPct val="90000"/>
               </a:lnSpc>
@@ -2320,7 +2278,7 @@
               <a:buChar char="•"/>
               <a:defRPr/>
             </a:lvl4pPr>
-            <a:lvl5pPr marL="2286000" lvl="4" indent="-342900" algn="l">
+            <a:lvl5pPr indent="-342900" lvl="4" marL="2286000" algn="l">
               <a:lnSpc>
                 <a:spcPct val="90000"/>
               </a:lnSpc>
@@ -2337,7 +2295,7 @@
               <a:buChar char="•"/>
               <a:defRPr/>
             </a:lvl5pPr>
-            <a:lvl6pPr marL="2743200" lvl="5" indent="-342900" algn="l">
+            <a:lvl6pPr indent="-342900" lvl="5" marL="2743200" algn="l">
               <a:lnSpc>
                 <a:spcPct val="90000"/>
               </a:lnSpc>
@@ -2354,7 +2312,7 @@
               <a:buChar char="•"/>
               <a:defRPr/>
             </a:lvl6pPr>
-            <a:lvl7pPr marL="3200400" lvl="6" indent="-342900" algn="l">
+            <a:lvl7pPr indent="-342900" lvl="6" marL="3200400" algn="l">
               <a:lnSpc>
                 <a:spcPct val="90000"/>
               </a:lnSpc>
@@ -2371,7 +2329,7 @@
               <a:buChar char="•"/>
               <a:defRPr/>
             </a:lvl7pPr>
-            <a:lvl8pPr marL="3657600" lvl="7" indent="-342900" algn="l">
+            <a:lvl8pPr indent="-342900" lvl="7" marL="3657600" algn="l">
               <a:lnSpc>
                 <a:spcPct val="90000"/>
               </a:lnSpc>
@@ -2388,7 +2346,7 @@
               <a:buChar char="•"/>
               <a:defRPr/>
             </a:lvl8pPr>
-            <a:lvl9pPr marL="4114800" lvl="8" indent="-342900" algn="l">
+            <a:lvl9pPr indent="-342900" lvl="8" marL="4114800" algn="l">
               <a:lnSpc>
                 <a:spcPct val="90000"/>
               </a:lnSpc>
@@ -2406,19 +2364,15 @@
               <a:defRPr/>
             </a:lvl9pPr>
           </a:lstStyle>
-          <a:p>
-            <a:endParaRPr/>
-          </a:p>
+          <a:p/>
         </p:txBody>
       </p:sp>
       <p:sp>
         <p:nvSpPr>
           <p:cNvPr id="74" name="Google Shape;74;p13"/>
-          <p:cNvSpPr txBox="1">
-            <a:spLocks noGrp="1"/>
-          </p:cNvSpPr>
+          <p:cNvSpPr txBox="1"/>
           <p:nvPr>
-            <p:ph type="dt" idx="10"/>
+            <p:ph idx="10" type="dt"/>
           </p:nvPr>
         </p:nvSpPr>
         <p:spPr>
@@ -2435,7 +2389,7 @@
           </a:ln>
         </p:spPr>
         <p:txBody>
-          <a:bodyPr spcFirstLastPara="1" wrap="square" lIns="91425" tIns="45700" rIns="91425" bIns="45700" anchor="ctr" anchorCtr="0">
+          <a:bodyPr anchorCtr="0" anchor="ctr" bIns="45700" lIns="91425" spcFirstLastPara="1" rIns="91425" wrap="square" tIns="45700">
             <a:noAutofit/>
           </a:bodyPr>
           <a:lstStyle>
@@ -2566,19 +2520,15 @@
               <a:defRPr/>
             </a:lvl9pPr>
           </a:lstStyle>
-          <a:p>
-            <a:endParaRPr/>
-          </a:p>
+          <a:p/>
         </p:txBody>
       </p:sp>
       <p:sp>
         <p:nvSpPr>
           <p:cNvPr id="75" name="Google Shape;75;p13"/>
-          <p:cNvSpPr txBox="1">
-            <a:spLocks noGrp="1"/>
-          </p:cNvSpPr>
+          <p:cNvSpPr txBox="1"/>
           <p:nvPr>
-            <p:ph type="ftr" idx="11"/>
+            <p:ph idx="11" type="ftr"/>
           </p:nvPr>
         </p:nvSpPr>
         <p:spPr>
@@ -2595,7 +2545,7 @@
           </a:ln>
         </p:spPr>
         <p:txBody>
-          <a:bodyPr spcFirstLastPara="1" wrap="square" lIns="91425" tIns="45700" rIns="91425" bIns="45700" anchor="ctr" anchorCtr="0">
+          <a:bodyPr anchorCtr="0" anchor="ctr" bIns="45700" lIns="91425" spcFirstLastPara="1" rIns="91425" wrap="square" tIns="45700">
             <a:noAutofit/>
           </a:bodyPr>
           <a:lstStyle>
@@ -2726,19 +2676,15 @@
               <a:defRPr/>
             </a:lvl9pPr>
           </a:lstStyle>
-          <a:p>
-            <a:endParaRPr/>
-          </a:p>
+          <a:p/>
         </p:txBody>
       </p:sp>
       <p:sp>
         <p:nvSpPr>
           <p:cNvPr id="76" name="Google Shape;76;p13"/>
-          <p:cNvSpPr txBox="1">
-            <a:spLocks noGrp="1"/>
-          </p:cNvSpPr>
+          <p:cNvSpPr txBox="1"/>
           <p:nvPr>
-            <p:ph type="sldNum" idx="12"/>
+            <p:ph idx="12" type="sldNum"/>
           </p:nvPr>
         </p:nvSpPr>
         <p:spPr>
@@ -2755,11 +2701,11 @@
           </a:ln>
         </p:spPr>
         <p:txBody>
-          <a:bodyPr spcFirstLastPara="1" wrap="square" lIns="91425" tIns="45700" rIns="91425" bIns="45700" anchor="ctr" anchorCtr="0">
+          <a:bodyPr anchorCtr="0" anchor="ctr" bIns="45700" lIns="91425" spcFirstLastPara="1" rIns="91425" wrap="square" tIns="45700">
             <a:noAutofit/>
           </a:bodyPr>
           <a:lstStyle>
-            <a:lvl1pPr marL="0" marR="0" lvl="0" indent="0" algn="r">
+            <a:lvl1pPr indent="0" lvl="0" marL="0" marR="0" algn="r">
               <a:lnSpc>
                 <a:spcPct val="100000"/>
               </a:lnSpc>
@@ -2775,7 +2721,7 @@
               <a:buSzPts val="5760"/>
               <a:buFont typeface="Arial"/>
               <a:buNone/>
-              <a:defRPr sz="5760" b="0" i="0" u="none" strike="noStrike" cap="none">
+              <a:defRPr b="0" i="0" sz="5760" u="none" cap="none" strike="noStrike">
                 <a:solidFill>
                   <a:srgbClr val="888888"/>
                 </a:solidFill>
@@ -2785,7 +2731,7 @@
                 <a:sym typeface="Calibri"/>
               </a:defRPr>
             </a:lvl1pPr>
-            <a:lvl2pPr marL="0" marR="0" lvl="1" indent="0" algn="r">
+            <a:lvl2pPr indent="0" lvl="1" marL="0" marR="0" algn="r">
               <a:lnSpc>
                 <a:spcPct val="100000"/>
               </a:lnSpc>
@@ -2801,7 +2747,7 @@
               <a:buSzPts val="5760"/>
               <a:buFont typeface="Arial"/>
               <a:buNone/>
-              <a:defRPr sz="5760" b="0" i="0" u="none" strike="noStrike" cap="none">
+              <a:defRPr b="0" i="0" sz="5760" u="none" cap="none" strike="noStrike">
                 <a:solidFill>
                   <a:srgbClr val="888888"/>
                 </a:solidFill>
@@ -2811,7 +2757,7 @@
                 <a:sym typeface="Calibri"/>
               </a:defRPr>
             </a:lvl2pPr>
-            <a:lvl3pPr marL="0" marR="0" lvl="2" indent="0" algn="r">
+            <a:lvl3pPr indent="0" lvl="2" marL="0" marR="0" algn="r">
               <a:lnSpc>
                 <a:spcPct val="100000"/>
               </a:lnSpc>
@@ -2827,7 +2773,7 @@
               <a:buSzPts val="5760"/>
               <a:buFont typeface="Arial"/>
               <a:buNone/>
-              <a:defRPr sz="5760" b="0" i="0" u="none" strike="noStrike" cap="none">
+              <a:defRPr b="0" i="0" sz="5760" u="none" cap="none" strike="noStrike">
                 <a:solidFill>
                   <a:srgbClr val="888888"/>
                 </a:solidFill>
@@ -2837,7 +2783,7 @@
                 <a:sym typeface="Calibri"/>
               </a:defRPr>
             </a:lvl3pPr>
-            <a:lvl4pPr marL="0" marR="0" lvl="3" indent="0" algn="r">
+            <a:lvl4pPr indent="0" lvl="3" marL="0" marR="0" algn="r">
               <a:lnSpc>
                 <a:spcPct val="100000"/>
               </a:lnSpc>
@@ -2853,7 +2799,7 @@
               <a:buSzPts val="5760"/>
               <a:buFont typeface="Arial"/>
               <a:buNone/>
-              <a:defRPr sz="5760" b="0" i="0" u="none" strike="noStrike" cap="none">
+              <a:defRPr b="0" i="0" sz="5760" u="none" cap="none" strike="noStrike">
                 <a:solidFill>
                   <a:srgbClr val="888888"/>
                 </a:solidFill>
@@ -2863,7 +2809,7 @@
                 <a:sym typeface="Calibri"/>
               </a:defRPr>
             </a:lvl4pPr>
-            <a:lvl5pPr marL="0" marR="0" lvl="4" indent="0" algn="r">
+            <a:lvl5pPr indent="0" lvl="4" marL="0" marR="0" algn="r">
               <a:lnSpc>
                 <a:spcPct val="100000"/>
               </a:lnSpc>
@@ -2879,7 +2825,7 @@
               <a:buSzPts val="5760"/>
               <a:buFont typeface="Arial"/>
               <a:buNone/>
-              <a:defRPr sz="5760" b="0" i="0" u="none" strike="noStrike" cap="none">
+              <a:defRPr b="0" i="0" sz="5760" u="none" cap="none" strike="noStrike">
                 <a:solidFill>
                   <a:srgbClr val="888888"/>
                 </a:solidFill>
@@ -2889,7 +2835,7 @@
                 <a:sym typeface="Calibri"/>
               </a:defRPr>
             </a:lvl5pPr>
-            <a:lvl6pPr marL="0" marR="0" lvl="5" indent="0" algn="r">
+            <a:lvl6pPr indent="0" lvl="5" marL="0" marR="0" algn="r">
               <a:lnSpc>
                 <a:spcPct val="100000"/>
               </a:lnSpc>
@@ -2905,7 +2851,7 @@
               <a:buSzPts val="5760"/>
               <a:buFont typeface="Arial"/>
               <a:buNone/>
-              <a:defRPr sz="5760" b="0" i="0" u="none" strike="noStrike" cap="none">
+              <a:defRPr b="0" i="0" sz="5760" u="none" cap="none" strike="noStrike">
                 <a:solidFill>
                   <a:srgbClr val="888888"/>
                 </a:solidFill>
@@ -2915,7 +2861,7 @@
                 <a:sym typeface="Calibri"/>
               </a:defRPr>
             </a:lvl6pPr>
-            <a:lvl7pPr marL="0" marR="0" lvl="6" indent="0" algn="r">
+            <a:lvl7pPr indent="0" lvl="6" marL="0" marR="0" algn="r">
               <a:lnSpc>
                 <a:spcPct val="100000"/>
               </a:lnSpc>
@@ -2931,7 +2877,7 @@
               <a:buSzPts val="5760"/>
               <a:buFont typeface="Arial"/>
               <a:buNone/>
-              <a:defRPr sz="5760" b="0" i="0" u="none" strike="noStrike" cap="none">
+              <a:defRPr b="0" i="0" sz="5760" u="none" cap="none" strike="noStrike">
                 <a:solidFill>
                   <a:srgbClr val="888888"/>
                 </a:solidFill>
@@ -2941,7 +2887,7 @@
                 <a:sym typeface="Calibri"/>
               </a:defRPr>
             </a:lvl7pPr>
-            <a:lvl8pPr marL="0" marR="0" lvl="7" indent="0" algn="r">
+            <a:lvl8pPr indent="0" lvl="7" marL="0" marR="0" algn="r">
               <a:lnSpc>
                 <a:spcPct val="100000"/>
               </a:lnSpc>
@@ -2957,7 +2903,7 @@
               <a:buSzPts val="5760"/>
               <a:buFont typeface="Arial"/>
               <a:buNone/>
-              <a:defRPr sz="5760" b="0" i="0" u="none" strike="noStrike" cap="none">
+              <a:defRPr b="0" i="0" sz="5760" u="none" cap="none" strike="noStrike">
                 <a:solidFill>
                   <a:srgbClr val="888888"/>
                 </a:solidFill>
@@ -2967,7 +2913,7 @@
                 <a:sym typeface="Calibri"/>
               </a:defRPr>
             </a:lvl8pPr>
-            <a:lvl9pPr marL="0" marR="0" lvl="8" indent="0" algn="r">
+            <a:lvl9pPr indent="0" lvl="8" marL="0" marR="0" algn="r">
               <a:lnSpc>
                 <a:spcPct val="100000"/>
               </a:lnSpc>
@@ -2983,7 +2929,7 @@
               <a:buSzPts val="5760"/>
               <a:buFont typeface="Arial"/>
               <a:buNone/>
-              <a:defRPr sz="5760" b="0" i="0" u="none" strike="noStrike" cap="none">
+              <a:defRPr b="0" i="0" sz="5760" u="none" cap="none" strike="noStrike">
                 <a:solidFill>
                   <a:srgbClr val="888888"/>
                 </a:solidFill>
@@ -2995,7 +2941,7 @@
             </a:lvl9pPr>
           </a:lstStyle>
           <a:p>
-            <a:pPr marL="0" lvl="0" indent="0" algn="r" rtl="0">
+            <a:pPr indent="0" lvl="0" marL="0" rtl="0" algn="r">
               <a:spcBef>
                 <a:spcPts val="0"/>
               </a:spcBef>
@@ -3021,11 +2967,11 @@
 </file>
 
 <file path=ppt/slideLayouts/slideLayout12.xml><?xml version="1.0" encoding="utf-8"?>
-<p:sldLayout xmlns:a="http://schemas.openxmlformats.org/drawingml/2006/main" xmlns:r="http://schemas.openxmlformats.org/officeDocument/2006/relationships" xmlns:p="http://schemas.openxmlformats.org/presentationml/2006/main" matchingName="Vertical Title and Text" type="vertTitleAndTx">
+<p:sldLayout xmlns:a="http://schemas.openxmlformats.org/drawingml/2006/main" xmlns:r="http://schemas.openxmlformats.org/officeDocument/2006/relationships" xmlns:mc="http://schemas.openxmlformats.org/markup-compatibility/2006" xmlns:mv="urn:schemas-microsoft-com:mac:vml" xmlns:p="http://schemas.openxmlformats.org/presentationml/2006/main" xmlns:c="http://schemas.openxmlformats.org/drawingml/2006/chart" xmlns:dgm="http://schemas.openxmlformats.org/drawingml/2006/diagram" xmlns:o="urn:schemas-microsoft-com:office:office" xmlns:v="urn:schemas-microsoft-com:vml" xmlns:pvml="urn:schemas-microsoft-com:office:powerpoint" xmlns:com="http://schemas.openxmlformats.org/drawingml/2006/compatibility" xmlns:p14="http://schemas.microsoft.com/office/powerpoint/2010/main" xmlns:p15="http://schemas.microsoft.com/office/powerpoint/2012/main" xmlns:ahyp="http://schemas.microsoft.com/office/drawing/2018/hyperlinkcolor" matchingName="Vertical Title and Text" type="vertTitleAndTx">
   <p:cSld name="VERTICAL_TITLE_AND_VERTICAL_TEXT">
     <p:spTree>
       <p:nvGrpSpPr>
-        <p:cNvPr id="1" name="Shape 77"/>
+        <p:cNvPr id="77" name="Shape 77"/>
         <p:cNvGrpSpPr/>
         <p:nvPr/>
       </p:nvGrpSpPr>
@@ -3040,9 +2986,7 @@
       <p:sp>
         <p:nvSpPr>
           <p:cNvPr id="78" name="Google Shape;78;p14"/>
-          <p:cNvSpPr txBox="1">
-            <a:spLocks noGrp="1"/>
-          </p:cNvSpPr>
+          <p:cNvSpPr txBox="1"/>
           <p:nvPr>
             <p:ph type="title"/>
           </p:nvPr>
@@ -3061,7 +3005,7 @@
           </a:ln>
         </p:spPr>
         <p:txBody>
-          <a:bodyPr spcFirstLastPara="1" wrap="square" lIns="91425" tIns="45700" rIns="91425" bIns="45700" anchor="ctr" anchorCtr="0">
+          <a:bodyPr anchorCtr="0" anchor="ctr" bIns="45700" lIns="91425" spcFirstLastPara="1" rIns="91425" wrap="square" tIns="45700">
             <a:normAutofit/>
           </a:bodyPr>
           <a:lstStyle>
@@ -3195,19 +3139,15 @@
               <a:defRPr/>
             </a:lvl9pPr>
           </a:lstStyle>
-          <a:p>
-            <a:endParaRPr/>
-          </a:p>
+          <a:p/>
         </p:txBody>
       </p:sp>
       <p:sp>
         <p:nvSpPr>
           <p:cNvPr id="79" name="Google Shape;79;p14"/>
-          <p:cNvSpPr txBox="1">
-            <a:spLocks noGrp="1"/>
-          </p:cNvSpPr>
+          <p:cNvSpPr txBox="1"/>
           <p:nvPr>
-            <p:ph type="body" idx="1"/>
+            <p:ph idx="1" type="body"/>
           </p:nvPr>
         </p:nvSpPr>
         <p:spPr>
@@ -3224,11 +3164,11 @@
           </a:ln>
         </p:spPr>
         <p:txBody>
-          <a:bodyPr spcFirstLastPara="1" wrap="square" lIns="91425" tIns="45700" rIns="91425" bIns="45700" anchor="t" anchorCtr="0">
+          <a:bodyPr anchorCtr="0" anchor="t" bIns="45700" lIns="91425" spcFirstLastPara="1" rIns="91425" wrap="square" tIns="45700">
             <a:normAutofit/>
           </a:bodyPr>
           <a:lstStyle>
-            <a:lvl1pPr marL="457200" lvl="0" indent="-342900" algn="l">
+            <a:lvl1pPr indent="-342900" lvl="0" marL="457200" algn="l">
               <a:lnSpc>
                 <a:spcPct val="90000"/>
               </a:lnSpc>
@@ -3245,7 +3185,7 @@
               <a:buChar char="•"/>
               <a:defRPr/>
             </a:lvl1pPr>
-            <a:lvl2pPr marL="914400" lvl="1" indent="-342900" algn="l">
+            <a:lvl2pPr indent="-342900" lvl="1" marL="914400" algn="l">
               <a:lnSpc>
                 <a:spcPct val="90000"/>
               </a:lnSpc>
@@ -3262,7 +3202,7 @@
               <a:buChar char="•"/>
               <a:defRPr/>
             </a:lvl2pPr>
-            <a:lvl3pPr marL="1371600" lvl="2" indent="-342900" algn="l">
+            <a:lvl3pPr indent="-342900" lvl="2" marL="1371600" algn="l">
               <a:lnSpc>
                 <a:spcPct val="90000"/>
               </a:lnSpc>
@@ -3279,7 +3219,7 @@
               <a:buChar char="•"/>
               <a:defRPr/>
             </a:lvl3pPr>
-            <a:lvl4pPr marL="1828800" lvl="3" indent="-342900" algn="l">
+            <a:lvl4pPr indent="-342900" lvl="3" marL="1828800" algn="l">
               <a:lnSpc>
                 <a:spcPct val="90000"/>
               </a:lnSpc>
@@ -3296,7 +3236,7 @@
               <a:buChar char="•"/>
               <a:defRPr/>
             </a:lvl4pPr>
-            <a:lvl5pPr marL="2286000" lvl="4" indent="-342900" algn="l">
+            <a:lvl5pPr indent="-342900" lvl="4" marL="2286000" algn="l">
               <a:lnSpc>
                 <a:spcPct val="90000"/>
               </a:lnSpc>
@@ -3313,7 +3253,7 @@
               <a:buChar char="•"/>
               <a:defRPr/>
             </a:lvl5pPr>
-            <a:lvl6pPr marL="2743200" lvl="5" indent="-342900" algn="l">
+            <a:lvl6pPr indent="-342900" lvl="5" marL="2743200" algn="l">
               <a:lnSpc>
                 <a:spcPct val="90000"/>
               </a:lnSpc>
@@ -3330,7 +3270,7 @@
               <a:buChar char="•"/>
               <a:defRPr/>
             </a:lvl6pPr>
-            <a:lvl7pPr marL="3200400" lvl="6" indent="-342900" algn="l">
+            <a:lvl7pPr indent="-342900" lvl="6" marL="3200400" algn="l">
               <a:lnSpc>
                 <a:spcPct val="90000"/>
               </a:lnSpc>
@@ -3347,7 +3287,7 @@
               <a:buChar char="•"/>
               <a:defRPr/>
             </a:lvl7pPr>
-            <a:lvl8pPr marL="3657600" lvl="7" indent="-342900" algn="l">
+            <a:lvl8pPr indent="-342900" lvl="7" marL="3657600" algn="l">
               <a:lnSpc>
                 <a:spcPct val="90000"/>
               </a:lnSpc>
@@ -3364,7 +3304,7 @@
               <a:buChar char="•"/>
               <a:defRPr/>
             </a:lvl8pPr>
-            <a:lvl9pPr marL="4114800" lvl="8" indent="-342900" algn="l">
+            <a:lvl9pPr indent="-342900" lvl="8" marL="4114800" algn="l">
               <a:lnSpc>
                 <a:spcPct val="90000"/>
               </a:lnSpc>
@@ -3382,19 +3322,15 @@
               <a:defRPr/>
             </a:lvl9pPr>
           </a:lstStyle>
-          <a:p>
-            <a:endParaRPr/>
-          </a:p>
+          <a:p/>
         </p:txBody>
       </p:sp>
       <p:sp>
         <p:nvSpPr>
           <p:cNvPr id="80" name="Google Shape;80;p14"/>
-          <p:cNvSpPr txBox="1">
-            <a:spLocks noGrp="1"/>
-          </p:cNvSpPr>
+          <p:cNvSpPr txBox="1"/>
           <p:nvPr>
-            <p:ph type="dt" idx="10"/>
+            <p:ph idx="10" type="dt"/>
           </p:nvPr>
         </p:nvSpPr>
         <p:spPr>
@@ -3411,7 +3347,7 @@
           </a:ln>
         </p:spPr>
         <p:txBody>
-          <a:bodyPr spcFirstLastPara="1" wrap="square" lIns="91425" tIns="45700" rIns="91425" bIns="45700" anchor="ctr" anchorCtr="0">
+          <a:bodyPr anchorCtr="0" anchor="ctr" bIns="45700" lIns="91425" spcFirstLastPara="1" rIns="91425" wrap="square" tIns="45700">
             <a:noAutofit/>
           </a:bodyPr>
           <a:lstStyle>
@@ -3542,19 +3478,15 @@
               <a:defRPr/>
             </a:lvl9pPr>
           </a:lstStyle>
-          <a:p>
-            <a:endParaRPr/>
-          </a:p>
+          <a:p/>
         </p:txBody>
       </p:sp>
       <p:sp>
         <p:nvSpPr>
           <p:cNvPr id="81" name="Google Shape;81;p14"/>
-          <p:cNvSpPr txBox="1">
-            <a:spLocks noGrp="1"/>
-          </p:cNvSpPr>
+          <p:cNvSpPr txBox="1"/>
           <p:nvPr>
-            <p:ph type="ftr" idx="11"/>
+            <p:ph idx="11" type="ftr"/>
           </p:nvPr>
         </p:nvSpPr>
         <p:spPr>
@@ -3571,7 +3503,7 @@
           </a:ln>
         </p:spPr>
         <p:txBody>
-          <a:bodyPr spcFirstLastPara="1" wrap="square" lIns="91425" tIns="45700" rIns="91425" bIns="45700" anchor="ctr" anchorCtr="0">
+          <a:bodyPr anchorCtr="0" anchor="ctr" bIns="45700" lIns="91425" spcFirstLastPara="1" rIns="91425" wrap="square" tIns="45700">
             <a:noAutofit/>
           </a:bodyPr>
           <a:lstStyle>
@@ -3702,19 +3634,15 @@
               <a:defRPr/>
             </a:lvl9pPr>
           </a:lstStyle>
-          <a:p>
-            <a:endParaRPr/>
-          </a:p>
+          <a:p/>
         </p:txBody>
       </p:sp>
       <p:sp>
         <p:nvSpPr>
           <p:cNvPr id="82" name="Google Shape;82;p14"/>
-          <p:cNvSpPr txBox="1">
-            <a:spLocks noGrp="1"/>
-          </p:cNvSpPr>
+          <p:cNvSpPr txBox="1"/>
           <p:nvPr>
-            <p:ph type="sldNum" idx="12"/>
+            <p:ph idx="12" type="sldNum"/>
           </p:nvPr>
         </p:nvSpPr>
         <p:spPr>
@@ -3731,11 +3659,11 @@
           </a:ln>
         </p:spPr>
         <p:txBody>
-          <a:bodyPr spcFirstLastPara="1" wrap="square" lIns="91425" tIns="45700" rIns="91425" bIns="45700" anchor="ctr" anchorCtr="0">
+          <a:bodyPr anchorCtr="0" anchor="ctr" bIns="45700" lIns="91425" spcFirstLastPara="1" rIns="91425" wrap="square" tIns="45700">
             <a:noAutofit/>
           </a:bodyPr>
           <a:lstStyle>
-            <a:lvl1pPr marL="0" marR="0" lvl="0" indent="0" algn="r">
+            <a:lvl1pPr indent="0" lvl="0" marL="0" marR="0" algn="r">
               <a:lnSpc>
                 <a:spcPct val="100000"/>
               </a:lnSpc>
@@ -3751,7 +3679,7 @@
               <a:buSzPts val="5760"/>
               <a:buFont typeface="Arial"/>
               <a:buNone/>
-              <a:defRPr sz="5760" b="0" i="0" u="none" strike="noStrike" cap="none">
+              <a:defRPr b="0" i="0" sz="5760" u="none" cap="none" strike="noStrike">
                 <a:solidFill>
                   <a:srgbClr val="888888"/>
                 </a:solidFill>
@@ -3761,7 +3689,7 @@
                 <a:sym typeface="Calibri"/>
               </a:defRPr>
             </a:lvl1pPr>
-            <a:lvl2pPr marL="0" marR="0" lvl="1" indent="0" algn="r">
+            <a:lvl2pPr indent="0" lvl="1" marL="0" marR="0" algn="r">
               <a:lnSpc>
                 <a:spcPct val="100000"/>
               </a:lnSpc>
@@ -3777,7 +3705,7 @@
               <a:buSzPts val="5760"/>
               <a:buFont typeface="Arial"/>
               <a:buNone/>
-              <a:defRPr sz="5760" b="0" i="0" u="none" strike="noStrike" cap="none">
+              <a:defRPr b="0" i="0" sz="5760" u="none" cap="none" strike="noStrike">
                 <a:solidFill>
                   <a:srgbClr val="888888"/>
                 </a:solidFill>
@@ -3787,7 +3715,7 @@
                 <a:sym typeface="Calibri"/>
               </a:defRPr>
             </a:lvl2pPr>
-            <a:lvl3pPr marL="0" marR="0" lvl="2" indent="0" algn="r">
+            <a:lvl3pPr indent="0" lvl="2" marL="0" marR="0" algn="r">
               <a:lnSpc>
                 <a:spcPct val="100000"/>
               </a:lnSpc>
@@ -3803,7 +3731,7 @@
               <a:buSzPts val="5760"/>
               <a:buFont typeface="Arial"/>
               <a:buNone/>
-              <a:defRPr sz="5760" b="0" i="0" u="none" strike="noStrike" cap="none">
+              <a:defRPr b="0" i="0" sz="5760" u="none" cap="none" strike="noStrike">
                 <a:solidFill>
                   <a:srgbClr val="888888"/>
                 </a:solidFill>
@@ -3813,7 +3741,7 @@
                 <a:sym typeface="Calibri"/>
               </a:defRPr>
             </a:lvl3pPr>
-            <a:lvl4pPr marL="0" marR="0" lvl="3" indent="0" algn="r">
+            <a:lvl4pPr indent="0" lvl="3" marL="0" marR="0" algn="r">
               <a:lnSpc>
                 <a:spcPct val="100000"/>
               </a:lnSpc>
@@ -3829,7 +3757,7 @@
               <a:buSzPts val="5760"/>
               <a:buFont typeface="Arial"/>
               <a:buNone/>
-              <a:defRPr sz="5760" b="0" i="0" u="none" strike="noStrike" cap="none">
+              <a:defRPr b="0" i="0" sz="5760" u="none" cap="none" strike="noStrike">
                 <a:solidFill>
                   <a:srgbClr val="888888"/>
                 </a:solidFill>
@@ -3839,7 +3767,7 @@
                 <a:sym typeface="Calibri"/>
               </a:defRPr>
             </a:lvl4pPr>
-            <a:lvl5pPr marL="0" marR="0" lvl="4" indent="0" algn="r">
+            <a:lvl5pPr indent="0" lvl="4" marL="0" marR="0" algn="r">
               <a:lnSpc>
                 <a:spcPct val="100000"/>
               </a:lnSpc>
@@ -3855,7 +3783,7 @@
               <a:buSzPts val="5760"/>
               <a:buFont typeface="Arial"/>
               <a:buNone/>
-              <a:defRPr sz="5760" b="0" i="0" u="none" strike="noStrike" cap="none">
+              <a:defRPr b="0" i="0" sz="5760" u="none" cap="none" strike="noStrike">
                 <a:solidFill>
                   <a:srgbClr val="888888"/>
                 </a:solidFill>
@@ -3865,7 +3793,7 @@
                 <a:sym typeface="Calibri"/>
               </a:defRPr>
             </a:lvl5pPr>
-            <a:lvl6pPr marL="0" marR="0" lvl="5" indent="0" algn="r">
+            <a:lvl6pPr indent="0" lvl="5" marL="0" marR="0" algn="r">
               <a:lnSpc>
                 <a:spcPct val="100000"/>
               </a:lnSpc>
@@ -3881,7 +3809,7 @@
               <a:buSzPts val="5760"/>
               <a:buFont typeface="Arial"/>
               <a:buNone/>
-              <a:defRPr sz="5760" b="0" i="0" u="none" strike="noStrike" cap="none">
+              <a:defRPr b="0" i="0" sz="5760" u="none" cap="none" strike="noStrike">
                 <a:solidFill>
                   <a:srgbClr val="888888"/>
                 </a:solidFill>
@@ -3891,7 +3819,7 @@
                 <a:sym typeface="Calibri"/>
               </a:defRPr>
             </a:lvl6pPr>
-            <a:lvl7pPr marL="0" marR="0" lvl="6" indent="0" algn="r">
+            <a:lvl7pPr indent="0" lvl="6" marL="0" marR="0" algn="r">
               <a:lnSpc>
                 <a:spcPct val="100000"/>
               </a:lnSpc>
@@ -3907,7 +3835,7 @@
               <a:buSzPts val="5760"/>
               <a:buFont typeface="Arial"/>
               <a:buNone/>
-              <a:defRPr sz="5760" b="0" i="0" u="none" strike="noStrike" cap="none">
+              <a:defRPr b="0" i="0" sz="5760" u="none" cap="none" strike="noStrike">
                 <a:solidFill>
                   <a:srgbClr val="888888"/>
                 </a:solidFill>
@@ -3917,7 +3845,7 @@
                 <a:sym typeface="Calibri"/>
               </a:defRPr>
             </a:lvl7pPr>
-            <a:lvl8pPr marL="0" marR="0" lvl="7" indent="0" algn="r">
+            <a:lvl8pPr indent="0" lvl="7" marL="0" marR="0" algn="r">
               <a:lnSpc>
                 <a:spcPct val="100000"/>
               </a:lnSpc>
@@ -3933,7 +3861,7 @@
               <a:buSzPts val="5760"/>
               <a:buFont typeface="Arial"/>
               <a:buNone/>
-              <a:defRPr sz="5760" b="0" i="0" u="none" strike="noStrike" cap="none">
+              <a:defRPr b="0" i="0" sz="5760" u="none" cap="none" strike="noStrike">
                 <a:solidFill>
                   <a:srgbClr val="888888"/>
                 </a:solidFill>
@@ -3943,7 +3871,7 @@
                 <a:sym typeface="Calibri"/>
               </a:defRPr>
             </a:lvl8pPr>
-            <a:lvl9pPr marL="0" marR="0" lvl="8" indent="0" algn="r">
+            <a:lvl9pPr indent="0" lvl="8" marL="0" marR="0" algn="r">
               <a:lnSpc>
                 <a:spcPct val="100000"/>
               </a:lnSpc>
@@ -3959,7 +3887,7 @@
               <a:buSzPts val="5760"/>
               <a:buFont typeface="Arial"/>
               <a:buNone/>
-              <a:defRPr sz="5760" b="0" i="0" u="none" strike="noStrike" cap="none">
+              <a:defRPr b="0" i="0" sz="5760" u="none" cap="none" strike="noStrike">
                 <a:solidFill>
                   <a:srgbClr val="888888"/>
                 </a:solidFill>
@@ -3971,7 +3899,7 @@
             </a:lvl9pPr>
           </a:lstStyle>
           <a:p>
-            <a:pPr marL="0" lvl="0" indent="0" algn="r" rtl="0">
+            <a:pPr indent="0" lvl="0" marL="0" rtl="0" algn="r">
               <a:spcBef>
                 <a:spcPts val="0"/>
               </a:spcBef>
@@ -3997,11 +3925,11 @@
 </file>
 
 <file path=ppt/slideLayouts/slideLayout2.xml><?xml version="1.0" encoding="utf-8"?>
-<p:sldLayout xmlns:a="http://schemas.openxmlformats.org/drawingml/2006/main" xmlns:r="http://schemas.openxmlformats.org/officeDocument/2006/relationships" xmlns:p="http://schemas.openxmlformats.org/presentationml/2006/main" matchingName="Title Slide" type="title">
+<p:sldLayout xmlns:a="http://schemas.openxmlformats.org/drawingml/2006/main" xmlns:r="http://schemas.openxmlformats.org/officeDocument/2006/relationships" xmlns:mc="http://schemas.openxmlformats.org/markup-compatibility/2006" xmlns:mv="urn:schemas-microsoft-com:mac:vml" xmlns:p="http://schemas.openxmlformats.org/presentationml/2006/main" xmlns:c="http://schemas.openxmlformats.org/drawingml/2006/chart" xmlns:dgm="http://schemas.openxmlformats.org/drawingml/2006/diagram" xmlns:o="urn:schemas-microsoft-com:office:office" xmlns:v="urn:schemas-microsoft-com:vml" xmlns:pvml="urn:schemas-microsoft-com:office:powerpoint" xmlns:com="http://schemas.openxmlformats.org/drawingml/2006/compatibility" xmlns:p14="http://schemas.microsoft.com/office/powerpoint/2010/main" xmlns:p15="http://schemas.microsoft.com/office/powerpoint/2012/main" xmlns:ahyp="http://schemas.microsoft.com/office/drawing/2018/hyperlinkcolor" matchingName="Title Slide" type="title">
   <p:cSld name="TITLE">
     <p:spTree>
       <p:nvGrpSpPr>
-        <p:cNvPr id="1" name="Shape 14"/>
+        <p:cNvPr id="14" name="Shape 14"/>
         <p:cNvGrpSpPr/>
         <p:nvPr/>
       </p:nvGrpSpPr>
@@ -4016,9 +3944,7 @@
       <p:sp>
         <p:nvSpPr>
           <p:cNvPr id="15" name="Google Shape;15;p4"/>
-          <p:cNvSpPr txBox="1">
-            <a:spLocks noGrp="1"/>
-          </p:cNvSpPr>
+          <p:cNvSpPr txBox="1"/>
           <p:nvPr>
             <p:ph type="ctrTitle"/>
           </p:nvPr>
@@ -4037,7 +3963,7 @@
           </a:ln>
         </p:spPr>
         <p:txBody>
-          <a:bodyPr spcFirstLastPara="1" wrap="square" lIns="91425" tIns="45700" rIns="91425" bIns="45700" anchor="b" anchorCtr="0">
+          <a:bodyPr anchorCtr="0" anchor="b" bIns="45700" lIns="91425" spcFirstLastPara="1" rIns="91425" wrap="square" tIns="45700">
             <a:normAutofit/>
           </a:bodyPr>
           <a:lstStyle>
@@ -4172,19 +4098,15 @@
               <a:defRPr/>
             </a:lvl9pPr>
           </a:lstStyle>
-          <a:p>
-            <a:endParaRPr/>
-          </a:p>
+          <a:p/>
         </p:txBody>
       </p:sp>
       <p:sp>
         <p:nvSpPr>
           <p:cNvPr id="16" name="Google Shape;16;p4"/>
-          <p:cNvSpPr txBox="1">
-            <a:spLocks noGrp="1"/>
-          </p:cNvSpPr>
+          <p:cNvSpPr txBox="1"/>
           <p:nvPr>
-            <p:ph type="subTitle" idx="1"/>
+            <p:ph idx="1" type="subTitle"/>
           </p:nvPr>
         </p:nvSpPr>
         <p:spPr>
@@ -4201,7 +4123,7 @@
           </a:ln>
         </p:spPr>
         <p:txBody>
-          <a:bodyPr spcFirstLastPara="1" wrap="square" lIns="91425" tIns="45700" rIns="91425" bIns="45700" anchor="t" anchorCtr="0">
+          <a:bodyPr anchorCtr="0" anchor="t" bIns="45700" lIns="91425" spcFirstLastPara="1" rIns="91425" wrap="square" tIns="45700">
             <a:normAutofit/>
           </a:bodyPr>
           <a:lstStyle>
@@ -4359,19 +4281,15 @@
               <a:defRPr sz="7680"/>
             </a:lvl9pPr>
           </a:lstStyle>
-          <a:p>
-            <a:endParaRPr/>
-          </a:p>
+          <a:p/>
         </p:txBody>
       </p:sp>
       <p:sp>
         <p:nvSpPr>
           <p:cNvPr id="17" name="Google Shape;17;p4"/>
-          <p:cNvSpPr txBox="1">
-            <a:spLocks noGrp="1"/>
-          </p:cNvSpPr>
+          <p:cNvSpPr txBox="1"/>
           <p:nvPr>
-            <p:ph type="dt" idx="10"/>
+            <p:ph idx="10" type="dt"/>
           </p:nvPr>
         </p:nvSpPr>
         <p:spPr>
@@ -4388,7 +4306,7 @@
           </a:ln>
         </p:spPr>
         <p:txBody>
-          <a:bodyPr spcFirstLastPara="1" wrap="square" lIns="91425" tIns="45700" rIns="91425" bIns="45700" anchor="ctr" anchorCtr="0">
+          <a:bodyPr anchorCtr="0" anchor="ctr" bIns="45700" lIns="91425" spcFirstLastPara="1" rIns="91425" wrap="square" tIns="45700">
             <a:noAutofit/>
           </a:bodyPr>
           <a:lstStyle>
@@ -4519,19 +4437,15 @@
               <a:defRPr/>
             </a:lvl9pPr>
           </a:lstStyle>
-          <a:p>
-            <a:endParaRPr/>
-          </a:p>
+          <a:p/>
         </p:txBody>
       </p:sp>
       <p:sp>
         <p:nvSpPr>
           <p:cNvPr id="18" name="Google Shape;18;p4"/>
-          <p:cNvSpPr txBox="1">
-            <a:spLocks noGrp="1"/>
-          </p:cNvSpPr>
+          <p:cNvSpPr txBox="1"/>
           <p:nvPr>
-            <p:ph type="ftr" idx="11"/>
+            <p:ph idx="11" type="ftr"/>
           </p:nvPr>
         </p:nvSpPr>
         <p:spPr>
@@ -4548,7 +4462,7 @@
           </a:ln>
         </p:spPr>
         <p:txBody>
-          <a:bodyPr spcFirstLastPara="1" wrap="square" lIns="91425" tIns="45700" rIns="91425" bIns="45700" anchor="ctr" anchorCtr="0">
+          <a:bodyPr anchorCtr="0" anchor="ctr" bIns="45700" lIns="91425" spcFirstLastPara="1" rIns="91425" wrap="square" tIns="45700">
             <a:noAutofit/>
           </a:bodyPr>
           <a:lstStyle>
@@ -4679,19 +4593,15 @@
               <a:defRPr/>
             </a:lvl9pPr>
           </a:lstStyle>
-          <a:p>
-            <a:endParaRPr/>
-          </a:p>
+          <a:p/>
         </p:txBody>
       </p:sp>
       <p:sp>
         <p:nvSpPr>
           <p:cNvPr id="19" name="Google Shape;19;p4"/>
-          <p:cNvSpPr txBox="1">
-            <a:spLocks noGrp="1"/>
-          </p:cNvSpPr>
+          <p:cNvSpPr txBox="1"/>
           <p:nvPr>
-            <p:ph type="sldNum" idx="12"/>
+            <p:ph idx="12" type="sldNum"/>
           </p:nvPr>
         </p:nvSpPr>
         <p:spPr>
@@ -4708,11 +4618,11 @@
           </a:ln>
         </p:spPr>
         <p:txBody>
-          <a:bodyPr spcFirstLastPara="1" wrap="square" lIns="91425" tIns="45700" rIns="91425" bIns="45700" anchor="ctr" anchorCtr="0">
+          <a:bodyPr anchorCtr="0" anchor="ctr" bIns="45700" lIns="91425" spcFirstLastPara="1" rIns="91425" wrap="square" tIns="45700">
             <a:noAutofit/>
           </a:bodyPr>
           <a:lstStyle>
-            <a:lvl1pPr marL="0" marR="0" lvl="0" indent="0" algn="r">
+            <a:lvl1pPr indent="0" lvl="0" marL="0" marR="0" algn="r">
               <a:lnSpc>
                 <a:spcPct val="100000"/>
               </a:lnSpc>
@@ -4728,7 +4638,7 @@
               <a:buSzPts val="5760"/>
               <a:buFont typeface="Arial"/>
               <a:buNone/>
-              <a:defRPr sz="5760" b="0" i="0" u="none" strike="noStrike" cap="none">
+              <a:defRPr b="0" i="0" sz="5760" u="none" cap="none" strike="noStrike">
                 <a:solidFill>
                   <a:srgbClr val="888888"/>
                 </a:solidFill>
@@ -4738,7 +4648,7 @@
                 <a:sym typeface="Calibri"/>
               </a:defRPr>
             </a:lvl1pPr>
-            <a:lvl2pPr marL="0" marR="0" lvl="1" indent="0" algn="r">
+            <a:lvl2pPr indent="0" lvl="1" marL="0" marR="0" algn="r">
               <a:lnSpc>
                 <a:spcPct val="100000"/>
               </a:lnSpc>
@@ -4754,7 +4664,7 @@
               <a:buSzPts val="5760"/>
               <a:buFont typeface="Arial"/>
               <a:buNone/>
-              <a:defRPr sz="5760" b="0" i="0" u="none" strike="noStrike" cap="none">
+              <a:defRPr b="0" i="0" sz="5760" u="none" cap="none" strike="noStrike">
                 <a:solidFill>
                   <a:srgbClr val="888888"/>
                 </a:solidFill>
@@ -4764,7 +4674,7 @@
                 <a:sym typeface="Calibri"/>
               </a:defRPr>
             </a:lvl2pPr>
-            <a:lvl3pPr marL="0" marR="0" lvl="2" indent="0" algn="r">
+            <a:lvl3pPr indent="0" lvl="2" marL="0" marR="0" algn="r">
               <a:lnSpc>
                 <a:spcPct val="100000"/>
               </a:lnSpc>
@@ -4780,7 +4690,7 @@
               <a:buSzPts val="5760"/>
               <a:buFont typeface="Arial"/>
               <a:buNone/>
-              <a:defRPr sz="5760" b="0" i="0" u="none" strike="noStrike" cap="none">
+              <a:defRPr b="0" i="0" sz="5760" u="none" cap="none" strike="noStrike">
                 <a:solidFill>
                   <a:srgbClr val="888888"/>
                 </a:solidFill>
@@ -4790,7 +4700,7 @@
                 <a:sym typeface="Calibri"/>
               </a:defRPr>
             </a:lvl3pPr>
-            <a:lvl4pPr marL="0" marR="0" lvl="3" indent="0" algn="r">
+            <a:lvl4pPr indent="0" lvl="3" marL="0" marR="0" algn="r">
               <a:lnSpc>
                 <a:spcPct val="100000"/>
               </a:lnSpc>
@@ -4806,7 +4716,7 @@
               <a:buSzPts val="5760"/>
               <a:buFont typeface="Arial"/>
               <a:buNone/>
-              <a:defRPr sz="5760" b="0" i="0" u="none" strike="noStrike" cap="none">
+              <a:defRPr b="0" i="0" sz="5760" u="none" cap="none" strike="noStrike">
                 <a:solidFill>
                   <a:srgbClr val="888888"/>
                 </a:solidFill>
@@ -4816,7 +4726,7 @@
                 <a:sym typeface="Calibri"/>
               </a:defRPr>
             </a:lvl4pPr>
-            <a:lvl5pPr marL="0" marR="0" lvl="4" indent="0" algn="r">
+            <a:lvl5pPr indent="0" lvl="4" marL="0" marR="0" algn="r">
               <a:lnSpc>
                 <a:spcPct val="100000"/>
               </a:lnSpc>
@@ -4832,7 +4742,7 @@
               <a:buSzPts val="5760"/>
               <a:buFont typeface="Arial"/>
               <a:buNone/>
-              <a:defRPr sz="5760" b="0" i="0" u="none" strike="noStrike" cap="none">
+              <a:defRPr b="0" i="0" sz="5760" u="none" cap="none" strike="noStrike">
                 <a:solidFill>
                   <a:srgbClr val="888888"/>
                 </a:solidFill>
@@ -4842,7 +4752,7 @@
                 <a:sym typeface="Calibri"/>
               </a:defRPr>
             </a:lvl5pPr>
-            <a:lvl6pPr marL="0" marR="0" lvl="5" indent="0" algn="r">
+            <a:lvl6pPr indent="0" lvl="5" marL="0" marR="0" algn="r">
               <a:lnSpc>
                 <a:spcPct val="100000"/>
               </a:lnSpc>
@@ -4858,7 +4768,7 @@
               <a:buSzPts val="5760"/>
               <a:buFont typeface="Arial"/>
               <a:buNone/>
-              <a:defRPr sz="5760" b="0" i="0" u="none" strike="noStrike" cap="none">
+              <a:defRPr b="0" i="0" sz="5760" u="none" cap="none" strike="noStrike">
                 <a:solidFill>
                   <a:srgbClr val="888888"/>
                 </a:solidFill>
@@ -4868,7 +4778,7 @@
                 <a:sym typeface="Calibri"/>
               </a:defRPr>
             </a:lvl6pPr>
-            <a:lvl7pPr marL="0" marR="0" lvl="6" indent="0" algn="r">
+            <a:lvl7pPr indent="0" lvl="6" marL="0" marR="0" algn="r">
               <a:lnSpc>
                 <a:spcPct val="100000"/>
               </a:lnSpc>
@@ -4884,7 +4794,7 @@
               <a:buSzPts val="5760"/>
               <a:buFont typeface="Arial"/>
               <a:buNone/>
-              <a:defRPr sz="5760" b="0" i="0" u="none" strike="noStrike" cap="none">
+              <a:defRPr b="0" i="0" sz="5760" u="none" cap="none" strike="noStrike">
                 <a:solidFill>
                   <a:srgbClr val="888888"/>
                 </a:solidFill>
@@ -4894,7 +4804,7 @@
                 <a:sym typeface="Calibri"/>
               </a:defRPr>
             </a:lvl7pPr>
-            <a:lvl8pPr marL="0" marR="0" lvl="7" indent="0" algn="r">
+            <a:lvl8pPr indent="0" lvl="7" marL="0" marR="0" algn="r">
               <a:lnSpc>
                 <a:spcPct val="100000"/>
               </a:lnSpc>
@@ -4910,7 +4820,7 @@
               <a:buSzPts val="5760"/>
               <a:buFont typeface="Arial"/>
               <a:buNone/>
-              <a:defRPr sz="5760" b="0" i="0" u="none" strike="noStrike" cap="none">
+              <a:defRPr b="0" i="0" sz="5760" u="none" cap="none" strike="noStrike">
                 <a:solidFill>
                   <a:srgbClr val="888888"/>
                 </a:solidFill>
@@ -4920,7 +4830,7 @@
                 <a:sym typeface="Calibri"/>
               </a:defRPr>
             </a:lvl8pPr>
-            <a:lvl9pPr marL="0" marR="0" lvl="8" indent="0" algn="r">
+            <a:lvl9pPr indent="0" lvl="8" marL="0" marR="0" algn="r">
               <a:lnSpc>
                 <a:spcPct val="100000"/>
               </a:lnSpc>
@@ -4936,7 +4846,7 @@
               <a:buSzPts val="5760"/>
               <a:buFont typeface="Arial"/>
               <a:buNone/>
-              <a:defRPr sz="5760" b="0" i="0" u="none" strike="noStrike" cap="none">
+              <a:defRPr b="0" i="0" sz="5760" u="none" cap="none" strike="noStrike">
                 <a:solidFill>
                   <a:srgbClr val="888888"/>
                 </a:solidFill>
@@ -4948,7 +4858,7 @@
             </a:lvl9pPr>
           </a:lstStyle>
           <a:p>
-            <a:pPr marL="0" lvl="0" indent="0" algn="r" rtl="0">
+            <a:pPr indent="0" lvl="0" marL="0" rtl="0" algn="r">
               <a:spcBef>
                 <a:spcPts val="0"/>
               </a:spcBef>
@@ -4974,11 +4884,11 @@
 </file>
 
 <file path=ppt/slideLayouts/slideLayout3.xml><?xml version="1.0" encoding="utf-8"?>
-<p:sldLayout xmlns:a="http://schemas.openxmlformats.org/drawingml/2006/main" xmlns:r="http://schemas.openxmlformats.org/officeDocument/2006/relationships" xmlns:p="http://schemas.openxmlformats.org/presentationml/2006/main" matchingName="Title and Content" type="obj">
+<p:sldLayout xmlns:a="http://schemas.openxmlformats.org/drawingml/2006/main" xmlns:r="http://schemas.openxmlformats.org/officeDocument/2006/relationships" xmlns:mc="http://schemas.openxmlformats.org/markup-compatibility/2006" xmlns:mv="urn:schemas-microsoft-com:mac:vml" xmlns:p="http://schemas.openxmlformats.org/presentationml/2006/main" xmlns:c="http://schemas.openxmlformats.org/drawingml/2006/chart" xmlns:dgm="http://schemas.openxmlformats.org/drawingml/2006/diagram" xmlns:o="urn:schemas-microsoft-com:office:office" xmlns:v="urn:schemas-microsoft-com:vml" xmlns:pvml="urn:schemas-microsoft-com:office:powerpoint" xmlns:com="http://schemas.openxmlformats.org/drawingml/2006/compatibility" xmlns:p14="http://schemas.microsoft.com/office/powerpoint/2010/main" xmlns:p15="http://schemas.microsoft.com/office/powerpoint/2012/main" xmlns:ahyp="http://schemas.microsoft.com/office/drawing/2018/hyperlinkcolor" matchingName="Title and Content" type="obj">
   <p:cSld name="OBJECT">
     <p:spTree>
       <p:nvGrpSpPr>
-        <p:cNvPr id="1" name="Shape 20"/>
+        <p:cNvPr id="20" name="Shape 20"/>
         <p:cNvGrpSpPr/>
         <p:nvPr/>
       </p:nvGrpSpPr>
@@ -4993,9 +4903,7 @@
       <p:sp>
         <p:nvSpPr>
           <p:cNvPr id="21" name="Google Shape;21;p5"/>
-          <p:cNvSpPr txBox="1">
-            <a:spLocks noGrp="1"/>
-          </p:cNvSpPr>
+          <p:cNvSpPr txBox="1"/>
           <p:nvPr>
             <p:ph type="title"/>
           </p:nvPr>
@@ -5014,7 +4922,7 @@
           </a:ln>
         </p:spPr>
         <p:txBody>
-          <a:bodyPr spcFirstLastPara="1" wrap="square" lIns="91425" tIns="45700" rIns="91425" bIns="45700" anchor="ctr" anchorCtr="0">
+          <a:bodyPr anchorCtr="0" anchor="ctr" bIns="45700" lIns="91425" spcFirstLastPara="1" rIns="91425" wrap="square" tIns="45700">
             <a:normAutofit/>
           </a:bodyPr>
           <a:lstStyle>
@@ -5148,19 +5056,15 @@
               <a:defRPr/>
             </a:lvl9pPr>
           </a:lstStyle>
-          <a:p>
-            <a:endParaRPr/>
-          </a:p>
+          <a:p/>
         </p:txBody>
       </p:sp>
       <p:sp>
         <p:nvSpPr>
           <p:cNvPr id="22" name="Google Shape;22;p5"/>
-          <p:cNvSpPr txBox="1">
-            <a:spLocks noGrp="1"/>
-          </p:cNvSpPr>
+          <p:cNvSpPr txBox="1"/>
           <p:nvPr>
-            <p:ph type="body" idx="1"/>
+            <p:ph idx="1" type="body"/>
           </p:nvPr>
         </p:nvSpPr>
         <p:spPr>
@@ -5177,11 +5081,11 @@
           </a:ln>
         </p:spPr>
         <p:txBody>
-          <a:bodyPr spcFirstLastPara="1" wrap="square" lIns="91425" tIns="45700" rIns="91425" bIns="45700" anchor="t" anchorCtr="0">
+          <a:bodyPr anchorCtr="0" anchor="t" bIns="45700" lIns="91425" spcFirstLastPara="1" rIns="91425" wrap="square" tIns="45700">
             <a:normAutofit/>
           </a:bodyPr>
           <a:lstStyle>
-            <a:lvl1pPr marL="457200" lvl="0" indent="-342900" algn="l">
+            <a:lvl1pPr indent="-342900" lvl="0" marL="457200" algn="l">
               <a:lnSpc>
                 <a:spcPct val="90000"/>
               </a:lnSpc>
@@ -5198,7 +5102,7 @@
               <a:buChar char="•"/>
               <a:defRPr/>
             </a:lvl1pPr>
-            <a:lvl2pPr marL="914400" lvl="1" indent="-342900" algn="l">
+            <a:lvl2pPr indent="-342900" lvl="1" marL="914400" algn="l">
               <a:lnSpc>
                 <a:spcPct val="90000"/>
               </a:lnSpc>
@@ -5215,7 +5119,7 @@
               <a:buChar char="•"/>
               <a:defRPr/>
             </a:lvl2pPr>
-            <a:lvl3pPr marL="1371600" lvl="2" indent="-342900" algn="l">
+            <a:lvl3pPr indent="-342900" lvl="2" marL="1371600" algn="l">
               <a:lnSpc>
                 <a:spcPct val="90000"/>
               </a:lnSpc>
@@ -5232,7 +5136,7 @@
               <a:buChar char="•"/>
               <a:defRPr/>
             </a:lvl3pPr>
-            <a:lvl4pPr marL="1828800" lvl="3" indent="-342900" algn="l">
+            <a:lvl4pPr indent="-342900" lvl="3" marL="1828800" algn="l">
               <a:lnSpc>
                 <a:spcPct val="90000"/>
               </a:lnSpc>
@@ -5249,7 +5153,7 @@
               <a:buChar char="•"/>
               <a:defRPr/>
             </a:lvl4pPr>
-            <a:lvl5pPr marL="2286000" lvl="4" indent="-342900" algn="l">
+            <a:lvl5pPr indent="-342900" lvl="4" marL="2286000" algn="l">
               <a:lnSpc>
                 <a:spcPct val="90000"/>
               </a:lnSpc>
@@ -5266,7 +5170,7 @@
               <a:buChar char="•"/>
               <a:defRPr/>
             </a:lvl5pPr>
-            <a:lvl6pPr marL="2743200" lvl="5" indent="-342900" algn="l">
+            <a:lvl6pPr indent="-342900" lvl="5" marL="2743200" algn="l">
               <a:lnSpc>
                 <a:spcPct val="90000"/>
               </a:lnSpc>
@@ -5283,7 +5187,7 @@
               <a:buChar char="•"/>
               <a:defRPr/>
             </a:lvl6pPr>
-            <a:lvl7pPr marL="3200400" lvl="6" indent="-342900" algn="l">
+            <a:lvl7pPr indent="-342900" lvl="6" marL="3200400" algn="l">
               <a:lnSpc>
                 <a:spcPct val="90000"/>
               </a:lnSpc>
@@ -5300,7 +5204,7 @@
               <a:buChar char="•"/>
               <a:defRPr/>
             </a:lvl7pPr>
-            <a:lvl8pPr marL="3657600" lvl="7" indent="-342900" algn="l">
+            <a:lvl8pPr indent="-342900" lvl="7" marL="3657600" algn="l">
               <a:lnSpc>
                 <a:spcPct val="90000"/>
               </a:lnSpc>
@@ -5317,7 +5221,7 @@
               <a:buChar char="•"/>
               <a:defRPr/>
             </a:lvl8pPr>
-            <a:lvl9pPr marL="4114800" lvl="8" indent="-342900" algn="l">
+            <a:lvl9pPr indent="-342900" lvl="8" marL="4114800" algn="l">
               <a:lnSpc>
                 <a:spcPct val="90000"/>
               </a:lnSpc>
@@ -5335,19 +5239,15 @@
               <a:defRPr/>
             </a:lvl9pPr>
           </a:lstStyle>
-          <a:p>
-            <a:endParaRPr/>
-          </a:p>
+          <a:p/>
         </p:txBody>
       </p:sp>
       <p:sp>
         <p:nvSpPr>
           <p:cNvPr id="23" name="Google Shape;23;p5"/>
-          <p:cNvSpPr txBox="1">
-            <a:spLocks noGrp="1"/>
-          </p:cNvSpPr>
+          <p:cNvSpPr txBox="1"/>
           <p:nvPr>
-            <p:ph type="dt" idx="10"/>
+            <p:ph idx="10" type="dt"/>
           </p:nvPr>
         </p:nvSpPr>
         <p:spPr>
@@ -5364,7 +5264,7 @@
           </a:ln>
         </p:spPr>
         <p:txBody>
-          <a:bodyPr spcFirstLastPara="1" wrap="square" lIns="91425" tIns="45700" rIns="91425" bIns="45700" anchor="ctr" anchorCtr="0">
+          <a:bodyPr anchorCtr="0" anchor="ctr" bIns="45700" lIns="91425" spcFirstLastPara="1" rIns="91425" wrap="square" tIns="45700">
             <a:noAutofit/>
           </a:bodyPr>
           <a:lstStyle>
@@ -5495,19 +5395,15 @@
               <a:defRPr/>
             </a:lvl9pPr>
           </a:lstStyle>
-          <a:p>
-            <a:endParaRPr/>
-          </a:p>
+          <a:p/>
         </p:txBody>
       </p:sp>
       <p:sp>
         <p:nvSpPr>
           <p:cNvPr id="24" name="Google Shape;24;p5"/>
-          <p:cNvSpPr txBox="1">
-            <a:spLocks noGrp="1"/>
-          </p:cNvSpPr>
+          <p:cNvSpPr txBox="1"/>
           <p:nvPr>
-            <p:ph type="ftr" idx="11"/>
+            <p:ph idx="11" type="ftr"/>
           </p:nvPr>
         </p:nvSpPr>
         <p:spPr>
@@ -5524,7 +5420,7 @@
           </a:ln>
         </p:spPr>
         <p:txBody>
-          <a:bodyPr spcFirstLastPara="1" wrap="square" lIns="91425" tIns="45700" rIns="91425" bIns="45700" anchor="ctr" anchorCtr="0">
+          <a:bodyPr anchorCtr="0" anchor="ctr" bIns="45700" lIns="91425" spcFirstLastPara="1" rIns="91425" wrap="square" tIns="45700">
             <a:noAutofit/>
           </a:bodyPr>
           <a:lstStyle>
@@ -5655,19 +5551,15 @@
               <a:defRPr/>
             </a:lvl9pPr>
           </a:lstStyle>
-          <a:p>
-            <a:endParaRPr/>
-          </a:p>
+          <a:p/>
         </p:txBody>
       </p:sp>
       <p:sp>
         <p:nvSpPr>
           <p:cNvPr id="25" name="Google Shape;25;p5"/>
-          <p:cNvSpPr txBox="1">
-            <a:spLocks noGrp="1"/>
-          </p:cNvSpPr>
+          <p:cNvSpPr txBox="1"/>
           <p:nvPr>
-            <p:ph type="sldNum" idx="12"/>
+            <p:ph idx="12" type="sldNum"/>
           </p:nvPr>
         </p:nvSpPr>
         <p:spPr>
@@ -5684,11 +5576,11 @@
           </a:ln>
         </p:spPr>
         <p:txBody>
-          <a:bodyPr spcFirstLastPara="1" wrap="square" lIns="91425" tIns="45700" rIns="91425" bIns="45700" anchor="ctr" anchorCtr="0">
+          <a:bodyPr anchorCtr="0" anchor="ctr" bIns="45700" lIns="91425" spcFirstLastPara="1" rIns="91425" wrap="square" tIns="45700">
             <a:noAutofit/>
           </a:bodyPr>
           <a:lstStyle>
-            <a:lvl1pPr marL="0" marR="0" lvl="0" indent="0" algn="r">
+            <a:lvl1pPr indent="0" lvl="0" marL="0" marR="0" algn="r">
               <a:lnSpc>
                 <a:spcPct val="100000"/>
               </a:lnSpc>
@@ -5704,7 +5596,7 @@
               <a:buSzPts val="5760"/>
               <a:buFont typeface="Arial"/>
               <a:buNone/>
-              <a:defRPr sz="5760" b="0" i="0" u="none" strike="noStrike" cap="none">
+              <a:defRPr b="0" i="0" sz="5760" u="none" cap="none" strike="noStrike">
                 <a:solidFill>
                   <a:srgbClr val="888888"/>
                 </a:solidFill>
@@ -5714,7 +5606,7 @@
                 <a:sym typeface="Calibri"/>
               </a:defRPr>
             </a:lvl1pPr>
-            <a:lvl2pPr marL="0" marR="0" lvl="1" indent="0" algn="r">
+            <a:lvl2pPr indent="0" lvl="1" marL="0" marR="0" algn="r">
               <a:lnSpc>
                 <a:spcPct val="100000"/>
               </a:lnSpc>
@@ -5730,7 +5622,7 @@
               <a:buSzPts val="5760"/>
               <a:buFont typeface="Arial"/>
               <a:buNone/>
-              <a:defRPr sz="5760" b="0" i="0" u="none" strike="noStrike" cap="none">
+              <a:defRPr b="0" i="0" sz="5760" u="none" cap="none" strike="noStrike">
                 <a:solidFill>
                   <a:srgbClr val="888888"/>
                 </a:solidFill>
@@ -5740,7 +5632,7 @@
                 <a:sym typeface="Calibri"/>
               </a:defRPr>
             </a:lvl2pPr>
-            <a:lvl3pPr marL="0" marR="0" lvl="2" indent="0" algn="r">
+            <a:lvl3pPr indent="0" lvl="2" marL="0" marR="0" algn="r">
               <a:lnSpc>
                 <a:spcPct val="100000"/>
               </a:lnSpc>
@@ -5756,7 +5648,7 @@
               <a:buSzPts val="5760"/>
               <a:buFont typeface="Arial"/>
               <a:buNone/>
-              <a:defRPr sz="5760" b="0" i="0" u="none" strike="noStrike" cap="none">
+              <a:defRPr b="0" i="0" sz="5760" u="none" cap="none" strike="noStrike">
                 <a:solidFill>
                   <a:srgbClr val="888888"/>
                 </a:solidFill>
@@ -5766,7 +5658,7 @@
                 <a:sym typeface="Calibri"/>
               </a:defRPr>
             </a:lvl3pPr>
-            <a:lvl4pPr marL="0" marR="0" lvl="3" indent="0" algn="r">
+            <a:lvl4pPr indent="0" lvl="3" marL="0" marR="0" algn="r">
               <a:lnSpc>
                 <a:spcPct val="100000"/>
               </a:lnSpc>
@@ -5782,7 +5674,7 @@
               <a:buSzPts val="5760"/>
               <a:buFont typeface="Arial"/>
               <a:buNone/>
-              <a:defRPr sz="5760" b="0" i="0" u="none" strike="noStrike" cap="none">
+              <a:defRPr b="0" i="0" sz="5760" u="none" cap="none" strike="noStrike">
                 <a:solidFill>
                   <a:srgbClr val="888888"/>
                 </a:solidFill>
@@ -5792,7 +5684,7 @@
                 <a:sym typeface="Calibri"/>
               </a:defRPr>
             </a:lvl4pPr>
-            <a:lvl5pPr marL="0" marR="0" lvl="4" indent="0" algn="r">
+            <a:lvl5pPr indent="0" lvl="4" marL="0" marR="0" algn="r">
               <a:lnSpc>
                 <a:spcPct val="100000"/>
               </a:lnSpc>
@@ -5808,7 +5700,7 @@
               <a:buSzPts val="5760"/>
               <a:buFont typeface="Arial"/>
               <a:buNone/>
-              <a:defRPr sz="5760" b="0" i="0" u="none" strike="noStrike" cap="none">
+              <a:defRPr b="0" i="0" sz="5760" u="none" cap="none" strike="noStrike">
                 <a:solidFill>
                   <a:srgbClr val="888888"/>
                 </a:solidFill>
@@ -5818,7 +5710,7 @@
                 <a:sym typeface="Calibri"/>
               </a:defRPr>
             </a:lvl5pPr>
-            <a:lvl6pPr marL="0" marR="0" lvl="5" indent="0" algn="r">
+            <a:lvl6pPr indent="0" lvl="5" marL="0" marR="0" algn="r">
               <a:lnSpc>
                 <a:spcPct val="100000"/>
               </a:lnSpc>
@@ -5834,7 +5726,7 @@
               <a:buSzPts val="5760"/>
               <a:buFont typeface="Arial"/>
               <a:buNone/>
-              <a:defRPr sz="5760" b="0" i="0" u="none" strike="noStrike" cap="none">
+              <a:defRPr b="0" i="0" sz="5760" u="none" cap="none" strike="noStrike">
                 <a:solidFill>
                   <a:srgbClr val="888888"/>
                 </a:solidFill>
@@ -5844,7 +5736,7 @@
                 <a:sym typeface="Calibri"/>
               </a:defRPr>
             </a:lvl6pPr>
-            <a:lvl7pPr marL="0" marR="0" lvl="6" indent="0" algn="r">
+            <a:lvl7pPr indent="0" lvl="6" marL="0" marR="0" algn="r">
               <a:lnSpc>
                 <a:spcPct val="100000"/>
               </a:lnSpc>
@@ -5860,7 +5752,7 @@
               <a:buSzPts val="5760"/>
               <a:buFont typeface="Arial"/>
               <a:buNone/>
-              <a:defRPr sz="5760" b="0" i="0" u="none" strike="noStrike" cap="none">
+              <a:defRPr b="0" i="0" sz="5760" u="none" cap="none" strike="noStrike">
                 <a:solidFill>
                   <a:srgbClr val="888888"/>
                 </a:solidFill>
@@ -5870,7 +5762,7 @@
                 <a:sym typeface="Calibri"/>
               </a:defRPr>
             </a:lvl7pPr>
-            <a:lvl8pPr marL="0" marR="0" lvl="7" indent="0" algn="r">
+            <a:lvl8pPr indent="0" lvl="7" marL="0" marR="0" algn="r">
               <a:lnSpc>
                 <a:spcPct val="100000"/>
               </a:lnSpc>
@@ -5886,7 +5778,7 @@
               <a:buSzPts val="5760"/>
               <a:buFont typeface="Arial"/>
               <a:buNone/>
-              <a:defRPr sz="5760" b="0" i="0" u="none" strike="noStrike" cap="none">
+              <a:defRPr b="0" i="0" sz="5760" u="none" cap="none" strike="noStrike">
                 <a:solidFill>
                   <a:srgbClr val="888888"/>
                 </a:solidFill>
@@ -5896,7 +5788,7 @@
                 <a:sym typeface="Calibri"/>
               </a:defRPr>
             </a:lvl8pPr>
-            <a:lvl9pPr marL="0" marR="0" lvl="8" indent="0" algn="r">
+            <a:lvl9pPr indent="0" lvl="8" marL="0" marR="0" algn="r">
               <a:lnSpc>
                 <a:spcPct val="100000"/>
               </a:lnSpc>
@@ -5912,7 +5804,7 @@
               <a:buSzPts val="5760"/>
               <a:buFont typeface="Arial"/>
               <a:buNone/>
-              <a:defRPr sz="5760" b="0" i="0" u="none" strike="noStrike" cap="none">
+              <a:defRPr b="0" i="0" sz="5760" u="none" cap="none" strike="noStrike">
                 <a:solidFill>
                   <a:srgbClr val="888888"/>
                 </a:solidFill>
@@ -5924,7 +5816,7 @@
             </a:lvl9pPr>
           </a:lstStyle>
           <a:p>
-            <a:pPr marL="0" lvl="0" indent="0" algn="r" rtl="0">
+            <a:pPr indent="0" lvl="0" marL="0" rtl="0" algn="r">
               <a:spcBef>
                 <a:spcPts val="0"/>
               </a:spcBef>
@@ -5950,11 +5842,11 @@
 </file>
 
 <file path=ppt/slideLayouts/slideLayout4.xml><?xml version="1.0" encoding="utf-8"?>
-<p:sldLayout xmlns:a="http://schemas.openxmlformats.org/drawingml/2006/main" xmlns:r="http://schemas.openxmlformats.org/officeDocument/2006/relationships" xmlns:p="http://schemas.openxmlformats.org/presentationml/2006/main" matchingName="Section Header" type="secHead">
+<p:sldLayout xmlns:a="http://schemas.openxmlformats.org/drawingml/2006/main" xmlns:r="http://schemas.openxmlformats.org/officeDocument/2006/relationships" xmlns:mc="http://schemas.openxmlformats.org/markup-compatibility/2006" xmlns:mv="urn:schemas-microsoft-com:mac:vml" xmlns:p="http://schemas.openxmlformats.org/presentationml/2006/main" xmlns:c="http://schemas.openxmlformats.org/drawingml/2006/chart" xmlns:dgm="http://schemas.openxmlformats.org/drawingml/2006/diagram" xmlns:o="urn:schemas-microsoft-com:office:office" xmlns:v="urn:schemas-microsoft-com:vml" xmlns:pvml="urn:schemas-microsoft-com:office:powerpoint" xmlns:com="http://schemas.openxmlformats.org/drawingml/2006/compatibility" xmlns:p14="http://schemas.microsoft.com/office/powerpoint/2010/main" xmlns:p15="http://schemas.microsoft.com/office/powerpoint/2012/main" xmlns:ahyp="http://schemas.microsoft.com/office/drawing/2018/hyperlinkcolor" matchingName="Section Header" type="secHead">
   <p:cSld name="SECTION_HEADER">
     <p:spTree>
       <p:nvGrpSpPr>
-        <p:cNvPr id="1" name="Shape 26"/>
+        <p:cNvPr id="26" name="Shape 26"/>
         <p:cNvGrpSpPr/>
         <p:nvPr/>
       </p:nvGrpSpPr>
@@ -5969,9 +5861,7 @@
       <p:sp>
         <p:nvSpPr>
           <p:cNvPr id="27" name="Google Shape;27;p6"/>
-          <p:cNvSpPr txBox="1">
-            <a:spLocks noGrp="1"/>
-          </p:cNvSpPr>
+          <p:cNvSpPr txBox="1"/>
           <p:nvPr>
             <p:ph type="title"/>
           </p:nvPr>
@@ -5990,7 +5880,7 @@
           </a:ln>
         </p:spPr>
         <p:txBody>
-          <a:bodyPr spcFirstLastPara="1" wrap="square" lIns="91425" tIns="45700" rIns="91425" bIns="45700" anchor="b" anchorCtr="0">
+          <a:bodyPr anchorCtr="0" anchor="b" bIns="45700" lIns="91425" spcFirstLastPara="1" rIns="91425" wrap="square" tIns="45700">
             <a:normAutofit/>
           </a:bodyPr>
           <a:lstStyle>
@@ -6125,19 +6015,15 @@
               <a:defRPr/>
             </a:lvl9pPr>
           </a:lstStyle>
-          <a:p>
-            <a:endParaRPr/>
-          </a:p>
+          <a:p/>
         </p:txBody>
       </p:sp>
       <p:sp>
         <p:nvSpPr>
           <p:cNvPr id="28" name="Google Shape;28;p6"/>
-          <p:cNvSpPr txBox="1">
-            <a:spLocks noGrp="1"/>
-          </p:cNvSpPr>
+          <p:cNvSpPr txBox="1"/>
           <p:nvPr>
-            <p:ph type="body" idx="1"/>
+            <p:ph idx="1" type="body"/>
           </p:nvPr>
         </p:nvSpPr>
         <p:spPr>
@@ -6154,11 +6040,11 @@
           </a:ln>
         </p:spPr>
         <p:txBody>
-          <a:bodyPr spcFirstLastPara="1" wrap="square" lIns="91425" tIns="45700" rIns="91425" bIns="45700" anchor="t" anchorCtr="0">
+          <a:bodyPr anchorCtr="0" anchor="t" bIns="45700" lIns="91425" spcFirstLastPara="1" rIns="91425" wrap="square" tIns="45700">
             <a:normAutofit/>
           </a:bodyPr>
           <a:lstStyle>
-            <a:lvl1pPr marL="457200" lvl="0" indent="-228600" algn="l">
+            <a:lvl1pPr indent="-228600" lvl="0" marL="457200" algn="l">
               <a:lnSpc>
                 <a:spcPct val="90000"/>
               </a:lnSpc>
@@ -6179,7 +6065,7 @@
                 </a:solidFill>
               </a:defRPr>
             </a:lvl1pPr>
-            <a:lvl2pPr marL="914400" lvl="1" indent="-228600" algn="l">
+            <a:lvl2pPr indent="-228600" lvl="1" marL="914400" algn="l">
               <a:lnSpc>
                 <a:spcPct val="90000"/>
               </a:lnSpc>
@@ -6200,7 +6086,7 @@
                 </a:solidFill>
               </a:defRPr>
             </a:lvl2pPr>
-            <a:lvl3pPr marL="1371600" lvl="2" indent="-228600" algn="l">
+            <a:lvl3pPr indent="-228600" lvl="2" marL="1371600" algn="l">
               <a:lnSpc>
                 <a:spcPct val="90000"/>
               </a:lnSpc>
@@ -6221,7 +6107,7 @@
                 </a:solidFill>
               </a:defRPr>
             </a:lvl3pPr>
-            <a:lvl4pPr marL="1828800" lvl="3" indent="-228600" algn="l">
+            <a:lvl4pPr indent="-228600" lvl="3" marL="1828800" algn="l">
               <a:lnSpc>
                 <a:spcPct val="90000"/>
               </a:lnSpc>
@@ -6242,7 +6128,7 @@
                 </a:solidFill>
               </a:defRPr>
             </a:lvl4pPr>
-            <a:lvl5pPr marL="2286000" lvl="4" indent="-228600" algn="l">
+            <a:lvl5pPr indent="-228600" lvl="4" marL="2286000" algn="l">
               <a:lnSpc>
                 <a:spcPct val="90000"/>
               </a:lnSpc>
@@ -6263,7 +6149,7 @@
                 </a:solidFill>
               </a:defRPr>
             </a:lvl5pPr>
-            <a:lvl6pPr marL="2743200" lvl="5" indent="-228600" algn="l">
+            <a:lvl6pPr indent="-228600" lvl="5" marL="2743200" algn="l">
               <a:lnSpc>
                 <a:spcPct val="90000"/>
               </a:lnSpc>
@@ -6284,7 +6170,7 @@
                 </a:solidFill>
               </a:defRPr>
             </a:lvl6pPr>
-            <a:lvl7pPr marL="3200400" lvl="6" indent="-228600" algn="l">
+            <a:lvl7pPr indent="-228600" lvl="6" marL="3200400" algn="l">
               <a:lnSpc>
                 <a:spcPct val="90000"/>
               </a:lnSpc>
@@ -6305,7 +6191,7 @@
                 </a:solidFill>
               </a:defRPr>
             </a:lvl7pPr>
-            <a:lvl8pPr marL="3657600" lvl="7" indent="-228600" algn="l">
+            <a:lvl8pPr indent="-228600" lvl="7" marL="3657600" algn="l">
               <a:lnSpc>
                 <a:spcPct val="90000"/>
               </a:lnSpc>
@@ -6326,7 +6212,7 @@
                 </a:solidFill>
               </a:defRPr>
             </a:lvl8pPr>
-            <a:lvl9pPr marL="4114800" lvl="8" indent="-228600" algn="l">
+            <a:lvl9pPr indent="-228600" lvl="8" marL="4114800" algn="l">
               <a:lnSpc>
                 <a:spcPct val="90000"/>
               </a:lnSpc>
@@ -6348,19 +6234,15 @@
               </a:defRPr>
             </a:lvl9pPr>
           </a:lstStyle>
-          <a:p>
-            <a:endParaRPr/>
-          </a:p>
+          <a:p/>
         </p:txBody>
       </p:sp>
       <p:sp>
         <p:nvSpPr>
           <p:cNvPr id="29" name="Google Shape;29;p6"/>
-          <p:cNvSpPr txBox="1">
-            <a:spLocks noGrp="1"/>
-          </p:cNvSpPr>
+          <p:cNvSpPr txBox="1"/>
           <p:nvPr>
-            <p:ph type="dt" idx="10"/>
+            <p:ph idx="10" type="dt"/>
           </p:nvPr>
         </p:nvSpPr>
         <p:spPr>
@@ -6377,7 +6259,7 @@
           </a:ln>
         </p:spPr>
         <p:txBody>
-          <a:bodyPr spcFirstLastPara="1" wrap="square" lIns="91425" tIns="45700" rIns="91425" bIns="45700" anchor="ctr" anchorCtr="0">
+          <a:bodyPr anchorCtr="0" anchor="ctr" bIns="45700" lIns="91425" spcFirstLastPara="1" rIns="91425" wrap="square" tIns="45700">
             <a:noAutofit/>
           </a:bodyPr>
           <a:lstStyle>
@@ -6508,19 +6390,15 @@
               <a:defRPr/>
             </a:lvl9pPr>
           </a:lstStyle>
-          <a:p>
-            <a:endParaRPr/>
-          </a:p>
+          <a:p/>
         </p:txBody>
       </p:sp>
       <p:sp>
         <p:nvSpPr>
           <p:cNvPr id="30" name="Google Shape;30;p6"/>
-          <p:cNvSpPr txBox="1">
-            <a:spLocks noGrp="1"/>
-          </p:cNvSpPr>
+          <p:cNvSpPr txBox="1"/>
           <p:nvPr>
-            <p:ph type="ftr" idx="11"/>
+            <p:ph idx="11" type="ftr"/>
           </p:nvPr>
         </p:nvSpPr>
         <p:spPr>
@@ -6537,7 +6415,7 @@
           </a:ln>
         </p:spPr>
         <p:txBody>
-          <a:bodyPr spcFirstLastPara="1" wrap="square" lIns="91425" tIns="45700" rIns="91425" bIns="45700" anchor="ctr" anchorCtr="0">
+          <a:bodyPr anchorCtr="0" anchor="ctr" bIns="45700" lIns="91425" spcFirstLastPara="1" rIns="91425" wrap="square" tIns="45700">
             <a:noAutofit/>
           </a:bodyPr>
           <a:lstStyle>
@@ -6668,19 +6546,15 @@
               <a:defRPr/>
             </a:lvl9pPr>
           </a:lstStyle>
-          <a:p>
-            <a:endParaRPr/>
-          </a:p>
+          <a:p/>
         </p:txBody>
       </p:sp>
       <p:sp>
         <p:nvSpPr>
           <p:cNvPr id="31" name="Google Shape;31;p6"/>
-          <p:cNvSpPr txBox="1">
-            <a:spLocks noGrp="1"/>
-          </p:cNvSpPr>
+          <p:cNvSpPr txBox="1"/>
           <p:nvPr>
-            <p:ph type="sldNum" idx="12"/>
+            <p:ph idx="12" type="sldNum"/>
           </p:nvPr>
         </p:nvSpPr>
         <p:spPr>
@@ -6697,11 +6571,11 @@
           </a:ln>
         </p:spPr>
         <p:txBody>
-          <a:bodyPr spcFirstLastPara="1" wrap="square" lIns="91425" tIns="45700" rIns="91425" bIns="45700" anchor="ctr" anchorCtr="0">
+          <a:bodyPr anchorCtr="0" anchor="ctr" bIns="45700" lIns="91425" spcFirstLastPara="1" rIns="91425" wrap="square" tIns="45700">
             <a:noAutofit/>
           </a:bodyPr>
           <a:lstStyle>
-            <a:lvl1pPr marL="0" marR="0" lvl="0" indent="0" algn="r">
+            <a:lvl1pPr indent="0" lvl="0" marL="0" marR="0" algn="r">
               <a:lnSpc>
                 <a:spcPct val="100000"/>
               </a:lnSpc>
@@ -6717,7 +6591,7 @@
               <a:buSzPts val="5760"/>
               <a:buFont typeface="Arial"/>
               <a:buNone/>
-              <a:defRPr sz="5760" b="0" i="0" u="none" strike="noStrike" cap="none">
+              <a:defRPr b="0" i="0" sz="5760" u="none" cap="none" strike="noStrike">
                 <a:solidFill>
                   <a:srgbClr val="888888"/>
                 </a:solidFill>
@@ -6727,7 +6601,7 @@
                 <a:sym typeface="Calibri"/>
               </a:defRPr>
             </a:lvl1pPr>
-            <a:lvl2pPr marL="0" marR="0" lvl="1" indent="0" algn="r">
+            <a:lvl2pPr indent="0" lvl="1" marL="0" marR="0" algn="r">
               <a:lnSpc>
                 <a:spcPct val="100000"/>
               </a:lnSpc>
@@ -6743,7 +6617,7 @@
               <a:buSzPts val="5760"/>
               <a:buFont typeface="Arial"/>
               <a:buNone/>
-              <a:defRPr sz="5760" b="0" i="0" u="none" strike="noStrike" cap="none">
+              <a:defRPr b="0" i="0" sz="5760" u="none" cap="none" strike="noStrike">
                 <a:solidFill>
                   <a:srgbClr val="888888"/>
                 </a:solidFill>
@@ -6753,7 +6627,7 @@
                 <a:sym typeface="Calibri"/>
               </a:defRPr>
             </a:lvl2pPr>
-            <a:lvl3pPr marL="0" marR="0" lvl="2" indent="0" algn="r">
+            <a:lvl3pPr indent="0" lvl="2" marL="0" marR="0" algn="r">
               <a:lnSpc>
                 <a:spcPct val="100000"/>
               </a:lnSpc>
@@ -6769,7 +6643,7 @@
               <a:buSzPts val="5760"/>
               <a:buFont typeface="Arial"/>
               <a:buNone/>
-              <a:defRPr sz="5760" b="0" i="0" u="none" strike="noStrike" cap="none">
+              <a:defRPr b="0" i="0" sz="5760" u="none" cap="none" strike="noStrike">
                 <a:solidFill>
                   <a:srgbClr val="888888"/>
                 </a:solidFill>
@@ -6779,7 +6653,7 @@
                 <a:sym typeface="Calibri"/>
               </a:defRPr>
             </a:lvl3pPr>
-            <a:lvl4pPr marL="0" marR="0" lvl="3" indent="0" algn="r">
+            <a:lvl4pPr indent="0" lvl="3" marL="0" marR="0" algn="r">
               <a:lnSpc>
                 <a:spcPct val="100000"/>
               </a:lnSpc>
@@ -6795,7 +6669,7 @@
               <a:buSzPts val="5760"/>
               <a:buFont typeface="Arial"/>
               <a:buNone/>
-              <a:defRPr sz="5760" b="0" i="0" u="none" strike="noStrike" cap="none">
+              <a:defRPr b="0" i="0" sz="5760" u="none" cap="none" strike="noStrike">
                 <a:solidFill>
                   <a:srgbClr val="888888"/>
                 </a:solidFill>
@@ -6805,7 +6679,7 @@
                 <a:sym typeface="Calibri"/>
               </a:defRPr>
             </a:lvl4pPr>
-            <a:lvl5pPr marL="0" marR="0" lvl="4" indent="0" algn="r">
+            <a:lvl5pPr indent="0" lvl="4" marL="0" marR="0" algn="r">
               <a:lnSpc>
                 <a:spcPct val="100000"/>
               </a:lnSpc>
@@ -6821,7 +6695,7 @@
               <a:buSzPts val="5760"/>
               <a:buFont typeface="Arial"/>
               <a:buNone/>
-              <a:defRPr sz="5760" b="0" i="0" u="none" strike="noStrike" cap="none">
+              <a:defRPr b="0" i="0" sz="5760" u="none" cap="none" strike="noStrike">
                 <a:solidFill>
                   <a:srgbClr val="888888"/>
                 </a:solidFill>
@@ -6831,7 +6705,7 @@
                 <a:sym typeface="Calibri"/>
               </a:defRPr>
             </a:lvl5pPr>
-            <a:lvl6pPr marL="0" marR="0" lvl="5" indent="0" algn="r">
+            <a:lvl6pPr indent="0" lvl="5" marL="0" marR="0" algn="r">
               <a:lnSpc>
                 <a:spcPct val="100000"/>
               </a:lnSpc>
@@ -6847,7 +6721,7 @@
               <a:buSzPts val="5760"/>
               <a:buFont typeface="Arial"/>
               <a:buNone/>
-              <a:defRPr sz="5760" b="0" i="0" u="none" strike="noStrike" cap="none">
+              <a:defRPr b="0" i="0" sz="5760" u="none" cap="none" strike="noStrike">
                 <a:solidFill>
                   <a:srgbClr val="888888"/>
                 </a:solidFill>
@@ -6857,7 +6731,7 @@
                 <a:sym typeface="Calibri"/>
               </a:defRPr>
             </a:lvl6pPr>
-            <a:lvl7pPr marL="0" marR="0" lvl="6" indent="0" algn="r">
+            <a:lvl7pPr indent="0" lvl="6" marL="0" marR="0" algn="r">
               <a:lnSpc>
                 <a:spcPct val="100000"/>
               </a:lnSpc>
@@ -6873,7 +6747,7 @@
               <a:buSzPts val="5760"/>
               <a:buFont typeface="Arial"/>
               <a:buNone/>
-              <a:defRPr sz="5760" b="0" i="0" u="none" strike="noStrike" cap="none">
+              <a:defRPr b="0" i="0" sz="5760" u="none" cap="none" strike="noStrike">
                 <a:solidFill>
                   <a:srgbClr val="888888"/>
                 </a:solidFill>
@@ -6883,7 +6757,7 @@
                 <a:sym typeface="Calibri"/>
               </a:defRPr>
             </a:lvl7pPr>
-            <a:lvl8pPr marL="0" marR="0" lvl="7" indent="0" algn="r">
+            <a:lvl8pPr indent="0" lvl="7" marL="0" marR="0" algn="r">
               <a:lnSpc>
                 <a:spcPct val="100000"/>
               </a:lnSpc>
@@ -6899,7 +6773,7 @@
               <a:buSzPts val="5760"/>
               <a:buFont typeface="Arial"/>
               <a:buNone/>
-              <a:defRPr sz="5760" b="0" i="0" u="none" strike="noStrike" cap="none">
+              <a:defRPr b="0" i="0" sz="5760" u="none" cap="none" strike="noStrike">
                 <a:solidFill>
                   <a:srgbClr val="888888"/>
                 </a:solidFill>
@@ -6909,7 +6783,7 @@
                 <a:sym typeface="Calibri"/>
               </a:defRPr>
             </a:lvl8pPr>
-            <a:lvl9pPr marL="0" marR="0" lvl="8" indent="0" algn="r">
+            <a:lvl9pPr indent="0" lvl="8" marL="0" marR="0" algn="r">
               <a:lnSpc>
                 <a:spcPct val="100000"/>
               </a:lnSpc>
@@ -6925,7 +6799,7 @@
               <a:buSzPts val="5760"/>
               <a:buFont typeface="Arial"/>
               <a:buNone/>
-              <a:defRPr sz="5760" b="0" i="0" u="none" strike="noStrike" cap="none">
+              <a:defRPr b="0" i="0" sz="5760" u="none" cap="none" strike="noStrike">
                 <a:solidFill>
                   <a:srgbClr val="888888"/>
                 </a:solidFill>
@@ -6937,7 +6811,7 @@
             </a:lvl9pPr>
           </a:lstStyle>
           <a:p>
-            <a:pPr marL="0" lvl="0" indent="0" algn="r" rtl="0">
+            <a:pPr indent="0" lvl="0" marL="0" rtl="0" algn="r">
               <a:spcBef>
                 <a:spcPts val="0"/>
               </a:spcBef>
@@ -6963,11 +6837,11 @@
 </file>
 
 <file path=ppt/slideLayouts/slideLayout5.xml><?xml version="1.0" encoding="utf-8"?>
-<p:sldLayout xmlns:a="http://schemas.openxmlformats.org/drawingml/2006/main" xmlns:r="http://schemas.openxmlformats.org/officeDocument/2006/relationships" xmlns:p="http://schemas.openxmlformats.org/presentationml/2006/main" matchingName="Two Content" type="twoObj">
+<p:sldLayout xmlns:a="http://schemas.openxmlformats.org/drawingml/2006/main" xmlns:r="http://schemas.openxmlformats.org/officeDocument/2006/relationships" xmlns:mc="http://schemas.openxmlformats.org/markup-compatibility/2006" xmlns:mv="urn:schemas-microsoft-com:mac:vml" xmlns:p="http://schemas.openxmlformats.org/presentationml/2006/main" xmlns:c="http://schemas.openxmlformats.org/drawingml/2006/chart" xmlns:dgm="http://schemas.openxmlformats.org/drawingml/2006/diagram" xmlns:o="urn:schemas-microsoft-com:office:office" xmlns:v="urn:schemas-microsoft-com:vml" xmlns:pvml="urn:schemas-microsoft-com:office:powerpoint" xmlns:com="http://schemas.openxmlformats.org/drawingml/2006/compatibility" xmlns:p14="http://schemas.microsoft.com/office/powerpoint/2010/main" xmlns:p15="http://schemas.microsoft.com/office/powerpoint/2012/main" xmlns:ahyp="http://schemas.microsoft.com/office/drawing/2018/hyperlinkcolor" matchingName="Two Content" type="twoObj">
   <p:cSld name="TWO_OBJECTS">
     <p:spTree>
       <p:nvGrpSpPr>
-        <p:cNvPr id="1" name="Shape 32"/>
+        <p:cNvPr id="32" name="Shape 32"/>
         <p:cNvGrpSpPr/>
         <p:nvPr/>
       </p:nvGrpSpPr>
@@ -6982,9 +6856,7 @@
       <p:sp>
         <p:nvSpPr>
           <p:cNvPr id="33" name="Google Shape;33;p7"/>
-          <p:cNvSpPr txBox="1">
-            <a:spLocks noGrp="1"/>
-          </p:cNvSpPr>
+          <p:cNvSpPr txBox="1"/>
           <p:nvPr>
             <p:ph type="title"/>
           </p:nvPr>
@@ -7003,7 +6875,7 @@
           </a:ln>
         </p:spPr>
         <p:txBody>
-          <a:bodyPr spcFirstLastPara="1" wrap="square" lIns="91425" tIns="45700" rIns="91425" bIns="45700" anchor="ctr" anchorCtr="0">
+          <a:bodyPr anchorCtr="0" anchor="ctr" bIns="45700" lIns="91425" spcFirstLastPara="1" rIns="91425" wrap="square" tIns="45700">
             <a:normAutofit/>
           </a:bodyPr>
           <a:lstStyle>
@@ -7137,19 +7009,15 @@
               <a:defRPr/>
             </a:lvl9pPr>
           </a:lstStyle>
-          <a:p>
-            <a:endParaRPr/>
-          </a:p>
+          <a:p/>
         </p:txBody>
       </p:sp>
       <p:sp>
         <p:nvSpPr>
           <p:cNvPr id="34" name="Google Shape;34;p7"/>
-          <p:cNvSpPr txBox="1">
-            <a:spLocks noGrp="1"/>
-          </p:cNvSpPr>
+          <p:cNvSpPr txBox="1"/>
           <p:nvPr>
-            <p:ph type="body" idx="1"/>
+            <p:ph idx="1" type="body"/>
           </p:nvPr>
         </p:nvSpPr>
         <p:spPr>
@@ -7166,11 +7034,11 @@
           </a:ln>
         </p:spPr>
         <p:txBody>
-          <a:bodyPr spcFirstLastPara="1" wrap="square" lIns="91425" tIns="45700" rIns="91425" bIns="45700" anchor="t" anchorCtr="0">
+          <a:bodyPr anchorCtr="0" anchor="t" bIns="45700" lIns="91425" spcFirstLastPara="1" rIns="91425" wrap="square" tIns="45700">
             <a:normAutofit/>
           </a:bodyPr>
           <a:lstStyle>
-            <a:lvl1pPr marL="457200" lvl="0" indent="-342900" algn="l">
+            <a:lvl1pPr indent="-342900" lvl="0" marL="457200" algn="l">
               <a:lnSpc>
                 <a:spcPct val="90000"/>
               </a:lnSpc>
@@ -7187,7 +7055,7 @@
               <a:buChar char="•"/>
               <a:defRPr/>
             </a:lvl1pPr>
-            <a:lvl2pPr marL="914400" lvl="1" indent="-342900" algn="l">
+            <a:lvl2pPr indent="-342900" lvl="1" marL="914400" algn="l">
               <a:lnSpc>
                 <a:spcPct val="90000"/>
               </a:lnSpc>
@@ -7204,7 +7072,7 @@
               <a:buChar char="•"/>
               <a:defRPr/>
             </a:lvl2pPr>
-            <a:lvl3pPr marL="1371600" lvl="2" indent="-342900" algn="l">
+            <a:lvl3pPr indent="-342900" lvl="2" marL="1371600" algn="l">
               <a:lnSpc>
                 <a:spcPct val="90000"/>
               </a:lnSpc>
@@ -7221,7 +7089,7 @@
               <a:buChar char="•"/>
               <a:defRPr/>
             </a:lvl3pPr>
-            <a:lvl4pPr marL="1828800" lvl="3" indent="-342900" algn="l">
+            <a:lvl4pPr indent="-342900" lvl="3" marL="1828800" algn="l">
               <a:lnSpc>
                 <a:spcPct val="90000"/>
               </a:lnSpc>
@@ -7238,7 +7106,7 @@
               <a:buChar char="•"/>
               <a:defRPr/>
             </a:lvl4pPr>
-            <a:lvl5pPr marL="2286000" lvl="4" indent="-342900" algn="l">
+            <a:lvl5pPr indent="-342900" lvl="4" marL="2286000" algn="l">
               <a:lnSpc>
                 <a:spcPct val="90000"/>
               </a:lnSpc>
@@ -7255,7 +7123,7 @@
               <a:buChar char="•"/>
               <a:defRPr/>
             </a:lvl5pPr>
-            <a:lvl6pPr marL="2743200" lvl="5" indent="-342900" algn="l">
+            <a:lvl6pPr indent="-342900" lvl="5" marL="2743200" algn="l">
               <a:lnSpc>
                 <a:spcPct val="90000"/>
               </a:lnSpc>
@@ -7272,7 +7140,7 @@
               <a:buChar char="•"/>
               <a:defRPr/>
             </a:lvl6pPr>
-            <a:lvl7pPr marL="3200400" lvl="6" indent="-342900" algn="l">
+            <a:lvl7pPr indent="-342900" lvl="6" marL="3200400" algn="l">
               <a:lnSpc>
                 <a:spcPct val="90000"/>
               </a:lnSpc>
@@ -7289,7 +7157,7 @@
               <a:buChar char="•"/>
               <a:defRPr/>
             </a:lvl7pPr>
-            <a:lvl8pPr marL="3657600" lvl="7" indent="-342900" algn="l">
+            <a:lvl8pPr indent="-342900" lvl="7" marL="3657600" algn="l">
               <a:lnSpc>
                 <a:spcPct val="90000"/>
               </a:lnSpc>
@@ -7306,7 +7174,7 @@
               <a:buChar char="•"/>
               <a:defRPr/>
             </a:lvl8pPr>
-            <a:lvl9pPr marL="4114800" lvl="8" indent="-342900" algn="l">
+            <a:lvl9pPr indent="-342900" lvl="8" marL="4114800" algn="l">
               <a:lnSpc>
                 <a:spcPct val="90000"/>
               </a:lnSpc>
@@ -7324,19 +7192,15 @@
               <a:defRPr/>
             </a:lvl9pPr>
           </a:lstStyle>
-          <a:p>
-            <a:endParaRPr/>
-          </a:p>
+          <a:p/>
         </p:txBody>
       </p:sp>
       <p:sp>
         <p:nvSpPr>
           <p:cNvPr id="35" name="Google Shape;35;p7"/>
-          <p:cNvSpPr txBox="1">
-            <a:spLocks noGrp="1"/>
-          </p:cNvSpPr>
+          <p:cNvSpPr txBox="1"/>
           <p:nvPr>
-            <p:ph type="body" idx="2"/>
+            <p:ph idx="2" type="body"/>
           </p:nvPr>
         </p:nvSpPr>
         <p:spPr>
@@ -7353,11 +7217,11 @@
           </a:ln>
         </p:spPr>
         <p:txBody>
-          <a:bodyPr spcFirstLastPara="1" wrap="square" lIns="91425" tIns="45700" rIns="91425" bIns="45700" anchor="t" anchorCtr="0">
+          <a:bodyPr anchorCtr="0" anchor="t" bIns="45700" lIns="91425" spcFirstLastPara="1" rIns="91425" wrap="square" tIns="45700">
             <a:normAutofit/>
           </a:bodyPr>
           <a:lstStyle>
-            <a:lvl1pPr marL="457200" lvl="0" indent="-342900" algn="l">
+            <a:lvl1pPr indent="-342900" lvl="0" marL="457200" algn="l">
               <a:lnSpc>
                 <a:spcPct val="90000"/>
               </a:lnSpc>
@@ -7374,7 +7238,7 @@
               <a:buChar char="•"/>
               <a:defRPr/>
             </a:lvl1pPr>
-            <a:lvl2pPr marL="914400" lvl="1" indent="-342900" algn="l">
+            <a:lvl2pPr indent="-342900" lvl="1" marL="914400" algn="l">
               <a:lnSpc>
                 <a:spcPct val="90000"/>
               </a:lnSpc>
@@ -7391,7 +7255,7 @@
               <a:buChar char="•"/>
               <a:defRPr/>
             </a:lvl2pPr>
-            <a:lvl3pPr marL="1371600" lvl="2" indent="-342900" algn="l">
+            <a:lvl3pPr indent="-342900" lvl="2" marL="1371600" algn="l">
               <a:lnSpc>
                 <a:spcPct val="90000"/>
               </a:lnSpc>
@@ -7408,7 +7272,7 @@
               <a:buChar char="•"/>
               <a:defRPr/>
             </a:lvl3pPr>
-            <a:lvl4pPr marL="1828800" lvl="3" indent="-342900" algn="l">
+            <a:lvl4pPr indent="-342900" lvl="3" marL="1828800" algn="l">
               <a:lnSpc>
                 <a:spcPct val="90000"/>
               </a:lnSpc>
@@ -7425,7 +7289,7 @@
               <a:buChar char="•"/>
               <a:defRPr/>
             </a:lvl4pPr>
-            <a:lvl5pPr marL="2286000" lvl="4" indent="-342900" algn="l">
+            <a:lvl5pPr indent="-342900" lvl="4" marL="2286000" algn="l">
               <a:lnSpc>
                 <a:spcPct val="90000"/>
               </a:lnSpc>
@@ -7442,7 +7306,7 @@
               <a:buChar char="•"/>
               <a:defRPr/>
             </a:lvl5pPr>
-            <a:lvl6pPr marL="2743200" lvl="5" indent="-342900" algn="l">
+            <a:lvl6pPr indent="-342900" lvl="5" marL="2743200" algn="l">
               <a:lnSpc>
                 <a:spcPct val="90000"/>
               </a:lnSpc>
@@ -7459,7 +7323,7 @@
               <a:buChar char="•"/>
               <a:defRPr/>
             </a:lvl6pPr>
-            <a:lvl7pPr marL="3200400" lvl="6" indent="-342900" algn="l">
+            <a:lvl7pPr indent="-342900" lvl="6" marL="3200400" algn="l">
               <a:lnSpc>
                 <a:spcPct val="90000"/>
               </a:lnSpc>
@@ -7476,7 +7340,7 @@
               <a:buChar char="•"/>
               <a:defRPr/>
             </a:lvl7pPr>
-            <a:lvl8pPr marL="3657600" lvl="7" indent="-342900" algn="l">
+            <a:lvl8pPr indent="-342900" lvl="7" marL="3657600" algn="l">
               <a:lnSpc>
                 <a:spcPct val="90000"/>
               </a:lnSpc>
@@ -7493,7 +7357,7 @@
               <a:buChar char="•"/>
               <a:defRPr/>
             </a:lvl8pPr>
-            <a:lvl9pPr marL="4114800" lvl="8" indent="-342900" algn="l">
+            <a:lvl9pPr indent="-342900" lvl="8" marL="4114800" algn="l">
               <a:lnSpc>
                 <a:spcPct val="90000"/>
               </a:lnSpc>
@@ -7511,19 +7375,15 @@
               <a:defRPr/>
             </a:lvl9pPr>
           </a:lstStyle>
-          <a:p>
-            <a:endParaRPr/>
-          </a:p>
+          <a:p/>
         </p:txBody>
       </p:sp>
       <p:sp>
         <p:nvSpPr>
           <p:cNvPr id="36" name="Google Shape;36;p7"/>
-          <p:cNvSpPr txBox="1">
-            <a:spLocks noGrp="1"/>
-          </p:cNvSpPr>
+          <p:cNvSpPr txBox="1"/>
           <p:nvPr>
-            <p:ph type="dt" idx="10"/>
+            <p:ph idx="10" type="dt"/>
           </p:nvPr>
         </p:nvSpPr>
         <p:spPr>
@@ -7540,7 +7400,7 @@
           </a:ln>
         </p:spPr>
         <p:txBody>
-          <a:bodyPr spcFirstLastPara="1" wrap="square" lIns="91425" tIns="45700" rIns="91425" bIns="45700" anchor="ctr" anchorCtr="0">
+          <a:bodyPr anchorCtr="0" anchor="ctr" bIns="45700" lIns="91425" spcFirstLastPara="1" rIns="91425" wrap="square" tIns="45700">
             <a:noAutofit/>
           </a:bodyPr>
           <a:lstStyle>
@@ -7671,19 +7531,15 @@
               <a:defRPr/>
             </a:lvl9pPr>
           </a:lstStyle>
-          <a:p>
-            <a:endParaRPr/>
-          </a:p>
+          <a:p/>
         </p:txBody>
       </p:sp>
       <p:sp>
         <p:nvSpPr>
           <p:cNvPr id="37" name="Google Shape;37;p7"/>
-          <p:cNvSpPr txBox="1">
-            <a:spLocks noGrp="1"/>
-          </p:cNvSpPr>
+          <p:cNvSpPr txBox="1"/>
           <p:nvPr>
-            <p:ph type="ftr" idx="11"/>
+            <p:ph idx="11" type="ftr"/>
           </p:nvPr>
         </p:nvSpPr>
         <p:spPr>
@@ -7700,7 +7556,7 @@
           </a:ln>
         </p:spPr>
         <p:txBody>
-          <a:bodyPr spcFirstLastPara="1" wrap="square" lIns="91425" tIns="45700" rIns="91425" bIns="45700" anchor="ctr" anchorCtr="0">
+          <a:bodyPr anchorCtr="0" anchor="ctr" bIns="45700" lIns="91425" spcFirstLastPara="1" rIns="91425" wrap="square" tIns="45700">
             <a:noAutofit/>
           </a:bodyPr>
           <a:lstStyle>
@@ -7831,19 +7687,15 @@
               <a:defRPr/>
             </a:lvl9pPr>
           </a:lstStyle>
-          <a:p>
-            <a:endParaRPr/>
-          </a:p>
+          <a:p/>
         </p:txBody>
       </p:sp>
       <p:sp>
         <p:nvSpPr>
           <p:cNvPr id="38" name="Google Shape;38;p7"/>
-          <p:cNvSpPr txBox="1">
-            <a:spLocks noGrp="1"/>
-          </p:cNvSpPr>
+          <p:cNvSpPr txBox="1"/>
           <p:nvPr>
-            <p:ph type="sldNum" idx="12"/>
+            <p:ph idx="12" type="sldNum"/>
           </p:nvPr>
         </p:nvSpPr>
         <p:spPr>
@@ -7860,11 +7712,11 @@
           </a:ln>
         </p:spPr>
         <p:txBody>
-          <a:bodyPr spcFirstLastPara="1" wrap="square" lIns="91425" tIns="45700" rIns="91425" bIns="45700" anchor="ctr" anchorCtr="0">
+          <a:bodyPr anchorCtr="0" anchor="ctr" bIns="45700" lIns="91425" spcFirstLastPara="1" rIns="91425" wrap="square" tIns="45700">
             <a:noAutofit/>
           </a:bodyPr>
           <a:lstStyle>
-            <a:lvl1pPr marL="0" marR="0" lvl="0" indent="0" algn="r">
+            <a:lvl1pPr indent="0" lvl="0" marL="0" marR="0" algn="r">
               <a:lnSpc>
                 <a:spcPct val="100000"/>
               </a:lnSpc>
@@ -7880,7 +7732,7 @@
               <a:buSzPts val="5760"/>
               <a:buFont typeface="Arial"/>
               <a:buNone/>
-              <a:defRPr sz="5760" b="0" i="0" u="none" strike="noStrike" cap="none">
+              <a:defRPr b="0" i="0" sz="5760" u="none" cap="none" strike="noStrike">
                 <a:solidFill>
                   <a:srgbClr val="888888"/>
                 </a:solidFill>
@@ -7890,7 +7742,7 @@
                 <a:sym typeface="Calibri"/>
               </a:defRPr>
             </a:lvl1pPr>
-            <a:lvl2pPr marL="0" marR="0" lvl="1" indent="0" algn="r">
+            <a:lvl2pPr indent="0" lvl="1" marL="0" marR="0" algn="r">
               <a:lnSpc>
                 <a:spcPct val="100000"/>
               </a:lnSpc>
@@ -7906,7 +7758,7 @@
               <a:buSzPts val="5760"/>
               <a:buFont typeface="Arial"/>
               <a:buNone/>
-              <a:defRPr sz="5760" b="0" i="0" u="none" strike="noStrike" cap="none">
+              <a:defRPr b="0" i="0" sz="5760" u="none" cap="none" strike="noStrike">
                 <a:solidFill>
                   <a:srgbClr val="888888"/>
                 </a:solidFill>
@@ -7916,7 +7768,7 @@
                 <a:sym typeface="Calibri"/>
               </a:defRPr>
             </a:lvl2pPr>
-            <a:lvl3pPr marL="0" marR="0" lvl="2" indent="0" algn="r">
+            <a:lvl3pPr indent="0" lvl="2" marL="0" marR="0" algn="r">
               <a:lnSpc>
                 <a:spcPct val="100000"/>
               </a:lnSpc>
@@ -7932,7 +7784,7 @@
               <a:buSzPts val="5760"/>
               <a:buFont typeface="Arial"/>
               <a:buNone/>
-              <a:defRPr sz="5760" b="0" i="0" u="none" strike="noStrike" cap="none">
+              <a:defRPr b="0" i="0" sz="5760" u="none" cap="none" strike="noStrike">
                 <a:solidFill>
                   <a:srgbClr val="888888"/>
                 </a:solidFill>
@@ -7942,7 +7794,7 @@
                 <a:sym typeface="Calibri"/>
               </a:defRPr>
             </a:lvl3pPr>
-            <a:lvl4pPr marL="0" marR="0" lvl="3" indent="0" algn="r">
+            <a:lvl4pPr indent="0" lvl="3" marL="0" marR="0" algn="r">
               <a:lnSpc>
                 <a:spcPct val="100000"/>
               </a:lnSpc>
@@ -7958,7 +7810,7 @@
               <a:buSzPts val="5760"/>
               <a:buFont typeface="Arial"/>
               <a:buNone/>
-              <a:defRPr sz="5760" b="0" i="0" u="none" strike="noStrike" cap="none">
+              <a:defRPr b="0" i="0" sz="5760" u="none" cap="none" strike="noStrike">
                 <a:solidFill>
                   <a:srgbClr val="888888"/>
                 </a:solidFill>
@@ -7968,7 +7820,7 @@
                 <a:sym typeface="Calibri"/>
               </a:defRPr>
             </a:lvl4pPr>
-            <a:lvl5pPr marL="0" marR="0" lvl="4" indent="0" algn="r">
+            <a:lvl5pPr indent="0" lvl="4" marL="0" marR="0" algn="r">
               <a:lnSpc>
                 <a:spcPct val="100000"/>
               </a:lnSpc>
@@ -7984,7 +7836,7 @@
               <a:buSzPts val="5760"/>
               <a:buFont typeface="Arial"/>
               <a:buNone/>
-              <a:defRPr sz="5760" b="0" i="0" u="none" strike="noStrike" cap="none">
+              <a:defRPr b="0" i="0" sz="5760" u="none" cap="none" strike="noStrike">
                 <a:solidFill>
                   <a:srgbClr val="888888"/>
                 </a:solidFill>
@@ -7994,7 +7846,7 @@
                 <a:sym typeface="Calibri"/>
               </a:defRPr>
             </a:lvl5pPr>
-            <a:lvl6pPr marL="0" marR="0" lvl="5" indent="0" algn="r">
+            <a:lvl6pPr indent="0" lvl="5" marL="0" marR="0" algn="r">
               <a:lnSpc>
                 <a:spcPct val="100000"/>
               </a:lnSpc>
@@ -8010,7 +7862,7 @@
               <a:buSzPts val="5760"/>
               <a:buFont typeface="Arial"/>
               <a:buNone/>
-              <a:defRPr sz="5760" b="0" i="0" u="none" strike="noStrike" cap="none">
+              <a:defRPr b="0" i="0" sz="5760" u="none" cap="none" strike="noStrike">
                 <a:solidFill>
                   <a:srgbClr val="888888"/>
                 </a:solidFill>
@@ -8020,7 +7872,7 @@
                 <a:sym typeface="Calibri"/>
               </a:defRPr>
             </a:lvl6pPr>
-            <a:lvl7pPr marL="0" marR="0" lvl="6" indent="0" algn="r">
+            <a:lvl7pPr indent="0" lvl="6" marL="0" marR="0" algn="r">
               <a:lnSpc>
                 <a:spcPct val="100000"/>
               </a:lnSpc>
@@ -8036,7 +7888,7 @@
               <a:buSzPts val="5760"/>
               <a:buFont typeface="Arial"/>
               <a:buNone/>
-              <a:defRPr sz="5760" b="0" i="0" u="none" strike="noStrike" cap="none">
+              <a:defRPr b="0" i="0" sz="5760" u="none" cap="none" strike="noStrike">
                 <a:solidFill>
                   <a:srgbClr val="888888"/>
                 </a:solidFill>
@@ -8046,7 +7898,7 @@
                 <a:sym typeface="Calibri"/>
               </a:defRPr>
             </a:lvl7pPr>
-            <a:lvl8pPr marL="0" marR="0" lvl="7" indent="0" algn="r">
+            <a:lvl8pPr indent="0" lvl="7" marL="0" marR="0" algn="r">
               <a:lnSpc>
                 <a:spcPct val="100000"/>
               </a:lnSpc>
@@ -8062,7 +7914,7 @@
               <a:buSzPts val="5760"/>
               <a:buFont typeface="Arial"/>
               <a:buNone/>
-              <a:defRPr sz="5760" b="0" i="0" u="none" strike="noStrike" cap="none">
+              <a:defRPr b="0" i="0" sz="5760" u="none" cap="none" strike="noStrike">
                 <a:solidFill>
                   <a:srgbClr val="888888"/>
                 </a:solidFill>
@@ -8072,7 +7924,7 @@
                 <a:sym typeface="Calibri"/>
               </a:defRPr>
             </a:lvl8pPr>
-            <a:lvl9pPr marL="0" marR="0" lvl="8" indent="0" algn="r">
+            <a:lvl9pPr indent="0" lvl="8" marL="0" marR="0" algn="r">
               <a:lnSpc>
                 <a:spcPct val="100000"/>
               </a:lnSpc>
@@ -8088,7 +7940,7 @@
               <a:buSzPts val="5760"/>
               <a:buFont typeface="Arial"/>
               <a:buNone/>
-              <a:defRPr sz="5760" b="0" i="0" u="none" strike="noStrike" cap="none">
+              <a:defRPr b="0" i="0" sz="5760" u="none" cap="none" strike="noStrike">
                 <a:solidFill>
                   <a:srgbClr val="888888"/>
                 </a:solidFill>
@@ -8100,7 +7952,7 @@
             </a:lvl9pPr>
           </a:lstStyle>
           <a:p>
-            <a:pPr marL="0" lvl="0" indent="0" algn="r" rtl="0">
+            <a:pPr indent="0" lvl="0" marL="0" rtl="0" algn="r">
               <a:spcBef>
                 <a:spcPts val="0"/>
               </a:spcBef>
@@ -8126,11 +7978,11 @@
 </file>
 
 <file path=ppt/slideLayouts/slideLayout6.xml><?xml version="1.0" encoding="utf-8"?>
-<p:sldLayout xmlns:a="http://schemas.openxmlformats.org/drawingml/2006/main" xmlns:r="http://schemas.openxmlformats.org/officeDocument/2006/relationships" xmlns:p="http://schemas.openxmlformats.org/presentationml/2006/main" matchingName="Comparison" type="twoTxTwoObj">
+<p:sldLayout xmlns:a="http://schemas.openxmlformats.org/drawingml/2006/main" xmlns:r="http://schemas.openxmlformats.org/officeDocument/2006/relationships" xmlns:mc="http://schemas.openxmlformats.org/markup-compatibility/2006" xmlns:mv="urn:schemas-microsoft-com:mac:vml" xmlns:p="http://schemas.openxmlformats.org/presentationml/2006/main" xmlns:c="http://schemas.openxmlformats.org/drawingml/2006/chart" xmlns:dgm="http://schemas.openxmlformats.org/drawingml/2006/diagram" xmlns:o="urn:schemas-microsoft-com:office:office" xmlns:v="urn:schemas-microsoft-com:vml" xmlns:pvml="urn:schemas-microsoft-com:office:powerpoint" xmlns:com="http://schemas.openxmlformats.org/drawingml/2006/compatibility" xmlns:p14="http://schemas.microsoft.com/office/powerpoint/2010/main" xmlns:p15="http://schemas.microsoft.com/office/powerpoint/2012/main" xmlns:ahyp="http://schemas.microsoft.com/office/drawing/2018/hyperlinkcolor" matchingName="Comparison" type="twoTxTwoObj">
   <p:cSld name="TWO_OBJECTS_WITH_TEXT">
     <p:spTree>
       <p:nvGrpSpPr>
-        <p:cNvPr id="1" name="Shape 39"/>
+        <p:cNvPr id="39" name="Shape 39"/>
         <p:cNvGrpSpPr/>
         <p:nvPr/>
       </p:nvGrpSpPr>
@@ -8145,9 +7997,7 @@
       <p:sp>
         <p:nvSpPr>
           <p:cNvPr id="40" name="Google Shape;40;p8"/>
-          <p:cNvSpPr txBox="1">
-            <a:spLocks noGrp="1"/>
-          </p:cNvSpPr>
+          <p:cNvSpPr txBox="1"/>
           <p:nvPr>
             <p:ph type="title"/>
           </p:nvPr>
@@ -8166,7 +8016,7 @@
           </a:ln>
         </p:spPr>
         <p:txBody>
-          <a:bodyPr spcFirstLastPara="1" wrap="square" lIns="91425" tIns="45700" rIns="91425" bIns="45700" anchor="ctr" anchorCtr="0">
+          <a:bodyPr anchorCtr="0" anchor="ctr" bIns="45700" lIns="91425" spcFirstLastPara="1" rIns="91425" wrap="square" tIns="45700">
             <a:normAutofit/>
           </a:bodyPr>
           <a:lstStyle>
@@ -8300,19 +8150,15 @@
               <a:defRPr/>
             </a:lvl9pPr>
           </a:lstStyle>
-          <a:p>
-            <a:endParaRPr/>
-          </a:p>
+          <a:p/>
         </p:txBody>
       </p:sp>
       <p:sp>
         <p:nvSpPr>
           <p:cNvPr id="41" name="Google Shape;41;p8"/>
-          <p:cNvSpPr txBox="1">
-            <a:spLocks noGrp="1"/>
-          </p:cNvSpPr>
+          <p:cNvSpPr txBox="1"/>
           <p:nvPr>
-            <p:ph type="body" idx="1"/>
+            <p:ph idx="1" type="body"/>
           </p:nvPr>
         </p:nvSpPr>
         <p:spPr>
@@ -8329,11 +8175,11 @@
           </a:ln>
         </p:spPr>
         <p:txBody>
-          <a:bodyPr spcFirstLastPara="1" wrap="square" lIns="91425" tIns="45700" rIns="91425" bIns="45700" anchor="b" anchorCtr="0">
+          <a:bodyPr anchorCtr="0" anchor="b" bIns="45700" lIns="91425" spcFirstLastPara="1" rIns="91425" wrap="square" tIns="45700">
             <a:normAutofit/>
           </a:bodyPr>
           <a:lstStyle>
-            <a:lvl1pPr marL="457200" lvl="0" indent="-228600" algn="l">
+            <a:lvl1pPr indent="-228600" lvl="0" marL="457200" algn="l">
               <a:lnSpc>
                 <a:spcPct val="90000"/>
               </a:lnSpc>
@@ -8348,9 +8194,9 @@
               </a:buClr>
               <a:buSzPts val="11520"/>
               <a:buNone/>
-              <a:defRPr sz="11520" b="1"/>
+              <a:defRPr b="1" sz="11520"/>
             </a:lvl1pPr>
-            <a:lvl2pPr marL="914400" lvl="1" indent="-228600" algn="l">
+            <a:lvl2pPr indent="-228600" lvl="1" marL="914400" algn="l">
               <a:lnSpc>
                 <a:spcPct val="90000"/>
               </a:lnSpc>
@@ -8365,9 +8211,9 @@
               </a:buClr>
               <a:buSzPts val="9600"/>
               <a:buNone/>
-              <a:defRPr sz="9600" b="1"/>
+              <a:defRPr b="1" sz="9600"/>
             </a:lvl2pPr>
-            <a:lvl3pPr marL="1371600" lvl="2" indent="-228600" algn="l">
+            <a:lvl3pPr indent="-228600" lvl="2" marL="1371600" algn="l">
               <a:lnSpc>
                 <a:spcPct val="90000"/>
               </a:lnSpc>
@@ -8382,9 +8228,9 @@
               </a:buClr>
               <a:buSzPts val="8640"/>
               <a:buNone/>
-              <a:defRPr sz="8640" b="1"/>
+              <a:defRPr b="1" sz="8640"/>
             </a:lvl3pPr>
-            <a:lvl4pPr marL="1828800" lvl="3" indent="-228600" algn="l">
+            <a:lvl4pPr indent="-228600" lvl="3" marL="1828800" algn="l">
               <a:lnSpc>
                 <a:spcPct val="90000"/>
               </a:lnSpc>
@@ -8399,9 +8245,9 @@
               </a:buClr>
               <a:buSzPts val="7680"/>
               <a:buNone/>
-              <a:defRPr sz="7680" b="1"/>
+              <a:defRPr b="1" sz="7680"/>
             </a:lvl4pPr>
-            <a:lvl5pPr marL="2286000" lvl="4" indent="-228600" algn="l">
+            <a:lvl5pPr indent="-228600" lvl="4" marL="2286000" algn="l">
               <a:lnSpc>
                 <a:spcPct val="90000"/>
               </a:lnSpc>
@@ -8416,9 +8262,9 @@
               </a:buClr>
               <a:buSzPts val="7680"/>
               <a:buNone/>
-              <a:defRPr sz="7680" b="1"/>
+              <a:defRPr b="1" sz="7680"/>
             </a:lvl5pPr>
-            <a:lvl6pPr marL="2743200" lvl="5" indent="-228600" algn="l">
+            <a:lvl6pPr indent="-228600" lvl="5" marL="2743200" algn="l">
               <a:lnSpc>
                 <a:spcPct val="90000"/>
               </a:lnSpc>
@@ -8433,9 +8279,9 @@
               </a:buClr>
               <a:buSzPts val="7680"/>
               <a:buNone/>
-              <a:defRPr sz="7680" b="1"/>
+              <a:defRPr b="1" sz="7680"/>
             </a:lvl6pPr>
-            <a:lvl7pPr marL="3200400" lvl="6" indent="-228600" algn="l">
+            <a:lvl7pPr indent="-228600" lvl="6" marL="3200400" algn="l">
               <a:lnSpc>
                 <a:spcPct val="90000"/>
               </a:lnSpc>
@@ -8450,9 +8296,9 @@
               </a:buClr>
               <a:buSzPts val="7680"/>
               <a:buNone/>
-              <a:defRPr sz="7680" b="1"/>
+              <a:defRPr b="1" sz="7680"/>
             </a:lvl7pPr>
-            <a:lvl8pPr marL="3657600" lvl="7" indent="-228600" algn="l">
+            <a:lvl8pPr indent="-228600" lvl="7" marL="3657600" algn="l">
               <a:lnSpc>
                 <a:spcPct val="90000"/>
               </a:lnSpc>
@@ -8467,9 +8313,9 @@
               </a:buClr>
               <a:buSzPts val="7680"/>
               <a:buNone/>
-              <a:defRPr sz="7680" b="1"/>
+              <a:defRPr b="1" sz="7680"/>
             </a:lvl8pPr>
-            <a:lvl9pPr marL="4114800" lvl="8" indent="-228600" algn="l">
+            <a:lvl9pPr indent="-228600" lvl="8" marL="4114800" algn="l">
               <a:lnSpc>
                 <a:spcPct val="90000"/>
               </a:lnSpc>
@@ -8484,22 +8330,18 @@
               </a:buClr>
               <a:buSzPts val="7680"/>
               <a:buNone/>
-              <a:defRPr sz="7680" b="1"/>
+              <a:defRPr b="1" sz="7680"/>
             </a:lvl9pPr>
           </a:lstStyle>
-          <a:p>
-            <a:endParaRPr/>
-          </a:p>
+          <a:p/>
         </p:txBody>
       </p:sp>
       <p:sp>
         <p:nvSpPr>
           <p:cNvPr id="42" name="Google Shape;42;p8"/>
-          <p:cNvSpPr txBox="1">
-            <a:spLocks noGrp="1"/>
-          </p:cNvSpPr>
+          <p:cNvSpPr txBox="1"/>
           <p:nvPr>
-            <p:ph type="body" idx="2"/>
+            <p:ph idx="2" type="body"/>
           </p:nvPr>
         </p:nvSpPr>
         <p:spPr>
@@ -8516,11 +8358,11 @@
           </a:ln>
         </p:spPr>
         <p:txBody>
-          <a:bodyPr spcFirstLastPara="1" wrap="square" lIns="91425" tIns="45700" rIns="91425" bIns="45700" anchor="t" anchorCtr="0">
+          <a:bodyPr anchorCtr="0" anchor="t" bIns="45700" lIns="91425" spcFirstLastPara="1" rIns="91425" wrap="square" tIns="45700">
             <a:normAutofit/>
           </a:bodyPr>
           <a:lstStyle>
-            <a:lvl1pPr marL="457200" lvl="0" indent="-342900" algn="l">
+            <a:lvl1pPr indent="-342900" lvl="0" marL="457200" algn="l">
               <a:lnSpc>
                 <a:spcPct val="90000"/>
               </a:lnSpc>
@@ -8537,7 +8379,7 @@
               <a:buChar char="•"/>
               <a:defRPr/>
             </a:lvl1pPr>
-            <a:lvl2pPr marL="914400" lvl="1" indent="-342900" algn="l">
+            <a:lvl2pPr indent="-342900" lvl="1" marL="914400" algn="l">
               <a:lnSpc>
                 <a:spcPct val="90000"/>
               </a:lnSpc>
@@ -8554,7 +8396,7 @@
               <a:buChar char="•"/>
               <a:defRPr/>
             </a:lvl2pPr>
-            <a:lvl3pPr marL="1371600" lvl="2" indent="-342900" algn="l">
+            <a:lvl3pPr indent="-342900" lvl="2" marL="1371600" algn="l">
               <a:lnSpc>
                 <a:spcPct val="90000"/>
               </a:lnSpc>
@@ -8571,7 +8413,7 @@
               <a:buChar char="•"/>
               <a:defRPr/>
             </a:lvl3pPr>
-            <a:lvl4pPr marL="1828800" lvl="3" indent="-342900" algn="l">
+            <a:lvl4pPr indent="-342900" lvl="3" marL="1828800" algn="l">
               <a:lnSpc>
                 <a:spcPct val="90000"/>
               </a:lnSpc>
@@ -8588,7 +8430,7 @@
               <a:buChar char="•"/>
               <a:defRPr/>
             </a:lvl4pPr>
-            <a:lvl5pPr marL="2286000" lvl="4" indent="-342900" algn="l">
+            <a:lvl5pPr indent="-342900" lvl="4" marL="2286000" algn="l">
               <a:lnSpc>
                 <a:spcPct val="90000"/>
               </a:lnSpc>
@@ -8605,7 +8447,7 @@
               <a:buChar char="•"/>
               <a:defRPr/>
             </a:lvl5pPr>
-            <a:lvl6pPr marL="2743200" lvl="5" indent="-342900" algn="l">
+            <a:lvl6pPr indent="-342900" lvl="5" marL="2743200" algn="l">
               <a:lnSpc>
                 <a:spcPct val="90000"/>
               </a:lnSpc>
@@ -8622,7 +8464,7 @@
               <a:buChar char="•"/>
               <a:defRPr/>
             </a:lvl6pPr>
-            <a:lvl7pPr marL="3200400" lvl="6" indent="-342900" algn="l">
+            <a:lvl7pPr indent="-342900" lvl="6" marL="3200400" algn="l">
               <a:lnSpc>
                 <a:spcPct val="90000"/>
               </a:lnSpc>
@@ -8639,7 +8481,7 @@
               <a:buChar char="•"/>
               <a:defRPr/>
             </a:lvl7pPr>
-            <a:lvl8pPr marL="3657600" lvl="7" indent="-342900" algn="l">
+            <a:lvl8pPr indent="-342900" lvl="7" marL="3657600" algn="l">
               <a:lnSpc>
                 <a:spcPct val="90000"/>
               </a:lnSpc>
@@ -8656,7 +8498,7 @@
               <a:buChar char="•"/>
               <a:defRPr/>
             </a:lvl8pPr>
-            <a:lvl9pPr marL="4114800" lvl="8" indent="-342900" algn="l">
+            <a:lvl9pPr indent="-342900" lvl="8" marL="4114800" algn="l">
               <a:lnSpc>
                 <a:spcPct val="90000"/>
               </a:lnSpc>
@@ -8674,19 +8516,15 @@
               <a:defRPr/>
             </a:lvl9pPr>
           </a:lstStyle>
-          <a:p>
-            <a:endParaRPr/>
-          </a:p>
+          <a:p/>
         </p:txBody>
       </p:sp>
       <p:sp>
         <p:nvSpPr>
           <p:cNvPr id="43" name="Google Shape;43;p8"/>
-          <p:cNvSpPr txBox="1">
-            <a:spLocks noGrp="1"/>
-          </p:cNvSpPr>
+          <p:cNvSpPr txBox="1"/>
           <p:nvPr>
-            <p:ph type="body" idx="3"/>
+            <p:ph idx="3" type="body"/>
           </p:nvPr>
         </p:nvSpPr>
         <p:spPr>
@@ -8703,11 +8541,11 @@
           </a:ln>
         </p:spPr>
         <p:txBody>
-          <a:bodyPr spcFirstLastPara="1" wrap="square" lIns="91425" tIns="45700" rIns="91425" bIns="45700" anchor="b" anchorCtr="0">
+          <a:bodyPr anchorCtr="0" anchor="b" bIns="45700" lIns="91425" spcFirstLastPara="1" rIns="91425" wrap="square" tIns="45700">
             <a:normAutofit/>
           </a:bodyPr>
           <a:lstStyle>
-            <a:lvl1pPr marL="457200" lvl="0" indent="-228600" algn="l">
+            <a:lvl1pPr indent="-228600" lvl="0" marL="457200" algn="l">
               <a:lnSpc>
                 <a:spcPct val="90000"/>
               </a:lnSpc>
@@ -8722,9 +8560,9 @@
               </a:buClr>
               <a:buSzPts val="11520"/>
               <a:buNone/>
-              <a:defRPr sz="11520" b="1"/>
+              <a:defRPr b="1" sz="11520"/>
             </a:lvl1pPr>
-            <a:lvl2pPr marL="914400" lvl="1" indent="-228600" algn="l">
+            <a:lvl2pPr indent="-228600" lvl="1" marL="914400" algn="l">
               <a:lnSpc>
                 <a:spcPct val="90000"/>
               </a:lnSpc>
@@ -8739,9 +8577,9 @@
               </a:buClr>
               <a:buSzPts val="9600"/>
               <a:buNone/>
-              <a:defRPr sz="9600" b="1"/>
+              <a:defRPr b="1" sz="9600"/>
             </a:lvl2pPr>
-            <a:lvl3pPr marL="1371600" lvl="2" indent="-228600" algn="l">
+            <a:lvl3pPr indent="-228600" lvl="2" marL="1371600" algn="l">
               <a:lnSpc>
                 <a:spcPct val="90000"/>
               </a:lnSpc>
@@ -8756,9 +8594,9 @@
               </a:buClr>
               <a:buSzPts val="8640"/>
               <a:buNone/>
-              <a:defRPr sz="8640" b="1"/>
+              <a:defRPr b="1" sz="8640"/>
             </a:lvl3pPr>
-            <a:lvl4pPr marL="1828800" lvl="3" indent="-228600" algn="l">
+            <a:lvl4pPr indent="-228600" lvl="3" marL="1828800" algn="l">
               <a:lnSpc>
                 <a:spcPct val="90000"/>
               </a:lnSpc>
@@ -8773,9 +8611,9 @@
               </a:buClr>
               <a:buSzPts val="7680"/>
               <a:buNone/>
-              <a:defRPr sz="7680" b="1"/>
+              <a:defRPr b="1" sz="7680"/>
             </a:lvl4pPr>
-            <a:lvl5pPr marL="2286000" lvl="4" indent="-228600" algn="l">
+            <a:lvl5pPr indent="-228600" lvl="4" marL="2286000" algn="l">
               <a:lnSpc>
                 <a:spcPct val="90000"/>
               </a:lnSpc>
@@ -8790,9 +8628,9 @@
               </a:buClr>
               <a:buSzPts val="7680"/>
               <a:buNone/>
-              <a:defRPr sz="7680" b="1"/>
+              <a:defRPr b="1" sz="7680"/>
             </a:lvl5pPr>
-            <a:lvl6pPr marL="2743200" lvl="5" indent="-228600" algn="l">
+            <a:lvl6pPr indent="-228600" lvl="5" marL="2743200" algn="l">
               <a:lnSpc>
                 <a:spcPct val="90000"/>
               </a:lnSpc>
@@ -8807,9 +8645,9 @@
               </a:buClr>
               <a:buSzPts val="7680"/>
               <a:buNone/>
-              <a:defRPr sz="7680" b="1"/>
+              <a:defRPr b="1" sz="7680"/>
             </a:lvl6pPr>
-            <a:lvl7pPr marL="3200400" lvl="6" indent="-228600" algn="l">
+            <a:lvl7pPr indent="-228600" lvl="6" marL="3200400" algn="l">
               <a:lnSpc>
                 <a:spcPct val="90000"/>
               </a:lnSpc>
@@ -8824,9 +8662,9 @@
               </a:buClr>
               <a:buSzPts val="7680"/>
               <a:buNone/>
-              <a:defRPr sz="7680" b="1"/>
+              <a:defRPr b="1" sz="7680"/>
             </a:lvl7pPr>
-            <a:lvl8pPr marL="3657600" lvl="7" indent="-228600" algn="l">
+            <a:lvl8pPr indent="-228600" lvl="7" marL="3657600" algn="l">
               <a:lnSpc>
                 <a:spcPct val="90000"/>
               </a:lnSpc>
@@ -8841,9 +8679,9 @@
               </a:buClr>
               <a:buSzPts val="7680"/>
               <a:buNone/>
-              <a:defRPr sz="7680" b="1"/>
+              <a:defRPr b="1" sz="7680"/>
             </a:lvl8pPr>
-            <a:lvl9pPr marL="4114800" lvl="8" indent="-228600" algn="l">
+            <a:lvl9pPr indent="-228600" lvl="8" marL="4114800" algn="l">
               <a:lnSpc>
                 <a:spcPct val="90000"/>
               </a:lnSpc>
@@ -8858,22 +8696,18 @@
               </a:buClr>
               <a:buSzPts val="7680"/>
               <a:buNone/>
-              <a:defRPr sz="7680" b="1"/>
+              <a:defRPr b="1" sz="7680"/>
             </a:lvl9pPr>
           </a:lstStyle>
-          <a:p>
-            <a:endParaRPr/>
-          </a:p>
+          <a:p/>
         </p:txBody>
       </p:sp>
       <p:sp>
         <p:nvSpPr>
           <p:cNvPr id="44" name="Google Shape;44;p8"/>
-          <p:cNvSpPr txBox="1">
-            <a:spLocks noGrp="1"/>
-          </p:cNvSpPr>
+          <p:cNvSpPr txBox="1"/>
           <p:nvPr>
-            <p:ph type="body" idx="4"/>
+            <p:ph idx="4" type="body"/>
           </p:nvPr>
         </p:nvSpPr>
         <p:spPr>
@@ -8890,11 +8724,11 @@
           </a:ln>
         </p:spPr>
         <p:txBody>
-          <a:bodyPr spcFirstLastPara="1" wrap="square" lIns="91425" tIns="45700" rIns="91425" bIns="45700" anchor="t" anchorCtr="0">
+          <a:bodyPr anchorCtr="0" anchor="t" bIns="45700" lIns="91425" spcFirstLastPara="1" rIns="91425" wrap="square" tIns="45700">
             <a:normAutofit/>
           </a:bodyPr>
           <a:lstStyle>
-            <a:lvl1pPr marL="457200" lvl="0" indent="-342900" algn="l">
+            <a:lvl1pPr indent="-342900" lvl="0" marL="457200" algn="l">
               <a:lnSpc>
                 <a:spcPct val="90000"/>
               </a:lnSpc>
@@ -8911,7 +8745,7 @@
               <a:buChar char="•"/>
               <a:defRPr/>
             </a:lvl1pPr>
-            <a:lvl2pPr marL="914400" lvl="1" indent="-342900" algn="l">
+            <a:lvl2pPr indent="-342900" lvl="1" marL="914400" algn="l">
               <a:lnSpc>
                 <a:spcPct val="90000"/>
               </a:lnSpc>
@@ -8928,7 +8762,7 @@
               <a:buChar char="•"/>
               <a:defRPr/>
             </a:lvl2pPr>
-            <a:lvl3pPr marL="1371600" lvl="2" indent="-342900" algn="l">
+            <a:lvl3pPr indent="-342900" lvl="2" marL="1371600" algn="l">
               <a:lnSpc>
                 <a:spcPct val="90000"/>
               </a:lnSpc>
@@ -8945,7 +8779,7 @@
               <a:buChar char="•"/>
               <a:defRPr/>
             </a:lvl3pPr>
-            <a:lvl4pPr marL="1828800" lvl="3" indent="-342900" algn="l">
+            <a:lvl4pPr indent="-342900" lvl="3" marL="1828800" algn="l">
               <a:lnSpc>
                 <a:spcPct val="90000"/>
               </a:lnSpc>
@@ -8962,7 +8796,7 @@
               <a:buChar char="•"/>
               <a:defRPr/>
             </a:lvl4pPr>
-            <a:lvl5pPr marL="2286000" lvl="4" indent="-342900" algn="l">
+            <a:lvl5pPr indent="-342900" lvl="4" marL="2286000" algn="l">
               <a:lnSpc>
                 <a:spcPct val="90000"/>
               </a:lnSpc>
@@ -8979,7 +8813,7 @@
               <a:buChar char="•"/>
               <a:defRPr/>
             </a:lvl5pPr>
-            <a:lvl6pPr marL="2743200" lvl="5" indent="-342900" algn="l">
+            <a:lvl6pPr indent="-342900" lvl="5" marL="2743200" algn="l">
               <a:lnSpc>
                 <a:spcPct val="90000"/>
               </a:lnSpc>
@@ -8996,7 +8830,7 @@
               <a:buChar char="•"/>
               <a:defRPr/>
             </a:lvl6pPr>
-            <a:lvl7pPr marL="3200400" lvl="6" indent="-342900" algn="l">
+            <a:lvl7pPr indent="-342900" lvl="6" marL="3200400" algn="l">
               <a:lnSpc>
                 <a:spcPct val="90000"/>
               </a:lnSpc>
@@ -9013,7 +8847,7 @@
               <a:buChar char="•"/>
               <a:defRPr/>
             </a:lvl7pPr>
-            <a:lvl8pPr marL="3657600" lvl="7" indent="-342900" algn="l">
+            <a:lvl8pPr indent="-342900" lvl="7" marL="3657600" algn="l">
               <a:lnSpc>
                 <a:spcPct val="90000"/>
               </a:lnSpc>
@@ -9030,7 +8864,7 @@
               <a:buChar char="•"/>
               <a:defRPr/>
             </a:lvl8pPr>
-            <a:lvl9pPr marL="4114800" lvl="8" indent="-342900" algn="l">
+            <a:lvl9pPr indent="-342900" lvl="8" marL="4114800" algn="l">
               <a:lnSpc>
                 <a:spcPct val="90000"/>
               </a:lnSpc>
@@ -9048,19 +8882,15 @@
               <a:defRPr/>
             </a:lvl9pPr>
           </a:lstStyle>
-          <a:p>
-            <a:endParaRPr/>
-          </a:p>
+          <a:p/>
         </p:txBody>
       </p:sp>
       <p:sp>
         <p:nvSpPr>
           <p:cNvPr id="45" name="Google Shape;45;p8"/>
-          <p:cNvSpPr txBox="1">
-            <a:spLocks noGrp="1"/>
-          </p:cNvSpPr>
+          <p:cNvSpPr txBox="1"/>
           <p:nvPr>
-            <p:ph type="dt" idx="10"/>
+            <p:ph idx="10" type="dt"/>
           </p:nvPr>
         </p:nvSpPr>
         <p:spPr>
@@ -9077,7 +8907,7 @@
           </a:ln>
         </p:spPr>
         <p:txBody>
-          <a:bodyPr spcFirstLastPara="1" wrap="square" lIns="91425" tIns="45700" rIns="91425" bIns="45700" anchor="ctr" anchorCtr="0">
+          <a:bodyPr anchorCtr="0" anchor="ctr" bIns="45700" lIns="91425" spcFirstLastPara="1" rIns="91425" wrap="square" tIns="45700">
             <a:noAutofit/>
           </a:bodyPr>
           <a:lstStyle>
@@ -9208,19 +9038,15 @@
               <a:defRPr/>
             </a:lvl9pPr>
           </a:lstStyle>
-          <a:p>
-            <a:endParaRPr/>
-          </a:p>
+          <a:p/>
         </p:txBody>
       </p:sp>
       <p:sp>
         <p:nvSpPr>
           <p:cNvPr id="46" name="Google Shape;46;p8"/>
-          <p:cNvSpPr txBox="1">
-            <a:spLocks noGrp="1"/>
-          </p:cNvSpPr>
+          <p:cNvSpPr txBox="1"/>
           <p:nvPr>
-            <p:ph type="ftr" idx="11"/>
+            <p:ph idx="11" type="ftr"/>
           </p:nvPr>
         </p:nvSpPr>
         <p:spPr>
@@ -9237,7 +9063,7 @@
           </a:ln>
         </p:spPr>
         <p:txBody>
-          <a:bodyPr spcFirstLastPara="1" wrap="square" lIns="91425" tIns="45700" rIns="91425" bIns="45700" anchor="ctr" anchorCtr="0">
+          <a:bodyPr anchorCtr="0" anchor="ctr" bIns="45700" lIns="91425" spcFirstLastPara="1" rIns="91425" wrap="square" tIns="45700">
             <a:noAutofit/>
           </a:bodyPr>
           <a:lstStyle>
@@ -9368,19 +9194,15 @@
               <a:defRPr/>
             </a:lvl9pPr>
           </a:lstStyle>
-          <a:p>
-            <a:endParaRPr/>
-          </a:p>
+          <a:p/>
         </p:txBody>
       </p:sp>
       <p:sp>
         <p:nvSpPr>
           <p:cNvPr id="47" name="Google Shape;47;p8"/>
-          <p:cNvSpPr txBox="1">
-            <a:spLocks noGrp="1"/>
-          </p:cNvSpPr>
+          <p:cNvSpPr txBox="1"/>
           <p:nvPr>
-            <p:ph type="sldNum" idx="12"/>
+            <p:ph idx="12" type="sldNum"/>
           </p:nvPr>
         </p:nvSpPr>
         <p:spPr>
@@ -9397,11 +9219,11 @@
           </a:ln>
         </p:spPr>
         <p:txBody>
-          <a:bodyPr spcFirstLastPara="1" wrap="square" lIns="91425" tIns="45700" rIns="91425" bIns="45700" anchor="ctr" anchorCtr="0">
+          <a:bodyPr anchorCtr="0" anchor="ctr" bIns="45700" lIns="91425" spcFirstLastPara="1" rIns="91425" wrap="square" tIns="45700">
             <a:noAutofit/>
           </a:bodyPr>
           <a:lstStyle>
-            <a:lvl1pPr marL="0" marR="0" lvl="0" indent="0" algn="r">
+            <a:lvl1pPr indent="0" lvl="0" marL="0" marR="0" algn="r">
               <a:lnSpc>
                 <a:spcPct val="100000"/>
               </a:lnSpc>
@@ -9417,7 +9239,7 @@
               <a:buSzPts val="5760"/>
               <a:buFont typeface="Arial"/>
               <a:buNone/>
-              <a:defRPr sz="5760" b="0" i="0" u="none" strike="noStrike" cap="none">
+              <a:defRPr b="0" i="0" sz="5760" u="none" cap="none" strike="noStrike">
                 <a:solidFill>
                   <a:srgbClr val="888888"/>
                 </a:solidFill>
@@ -9427,7 +9249,7 @@
                 <a:sym typeface="Calibri"/>
               </a:defRPr>
             </a:lvl1pPr>
-            <a:lvl2pPr marL="0" marR="0" lvl="1" indent="0" algn="r">
+            <a:lvl2pPr indent="0" lvl="1" marL="0" marR="0" algn="r">
               <a:lnSpc>
                 <a:spcPct val="100000"/>
               </a:lnSpc>
@@ -9443,7 +9265,7 @@
               <a:buSzPts val="5760"/>
               <a:buFont typeface="Arial"/>
               <a:buNone/>
-              <a:defRPr sz="5760" b="0" i="0" u="none" strike="noStrike" cap="none">
+              <a:defRPr b="0" i="0" sz="5760" u="none" cap="none" strike="noStrike">
                 <a:solidFill>
                   <a:srgbClr val="888888"/>
                 </a:solidFill>
@@ -9453,7 +9275,7 @@
                 <a:sym typeface="Calibri"/>
               </a:defRPr>
             </a:lvl2pPr>
-            <a:lvl3pPr marL="0" marR="0" lvl="2" indent="0" algn="r">
+            <a:lvl3pPr indent="0" lvl="2" marL="0" marR="0" algn="r">
               <a:lnSpc>
                 <a:spcPct val="100000"/>
               </a:lnSpc>
@@ -9469,7 +9291,7 @@
               <a:buSzPts val="5760"/>
               <a:buFont typeface="Arial"/>
               <a:buNone/>
-              <a:defRPr sz="5760" b="0" i="0" u="none" strike="noStrike" cap="none">
+              <a:defRPr b="0" i="0" sz="5760" u="none" cap="none" strike="noStrike">
                 <a:solidFill>
                   <a:srgbClr val="888888"/>
                 </a:solidFill>
@@ -9479,7 +9301,7 @@
                 <a:sym typeface="Calibri"/>
               </a:defRPr>
             </a:lvl3pPr>
-            <a:lvl4pPr marL="0" marR="0" lvl="3" indent="0" algn="r">
+            <a:lvl4pPr indent="0" lvl="3" marL="0" marR="0" algn="r">
               <a:lnSpc>
                 <a:spcPct val="100000"/>
               </a:lnSpc>
@@ -9495,7 +9317,7 @@
               <a:buSzPts val="5760"/>
               <a:buFont typeface="Arial"/>
               <a:buNone/>
-              <a:defRPr sz="5760" b="0" i="0" u="none" strike="noStrike" cap="none">
+              <a:defRPr b="0" i="0" sz="5760" u="none" cap="none" strike="noStrike">
                 <a:solidFill>
                   <a:srgbClr val="888888"/>
                 </a:solidFill>
@@ -9505,7 +9327,7 @@
                 <a:sym typeface="Calibri"/>
               </a:defRPr>
             </a:lvl4pPr>
-            <a:lvl5pPr marL="0" marR="0" lvl="4" indent="0" algn="r">
+            <a:lvl5pPr indent="0" lvl="4" marL="0" marR="0" algn="r">
               <a:lnSpc>
                 <a:spcPct val="100000"/>
               </a:lnSpc>
@@ -9521,7 +9343,7 @@
               <a:buSzPts val="5760"/>
               <a:buFont typeface="Arial"/>
               <a:buNone/>
-              <a:defRPr sz="5760" b="0" i="0" u="none" strike="noStrike" cap="none">
+              <a:defRPr b="0" i="0" sz="5760" u="none" cap="none" strike="noStrike">
                 <a:solidFill>
                   <a:srgbClr val="888888"/>
                 </a:solidFill>
@@ -9531,7 +9353,7 @@
                 <a:sym typeface="Calibri"/>
               </a:defRPr>
             </a:lvl5pPr>
-            <a:lvl6pPr marL="0" marR="0" lvl="5" indent="0" algn="r">
+            <a:lvl6pPr indent="0" lvl="5" marL="0" marR="0" algn="r">
               <a:lnSpc>
                 <a:spcPct val="100000"/>
               </a:lnSpc>
@@ -9547,7 +9369,7 @@
               <a:buSzPts val="5760"/>
               <a:buFont typeface="Arial"/>
               <a:buNone/>
-              <a:defRPr sz="5760" b="0" i="0" u="none" strike="noStrike" cap="none">
+              <a:defRPr b="0" i="0" sz="5760" u="none" cap="none" strike="noStrike">
                 <a:solidFill>
                   <a:srgbClr val="888888"/>
                 </a:solidFill>
@@ -9557,7 +9379,7 @@
                 <a:sym typeface="Calibri"/>
               </a:defRPr>
             </a:lvl6pPr>
-            <a:lvl7pPr marL="0" marR="0" lvl="6" indent="0" algn="r">
+            <a:lvl7pPr indent="0" lvl="6" marL="0" marR="0" algn="r">
               <a:lnSpc>
                 <a:spcPct val="100000"/>
               </a:lnSpc>
@@ -9573,7 +9395,7 @@
               <a:buSzPts val="5760"/>
               <a:buFont typeface="Arial"/>
               <a:buNone/>
-              <a:defRPr sz="5760" b="0" i="0" u="none" strike="noStrike" cap="none">
+              <a:defRPr b="0" i="0" sz="5760" u="none" cap="none" strike="noStrike">
                 <a:solidFill>
                   <a:srgbClr val="888888"/>
                 </a:solidFill>
@@ -9583,7 +9405,7 @@
                 <a:sym typeface="Calibri"/>
               </a:defRPr>
             </a:lvl7pPr>
-            <a:lvl8pPr marL="0" marR="0" lvl="7" indent="0" algn="r">
+            <a:lvl8pPr indent="0" lvl="7" marL="0" marR="0" algn="r">
               <a:lnSpc>
                 <a:spcPct val="100000"/>
               </a:lnSpc>
@@ -9599,7 +9421,7 @@
               <a:buSzPts val="5760"/>
               <a:buFont typeface="Arial"/>
               <a:buNone/>
-              <a:defRPr sz="5760" b="0" i="0" u="none" strike="noStrike" cap="none">
+              <a:defRPr b="0" i="0" sz="5760" u="none" cap="none" strike="noStrike">
                 <a:solidFill>
                   <a:srgbClr val="888888"/>
                 </a:solidFill>
@@ -9609,7 +9431,7 @@
                 <a:sym typeface="Calibri"/>
               </a:defRPr>
             </a:lvl8pPr>
-            <a:lvl9pPr marL="0" marR="0" lvl="8" indent="0" algn="r">
+            <a:lvl9pPr indent="0" lvl="8" marL="0" marR="0" algn="r">
               <a:lnSpc>
                 <a:spcPct val="100000"/>
               </a:lnSpc>
@@ -9625,7 +9447,7 @@
               <a:buSzPts val="5760"/>
               <a:buFont typeface="Arial"/>
               <a:buNone/>
-              <a:defRPr sz="5760" b="0" i="0" u="none" strike="noStrike" cap="none">
+              <a:defRPr b="0" i="0" sz="5760" u="none" cap="none" strike="noStrike">
                 <a:solidFill>
                   <a:srgbClr val="888888"/>
                 </a:solidFill>
@@ -9637,7 +9459,7 @@
             </a:lvl9pPr>
           </a:lstStyle>
           <a:p>
-            <a:pPr marL="0" lvl="0" indent="0" algn="r" rtl="0">
+            <a:pPr indent="0" lvl="0" marL="0" rtl="0" algn="r">
               <a:spcBef>
                 <a:spcPts val="0"/>
               </a:spcBef>
@@ -9663,11 +9485,11 @@
 </file>
 
 <file path=ppt/slideLayouts/slideLayout7.xml><?xml version="1.0" encoding="utf-8"?>
-<p:sldLayout xmlns:a="http://schemas.openxmlformats.org/drawingml/2006/main" xmlns:r="http://schemas.openxmlformats.org/officeDocument/2006/relationships" xmlns:p="http://schemas.openxmlformats.org/presentationml/2006/main" matchingName="Title Only" type="titleOnly">
+<p:sldLayout xmlns:a="http://schemas.openxmlformats.org/drawingml/2006/main" xmlns:r="http://schemas.openxmlformats.org/officeDocument/2006/relationships" xmlns:mc="http://schemas.openxmlformats.org/markup-compatibility/2006" xmlns:mv="urn:schemas-microsoft-com:mac:vml" xmlns:p="http://schemas.openxmlformats.org/presentationml/2006/main" xmlns:c="http://schemas.openxmlformats.org/drawingml/2006/chart" xmlns:dgm="http://schemas.openxmlformats.org/drawingml/2006/diagram" xmlns:o="urn:schemas-microsoft-com:office:office" xmlns:v="urn:schemas-microsoft-com:vml" xmlns:pvml="urn:schemas-microsoft-com:office:powerpoint" xmlns:com="http://schemas.openxmlformats.org/drawingml/2006/compatibility" xmlns:p14="http://schemas.microsoft.com/office/powerpoint/2010/main" xmlns:p15="http://schemas.microsoft.com/office/powerpoint/2012/main" xmlns:ahyp="http://schemas.microsoft.com/office/drawing/2018/hyperlinkcolor" matchingName="Title Only" type="titleOnly">
   <p:cSld name="TITLE_ONLY">
     <p:spTree>
       <p:nvGrpSpPr>
-        <p:cNvPr id="1" name="Shape 48"/>
+        <p:cNvPr id="48" name="Shape 48"/>
         <p:cNvGrpSpPr/>
         <p:nvPr/>
       </p:nvGrpSpPr>
@@ -9682,9 +9504,7 @@
       <p:sp>
         <p:nvSpPr>
           <p:cNvPr id="49" name="Google Shape;49;p9"/>
-          <p:cNvSpPr txBox="1">
-            <a:spLocks noGrp="1"/>
-          </p:cNvSpPr>
+          <p:cNvSpPr txBox="1"/>
           <p:nvPr>
             <p:ph type="title"/>
           </p:nvPr>
@@ -9703,7 +9523,7 @@
           </a:ln>
         </p:spPr>
         <p:txBody>
-          <a:bodyPr spcFirstLastPara="1" wrap="square" lIns="91425" tIns="45700" rIns="91425" bIns="45700" anchor="ctr" anchorCtr="0">
+          <a:bodyPr anchorCtr="0" anchor="ctr" bIns="45700" lIns="91425" spcFirstLastPara="1" rIns="91425" wrap="square" tIns="45700">
             <a:normAutofit/>
           </a:bodyPr>
           <a:lstStyle>
@@ -9837,19 +9657,15 @@
               <a:defRPr/>
             </a:lvl9pPr>
           </a:lstStyle>
-          <a:p>
-            <a:endParaRPr/>
-          </a:p>
+          <a:p/>
         </p:txBody>
       </p:sp>
       <p:sp>
         <p:nvSpPr>
           <p:cNvPr id="50" name="Google Shape;50;p9"/>
-          <p:cNvSpPr txBox="1">
-            <a:spLocks noGrp="1"/>
-          </p:cNvSpPr>
+          <p:cNvSpPr txBox="1"/>
           <p:nvPr>
-            <p:ph type="dt" idx="10"/>
+            <p:ph idx="10" type="dt"/>
           </p:nvPr>
         </p:nvSpPr>
         <p:spPr>
@@ -9866,7 +9682,7 @@
           </a:ln>
         </p:spPr>
         <p:txBody>
-          <a:bodyPr spcFirstLastPara="1" wrap="square" lIns="91425" tIns="45700" rIns="91425" bIns="45700" anchor="ctr" anchorCtr="0">
+          <a:bodyPr anchorCtr="0" anchor="ctr" bIns="45700" lIns="91425" spcFirstLastPara="1" rIns="91425" wrap="square" tIns="45700">
             <a:noAutofit/>
           </a:bodyPr>
           <a:lstStyle>
@@ -9997,19 +9813,15 @@
               <a:defRPr/>
             </a:lvl9pPr>
           </a:lstStyle>
-          <a:p>
-            <a:endParaRPr/>
-          </a:p>
+          <a:p/>
         </p:txBody>
       </p:sp>
       <p:sp>
         <p:nvSpPr>
           <p:cNvPr id="51" name="Google Shape;51;p9"/>
-          <p:cNvSpPr txBox="1">
-            <a:spLocks noGrp="1"/>
-          </p:cNvSpPr>
+          <p:cNvSpPr txBox="1"/>
           <p:nvPr>
-            <p:ph type="ftr" idx="11"/>
+            <p:ph idx="11" type="ftr"/>
           </p:nvPr>
         </p:nvSpPr>
         <p:spPr>
@@ -10026,7 +9838,7 @@
           </a:ln>
         </p:spPr>
         <p:txBody>
-          <a:bodyPr spcFirstLastPara="1" wrap="square" lIns="91425" tIns="45700" rIns="91425" bIns="45700" anchor="ctr" anchorCtr="0">
+          <a:bodyPr anchorCtr="0" anchor="ctr" bIns="45700" lIns="91425" spcFirstLastPara="1" rIns="91425" wrap="square" tIns="45700">
             <a:noAutofit/>
           </a:bodyPr>
           <a:lstStyle>
@@ -10157,19 +9969,15 @@
               <a:defRPr/>
             </a:lvl9pPr>
           </a:lstStyle>
-          <a:p>
-            <a:endParaRPr/>
-          </a:p>
+          <a:p/>
         </p:txBody>
       </p:sp>
       <p:sp>
         <p:nvSpPr>
           <p:cNvPr id="52" name="Google Shape;52;p9"/>
-          <p:cNvSpPr txBox="1">
-            <a:spLocks noGrp="1"/>
-          </p:cNvSpPr>
+          <p:cNvSpPr txBox="1"/>
           <p:nvPr>
-            <p:ph type="sldNum" idx="12"/>
+            <p:ph idx="12" type="sldNum"/>
           </p:nvPr>
         </p:nvSpPr>
         <p:spPr>
@@ -10186,11 +9994,11 @@
           </a:ln>
         </p:spPr>
         <p:txBody>
-          <a:bodyPr spcFirstLastPara="1" wrap="square" lIns="91425" tIns="45700" rIns="91425" bIns="45700" anchor="ctr" anchorCtr="0">
+          <a:bodyPr anchorCtr="0" anchor="ctr" bIns="45700" lIns="91425" spcFirstLastPara="1" rIns="91425" wrap="square" tIns="45700">
             <a:noAutofit/>
           </a:bodyPr>
           <a:lstStyle>
-            <a:lvl1pPr marL="0" marR="0" lvl="0" indent="0" algn="r">
+            <a:lvl1pPr indent="0" lvl="0" marL="0" marR="0" algn="r">
               <a:lnSpc>
                 <a:spcPct val="100000"/>
               </a:lnSpc>
@@ -10206,7 +10014,7 @@
               <a:buSzPts val="5760"/>
               <a:buFont typeface="Arial"/>
               <a:buNone/>
-              <a:defRPr sz="5760" b="0" i="0" u="none" strike="noStrike" cap="none">
+              <a:defRPr b="0" i="0" sz="5760" u="none" cap="none" strike="noStrike">
                 <a:solidFill>
                   <a:srgbClr val="888888"/>
                 </a:solidFill>
@@ -10216,7 +10024,7 @@
                 <a:sym typeface="Calibri"/>
               </a:defRPr>
             </a:lvl1pPr>
-            <a:lvl2pPr marL="0" marR="0" lvl="1" indent="0" algn="r">
+            <a:lvl2pPr indent="0" lvl="1" marL="0" marR="0" algn="r">
               <a:lnSpc>
                 <a:spcPct val="100000"/>
               </a:lnSpc>
@@ -10232,7 +10040,7 @@
               <a:buSzPts val="5760"/>
               <a:buFont typeface="Arial"/>
               <a:buNone/>
-              <a:defRPr sz="5760" b="0" i="0" u="none" strike="noStrike" cap="none">
+              <a:defRPr b="0" i="0" sz="5760" u="none" cap="none" strike="noStrike">
                 <a:solidFill>
                   <a:srgbClr val="888888"/>
                 </a:solidFill>
@@ -10242,7 +10050,7 @@
                 <a:sym typeface="Calibri"/>
               </a:defRPr>
             </a:lvl2pPr>
-            <a:lvl3pPr marL="0" marR="0" lvl="2" indent="0" algn="r">
+            <a:lvl3pPr indent="0" lvl="2" marL="0" marR="0" algn="r">
               <a:lnSpc>
                 <a:spcPct val="100000"/>
               </a:lnSpc>
@@ -10258,7 +10066,7 @@
               <a:buSzPts val="5760"/>
               <a:buFont typeface="Arial"/>
               <a:buNone/>
-              <a:defRPr sz="5760" b="0" i="0" u="none" strike="noStrike" cap="none">
+              <a:defRPr b="0" i="0" sz="5760" u="none" cap="none" strike="noStrike">
                 <a:solidFill>
                   <a:srgbClr val="888888"/>
                 </a:solidFill>
@@ -10268,7 +10076,7 @@
                 <a:sym typeface="Calibri"/>
               </a:defRPr>
             </a:lvl3pPr>
-            <a:lvl4pPr marL="0" marR="0" lvl="3" indent="0" algn="r">
+            <a:lvl4pPr indent="0" lvl="3" marL="0" marR="0" algn="r">
               <a:lnSpc>
                 <a:spcPct val="100000"/>
               </a:lnSpc>
@@ -10284,7 +10092,7 @@
               <a:buSzPts val="5760"/>
               <a:buFont typeface="Arial"/>
               <a:buNone/>
-              <a:defRPr sz="5760" b="0" i="0" u="none" strike="noStrike" cap="none">
+              <a:defRPr b="0" i="0" sz="5760" u="none" cap="none" strike="noStrike">
                 <a:solidFill>
                   <a:srgbClr val="888888"/>
                 </a:solidFill>
@@ -10294,7 +10102,7 @@
                 <a:sym typeface="Calibri"/>
               </a:defRPr>
             </a:lvl4pPr>
-            <a:lvl5pPr marL="0" marR="0" lvl="4" indent="0" algn="r">
+            <a:lvl5pPr indent="0" lvl="4" marL="0" marR="0" algn="r">
               <a:lnSpc>
                 <a:spcPct val="100000"/>
               </a:lnSpc>
@@ -10310,7 +10118,7 @@
               <a:buSzPts val="5760"/>
               <a:buFont typeface="Arial"/>
               <a:buNone/>
-              <a:defRPr sz="5760" b="0" i="0" u="none" strike="noStrike" cap="none">
+              <a:defRPr b="0" i="0" sz="5760" u="none" cap="none" strike="noStrike">
                 <a:solidFill>
                   <a:srgbClr val="888888"/>
                 </a:solidFill>
@@ -10320,7 +10128,7 @@
                 <a:sym typeface="Calibri"/>
               </a:defRPr>
             </a:lvl5pPr>
-            <a:lvl6pPr marL="0" marR="0" lvl="5" indent="0" algn="r">
+            <a:lvl6pPr indent="0" lvl="5" marL="0" marR="0" algn="r">
               <a:lnSpc>
                 <a:spcPct val="100000"/>
               </a:lnSpc>
@@ -10336,7 +10144,7 @@
               <a:buSzPts val="5760"/>
               <a:buFont typeface="Arial"/>
               <a:buNone/>
-              <a:defRPr sz="5760" b="0" i="0" u="none" strike="noStrike" cap="none">
+              <a:defRPr b="0" i="0" sz="5760" u="none" cap="none" strike="noStrike">
                 <a:solidFill>
                   <a:srgbClr val="888888"/>
                 </a:solidFill>
@@ -10346,7 +10154,7 @@
                 <a:sym typeface="Calibri"/>
               </a:defRPr>
             </a:lvl6pPr>
-            <a:lvl7pPr marL="0" marR="0" lvl="6" indent="0" algn="r">
+            <a:lvl7pPr indent="0" lvl="6" marL="0" marR="0" algn="r">
               <a:lnSpc>
                 <a:spcPct val="100000"/>
               </a:lnSpc>
@@ -10362,7 +10170,7 @@
               <a:buSzPts val="5760"/>
               <a:buFont typeface="Arial"/>
               <a:buNone/>
-              <a:defRPr sz="5760" b="0" i="0" u="none" strike="noStrike" cap="none">
+              <a:defRPr b="0" i="0" sz="5760" u="none" cap="none" strike="noStrike">
                 <a:solidFill>
                   <a:srgbClr val="888888"/>
                 </a:solidFill>
@@ -10372,7 +10180,7 @@
                 <a:sym typeface="Calibri"/>
               </a:defRPr>
             </a:lvl7pPr>
-            <a:lvl8pPr marL="0" marR="0" lvl="7" indent="0" algn="r">
+            <a:lvl8pPr indent="0" lvl="7" marL="0" marR="0" algn="r">
               <a:lnSpc>
                 <a:spcPct val="100000"/>
               </a:lnSpc>
@@ -10388,7 +10196,7 @@
               <a:buSzPts val="5760"/>
               <a:buFont typeface="Arial"/>
               <a:buNone/>
-              <a:defRPr sz="5760" b="0" i="0" u="none" strike="noStrike" cap="none">
+              <a:defRPr b="0" i="0" sz="5760" u="none" cap="none" strike="noStrike">
                 <a:solidFill>
                   <a:srgbClr val="888888"/>
                 </a:solidFill>
@@ -10398,7 +10206,7 @@
                 <a:sym typeface="Calibri"/>
               </a:defRPr>
             </a:lvl8pPr>
-            <a:lvl9pPr marL="0" marR="0" lvl="8" indent="0" algn="r">
+            <a:lvl9pPr indent="0" lvl="8" marL="0" marR="0" algn="r">
               <a:lnSpc>
                 <a:spcPct val="100000"/>
               </a:lnSpc>
@@ -10414,7 +10222,7 @@
               <a:buSzPts val="5760"/>
               <a:buFont typeface="Arial"/>
               <a:buNone/>
-              <a:defRPr sz="5760" b="0" i="0" u="none" strike="noStrike" cap="none">
+              <a:defRPr b="0" i="0" sz="5760" u="none" cap="none" strike="noStrike">
                 <a:solidFill>
                   <a:srgbClr val="888888"/>
                 </a:solidFill>
@@ -10426,7 +10234,7 @@
             </a:lvl9pPr>
           </a:lstStyle>
           <a:p>
-            <a:pPr marL="0" lvl="0" indent="0" algn="r" rtl="0">
+            <a:pPr indent="0" lvl="0" marL="0" rtl="0" algn="r">
               <a:spcBef>
                 <a:spcPts val="0"/>
               </a:spcBef>
@@ -10452,11 +10260,11 @@
 </file>
 
 <file path=ppt/slideLayouts/slideLayout8.xml><?xml version="1.0" encoding="utf-8"?>
-<p:sldLayout xmlns:a="http://schemas.openxmlformats.org/drawingml/2006/main" xmlns:r="http://schemas.openxmlformats.org/officeDocument/2006/relationships" xmlns:p="http://schemas.openxmlformats.org/presentationml/2006/main" matchingName="Blank" type="blank">
+<p:sldLayout xmlns:a="http://schemas.openxmlformats.org/drawingml/2006/main" xmlns:r="http://schemas.openxmlformats.org/officeDocument/2006/relationships" xmlns:mc="http://schemas.openxmlformats.org/markup-compatibility/2006" xmlns:mv="urn:schemas-microsoft-com:mac:vml" xmlns:p="http://schemas.openxmlformats.org/presentationml/2006/main" xmlns:c="http://schemas.openxmlformats.org/drawingml/2006/chart" xmlns:dgm="http://schemas.openxmlformats.org/drawingml/2006/diagram" xmlns:o="urn:schemas-microsoft-com:office:office" xmlns:v="urn:schemas-microsoft-com:vml" xmlns:pvml="urn:schemas-microsoft-com:office:powerpoint" xmlns:com="http://schemas.openxmlformats.org/drawingml/2006/compatibility" xmlns:p14="http://schemas.microsoft.com/office/powerpoint/2010/main" xmlns:p15="http://schemas.microsoft.com/office/powerpoint/2012/main" xmlns:ahyp="http://schemas.microsoft.com/office/drawing/2018/hyperlinkcolor" matchingName="Blank" type="blank">
   <p:cSld name="BLANK">
     <p:spTree>
       <p:nvGrpSpPr>
-        <p:cNvPr id="1" name="Shape 53"/>
+        <p:cNvPr id="53" name="Shape 53"/>
         <p:cNvGrpSpPr/>
         <p:nvPr/>
       </p:nvGrpSpPr>
@@ -10471,11 +10279,9 @@
       <p:sp>
         <p:nvSpPr>
           <p:cNvPr id="54" name="Google Shape;54;p10"/>
-          <p:cNvSpPr txBox="1">
-            <a:spLocks noGrp="1"/>
-          </p:cNvSpPr>
+          <p:cNvSpPr txBox="1"/>
           <p:nvPr>
-            <p:ph type="dt" idx="10"/>
+            <p:ph idx="10" type="dt"/>
           </p:nvPr>
         </p:nvSpPr>
         <p:spPr>
@@ -10492,7 +10298,7 @@
           </a:ln>
         </p:spPr>
         <p:txBody>
-          <a:bodyPr spcFirstLastPara="1" wrap="square" lIns="91425" tIns="45700" rIns="91425" bIns="45700" anchor="ctr" anchorCtr="0">
+          <a:bodyPr anchorCtr="0" anchor="ctr" bIns="45700" lIns="91425" spcFirstLastPara="1" rIns="91425" wrap="square" tIns="45700">
             <a:noAutofit/>
           </a:bodyPr>
           <a:lstStyle>
@@ -10623,19 +10429,15 @@
               <a:defRPr/>
             </a:lvl9pPr>
           </a:lstStyle>
-          <a:p>
-            <a:endParaRPr/>
-          </a:p>
+          <a:p/>
         </p:txBody>
       </p:sp>
       <p:sp>
         <p:nvSpPr>
           <p:cNvPr id="55" name="Google Shape;55;p10"/>
-          <p:cNvSpPr txBox="1">
-            <a:spLocks noGrp="1"/>
-          </p:cNvSpPr>
+          <p:cNvSpPr txBox="1"/>
           <p:nvPr>
-            <p:ph type="ftr" idx="11"/>
+            <p:ph idx="11" type="ftr"/>
           </p:nvPr>
         </p:nvSpPr>
         <p:spPr>
@@ -10652,7 +10454,7 @@
           </a:ln>
         </p:spPr>
         <p:txBody>
-          <a:bodyPr spcFirstLastPara="1" wrap="square" lIns="91425" tIns="45700" rIns="91425" bIns="45700" anchor="ctr" anchorCtr="0">
+          <a:bodyPr anchorCtr="0" anchor="ctr" bIns="45700" lIns="91425" spcFirstLastPara="1" rIns="91425" wrap="square" tIns="45700">
             <a:noAutofit/>
           </a:bodyPr>
           <a:lstStyle>
@@ -10783,19 +10585,15 @@
               <a:defRPr/>
             </a:lvl9pPr>
           </a:lstStyle>
-          <a:p>
-            <a:endParaRPr/>
-          </a:p>
+          <a:p/>
         </p:txBody>
       </p:sp>
       <p:sp>
         <p:nvSpPr>
           <p:cNvPr id="56" name="Google Shape;56;p10"/>
-          <p:cNvSpPr txBox="1">
-            <a:spLocks noGrp="1"/>
-          </p:cNvSpPr>
+          <p:cNvSpPr txBox="1"/>
           <p:nvPr>
-            <p:ph type="sldNum" idx="12"/>
+            <p:ph idx="12" type="sldNum"/>
           </p:nvPr>
         </p:nvSpPr>
         <p:spPr>
@@ -10812,11 +10610,11 @@
           </a:ln>
         </p:spPr>
         <p:txBody>
-          <a:bodyPr spcFirstLastPara="1" wrap="square" lIns="91425" tIns="45700" rIns="91425" bIns="45700" anchor="ctr" anchorCtr="0">
+          <a:bodyPr anchorCtr="0" anchor="ctr" bIns="45700" lIns="91425" spcFirstLastPara="1" rIns="91425" wrap="square" tIns="45700">
             <a:noAutofit/>
           </a:bodyPr>
           <a:lstStyle>
-            <a:lvl1pPr marL="0" marR="0" lvl="0" indent="0" algn="r">
+            <a:lvl1pPr indent="0" lvl="0" marL="0" marR="0" algn="r">
               <a:lnSpc>
                 <a:spcPct val="100000"/>
               </a:lnSpc>
@@ -10832,7 +10630,7 @@
               <a:buSzPts val="5760"/>
               <a:buFont typeface="Arial"/>
               <a:buNone/>
-              <a:defRPr sz="5760" b="0" i="0" u="none" strike="noStrike" cap="none">
+              <a:defRPr b="0" i="0" sz="5760" u="none" cap="none" strike="noStrike">
                 <a:solidFill>
                   <a:srgbClr val="888888"/>
                 </a:solidFill>
@@ -10842,7 +10640,7 @@
                 <a:sym typeface="Calibri"/>
               </a:defRPr>
             </a:lvl1pPr>
-            <a:lvl2pPr marL="0" marR="0" lvl="1" indent="0" algn="r">
+            <a:lvl2pPr indent="0" lvl="1" marL="0" marR="0" algn="r">
               <a:lnSpc>
                 <a:spcPct val="100000"/>
               </a:lnSpc>
@@ -10858,7 +10656,7 @@
               <a:buSzPts val="5760"/>
               <a:buFont typeface="Arial"/>
               <a:buNone/>
-              <a:defRPr sz="5760" b="0" i="0" u="none" strike="noStrike" cap="none">
+              <a:defRPr b="0" i="0" sz="5760" u="none" cap="none" strike="noStrike">
                 <a:solidFill>
                   <a:srgbClr val="888888"/>
                 </a:solidFill>
@@ -10868,7 +10666,7 @@
                 <a:sym typeface="Calibri"/>
               </a:defRPr>
             </a:lvl2pPr>
-            <a:lvl3pPr marL="0" marR="0" lvl="2" indent="0" algn="r">
+            <a:lvl3pPr indent="0" lvl="2" marL="0" marR="0" algn="r">
               <a:lnSpc>
                 <a:spcPct val="100000"/>
               </a:lnSpc>
@@ -10884,7 +10682,7 @@
               <a:buSzPts val="5760"/>
               <a:buFont typeface="Arial"/>
               <a:buNone/>
-              <a:defRPr sz="5760" b="0" i="0" u="none" strike="noStrike" cap="none">
+              <a:defRPr b="0" i="0" sz="5760" u="none" cap="none" strike="noStrike">
                 <a:solidFill>
                   <a:srgbClr val="888888"/>
                 </a:solidFill>
@@ -10894,7 +10692,7 @@
                 <a:sym typeface="Calibri"/>
               </a:defRPr>
             </a:lvl3pPr>
-            <a:lvl4pPr marL="0" marR="0" lvl="3" indent="0" algn="r">
+            <a:lvl4pPr indent="0" lvl="3" marL="0" marR="0" algn="r">
               <a:lnSpc>
                 <a:spcPct val="100000"/>
               </a:lnSpc>
@@ -10910,7 +10708,7 @@
               <a:buSzPts val="5760"/>
               <a:buFont typeface="Arial"/>
               <a:buNone/>
-              <a:defRPr sz="5760" b="0" i="0" u="none" strike="noStrike" cap="none">
+              <a:defRPr b="0" i="0" sz="5760" u="none" cap="none" strike="noStrike">
                 <a:solidFill>
                   <a:srgbClr val="888888"/>
                 </a:solidFill>
@@ -10920,7 +10718,7 @@
                 <a:sym typeface="Calibri"/>
               </a:defRPr>
             </a:lvl4pPr>
-            <a:lvl5pPr marL="0" marR="0" lvl="4" indent="0" algn="r">
+            <a:lvl5pPr indent="0" lvl="4" marL="0" marR="0" algn="r">
               <a:lnSpc>
                 <a:spcPct val="100000"/>
               </a:lnSpc>
@@ -10936,7 +10734,7 @@
               <a:buSzPts val="5760"/>
               <a:buFont typeface="Arial"/>
               <a:buNone/>
-              <a:defRPr sz="5760" b="0" i="0" u="none" strike="noStrike" cap="none">
+              <a:defRPr b="0" i="0" sz="5760" u="none" cap="none" strike="noStrike">
                 <a:solidFill>
                   <a:srgbClr val="888888"/>
                 </a:solidFill>
@@ -10946,7 +10744,7 @@
                 <a:sym typeface="Calibri"/>
               </a:defRPr>
             </a:lvl5pPr>
-            <a:lvl6pPr marL="0" marR="0" lvl="5" indent="0" algn="r">
+            <a:lvl6pPr indent="0" lvl="5" marL="0" marR="0" algn="r">
               <a:lnSpc>
                 <a:spcPct val="100000"/>
               </a:lnSpc>
@@ -10962,7 +10760,7 @@
               <a:buSzPts val="5760"/>
               <a:buFont typeface="Arial"/>
               <a:buNone/>
-              <a:defRPr sz="5760" b="0" i="0" u="none" strike="noStrike" cap="none">
+              <a:defRPr b="0" i="0" sz="5760" u="none" cap="none" strike="noStrike">
                 <a:solidFill>
                   <a:srgbClr val="888888"/>
                 </a:solidFill>
@@ -10972,7 +10770,7 @@
                 <a:sym typeface="Calibri"/>
               </a:defRPr>
             </a:lvl6pPr>
-            <a:lvl7pPr marL="0" marR="0" lvl="6" indent="0" algn="r">
+            <a:lvl7pPr indent="0" lvl="6" marL="0" marR="0" algn="r">
               <a:lnSpc>
                 <a:spcPct val="100000"/>
               </a:lnSpc>
@@ -10988,7 +10786,7 @@
               <a:buSzPts val="5760"/>
               <a:buFont typeface="Arial"/>
               <a:buNone/>
-              <a:defRPr sz="5760" b="0" i="0" u="none" strike="noStrike" cap="none">
+              <a:defRPr b="0" i="0" sz="5760" u="none" cap="none" strike="noStrike">
                 <a:solidFill>
                   <a:srgbClr val="888888"/>
                 </a:solidFill>
@@ -10998,7 +10796,7 @@
                 <a:sym typeface="Calibri"/>
               </a:defRPr>
             </a:lvl7pPr>
-            <a:lvl8pPr marL="0" marR="0" lvl="7" indent="0" algn="r">
+            <a:lvl8pPr indent="0" lvl="7" marL="0" marR="0" algn="r">
               <a:lnSpc>
                 <a:spcPct val="100000"/>
               </a:lnSpc>
@@ -11014,7 +10812,7 @@
               <a:buSzPts val="5760"/>
               <a:buFont typeface="Arial"/>
               <a:buNone/>
-              <a:defRPr sz="5760" b="0" i="0" u="none" strike="noStrike" cap="none">
+              <a:defRPr b="0" i="0" sz="5760" u="none" cap="none" strike="noStrike">
                 <a:solidFill>
                   <a:srgbClr val="888888"/>
                 </a:solidFill>
@@ -11024,7 +10822,7 @@
                 <a:sym typeface="Calibri"/>
               </a:defRPr>
             </a:lvl8pPr>
-            <a:lvl9pPr marL="0" marR="0" lvl="8" indent="0" algn="r">
+            <a:lvl9pPr indent="0" lvl="8" marL="0" marR="0" algn="r">
               <a:lnSpc>
                 <a:spcPct val="100000"/>
               </a:lnSpc>
@@ -11040,7 +10838,7 @@
               <a:buSzPts val="5760"/>
               <a:buFont typeface="Arial"/>
               <a:buNone/>
-              <a:defRPr sz="5760" b="0" i="0" u="none" strike="noStrike" cap="none">
+              <a:defRPr b="0" i="0" sz="5760" u="none" cap="none" strike="noStrike">
                 <a:solidFill>
                   <a:srgbClr val="888888"/>
                 </a:solidFill>
@@ -11052,7 +10850,7 @@
             </a:lvl9pPr>
           </a:lstStyle>
           <a:p>
-            <a:pPr marL="0" lvl="0" indent="0" algn="r" rtl="0">
+            <a:pPr indent="0" lvl="0" marL="0" rtl="0" algn="r">
               <a:spcBef>
                 <a:spcPts val="0"/>
               </a:spcBef>
@@ -11078,11 +10876,11 @@
 </file>
 
 <file path=ppt/slideLayouts/slideLayout9.xml><?xml version="1.0" encoding="utf-8"?>
-<p:sldLayout xmlns:a="http://schemas.openxmlformats.org/drawingml/2006/main" xmlns:r="http://schemas.openxmlformats.org/officeDocument/2006/relationships" xmlns:p="http://schemas.openxmlformats.org/presentationml/2006/main" matchingName="Content with Caption" type="objTx">
+<p:sldLayout xmlns:a="http://schemas.openxmlformats.org/drawingml/2006/main" xmlns:r="http://schemas.openxmlformats.org/officeDocument/2006/relationships" xmlns:mc="http://schemas.openxmlformats.org/markup-compatibility/2006" xmlns:mv="urn:schemas-microsoft-com:mac:vml" xmlns:p="http://schemas.openxmlformats.org/presentationml/2006/main" xmlns:c="http://schemas.openxmlformats.org/drawingml/2006/chart" xmlns:dgm="http://schemas.openxmlformats.org/drawingml/2006/diagram" xmlns:o="urn:schemas-microsoft-com:office:office" xmlns:v="urn:schemas-microsoft-com:vml" xmlns:pvml="urn:schemas-microsoft-com:office:powerpoint" xmlns:com="http://schemas.openxmlformats.org/drawingml/2006/compatibility" xmlns:p14="http://schemas.microsoft.com/office/powerpoint/2010/main" xmlns:p15="http://schemas.microsoft.com/office/powerpoint/2012/main" xmlns:ahyp="http://schemas.microsoft.com/office/drawing/2018/hyperlinkcolor" matchingName="Content with Caption" type="objTx">
   <p:cSld name="OBJECT_WITH_CAPTION_TEXT">
     <p:spTree>
       <p:nvGrpSpPr>
-        <p:cNvPr id="1" name="Shape 57"/>
+        <p:cNvPr id="57" name="Shape 57"/>
         <p:cNvGrpSpPr/>
         <p:nvPr/>
       </p:nvGrpSpPr>
@@ -11097,9 +10895,7 @@
       <p:sp>
         <p:nvSpPr>
           <p:cNvPr id="58" name="Google Shape;58;p11"/>
-          <p:cNvSpPr txBox="1">
-            <a:spLocks noGrp="1"/>
-          </p:cNvSpPr>
+          <p:cNvSpPr txBox="1"/>
           <p:nvPr>
             <p:ph type="title"/>
           </p:nvPr>
@@ -11118,7 +10914,7 @@
           </a:ln>
         </p:spPr>
         <p:txBody>
-          <a:bodyPr spcFirstLastPara="1" wrap="square" lIns="91425" tIns="45700" rIns="91425" bIns="45700" anchor="b" anchorCtr="0">
+          <a:bodyPr anchorCtr="0" anchor="b" bIns="45700" lIns="91425" spcFirstLastPara="1" rIns="91425" wrap="square" tIns="45700">
             <a:normAutofit/>
           </a:bodyPr>
           <a:lstStyle>
@@ -11253,19 +11049,15 @@
               <a:defRPr/>
             </a:lvl9pPr>
           </a:lstStyle>
-          <a:p>
-            <a:endParaRPr/>
-          </a:p>
+          <a:p/>
         </p:txBody>
       </p:sp>
       <p:sp>
         <p:nvSpPr>
           <p:cNvPr id="59" name="Google Shape;59;p11"/>
-          <p:cNvSpPr txBox="1">
-            <a:spLocks noGrp="1"/>
-          </p:cNvSpPr>
+          <p:cNvSpPr txBox="1"/>
           <p:nvPr>
-            <p:ph type="body" idx="1"/>
+            <p:ph idx="1" type="body"/>
           </p:nvPr>
         </p:nvSpPr>
         <p:spPr>
@@ -11282,11 +11074,11 @@
           </a:ln>
         </p:spPr>
         <p:txBody>
-          <a:bodyPr spcFirstLastPara="1" wrap="square" lIns="91425" tIns="45700" rIns="91425" bIns="45700" anchor="t" anchorCtr="0">
+          <a:bodyPr anchorCtr="0" anchor="t" bIns="45700" lIns="91425" spcFirstLastPara="1" rIns="91425" wrap="square" tIns="45700">
             <a:normAutofit/>
           </a:bodyPr>
           <a:lstStyle>
-            <a:lvl1pPr marL="457200" lvl="0" indent="-1203960" algn="l">
+            <a:lvl1pPr indent="-1203960" lvl="0" marL="457200" algn="l">
               <a:lnSpc>
                 <a:spcPct val="90000"/>
               </a:lnSpc>
@@ -11303,7 +11095,7 @@
               <a:buChar char="•"/>
               <a:defRPr sz="15360"/>
             </a:lvl1pPr>
-            <a:lvl2pPr marL="914400" lvl="1" indent="-1082040" algn="l">
+            <a:lvl2pPr indent="-1082040" lvl="1" marL="914400" algn="l">
               <a:lnSpc>
                 <a:spcPct val="90000"/>
               </a:lnSpc>
@@ -11320,7 +11112,7 @@
               <a:buChar char="•"/>
               <a:defRPr sz="13439"/>
             </a:lvl2pPr>
-            <a:lvl3pPr marL="1371600" lvl="2" indent="-960120" algn="l">
+            <a:lvl3pPr indent="-960120" lvl="2" marL="1371600" algn="l">
               <a:lnSpc>
                 <a:spcPct val="90000"/>
               </a:lnSpc>
@@ -11337,7 +11129,7 @@
               <a:buChar char="•"/>
               <a:defRPr sz="11520"/>
             </a:lvl3pPr>
-            <a:lvl4pPr marL="1828800" lvl="3" indent="-838200" algn="l">
+            <a:lvl4pPr indent="-838200" lvl="3" marL="1828800" algn="l">
               <a:lnSpc>
                 <a:spcPct val="90000"/>
               </a:lnSpc>
@@ -11354,7 +11146,7 @@
               <a:buChar char="•"/>
               <a:defRPr sz="9600"/>
             </a:lvl4pPr>
-            <a:lvl5pPr marL="2286000" lvl="4" indent="-838200" algn="l">
+            <a:lvl5pPr indent="-838200" lvl="4" marL="2286000" algn="l">
               <a:lnSpc>
                 <a:spcPct val="90000"/>
               </a:lnSpc>
@@ -11371,7 +11163,7 @@
               <a:buChar char="•"/>
               <a:defRPr sz="9600"/>
             </a:lvl5pPr>
-            <a:lvl6pPr marL="2743200" lvl="5" indent="-838200" algn="l">
+            <a:lvl6pPr indent="-838200" lvl="5" marL="2743200" algn="l">
               <a:lnSpc>
                 <a:spcPct val="90000"/>
               </a:lnSpc>
@@ -11388,7 +11180,7 @@
               <a:buChar char="•"/>
               <a:defRPr sz="9600"/>
             </a:lvl6pPr>
-            <a:lvl7pPr marL="3200400" lvl="6" indent="-838200" algn="l">
+            <a:lvl7pPr indent="-838200" lvl="6" marL="3200400" algn="l">
               <a:lnSpc>
                 <a:spcPct val="90000"/>
               </a:lnSpc>
@@ -11405,7 +11197,7 @@
               <a:buChar char="•"/>
               <a:defRPr sz="9600"/>
             </a:lvl7pPr>
-            <a:lvl8pPr marL="3657600" lvl="7" indent="-838200" algn="l">
+            <a:lvl8pPr indent="-838200" lvl="7" marL="3657600" algn="l">
               <a:lnSpc>
                 <a:spcPct val="90000"/>
               </a:lnSpc>
@@ -11422,7 +11214,7 @@
               <a:buChar char="•"/>
               <a:defRPr sz="9600"/>
             </a:lvl8pPr>
-            <a:lvl9pPr marL="4114800" lvl="8" indent="-838200" algn="l">
+            <a:lvl9pPr indent="-838200" lvl="8" marL="4114800" algn="l">
               <a:lnSpc>
                 <a:spcPct val="90000"/>
               </a:lnSpc>
@@ -11440,19 +11232,15 @@
               <a:defRPr sz="9600"/>
             </a:lvl9pPr>
           </a:lstStyle>
-          <a:p>
-            <a:endParaRPr/>
-          </a:p>
+          <a:p/>
         </p:txBody>
       </p:sp>
       <p:sp>
         <p:nvSpPr>
           <p:cNvPr id="60" name="Google Shape;60;p11"/>
-          <p:cNvSpPr txBox="1">
-            <a:spLocks noGrp="1"/>
-          </p:cNvSpPr>
+          <p:cNvSpPr txBox="1"/>
           <p:nvPr>
-            <p:ph type="body" idx="2"/>
+            <p:ph idx="2" type="body"/>
           </p:nvPr>
         </p:nvSpPr>
         <p:spPr>
@@ -11469,11 +11257,11 @@
           </a:ln>
         </p:spPr>
         <p:txBody>
-          <a:bodyPr spcFirstLastPara="1" wrap="square" lIns="91425" tIns="45700" rIns="91425" bIns="45700" anchor="t" anchorCtr="0">
+          <a:bodyPr anchorCtr="0" anchor="t" bIns="45700" lIns="91425" spcFirstLastPara="1" rIns="91425" wrap="square" tIns="45700">
             <a:normAutofit/>
           </a:bodyPr>
           <a:lstStyle>
-            <a:lvl1pPr marL="457200" lvl="0" indent="-228600" algn="l">
+            <a:lvl1pPr indent="-228600" lvl="0" marL="457200" algn="l">
               <a:lnSpc>
                 <a:spcPct val="90000"/>
               </a:lnSpc>
@@ -11490,7 +11278,7 @@
               <a:buNone/>
               <a:defRPr sz="7680"/>
             </a:lvl1pPr>
-            <a:lvl2pPr marL="914400" lvl="1" indent="-228600" algn="l">
+            <a:lvl2pPr indent="-228600" lvl="1" marL="914400" algn="l">
               <a:lnSpc>
                 <a:spcPct val="90000"/>
               </a:lnSpc>
@@ -11507,7 +11295,7 @@
               <a:buNone/>
               <a:defRPr sz="6719"/>
             </a:lvl2pPr>
-            <a:lvl3pPr marL="1371600" lvl="2" indent="-228600" algn="l">
+            <a:lvl3pPr indent="-228600" lvl="2" marL="1371600" algn="l">
               <a:lnSpc>
                 <a:spcPct val="90000"/>
               </a:lnSpc>
@@ -11524,7 +11312,7 @@
               <a:buNone/>
               <a:defRPr sz="5760"/>
             </a:lvl3pPr>
-            <a:lvl4pPr marL="1828800" lvl="3" indent="-228600" algn="l">
+            <a:lvl4pPr indent="-228600" lvl="3" marL="1828800" algn="l">
               <a:lnSpc>
                 <a:spcPct val="90000"/>
               </a:lnSpc>
@@ -11541,7 +11329,7 @@
               <a:buNone/>
               <a:defRPr sz="4800"/>
             </a:lvl4pPr>
-            <a:lvl5pPr marL="2286000" lvl="4" indent="-228600" algn="l">
+            <a:lvl5pPr indent="-228600" lvl="4" marL="2286000" algn="l">
               <a:lnSpc>
                 <a:spcPct val="90000"/>
               </a:lnSpc>
@@ -11558,7 +11346,7 @@
               <a:buNone/>
               <a:defRPr sz="4800"/>
             </a:lvl5pPr>
-            <a:lvl6pPr marL="2743200" lvl="5" indent="-228600" algn="l">
+            <a:lvl6pPr indent="-228600" lvl="5" marL="2743200" algn="l">
               <a:lnSpc>
                 <a:spcPct val="90000"/>
               </a:lnSpc>
@@ -11575,7 +11363,7 @@
               <a:buNone/>
               <a:defRPr sz="4800"/>
             </a:lvl6pPr>
-            <a:lvl7pPr marL="3200400" lvl="6" indent="-228600" algn="l">
+            <a:lvl7pPr indent="-228600" lvl="6" marL="3200400" algn="l">
               <a:lnSpc>
                 <a:spcPct val="90000"/>
               </a:lnSpc>
@@ -11592,7 +11380,7 @@
               <a:buNone/>
               <a:defRPr sz="4800"/>
             </a:lvl7pPr>
-            <a:lvl8pPr marL="3657600" lvl="7" indent="-228600" algn="l">
+            <a:lvl8pPr indent="-228600" lvl="7" marL="3657600" algn="l">
               <a:lnSpc>
                 <a:spcPct val="90000"/>
               </a:lnSpc>
@@ -11609,7 +11397,7 @@
               <a:buNone/>
               <a:defRPr sz="4800"/>
             </a:lvl8pPr>
-            <a:lvl9pPr marL="4114800" lvl="8" indent="-228600" algn="l">
+            <a:lvl9pPr indent="-228600" lvl="8" marL="4114800" algn="l">
               <a:lnSpc>
                 <a:spcPct val="90000"/>
               </a:lnSpc>
@@ -11627,19 +11415,15 @@
               <a:defRPr sz="4800"/>
             </a:lvl9pPr>
           </a:lstStyle>
-          <a:p>
-            <a:endParaRPr/>
-          </a:p>
+          <a:p/>
         </p:txBody>
       </p:sp>
       <p:sp>
         <p:nvSpPr>
           <p:cNvPr id="61" name="Google Shape;61;p11"/>
-          <p:cNvSpPr txBox="1">
-            <a:spLocks noGrp="1"/>
-          </p:cNvSpPr>
+          <p:cNvSpPr txBox="1"/>
           <p:nvPr>
-            <p:ph type="dt" idx="10"/>
+            <p:ph idx="10" type="dt"/>
           </p:nvPr>
         </p:nvSpPr>
         <p:spPr>
@@ -11656,7 +11440,7 @@
           </a:ln>
         </p:spPr>
         <p:txBody>
-          <a:bodyPr spcFirstLastPara="1" wrap="square" lIns="91425" tIns="45700" rIns="91425" bIns="45700" anchor="ctr" anchorCtr="0">
+          <a:bodyPr anchorCtr="0" anchor="ctr" bIns="45700" lIns="91425" spcFirstLastPara="1" rIns="91425" wrap="square" tIns="45700">
             <a:noAutofit/>
           </a:bodyPr>
           <a:lstStyle>
@@ -11787,19 +11571,15 @@
               <a:defRPr/>
             </a:lvl9pPr>
           </a:lstStyle>
-          <a:p>
-            <a:endParaRPr/>
-          </a:p>
+          <a:p/>
         </p:txBody>
       </p:sp>
       <p:sp>
         <p:nvSpPr>
           <p:cNvPr id="62" name="Google Shape;62;p11"/>
-          <p:cNvSpPr txBox="1">
-            <a:spLocks noGrp="1"/>
-          </p:cNvSpPr>
+          <p:cNvSpPr txBox="1"/>
           <p:nvPr>
-            <p:ph type="ftr" idx="11"/>
+            <p:ph idx="11" type="ftr"/>
           </p:nvPr>
         </p:nvSpPr>
         <p:spPr>
@@ -11816,7 +11596,7 @@
           </a:ln>
         </p:spPr>
         <p:txBody>
-          <a:bodyPr spcFirstLastPara="1" wrap="square" lIns="91425" tIns="45700" rIns="91425" bIns="45700" anchor="ctr" anchorCtr="0">
+          <a:bodyPr anchorCtr="0" anchor="ctr" bIns="45700" lIns="91425" spcFirstLastPara="1" rIns="91425" wrap="square" tIns="45700">
             <a:noAutofit/>
           </a:bodyPr>
           <a:lstStyle>
@@ -11947,19 +11727,15 @@
               <a:defRPr/>
             </a:lvl9pPr>
           </a:lstStyle>
-          <a:p>
-            <a:endParaRPr/>
-          </a:p>
+          <a:p/>
         </p:txBody>
       </p:sp>
       <p:sp>
         <p:nvSpPr>
           <p:cNvPr id="63" name="Google Shape;63;p11"/>
-          <p:cNvSpPr txBox="1">
-            <a:spLocks noGrp="1"/>
-          </p:cNvSpPr>
+          <p:cNvSpPr txBox="1"/>
           <p:nvPr>
-            <p:ph type="sldNum" idx="12"/>
+            <p:ph idx="12" type="sldNum"/>
           </p:nvPr>
         </p:nvSpPr>
         <p:spPr>
@@ -11976,11 +11752,11 @@
           </a:ln>
         </p:spPr>
         <p:txBody>
-          <a:bodyPr spcFirstLastPara="1" wrap="square" lIns="91425" tIns="45700" rIns="91425" bIns="45700" anchor="ctr" anchorCtr="0">
+          <a:bodyPr anchorCtr="0" anchor="ctr" bIns="45700" lIns="91425" spcFirstLastPara="1" rIns="91425" wrap="square" tIns="45700">
             <a:noAutofit/>
           </a:bodyPr>
           <a:lstStyle>
-            <a:lvl1pPr marL="0" marR="0" lvl="0" indent="0" algn="r">
+            <a:lvl1pPr indent="0" lvl="0" marL="0" marR="0" algn="r">
               <a:lnSpc>
                 <a:spcPct val="100000"/>
               </a:lnSpc>
@@ -11996,7 +11772,7 @@
               <a:buSzPts val="5760"/>
               <a:buFont typeface="Arial"/>
               <a:buNone/>
-              <a:defRPr sz="5760" b="0" i="0" u="none" strike="noStrike" cap="none">
+              <a:defRPr b="0" i="0" sz="5760" u="none" cap="none" strike="noStrike">
                 <a:solidFill>
                   <a:srgbClr val="888888"/>
                 </a:solidFill>
@@ -12006,7 +11782,7 @@
                 <a:sym typeface="Calibri"/>
               </a:defRPr>
             </a:lvl1pPr>
-            <a:lvl2pPr marL="0" marR="0" lvl="1" indent="0" algn="r">
+            <a:lvl2pPr indent="0" lvl="1" marL="0" marR="0" algn="r">
               <a:lnSpc>
                 <a:spcPct val="100000"/>
               </a:lnSpc>
@@ -12022,7 +11798,7 @@
               <a:buSzPts val="5760"/>
               <a:buFont typeface="Arial"/>
               <a:buNone/>
-              <a:defRPr sz="5760" b="0" i="0" u="none" strike="noStrike" cap="none">
+              <a:defRPr b="0" i="0" sz="5760" u="none" cap="none" strike="noStrike">
                 <a:solidFill>
                   <a:srgbClr val="888888"/>
                 </a:solidFill>
@@ -12032,7 +11808,7 @@
                 <a:sym typeface="Calibri"/>
               </a:defRPr>
             </a:lvl2pPr>
-            <a:lvl3pPr marL="0" marR="0" lvl="2" indent="0" algn="r">
+            <a:lvl3pPr indent="0" lvl="2" marL="0" marR="0" algn="r">
               <a:lnSpc>
                 <a:spcPct val="100000"/>
               </a:lnSpc>
@@ -12048,7 +11824,7 @@
               <a:buSzPts val="5760"/>
               <a:buFont typeface="Arial"/>
               <a:buNone/>
-              <a:defRPr sz="5760" b="0" i="0" u="none" strike="noStrike" cap="none">
+              <a:defRPr b="0" i="0" sz="5760" u="none" cap="none" strike="noStrike">
                 <a:solidFill>
                   <a:srgbClr val="888888"/>
                 </a:solidFill>
@@ -12058,7 +11834,7 @@
                 <a:sym typeface="Calibri"/>
               </a:defRPr>
             </a:lvl3pPr>
-            <a:lvl4pPr marL="0" marR="0" lvl="3" indent="0" algn="r">
+            <a:lvl4pPr indent="0" lvl="3" marL="0" marR="0" algn="r">
               <a:lnSpc>
                 <a:spcPct val="100000"/>
               </a:lnSpc>
@@ -12074,7 +11850,7 @@
               <a:buSzPts val="5760"/>
               <a:buFont typeface="Arial"/>
               <a:buNone/>
-              <a:defRPr sz="5760" b="0" i="0" u="none" strike="noStrike" cap="none">
+              <a:defRPr b="0" i="0" sz="5760" u="none" cap="none" strike="noStrike">
                 <a:solidFill>
                   <a:srgbClr val="888888"/>
                 </a:solidFill>
@@ -12084,7 +11860,7 @@
                 <a:sym typeface="Calibri"/>
               </a:defRPr>
             </a:lvl4pPr>
-            <a:lvl5pPr marL="0" marR="0" lvl="4" indent="0" algn="r">
+            <a:lvl5pPr indent="0" lvl="4" marL="0" marR="0" algn="r">
               <a:lnSpc>
                 <a:spcPct val="100000"/>
               </a:lnSpc>
@@ -12100,7 +11876,7 @@
               <a:buSzPts val="5760"/>
               <a:buFont typeface="Arial"/>
               <a:buNone/>
-              <a:defRPr sz="5760" b="0" i="0" u="none" strike="noStrike" cap="none">
+              <a:defRPr b="0" i="0" sz="5760" u="none" cap="none" strike="noStrike">
                 <a:solidFill>
                   <a:srgbClr val="888888"/>
                 </a:solidFill>
@@ -12110,7 +11886,7 @@
                 <a:sym typeface="Calibri"/>
               </a:defRPr>
             </a:lvl5pPr>
-            <a:lvl6pPr marL="0" marR="0" lvl="5" indent="0" algn="r">
+            <a:lvl6pPr indent="0" lvl="5" marL="0" marR="0" algn="r">
               <a:lnSpc>
                 <a:spcPct val="100000"/>
               </a:lnSpc>
@@ -12126,7 +11902,7 @@
               <a:buSzPts val="5760"/>
               <a:buFont typeface="Arial"/>
               <a:buNone/>
-              <a:defRPr sz="5760" b="0" i="0" u="none" strike="noStrike" cap="none">
+              <a:defRPr b="0" i="0" sz="5760" u="none" cap="none" strike="noStrike">
                 <a:solidFill>
                   <a:srgbClr val="888888"/>
                 </a:solidFill>
@@ -12136,7 +11912,7 @@
                 <a:sym typeface="Calibri"/>
               </a:defRPr>
             </a:lvl6pPr>
-            <a:lvl7pPr marL="0" marR="0" lvl="6" indent="0" algn="r">
+            <a:lvl7pPr indent="0" lvl="6" marL="0" marR="0" algn="r">
               <a:lnSpc>
                 <a:spcPct val="100000"/>
               </a:lnSpc>
@@ -12152,7 +11928,7 @@
               <a:buSzPts val="5760"/>
               <a:buFont typeface="Arial"/>
               <a:buNone/>
-              <a:defRPr sz="5760" b="0" i="0" u="none" strike="noStrike" cap="none">
+              <a:defRPr b="0" i="0" sz="5760" u="none" cap="none" strike="noStrike">
                 <a:solidFill>
                   <a:srgbClr val="888888"/>
                 </a:solidFill>
@@ -12162,7 +11938,7 @@
                 <a:sym typeface="Calibri"/>
               </a:defRPr>
             </a:lvl7pPr>
-            <a:lvl8pPr marL="0" marR="0" lvl="7" indent="0" algn="r">
+            <a:lvl8pPr indent="0" lvl="7" marL="0" marR="0" algn="r">
               <a:lnSpc>
                 <a:spcPct val="100000"/>
               </a:lnSpc>
@@ -12178,7 +11954,7 @@
               <a:buSzPts val="5760"/>
               <a:buFont typeface="Arial"/>
               <a:buNone/>
-              <a:defRPr sz="5760" b="0" i="0" u="none" strike="noStrike" cap="none">
+              <a:defRPr b="0" i="0" sz="5760" u="none" cap="none" strike="noStrike">
                 <a:solidFill>
                   <a:srgbClr val="888888"/>
                 </a:solidFill>
@@ -12188,7 +11964,7 @@
                 <a:sym typeface="Calibri"/>
               </a:defRPr>
             </a:lvl8pPr>
-            <a:lvl9pPr marL="0" marR="0" lvl="8" indent="0" algn="r">
+            <a:lvl9pPr indent="0" lvl="8" marL="0" marR="0" algn="r">
               <a:lnSpc>
                 <a:spcPct val="100000"/>
               </a:lnSpc>
@@ -12204,7 +11980,7 @@
               <a:buSzPts val="5760"/>
               <a:buFont typeface="Arial"/>
               <a:buNone/>
-              <a:defRPr sz="5760" b="0" i="0" u="none" strike="noStrike" cap="none">
+              <a:defRPr b="0" i="0" sz="5760" u="none" cap="none" strike="noStrike">
                 <a:solidFill>
                   <a:srgbClr val="888888"/>
                 </a:solidFill>
@@ -12216,7 +11992,7 @@
             </a:lvl9pPr>
           </a:lstStyle>
           <a:p>
-            <a:pPr marL="0" lvl="0" indent="0" algn="r" rtl="0">
+            <a:pPr indent="0" lvl="0" marL="0" rtl="0" algn="r">
               <a:spcBef>
                 <a:spcPts val="0"/>
               </a:spcBef>
@@ -12242,19 +12018,18 @@
 </file>
 
 <file path=ppt/slideMasters/slideMaster1.xml><?xml version="1.0" encoding="utf-8"?>
-<p:sldMaster xmlns:a="http://schemas.openxmlformats.org/drawingml/2006/main" xmlns:r="http://schemas.openxmlformats.org/officeDocument/2006/relationships" xmlns:p="http://schemas.openxmlformats.org/presentationml/2006/main">
+<p:sldMaster xmlns:a="http://schemas.openxmlformats.org/drawingml/2006/main" xmlns:r="http://schemas.openxmlformats.org/officeDocument/2006/relationships" xmlns:mc="http://schemas.openxmlformats.org/markup-compatibility/2006" xmlns:mv="urn:schemas-microsoft-com:mac:vml" xmlns:p="http://schemas.openxmlformats.org/presentationml/2006/main" xmlns:c="http://schemas.openxmlformats.org/drawingml/2006/chart" xmlns:dgm="http://schemas.openxmlformats.org/drawingml/2006/diagram" xmlns:o="urn:schemas-microsoft-com:office:office" xmlns:v="urn:schemas-microsoft-com:vml" xmlns:pvml="urn:schemas-microsoft-com:office:powerpoint" xmlns:com="http://schemas.openxmlformats.org/drawingml/2006/compatibility" xmlns:p14="http://schemas.microsoft.com/office/powerpoint/2010/main" xmlns:p15="http://schemas.microsoft.com/office/powerpoint/2012/main" xmlns:ahyp="http://schemas.microsoft.com/office/drawing/2018/hyperlinkcolor">
   <p:cSld>
     <p:bg>
       <p:bgPr>
         <a:solidFill>
           <a:schemeClr val="lt1"/>
         </a:solidFill>
-        <a:effectLst/>
       </p:bgPr>
     </p:bg>
     <p:spTree>
       <p:nvGrpSpPr>
-        <p:cNvPr id="1" name="Shape 5"/>
+        <p:cNvPr id="5" name="Shape 5"/>
         <p:cNvGrpSpPr/>
         <p:nvPr/>
       </p:nvGrpSpPr>
@@ -12269,9 +12044,7 @@
       <p:sp>
         <p:nvSpPr>
           <p:cNvPr id="6" name="Google Shape;6;p2"/>
-          <p:cNvSpPr txBox="1">
-            <a:spLocks noGrp="1"/>
-          </p:cNvSpPr>
+          <p:cNvSpPr txBox="1"/>
           <p:nvPr>
             <p:ph type="title"/>
           </p:nvPr>
@@ -12290,11 +12063,11 @@
           </a:ln>
         </p:spPr>
         <p:txBody>
-          <a:bodyPr spcFirstLastPara="1" wrap="square" lIns="91425" tIns="45700" rIns="91425" bIns="45700" anchor="ctr" anchorCtr="0">
+          <a:bodyPr anchorCtr="0" anchor="ctr" bIns="45700" lIns="91425" spcFirstLastPara="1" rIns="91425" wrap="square" tIns="45700">
             <a:normAutofit/>
           </a:bodyPr>
           <a:lstStyle>
-            <a:lvl1pPr marR="0" lvl="0" algn="l" rtl="0">
+            <a:lvl1pPr lvl="0" marR="0" rtl="0" algn="l">
               <a:lnSpc>
                 <a:spcPct val="90000"/>
               </a:lnSpc>
@@ -12310,7 +12083,7 @@
               <a:buSzPts val="21120"/>
               <a:buFont typeface="Calibri"/>
               <a:buNone/>
-              <a:defRPr sz="21120" b="0" i="0" u="none" strike="noStrike" cap="none">
+              <a:defRPr b="0" i="0" sz="21120" u="none" cap="none" strike="noStrike">
                 <a:solidFill>
                   <a:schemeClr val="dk1"/>
                 </a:solidFill>
@@ -12320,7 +12093,7 @@
                 <a:sym typeface="Calibri"/>
               </a:defRPr>
             </a:lvl1pPr>
-            <a:lvl2pPr marR="0" lvl="1" algn="l" rtl="0">
+            <a:lvl2pPr lvl="1" marR="0" rtl="0" algn="l">
               <a:lnSpc>
                 <a:spcPct val="100000"/>
               </a:lnSpc>
@@ -12336,7 +12109,7 @@
               <a:buSzPts val="1400"/>
               <a:buFont typeface="Arial"/>
               <a:buNone/>
-              <a:defRPr sz="1800" b="0" i="0" u="none" strike="noStrike" cap="none">
+              <a:defRPr b="0" i="0" sz="1800" u="none" cap="none" strike="noStrike">
                 <a:solidFill>
                   <a:srgbClr val="000000"/>
                 </a:solidFill>
@@ -12346,7 +12119,7 @@
                 <a:sym typeface="Arial"/>
               </a:defRPr>
             </a:lvl2pPr>
-            <a:lvl3pPr marR="0" lvl="2" algn="l" rtl="0">
+            <a:lvl3pPr lvl="2" marR="0" rtl="0" algn="l">
               <a:lnSpc>
                 <a:spcPct val="100000"/>
               </a:lnSpc>
@@ -12362,7 +12135,7 @@
               <a:buSzPts val="1400"/>
               <a:buFont typeface="Arial"/>
               <a:buNone/>
-              <a:defRPr sz="1800" b="0" i="0" u="none" strike="noStrike" cap="none">
+              <a:defRPr b="0" i="0" sz="1800" u="none" cap="none" strike="noStrike">
                 <a:solidFill>
                   <a:srgbClr val="000000"/>
                 </a:solidFill>
@@ -12372,7 +12145,7 @@
                 <a:sym typeface="Arial"/>
               </a:defRPr>
             </a:lvl3pPr>
-            <a:lvl4pPr marR="0" lvl="3" algn="l" rtl="0">
+            <a:lvl4pPr lvl="3" marR="0" rtl="0" algn="l">
               <a:lnSpc>
                 <a:spcPct val="100000"/>
               </a:lnSpc>
@@ -12388,7 +12161,7 @@
               <a:buSzPts val="1400"/>
               <a:buFont typeface="Arial"/>
               <a:buNone/>
-              <a:defRPr sz="1800" b="0" i="0" u="none" strike="noStrike" cap="none">
+              <a:defRPr b="0" i="0" sz="1800" u="none" cap="none" strike="noStrike">
                 <a:solidFill>
                   <a:srgbClr val="000000"/>
                 </a:solidFill>
@@ -12398,7 +12171,7 @@
                 <a:sym typeface="Arial"/>
               </a:defRPr>
             </a:lvl4pPr>
-            <a:lvl5pPr marR="0" lvl="4" algn="l" rtl="0">
+            <a:lvl5pPr lvl="4" marR="0" rtl="0" algn="l">
               <a:lnSpc>
                 <a:spcPct val="100000"/>
               </a:lnSpc>
@@ -12414,7 +12187,7 @@
               <a:buSzPts val="1400"/>
               <a:buFont typeface="Arial"/>
               <a:buNone/>
-              <a:defRPr sz="1800" b="0" i="0" u="none" strike="noStrike" cap="none">
+              <a:defRPr b="0" i="0" sz="1800" u="none" cap="none" strike="noStrike">
                 <a:solidFill>
                   <a:srgbClr val="000000"/>
                 </a:solidFill>
@@ -12424,7 +12197,7 @@
                 <a:sym typeface="Arial"/>
               </a:defRPr>
             </a:lvl5pPr>
-            <a:lvl6pPr marR="0" lvl="5" algn="l" rtl="0">
+            <a:lvl6pPr lvl="5" marR="0" rtl="0" algn="l">
               <a:lnSpc>
                 <a:spcPct val="100000"/>
               </a:lnSpc>
@@ -12440,7 +12213,7 @@
               <a:buSzPts val="1400"/>
               <a:buFont typeface="Arial"/>
               <a:buNone/>
-              <a:defRPr sz="1800" b="0" i="0" u="none" strike="noStrike" cap="none">
+              <a:defRPr b="0" i="0" sz="1800" u="none" cap="none" strike="noStrike">
                 <a:solidFill>
                   <a:srgbClr val="000000"/>
                 </a:solidFill>
@@ -12450,7 +12223,7 @@
                 <a:sym typeface="Arial"/>
               </a:defRPr>
             </a:lvl6pPr>
-            <a:lvl7pPr marR="0" lvl="6" algn="l" rtl="0">
+            <a:lvl7pPr lvl="6" marR="0" rtl="0" algn="l">
               <a:lnSpc>
                 <a:spcPct val="100000"/>
               </a:lnSpc>
@@ -12466,7 +12239,7 @@
               <a:buSzPts val="1400"/>
               <a:buFont typeface="Arial"/>
               <a:buNone/>
-              <a:defRPr sz="1800" b="0" i="0" u="none" strike="noStrike" cap="none">
+              <a:defRPr b="0" i="0" sz="1800" u="none" cap="none" strike="noStrike">
                 <a:solidFill>
                   <a:srgbClr val="000000"/>
                 </a:solidFill>
@@ -12476,7 +12249,7 @@
                 <a:sym typeface="Arial"/>
               </a:defRPr>
             </a:lvl7pPr>
-            <a:lvl8pPr marR="0" lvl="7" algn="l" rtl="0">
+            <a:lvl8pPr lvl="7" marR="0" rtl="0" algn="l">
               <a:lnSpc>
                 <a:spcPct val="100000"/>
               </a:lnSpc>
@@ -12492,7 +12265,7 @@
               <a:buSzPts val="1400"/>
               <a:buFont typeface="Arial"/>
               <a:buNone/>
-              <a:defRPr sz="1800" b="0" i="0" u="none" strike="noStrike" cap="none">
+              <a:defRPr b="0" i="0" sz="1800" u="none" cap="none" strike="noStrike">
                 <a:solidFill>
                   <a:srgbClr val="000000"/>
                 </a:solidFill>
@@ -12502,7 +12275,7 @@
                 <a:sym typeface="Arial"/>
               </a:defRPr>
             </a:lvl8pPr>
-            <a:lvl9pPr marR="0" lvl="8" algn="l" rtl="0">
+            <a:lvl9pPr lvl="8" marR="0" rtl="0" algn="l">
               <a:lnSpc>
                 <a:spcPct val="100000"/>
               </a:lnSpc>
@@ -12518,7 +12291,7 @@
               <a:buSzPts val="1400"/>
               <a:buFont typeface="Arial"/>
               <a:buNone/>
-              <a:defRPr sz="1800" b="0" i="0" u="none" strike="noStrike" cap="none">
+              <a:defRPr b="0" i="0" sz="1800" u="none" cap="none" strike="noStrike">
                 <a:solidFill>
                   <a:srgbClr val="000000"/>
                 </a:solidFill>
@@ -12529,19 +12302,15 @@
               </a:defRPr>
             </a:lvl9pPr>
           </a:lstStyle>
-          <a:p>
-            <a:endParaRPr/>
-          </a:p>
+          <a:p/>
         </p:txBody>
       </p:sp>
       <p:sp>
         <p:nvSpPr>
           <p:cNvPr id="7" name="Google Shape;7;p2"/>
-          <p:cNvSpPr txBox="1">
-            <a:spLocks noGrp="1"/>
-          </p:cNvSpPr>
+          <p:cNvSpPr txBox="1"/>
           <p:nvPr>
-            <p:ph type="body" idx="1"/>
+            <p:ph idx="1" type="body"/>
           </p:nvPr>
         </p:nvSpPr>
         <p:spPr>
@@ -12558,11 +12327,11 @@
           </a:ln>
         </p:spPr>
         <p:txBody>
-          <a:bodyPr spcFirstLastPara="1" wrap="square" lIns="91425" tIns="45700" rIns="91425" bIns="45700" anchor="t" anchorCtr="0">
+          <a:bodyPr anchorCtr="0" anchor="t" bIns="45700" lIns="91425" spcFirstLastPara="1" rIns="91425" wrap="square" tIns="45700">
             <a:normAutofit/>
           </a:bodyPr>
           <a:lstStyle>
-            <a:lvl1pPr marL="457200" marR="0" lvl="0" indent="-1082040" algn="l" rtl="0">
+            <a:lvl1pPr indent="-1082040" lvl="0" marL="457200" marR="0" rtl="0" algn="l">
               <a:lnSpc>
                 <a:spcPct val="90000"/>
               </a:lnSpc>
@@ -12578,7 +12347,7 @@
               <a:buSzPts val="13440"/>
               <a:buFont typeface="Arial"/>
               <a:buChar char="•"/>
-              <a:defRPr sz="13439" b="0" i="0" u="none" strike="noStrike" cap="none">
+              <a:defRPr b="0" i="0" sz="13439" u="none" cap="none" strike="noStrike">
                 <a:solidFill>
                   <a:schemeClr val="dk1"/>
                 </a:solidFill>
@@ -12588,7 +12357,7 @@
                 <a:sym typeface="Calibri"/>
               </a:defRPr>
             </a:lvl1pPr>
-            <a:lvl2pPr marL="914400" marR="0" lvl="1" indent="-960120" algn="l" rtl="0">
+            <a:lvl2pPr indent="-960120" lvl="1" marL="914400" marR="0" rtl="0" algn="l">
               <a:lnSpc>
                 <a:spcPct val="90000"/>
               </a:lnSpc>
@@ -12604,7 +12373,7 @@
               <a:buSzPts val="11520"/>
               <a:buFont typeface="Arial"/>
               <a:buChar char="•"/>
-              <a:defRPr sz="11520" b="0" i="0" u="none" strike="noStrike" cap="none">
+              <a:defRPr b="0" i="0" sz="11520" u="none" cap="none" strike="noStrike">
                 <a:solidFill>
                   <a:schemeClr val="dk1"/>
                 </a:solidFill>
@@ -12614,7 +12383,7 @@
                 <a:sym typeface="Calibri"/>
               </a:defRPr>
             </a:lvl2pPr>
-            <a:lvl3pPr marL="1371600" marR="0" lvl="2" indent="-838200" algn="l" rtl="0">
+            <a:lvl3pPr indent="-838200" lvl="2" marL="1371600" marR="0" rtl="0" algn="l">
               <a:lnSpc>
                 <a:spcPct val="90000"/>
               </a:lnSpc>
@@ -12630,7 +12399,7 @@
               <a:buSzPts val="9600"/>
               <a:buFont typeface="Arial"/>
               <a:buChar char="•"/>
-              <a:defRPr sz="9600" b="0" i="0" u="none" strike="noStrike" cap="none">
+              <a:defRPr b="0" i="0" sz="9600" u="none" cap="none" strike="noStrike">
                 <a:solidFill>
                   <a:schemeClr val="dk1"/>
                 </a:solidFill>
@@ -12640,7 +12409,7 @@
                 <a:sym typeface="Calibri"/>
               </a:defRPr>
             </a:lvl3pPr>
-            <a:lvl4pPr marL="1828800" marR="0" lvl="3" indent="-777239" algn="l" rtl="0">
+            <a:lvl4pPr indent="-777239" lvl="3" marL="1828800" marR="0" rtl="0" algn="l">
               <a:lnSpc>
                 <a:spcPct val="90000"/>
               </a:lnSpc>
@@ -12656,7 +12425,7 @@
               <a:buSzPts val="8640"/>
               <a:buFont typeface="Arial"/>
               <a:buChar char="•"/>
-              <a:defRPr sz="8640" b="0" i="0" u="none" strike="noStrike" cap="none">
+              <a:defRPr b="0" i="0" sz="8640" u="none" cap="none" strike="noStrike">
                 <a:solidFill>
                   <a:schemeClr val="dk1"/>
                 </a:solidFill>
@@ -12666,7 +12435,7 @@
                 <a:sym typeface="Calibri"/>
               </a:defRPr>
             </a:lvl4pPr>
-            <a:lvl5pPr marL="2286000" marR="0" lvl="4" indent="-777239" algn="l" rtl="0">
+            <a:lvl5pPr indent="-777239" lvl="4" marL="2286000" marR="0" rtl="0" algn="l">
               <a:lnSpc>
                 <a:spcPct val="90000"/>
               </a:lnSpc>
@@ -12682,7 +12451,7 @@
               <a:buSzPts val="8640"/>
               <a:buFont typeface="Arial"/>
               <a:buChar char="•"/>
-              <a:defRPr sz="8640" b="0" i="0" u="none" strike="noStrike" cap="none">
+              <a:defRPr b="0" i="0" sz="8640" u="none" cap="none" strike="noStrike">
                 <a:solidFill>
                   <a:schemeClr val="dk1"/>
                 </a:solidFill>
@@ -12692,7 +12461,7 @@
                 <a:sym typeface="Calibri"/>
               </a:defRPr>
             </a:lvl5pPr>
-            <a:lvl6pPr marL="2743200" marR="0" lvl="5" indent="-777239" algn="l" rtl="0">
+            <a:lvl6pPr indent="-777239" lvl="5" marL="2743200" marR="0" rtl="0" algn="l">
               <a:lnSpc>
                 <a:spcPct val="90000"/>
               </a:lnSpc>
@@ -12708,7 +12477,7 @@
               <a:buSzPts val="8640"/>
               <a:buFont typeface="Arial"/>
               <a:buChar char="•"/>
-              <a:defRPr sz="8640" b="0" i="0" u="none" strike="noStrike" cap="none">
+              <a:defRPr b="0" i="0" sz="8640" u="none" cap="none" strike="noStrike">
                 <a:solidFill>
                   <a:schemeClr val="dk1"/>
                 </a:solidFill>
@@ -12718,7 +12487,7 @@
                 <a:sym typeface="Calibri"/>
               </a:defRPr>
             </a:lvl6pPr>
-            <a:lvl7pPr marL="3200400" marR="0" lvl="6" indent="-777239" algn="l" rtl="0">
+            <a:lvl7pPr indent="-777239" lvl="6" marL="3200400" marR="0" rtl="0" algn="l">
               <a:lnSpc>
                 <a:spcPct val="90000"/>
               </a:lnSpc>
@@ -12734,7 +12503,7 @@
               <a:buSzPts val="8640"/>
               <a:buFont typeface="Arial"/>
               <a:buChar char="•"/>
-              <a:defRPr sz="8640" b="0" i="0" u="none" strike="noStrike" cap="none">
+              <a:defRPr b="0" i="0" sz="8640" u="none" cap="none" strike="noStrike">
                 <a:solidFill>
                   <a:schemeClr val="dk1"/>
                 </a:solidFill>
@@ -12744,7 +12513,7 @@
                 <a:sym typeface="Calibri"/>
               </a:defRPr>
             </a:lvl7pPr>
-            <a:lvl8pPr marL="3657600" marR="0" lvl="7" indent="-777239" algn="l" rtl="0">
+            <a:lvl8pPr indent="-777239" lvl="7" marL="3657600" marR="0" rtl="0" algn="l">
               <a:lnSpc>
                 <a:spcPct val="90000"/>
               </a:lnSpc>
@@ -12760,7 +12529,7 @@
               <a:buSzPts val="8640"/>
               <a:buFont typeface="Arial"/>
               <a:buChar char="•"/>
-              <a:defRPr sz="8640" b="0" i="0" u="none" strike="noStrike" cap="none">
+              <a:defRPr b="0" i="0" sz="8640" u="none" cap="none" strike="noStrike">
                 <a:solidFill>
                   <a:schemeClr val="dk1"/>
                 </a:solidFill>
@@ -12770,7 +12539,7 @@
                 <a:sym typeface="Calibri"/>
               </a:defRPr>
             </a:lvl8pPr>
-            <a:lvl9pPr marL="4114800" marR="0" lvl="8" indent="-777240" algn="l" rtl="0">
+            <a:lvl9pPr indent="-777240" lvl="8" marL="4114800" marR="0" rtl="0" algn="l">
               <a:lnSpc>
                 <a:spcPct val="90000"/>
               </a:lnSpc>
@@ -12786,7 +12555,7 @@
               <a:buSzPts val="8640"/>
               <a:buFont typeface="Arial"/>
               <a:buChar char="•"/>
-              <a:defRPr sz="8640" b="0" i="0" u="none" strike="noStrike" cap="none">
+              <a:defRPr b="0" i="0" sz="8640" u="none" cap="none" strike="noStrike">
                 <a:solidFill>
                   <a:schemeClr val="dk1"/>
                 </a:solidFill>
@@ -12797,19 +12566,15 @@
               </a:defRPr>
             </a:lvl9pPr>
           </a:lstStyle>
-          <a:p>
-            <a:endParaRPr/>
-          </a:p>
+          <a:p/>
         </p:txBody>
       </p:sp>
       <p:sp>
         <p:nvSpPr>
           <p:cNvPr id="8" name="Google Shape;8;p2"/>
-          <p:cNvSpPr txBox="1">
-            <a:spLocks noGrp="1"/>
-          </p:cNvSpPr>
+          <p:cNvSpPr txBox="1"/>
           <p:nvPr>
-            <p:ph type="dt" idx="10"/>
+            <p:ph idx="10" type="dt"/>
           </p:nvPr>
         </p:nvSpPr>
         <p:spPr>
@@ -12826,11 +12591,11 @@
           </a:ln>
         </p:spPr>
         <p:txBody>
-          <a:bodyPr spcFirstLastPara="1" wrap="square" lIns="91425" tIns="45700" rIns="91425" bIns="45700" anchor="ctr" anchorCtr="0">
+          <a:bodyPr anchorCtr="0" anchor="ctr" bIns="45700" lIns="91425" spcFirstLastPara="1" rIns="91425" wrap="square" tIns="45700">
             <a:noAutofit/>
           </a:bodyPr>
           <a:lstStyle>
-            <a:lvl1pPr marR="0" lvl="0" algn="l" rtl="0">
+            <a:lvl1pPr lvl="0" marR="0" rtl="0" algn="l">
               <a:lnSpc>
                 <a:spcPct val="100000"/>
               </a:lnSpc>
@@ -12846,7 +12611,7 @@
               <a:buSzPts val="1400"/>
               <a:buFont typeface="Arial"/>
               <a:buNone/>
-              <a:defRPr sz="5760" b="0" i="0" u="none" strike="noStrike" cap="none">
+              <a:defRPr b="0" i="0" sz="5760" u="none" cap="none" strike="noStrike">
                 <a:solidFill>
                   <a:srgbClr val="888888"/>
                 </a:solidFill>
@@ -12856,7 +12621,7 @@
                 <a:sym typeface="Calibri"/>
               </a:defRPr>
             </a:lvl1pPr>
-            <a:lvl2pPr marR="0" lvl="1" algn="l" rtl="0">
+            <a:lvl2pPr lvl="1" marR="0" rtl="0" algn="l">
               <a:lnSpc>
                 <a:spcPct val="100000"/>
               </a:lnSpc>
@@ -12872,7 +12637,7 @@
               <a:buSzPts val="1400"/>
               <a:buFont typeface="Arial"/>
               <a:buNone/>
-              <a:defRPr sz="1800" b="0" i="0" u="none" strike="noStrike" cap="none">
+              <a:defRPr b="0" i="0" sz="1800" u="none" cap="none" strike="noStrike">
                 <a:solidFill>
                   <a:schemeClr val="dk1"/>
                 </a:solidFill>
@@ -12882,7 +12647,7 @@
                 <a:sym typeface="Calibri"/>
               </a:defRPr>
             </a:lvl2pPr>
-            <a:lvl3pPr marR="0" lvl="2" algn="l" rtl="0">
+            <a:lvl3pPr lvl="2" marR="0" rtl="0" algn="l">
               <a:lnSpc>
                 <a:spcPct val="100000"/>
               </a:lnSpc>
@@ -12898,7 +12663,7 @@
               <a:buSzPts val="1400"/>
               <a:buFont typeface="Arial"/>
               <a:buNone/>
-              <a:defRPr sz="1800" b="0" i="0" u="none" strike="noStrike" cap="none">
+              <a:defRPr b="0" i="0" sz="1800" u="none" cap="none" strike="noStrike">
                 <a:solidFill>
                   <a:schemeClr val="dk1"/>
                 </a:solidFill>
@@ -12908,7 +12673,7 @@
                 <a:sym typeface="Calibri"/>
               </a:defRPr>
             </a:lvl3pPr>
-            <a:lvl4pPr marR="0" lvl="3" algn="l" rtl="0">
+            <a:lvl4pPr lvl="3" marR="0" rtl="0" algn="l">
               <a:lnSpc>
                 <a:spcPct val="100000"/>
               </a:lnSpc>
@@ -12924,7 +12689,7 @@
               <a:buSzPts val="1400"/>
               <a:buFont typeface="Arial"/>
               <a:buNone/>
-              <a:defRPr sz="1800" b="0" i="0" u="none" strike="noStrike" cap="none">
+              <a:defRPr b="0" i="0" sz="1800" u="none" cap="none" strike="noStrike">
                 <a:solidFill>
                   <a:schemeClr val="dk1"/>
                 </a:solidFill>
@@ -12934,7 +12699,7 @@
                 <a:sym typeface="Calibri"/>
               </a:defRPr>
             </a:lvl4pPr>
-            <a:lvl5pPr marR="0" lvl="4" algn="l" rtl="0">
+            <a:lvl5pPr lvl="4" marR="0" rtl="0" algn="l">
               <a:lnSpc>
                 <a:spcPct val="100000"/>
               </a:lnSpc>
@@ -12950,7 +12715,7 @@
               <a:buSzPts val="1400"/>
               <a:buFont typeface="Arial"/>
               <a:buNone/>
-              <a:defRPr sz="1800" b="0" i="0" u="none" strike="noStrike" cap="none">
+              <a:defRPr b="0" i="0" sz="1800" u="none" cap="none" strike="noStrike">
                 <a:solidFill>
                   <a:schemeClr val="dk1"/>
                 </a:solidFill>
@@ -12960,7 +12725,7 @@
                 <a:sym typeface="Calibri"/>
               </a:defRPr>
             </a:lvl5pPr>
-            <a:lvl6pPr marR="0" lvl="5" algn="l" rtl="0">
+            <a:lvl6pPr lvl="5" marR="0" rtl="0" algn="l">
               <a:lnSpc>
                 <a:spcPct val="100000"/>
               </a:lnSpc>
@@ -12976,7 +12741,7 @@
               <a:buSzPts val="1400"/>
               <a:buFont typeface="Arial"/>
               <a:buNone/>
-              <a:defRPr sz="1800" b="0" i="0" u="none" strike="noStrike" cap="none">
+              <a:defRPr b="0" i="0" sz="1800" u="none" cap="none" strike="noStrike">
                 <a:solidFill>
                   <a:schemeClr val="dk1"/>
                 </a:solidFill>
@@ -12986,7 +12751,7 @@
                 <a:sym typeface="Calibri"/>
               </a:defRPr>
             </a:lvl6pPr>
-            <a:lvl7pPr marR="0" lvl="6" algn="l" rtl="0">
+            <a:lvl7pPr lvl="6" marR="0" rtl="0" algn="l">
               <a:lnSpc>
                 <a:spcPct val="100000"/>
               </a:lnSpc>
@@ -13002,7 +12767,7 @@
               <a:buSzPts val="1400"/>
               <a:buFont typeface="Arial"/>
               <a:buNone/>
-              <a:defRPr sz="1800" b="0" i="0" u="none" strike="noStrike" cap="none">
+              <a:defRPr b="0" i="0" sz="1800" u="none" cap="none" strike="noStrike">
                 <a:solidFill>
                   <a:schemeClr val="dk1"/>
                 </a:solidFill>
@@ -13012,7 +12777,7 @@
                 <a:sym typeface="Calibri"/>
               </a:defRPr>
             </a:lvl7pPr>
-            <a:lvl8pPr marR="0" lvl="7" algn="l" rtl="0">
+            <a:lvl8pPr lvl="7" marR="0" rtl="0" algn="l">
               <a:lnSpc>
                 <a:spcPct val="100000"/>
               </a:lnSpc>
@@ -13028,7 +12793,7 @@
               <a:buSzPts val="1400"/>
               <a:buFont typeface="Arial"/>
               <a:buNone/>
-              <a:defRPr sz="1800" b="0" i="0" u="none" strike="noStrike" cap="none">
+              <a:defRPr b="0" i="0" sz="1800" u="none" cap="none" strike="noStrike">
                 <a:solidFill>
                   <a:schemeClr val="dk1"/>
                 </a:solidFill>
@@ -13038,7 +12803,7 @@
                 <a:sym typeface="Calibri"/>
               </a:defRPr>
             </a:lvl8pPr>
-            <a:lvl9pPr marR="0" lvl="8" algn="l" rtl="0">
+            <a:lvl9pPr lvl="8" marR="0" rtl="0" algn="l">
               <a:lnSpc>
                 <a:spcPct val="100000"/>
               </a:lnSpc>
@@ -13054,7 +12819,7 @@
               <a:buSzPts val="1400"/>
               <a:buFont typeface="Arial"/>
               <a:buNone/>
-              <a:defRPr sz="1800" b="0" i="0" u="none" strike="noStrike" cap="none">
+              <a:defRPr b="0" i="0" sz="1800" u="none" cap="none" strike="noStrike">
                 <a:solidFill>
                   <a:schemeClr val="dk1"/>
                 </a:solidFill>
@@ -13065,19 +12830,15 @@
               </a:defRPr>
             </a:lvl9pPr>
           </a:lstStyle>
-          <a:p>
-            <a:endParaRPr/>
-          </a:p>
+          <a:p/>
         </p:txBody>
       </p:sp>
       <p:sp>
         <p:nvSpPr>
           <p:cNvPr id="9" name="Google Shape;9;p2"/>
-          <p:cNvSpPr txBox="1">
-            <a:spLocks noGrp="1"/>
-          </p:cNvSpPr>
+          <p:cNvSpPr txBox="1"/>
           <p:nvPr>
-            <p:ph type="ftr" idx="11"/>
+            <p:ph idx="11" type="ftr"/>
           </p:nvPr>
         </p:nvSpPr>
         <p:spPr>
@@ -13094,11 +12855,11 @@
           </a:ln>
         </p:spPr>
         <p:txBody>
-          <a:bodyPr spcFirstLastPara="1" wrap="square" lIns="91425" tIns="45700" rIns="91425" bIns="45700" anchor="ctr" anchorCtr="0">
+          <a:bodyPr anchorCtr="0" anchor="ctr" bIns="45700" lIns="91425" spcFirstLastPara="1" rIns="91425" wrap="square" tIns="45700">
             <a:noAutofit/>
           </a:bodyPr>
           <a:lstStyle>
-            <a:lvl1pPr marR="0" lvl="0" algn="ctr" rtl="0">
+            <a:lvl1pPr lvl="0" marR="0" rtl="0" algn="ctr">
               <a:lnSpc>
                 <a:spcPct val="100000"/>
               </a:lnSpc>
@@ -13114,7 +12875,7 @@
               <a:buSzPts val="1400"/>
               <a:buFont typeface="Arial"/>
               <a:buNone/>
-              <a:defRPr sz="5760" b="0" i="0" u="none" strike="noStrike" cap="none">
+              <a:defRPr b="0" i="0" sz="5760" u="none" cap="none" strike="noStrike">
                 <a:solidFill>
                   <a:srgbClr val="888888"/>
                 </a:solidFill>
@@ -13124,7 +12885,7 @@
                 <a:sym typeface="Calibri"/>
               </a:defRPr>
             </a:lvl1pPr>
-            <a:lvl2pPr marR="0" lvl="1" algn="l" rtl="0">
+            <a:lvl2pPr lvl="1" marR="0" rtl="0" algn="l">
               <a:lnSpc>
                 <a:spcPct val="100000"/>
               </a:lnSpc>
@@ -13140,7 +12901,7 @@
               <a:buSzPts val="1400"/>
               <a:buFont typeface="Arial"/>
               <a:buNone/>
-              <a:defRPr sz="1800" b="0" i="0" u="none" strike="noStrike" cap="none">
+              <a:defRPr b="0" i="0" sz="1800" u="none" cap="none" strike="noStrike">
                 <a:solidFill>
                   <a:schemeClr val="dk1"/>
                 </a:solidFill>
@@ -13150,7 +12911,7 @@
                 <a:sym typeface="Calibri"/>
               </a:defRPr>
             </a:lvl2pPr>
-            <a:lvl3pPr marR="0" lvl="2" algn="l" rtl="0">
+            <a:lvl3pPr lvl="2" marR="0" rtl="0" algn="l">
               <a:lnSpc>
                 <a:spcPct val="100000"/>
               </a:lnSpc>
@@ -13166,7 +12927,7 @@
               <a:buSzPts val="1400"/>
               <a:buFont typeface="Arial"/>
               <a:buNone/>
-              <a:defRPr sz="1800" b="0" i="0" u="none" strike="noStrike" cap="none">
+              <a:defRPr b="0" i="0" sz="1800" u="none" cap="none" strike="noStrike">
                 <a:solidFill>
                   <a:schemeClr val="dk1"/>
                 </a:solidFill>
@@ -13176,7 +12937,7 @@
                 <a:sym typeface="Calibri"/>
               </a:defRPr>
             </a:lvl3pPr>
-            <a:lvl4pPr marR="0" lvl="3" algn="l" rtl="0">
+            <a:lvl4pPr lvl="3" marR="0" rtl="0" algn="l">
               <a:lnSpc>
                 <a:spcPct val="100000"/>
               </a:lnSpc>
@@ -13192,7 +12953,7 @@
               <a:buSzPts val="1400"/>
               <a:buFont typeface="Arial"/>
               <a:buNone/>
-              <a:defRPr sz="1800" b="0" i="0" u="none" strike="noStrike" cap="none">
+              <a:defRPr b="0" i="0" sz="1800" u="none" cap="none" strike="noStrike">
                 <a:solidFill>
                   <a:schemeClr val="dk1"/>
                 </a:solidFill>
@@ -13202,7 +12963,7 @@
                 <a:sym typeface="Calibri"/>
               </a:defRPr>
             </a:lvl4pPr>
-            <a:lvl5pPr marR="0" lvl="4" algn="l" rtl="0">
+            <a:lvl5pPr lvl="4" marR="0" rtl="0" algn="l">
               <a:lnSpc>
                 <a:spcPct val="100000"/>
               </a:lnSpc>
@@ -13218,7 +12979,7 @@
               <a:buSzPts val="1400"/>
               <a:buFont typeface="Arial"/>
               <a:buNone/>
-              <a:defRPr sz="1800" b="0" i="0" u="none" strike="noStrike" cap="none">
+              <a:defRPr b="0" i="0" sz="1800" u="none" cap="none" strike="noStrike">
                 <a:solidFill>
                   <a:schemeClr val="dk1"/>
                 </a:solidFill>
@@ -13228,7 +12989,7 @@
                 <a:sym typeface="Calibri"/>
               </a:defRPr>
             </a:lvl5pPr>
-            <a:lvl6pPr marR="0" lvl="5" algn="l" rtl="0">
+            <a:lvl6pPr lvl="5" marR="0" rtl="0" algn="l">
               <a:lnSpc>
                 <a:spcPct val="100000"/>
               </a:lnSpc>
@@ -13244,7 +13005,7 @@
               <a:buSzPts val="1400"/>
               <a:buFont typeface="Arial"/>
               <a:buNone/>
-              <a:defRPr sz="1800" b="0" i="0" u="none" strike="noStrike" cap="none">
+              <a:defRPr b="0" i="0" sz="1800" u="none" cap="none" strike="noStrike">
                 <a:solidFill>
                   <a:schemeClr val="dk1"/>
                 </a:solidFill>
@@ -13254,7 +13015,7 @@
                 <a:sym typeface="Calibri"/>
               </a:defRPr>
             </a:lvl6pPr>
-            <a:lvl7pPr marR="0" lvl="6" algn="l" rtl="0">
+            <a:lvl7pPr lvl="6" marR="0" rtl="0" algn="l">
               <a:lnSpc>
                 <a:spcPct val="100000"/>
               </a:lnSpc>
@@ -13270,7 +13031,7 @@
               <a:buSzPts val="1400"/>
               <a:buFont typeface="Arial"/>
               <a:buNone/>
-              <a:defRPr sz="1800" b="0" i="0" u="none" strike="noStrike" cap="none">
+              <a:defRPr b="0" i="0" sz="1800" u="none" cap="none" strike="noStrike">
                 <a:solidFill>
                   <a:schemeClr val="dk1"/>
                 </a:solidFill>
@@ -13280,7 +13041,7 @@
                 <a:sym typeface="Calibri"/>
               </a:defRPr>
             </a:lvl7pPr>
-            <a:lvl8pPr marR="0" lvl="7" algn="l" rtl="0">
+            <a:lvl8pPr lvl="7" marR="0" rtl="0" algn="l">
               <a:lnSpc>
                 <a:spcPct val="100000"/>
               </a:lnSpc>
@@ -13296,7 +13057,7 @@
               <a:buSzPts val="1400"/>
               <a:buFont typeface="Arial"/>
               <a:buNone/>
-              <a:defRPr sz="1800" b="0" i="0" u="none" strike="noStrike" cap="none">
+              <a:defRPr b="0" i="0" sz="1800" u="none" cap="none" strike="noStrike">
                 <a:solidFill>
                   <a:schemeClr val="dk1"/>
                 </a:solidFill>
@@ -13306,7 +13067,7 @@
                 <a:sym typeface="Calibri"/>
               </a:defRPr>
             </a:lvl8pPr>
-            <a:lvl9pPr marR="0" lvl="8" algn="l" rtl="0">
+            <a:lvl9pPr lvl="8" marR="0" rtl="0" algn="l">
               <a:lnSpc>
                 <a:spcPct val="100000"/>
               </a:lnSpc>
@@ -13322,7 +13083,7 @@
               <a:buSzPts val="1400"/>
               <a:buFont typeface="Arial"/>
               <a:buNone/>
-              <a:defRPr sz="1800" b="0" i="0" u="none" strike="noStrike" cap="none">
+              <a:defRPr b="0" i="0" sz="1800" u="none" cap="none" strike="noStrike">
                 <a:solidFill>
                   <a:schemeClr val="dk1"/>
                 </a:solidFill>
@@ -13333,19 +13094,15 @@
               </a:defRPr>
             </a:lvl9pPr>
           </a:lstStyle>
-          <a:p>
-            <a:endParaRPr/>
-          </a:p>
+          <a:p/>
         </p:txBody>
       </p:sp>
       <p:sp>
         <p:nvSpPr>
           <p:cNvPr id="10" name="Google Shape;10;p2"/>
-          <p:cNvSpPr txBox="1">
-            <a:spLocks noGrp="1"/>
-          </p:cNvSpPr>
+          <p:cNvSpPr txBox="1"/>
           <p:nvPr>
-            <p:ph type="sldNum" idx="12"/>
+            <p:ph idx="12" type="sldNum"/>
           </p:nvPr>
         </p:nvSpPr>
         <p:spPr>
@@ -13362,11 +13119,11 @@
           </a:ln>
         </p:spPr>
         <p:txBody>
-          <a:bodyPr spcFirstLastPara="1" wrap="square" lIns="91425" tIns="45700" rIns="91425" bIns="45700" anchor="ctr" anchorCtr="0">
+          <a:bodyPr anchorCtr="0" anchor="ctr" bIns="45700" lIns="91425" spcFirstLastPara="1" rIns="91425" wrap="square" tIns="45700">
             <a:noAutofit/>
           </a:bodyPr>
           <a:lstStyle>
-            <a:lvl1pPr marL="0" marR="0" lvl="0" indent="0" algn="r" rtl="0">
+            <a:lvl1pPr indent="0" lvl="0" marL="0" marR="0" rtl="0" algn="r">
               <a:lnSpc>
                 <a:spcPct val="100000"/>
               </a:lnSpc>
@@ -13382,7 +13139,7 @@
               <a:buSzPts val="5760"/>
               <a:buFont typeface="Arial"/>
               <a:buNone/>
-              <a:defRPr sz="5760" b="0" i="0" u="none" strike="noStrike" cap="none">
+              <a:defRPr b="0" i="0" sz="5760" u="none" cap="none" strike="noStrike">
                 <a:solidFill>
                   <a:srgbClr val="888888"/>
                 </a:solidFill>
@@ -13392,7 +13149,7 @@
                 <a:sym typeface="Calibri"/>
               </a:defRPr>
             </a:lvl1pPr>
-            <a:lvl2pPr marL="0" marR="0" lvl="1" indent="0" algn="r" rtl="0">
+            <a:lvl2pPr indent="0" lvl="1" marL="0" marR="0" rtl="0" algn="r">
               <a:lnSpc>
                 <a:spcPct val="100000"/>
               </a:lnSpc>
@@ -13408,7 +13165,7 @@
               <a:buSzPts val="5760"/>
               <a:buFont typeface="Arial"/>
               <a:buNone/>
-              <a:defRPr sz="5760" b="0" i="0" u="none" strike="noStrike" cap="none">
+              <a:defRPr b="0" i="0" sz="5760" u="none" cap="none" strike="noStrike">
                 <a:solidFill>
                   <a:srgbClr val="888888"/>
                 </a:solidFill>
@@ -13418,7 +13175,7 @@
                 <a:sym typeface="Calibri"/>
               </a:defRPr>
             </a:lvl2pPr>
-            <a:lvl3pPr marL="0" marR="0" lvl="2" indent="0" algn="r" rtl="0">
+            <a:lvl3pPr indent="0" lvl="2" marL="0" marR="0" rtl="0" algn="r">
               <a:lnSpc>
                 <a:spcPct val="100000"/>
               </a:lnSpc>
@@ -13434,7 +13191,7 @@
               <a:buSzPts val="5760"/>
               <a:buFont typeface="Arial"/>
               <a:buNone/>
-              <a:defRPr sz="5760" b="0" i="0" u="none" strike="noStrike" cap="none">
+              <a:defRPr b="0" i="0" sz="5760" u="none" cap="none" strike="noStrike">
                 <a:solidFill>
                   <a:srgbClr val="888888"/>
                 </a:solidFill>
@@ -13444,7 +13201,7 @@
                 <a:sym typeface="Calibri"/>
               </a:defRPr>
             </a:lvl3pPr>
-            <a:lvl4pPr marL="0" marR="0" lvl="3" indent="0" algn="r" rtl="0">
+            <a:lvl4pPr indent="0" lvl="3" marL="0" marR="0" rtl="0" algn="r">
               <a:lnSpc>
                 <a:spcPct val="100000"/>
               </a:lnSpc>
@@ -13460,7 +13217,7 @@
               <a:buSzPts val="5760"/>
               <a:buFont typeface="Arial"/>
               <a:buNone/>
-              <a:defRPr sz="5760" b="0" i="0" u="none" strike="noStrike" cap="none">
+              <a:defRPr b="0" i="0" sz="5760" u="none" cap="none" strike="noStrike">
                 <a:solidFill>
                   <a:srgbClr val="888888"/>
                 </a:solidFill>
@@ -13470,7 +13227,7 @@
                 <a:sym typeface="Calibri"/>
               </a:defRPr>
             </a:lvl4pPr>
-            <a:lvl5pPr marL="0" marR="0" lvl="4" indent="0" algn="r" rtl="0">
+            <a:lvl5pPr indent="0" lvl="4" marL="0" marR="0" rtl="0" algn="r">
               <a:lnSpc>
                 <a:spcPct val="100000"/>
               </a:lnSpc>
@@ -13486,7 +13243,7 @@
               <a:buSzPts val="5760"/>
               <a:buFont typeface="Arial"/>
               <a:buNone/>
-              <a:defRPr sz="5760" b="0" i="0" u="none" strike="noStrike" cap="none">
+              <a:defRPr b="0" i="0" sz="5760" u="none" cap="none" strike="noStrike">
                 <a:solidFill>
                   <a:srgbClr val="888888"/>
                 </a:solidFill>
@@ -13496,7 +13253,7 @@
                 <a:sym typeface="Calibri"/>
               </a:defRPr>
             </a:lvl5pPr>
-            <a:lvl6pPr marL="0" marR="0" lvl="5" indent="0" algn="r" rtl="0">
+            <a:lvl6pPr indent="0" lvl="5" marL="0" marR="0" rtl="0" algn="r">
               <a:lnSpc>
                 <a:spcPct val="100000"/>
               </a:lnSpc>
@@ -13512,7 +13269,7 @@
               <a:buSzPts val="5760"/>
               <a:buFont typeface="Arial"/>
               <a:buNone/>
-              <a:defRPr sz="5760" b="0" i="0" u="none" strike="noStrike" cap="none">
+              <a:defRPr b="0" i="0" sz="5760" u="none" cap="none" strike="noStrike">
                 <a:solidFill>
                   <a:srgbClr val="888888"/>
                 </a:solidFill>
@@ -13522,7 +13279,7 @@
                 <a:sym typeface="Calibri"/>
               </a:defRPr>
             </a:lvl6pPr>
-            <a:lvl7pPr marL="0" marR="0" lvl="6" indent="0" algn="r" rtl="0">
+            <a:lvl7pPr indent="0" lvl="6" marL="0" marR="0" rtl="0" algn="r">
               <a:lnSpc>
                 <a:spcPct val="100000"/>
               </a:lnSpc>
@@ -13538,7 +13295,7 @@
               <a:buSzPts val="5760"/>
               <a:buFont typeface="Arial"/>
               <a:buNone/>
-              <a:defRPr sz="5760" b="0" i="0" u="none" strike="noStrike" cap="none">
+              <a:defRPr b="0" i="0" sz="5760" u="none" cap="none" strike="noStrike">
                 <a:solidFill>
                   <a:srgbClr val="888888"/>
                 </a:solidFill>
@@ -13548,7 +13305,7 @@
                 <a:sym typeface="Calibri"/>
               </a:defRPr>
             </a:lvl7pPr>
-            <a:lvl8pPr marL="0" marR="0" lvl="7" indent="0" algn="r" rtl="0">
+            <a:lvl8pPr indent="0" lvl="7" marL="0" marR="0" rtl="0" algn="r">
               <a:lnSpc>
                 <a:spcPct val="100000"/>
               </a:lnSpc>
@@ -13564,7 +13321,7 @@
               <a:buSzPts val="5760"/>
               <a:buFont typeface="Arial"/>
               <a:buNone/>
-              <a:defRPr sz="5760" b="0" i="0" u="none" strike="noStrike" cap="none">
+              <a:defRPr b="0" i="0" sz="5760" u="none" cap="none" strike="noStrike">
                 <a:solidFill>
                   <a:srgbClr val="888888"/>
                 </a:solidFill>
@@ -13574,7 +13331,7 @@
                 <a:sym typeface="Calibri"/>
               </a:defRPr>
             </a:lvl8pPr>
-            <a:lvl9pPr marL="0" marR="0" lvl="8" indent="0" algn="r" rtl="0">
+            <a:lvl9pPr indent="0" lvl="8" marL="0" marR="0" rtl="0" algn="r">
               <a:lnSpc>
                 <a:spcPct val="100000"/>
               </a:lnSpc>
@@ -13590,7 +13347,7 @@
               <a:buSzPts val="5760"/>
               <a:buFont typeface="Arial"/>
               <a:buNone/>
-              <a:defRPr sz="5760" b="0" i="0" u="none" strike="noStrike" cap="none">
+              <a:defRPr b="0" i="0" sz="5760" u="none" cap="none" strike="noStrike">
                 <a:solidFill>
                   <a:srgbClr val="888888"/>
                 </a:solidFill>
@@ -13602,7 +13359,7 @@
             </a:lvl9pPr>
           </a:lstStyle>
           <a:p>
-            <a:pPr marL="0" lvl="0" indent="0" algn="r" rtl="0">
+            <a:pPr indent="0" lvl="0" marL="0" rtl="0" algn="r">
               <a:spcBef>
                 <a:spcPts val="0"/>
               </a:spcBef>
@@ -13621,7 +13378,7 @@
       </p:sp>
     </p:spTree>
   </p:cSld>
-  <p:clrMap bg1="lt1" tx1="dk1" bg2="dk2" tx2="lt2" accent1="accent1" accent2="accent2" accent3="accent3" accent4="accent4" accent5="accent5" accent6="accent6" hlink="hlink" folHlink="folHlink"/>
+  <p:clrMap accent1="accent1" accent2="accent2" accent3="accent3" accent4="accent4" accent5="accent5" accent6="accent6" bg1="lt1" bg2="dk2" tx1="dk1" tx2="lt2" folHlink="folHlink" hlink="hlink"/>
   <p:sldLayoutIdLst>
     <p:sldLayoutId id="2147483649" r:id="rId1"/>
     <p:sldLayoutId id="2147483650" r:id="rId2"/>
@@ -13636,10 +13393,10 @@
     <p:sldLayoutId id="2147483659" r:id="rId11"/>
     <p:sldLayoutId id="2147483660" r:id="rId12"/>
   </p:sldLayoutIdLst>
-  <p:hf sldNum="0" hdr="0" ftr="0" dt="0"/>
+  <p:hf dt="0" ftr="0" hdr="0" sldNum="0"/>
   <p:txStyles>
     <p:titleStyle>
-      <a:defPPr marR="0" lvl="0" algn="l" rtl="0">
+      <a:defPPr lvl="0" marR="0" rtl="0" algn="l">
         <a:lnSpc>
           <a:spcPct val="100000"/>
         </a:lnSpc>
@@ -13650,7 +13407,7 @@
           <a:spcPts val="0"/>
         </a:spcAft>
       </a:defPPr>
-      <a:lvl1pPr marR="0" lvl="0" algn="l" rtl="0">
+      <a:lvl1pPr lvl="0" marR="0" rtl="0" algn="l">
         <a:lnSpc>
           <a:spcPct val="100000"/>
         </a:lnSpc>
@@ -13664,7 +13421,7 @@
           <a:srgbClr val="000000"/>
         </a:buClr>
         <a:buFont typeface="Arial"/>
-        <a:defRPr sz="1400" b="0" i="0" u="none" strike="noStrike" cap="none">
+        <a:defRPr b="0" i="0" sz="1400" u="none" cap="none" strike="noStrike">
           <a:solidFill>
             <a:srgbClr val="000000"/>
           </a:solidFill>
@@ -13674,7 +13431,7 @@
           <a:sym typeface="Arial"/>
         </a:defRPr>
       </a:lvl1pPr>
-      <a:lvl2pPr marR="0" lvl="1" algn="l" rtl="0">
+      <a:lvl2pPr lvl="1" marR="0" rtl="0" algn="l">
         <a:lnSpc>
           <a:spcPct val="100000"/>
         </a:lnSpc>
@@ -13688,7 +13445,7 @@
           <a:srgbClr val="000000"/>
         </a:buClr>
         <a:buFont typeface="Arial"/>
-        <a:defRPr sz="1400" b="0" i="0" u="none" strike="noStrike" cap="none">
+        <a:defRPr b="0" i="0" sz="1400" u="none" cap="none" strike="noStrike">
           <a:solidFill>
             <a:srgbClr val="000000"/>
           </a:solidFill>
@@ -13698,7 +13455,7 @@
           <a:sym typeface="Arial"/>
         </a:defRPr>
       </a:lvl2pPr>
-      <a:lvl3pPr marR="0" lvl="2" algn="l" rtl="0">
+      <a:lvl3pPr lvl="2" marR="0" rtl="0" algn="l">
         <a:lnSpc>
           <a:spcPct val="100000"/>
         </a:lnSpc>
@@ -13712,7 +13469,7 @@
           <a:srgbClr val="000000"/>
         </a:buClr>
         <a:buFont typeface="Arial"/>
-        <a:defRPr sz="1400" b="0" i="0" u="none" strike="noStrike" cap="none">
+        <a:defRPr b="0" i="0" sz="1400" u="none" cap="none" strike="noStrike">
           <a:solidFill>
             <a:srgbClr val="000000"/>
           </a:solidFill>
@@ -13722,7 +13479,7 @@
           <a:sym typeface="Arial"/>
         </a:defRPr>
       </a:lvl3pPr>
-      <a:lvl4pPr marR="0" lvl="3" algn="l" rtl="0">
+      <a:lvl4pPr lvl="3" marR="0" rtl="0" algn="l">
         <a:lnSpc>
           <a:spcPct val="100000"/>
         </a:lnSpc>
@@ -13736,7 +13493,7 @@
           <a:srgbClr val="000000"/>
         </a:buClr>
         <a:buFont typeface="Arial"/>
-        <a:defRPr sz="1400" b="0" i="0" u="none" strike="noStrike" cap="none">
+        <a:defRPr b="0" i="0" sz="1400" u="none" cap="none" strike="noStrike">
           <a:solidFill>
             <a:srgbClr val="000000"/>
           </a:solidFill>
@@ -13746,7 +13503,7 @@
           <a:sym typeface="Arial"/>
         </a:defRPr>
       </a:lvl4pPr>
-      <a:lvl5pPr marR="0" lvl="4" algn="l" rtl="0">
+      <a:lvl5pPr lvl="4" marR="0" rtl="0" algn="l">
         <a:lnSpc>
           <a:spcPct val="100000"/>
         </a:lnSpc>
@@ -13760,7 +13517,7 @@
           <a:srgbClr val="000000"/>
         </a:buClr>
         <a:buFont typeface="Arial"/>
-        <a:defRPr sz="1400" b="0" i="0" u="none" strike="noStrike" cap="none">
+        <a:defRPr b="0" i="0" sz="1400" u="none" cap="none" strike="noStrike">
           <a:solidFill>
             <a:srgbClr val="000000"/>
           </a:solidFill>
@@ -13770,7 +13527,7 @@
           <a:sym typeface="Arial"/>
         </a:defRPr>
       </a:lvl5pPr>
-      <a:lvl6pPr marR="0" lvl="5" algn="l" rtl="0">
+      <a:lvl6pPr lvl="5" marR="0" rtl="0" algn="l">
         <a:lnSpc>
           <a:spcPct val="100000"/>
         </a:lnSpc>
@@ -13784,7 +13541,7 @@
           <a:srgbClr val="000000"/>
         </a:buClr>
         <a:buFont typeface="Arial"/>
-        <a:defRPr sz="1400" b="0" i="0" u="none" strike="noStrike" cap="none">
+        <a:defRPr b="0" i="0" sz="1400" u="none" cap="none" strike="noStrike">
           <a:solidFill>
             <a:srgbClr val="000000"/>
           </a:solidFill>
@@ -13794,7 +13551,7 @@
           <a:sym typeface="Arial"/>
         </a:defRPr>
       </a:lvl6pPr>
-      <a:lvl7pPr marR="0" lvl="6" algn="l" rtl="0">
+      <a:lvl7pPr lvl="6" marR="0" rtl="0" algn="l">
         <a:lnSpc>
           <a:spcPct val="100000"/>
         </a:lnSpc>
@@ -13808,7 +13565,7 @@
           <a:srgbClr val="000000"/>
         </a:buClr>
         <a:buFont typeface="Arial"/>
-        <a:defRPr sz="1400" b="0" i="0" u="none" strike="noStrike" cap="none">
+        <a:defRPr b="0" i="0" sz="1400" u="none" cap="none" strike="noStrike">
           <a:solidFill>
             <a:srgbClr val="000000"/>
           </a:solidFill>
@@ -13818,7 +13575,7 @@
           <a:sym typeface="Arial"/>
         </a:defRPr>
       </a:lvl7pPr>
-      <a:lvl8pPr marR="0" lvl="7" algn="l" rtl="0">
+      <a:lvl8pPr lvl="7" marR="0" rtl="0" algn="l">
         <a:lnSpc>
           <a:spcPct val="100000"/>
         </a:lnSpc>
@@ -13832,7 +13589,7 @@
           <a:srgbClr val="000000"/>
         </a:buClr>
         <a:buFont typeface="Arial"/>
-        <a:defRPr sz="1400" b="0" i="0" u="none" strike="noStrike" cap="none">
+        <a:defRPr b="0" i="0" sz="1400" u="none" cap="none" strike="noStrike">
           <a:solidFill>
             <a:srgbClr val="000000"/>
           </a:solidFill>
@@ -13842,7 +13599,7 @@
           <a:sym typeface="Arial"/>
         </a:defRPr>
       </a:lvl8pPr>
-      <a:lvl9pPr marR="0" lvl="8" algn="l" rtl="0">
+      <a:lvl9pPr lvl="8" marR="0" rtl="0" algn="l">
         <a:lnSpc>
           <a:spcPct val="100000"/>
         </a:lnSpc>
@@ -13856,7 +13613,7 @@
           <a:srgbClr val="000000"/>
         </a:buClr>
         <a:buFont typeface="Arial"/>
-        <a:defRPr sz="1400" b="0" i="0" u="none" strike="noStrike" cap="none">
+        <a:defRPr b="0" i="0" sz="1400" u="none" cap="none" strike="noStrike">
           <a:solidFill>
             <a:srgbClr val="000000"/>
           </a:solidFill>
@@ -13868,7 +13625,7 @@
       </a:lvl9pPr>
     </p:titleStyle>
     <p:bodyStyle>
-      <a:defPPr marR="0" lvl="0" algn="l" rtl="0">
+      <a:defPPr lvl="0" marR="0" rtl="0" algn="l">
         <a:lnSpc>
           <a:spcPct val="100000"/>
         </a:lnSpc>
@@ -13879,7 +13636,7 @@
           <a:spcPts val="0"/>
         </a:spcAft>
       </a:defPPr>
-      <a:lvl1pPr marR="0" lvl="0" algn="l" rtl="0">
+      <a:lvl1pPr lvl="0" marR="0" rtl="0" algn="l">
         <a:lnSpc>
           <a:spcPct val="100000"/>
         </a:lnSpc>
@@ -13893,7 +13650,7 @@
           <a:srgbClr val="000000"/>
         </a:buClr>
         <a:buFont typeface="Arial"/>
-        <a:defRPr sz="1400" b="0" i="0" u="none" strike="noStrike" cap="none">
+        <a:defRPr b="0" i="0" sz="1400" u="none" cap="none" strike="noStrike">
           <a:solidFill>
             <a:srgbClr val="000000"/>
           </a:solidFill>
@@ -13903,7 +13660,7 @@
           <a:sym typeface="Arial"/>
         </a:defRPr>
       </a:lvl1pPr>
-      <a:lvl2pPr marR="0" lvl="1" algn="l" rtl="0">
+      <a:lvl2pPr lvl="1" marR="0" rtl="0" algn="l">
         <a:lnSpc>
           <a:spcPct val="100000"/>
         </a:lnSpc>
@@ -13917,7 +13674,7 @@
           <a:srgbClr val="000000"/>
         </a:buClr>
         <a:buFont typeface="Arial"/>
-        <a:defRPr sz="1400" b="0" i="0" u="none" strike="noStrike" cap="none">
+        <a:defRPr b="0" i="0" sz="1400" u="none" cap="none" strike="noStrike">
           <a:solidFill>
             <a:srgbClr val="000000"/>
           </a:solidFill>
@@ -13927,7 +13684,7 @@
           <a:sym typeface="Arial"/>
         </a:defRPr>
       </a:lvl2pPr>
-      <a:lvl3pPr marR="0" lvl="2" algn="l" rtl="0">
+      <a:lvl3pPr lvl="2" marR="0" rtl="0" algn="l">
         <a:lnSpc>
           <a:spcPct val="100000"/>
         </a:lnSpc>
@@ -13941,7 +13698,7 @@
           <a:srgbClr val="000000"/>
         </a:buClr>
         <a:buFont typeface="Arial"/>
-        <a:defRPr sz="1400" b="0" i="0" u="none" strike="noStrike" cap="none">
+        <a:defRPr b="0" i="0" sz="1400" u="none" cap="none" strike="noStrike">
           <a:solidFill>
             <a:srgbClr val="000000"/>
           </a:solidFill>
@@ -13951,7 +13708,7 @@
           <a:sym typeface="Arial"/>
         </a:defRPr>
       </a:lvl3pPr>
-      <a:lvl4pPr marR="0" lvl="3" algn="l" rtl="0">
+      <a:lvl4pPr lvl="3" marR="0" rtl="0" algn="l">
         <a:lnSpc>
           <a:spcPct val="100000"/>
         </a:lnSpc>
@@ -13965,7 +13722,7 @@
           <a:srgbClr val="000000"/>
         </a:buClr>
         <a:buFont typeface="Arial"/>
-        <a:defRPr sz="1400" b="0" i="0" u="none" strike="noStrike" cap="none">
+        <a:defRPr b="0" i="0" sz="1400" u="none" cap="none" strike="noStrike">
           <a:solidFill>
             <a:srgbClr val="000000"/>
           </a:solidFill>
@@ -13975,7 +13732,7 @@
           <a:sym typeface="Arial"/>
         </a:defRPr>
       </a:lvl4pPr>
-      <a:lvl5pPr marR="0" lvl="4" algn="l" rtl="0">
+      <a:lvl5pPr lvl="4" marR="0" rtl="0" algn="l">
         <a:lnSpc>
           <a:spcPct val="100000"/>
         </a:lnSpc>
@@ -13989,7 +13746,7 @@
           <a:srgbClr val="000000"/>
         </a:buClr>
         <a:buFont typeface="Arial"/>
-        <a:defRPr sz="1400" b="0" i="0" u="none" strike="noStrike" cap="none">
+        <a:defRPr b="0" i="0" sz="1400" u="none" cap="none" strike="noStrike">
           <a:solidFill>
             <a:srgbClr val="000000"/>
           </a:solidFill>
@@ -13999,7 +13756,7 @@
           <a:sym typeface="Arial"/>
         </a:defRPr>
       </a:lvl5pPr>
-      <a:lvl6pPr marR="0" lvl="5" algn="l" rtl="0">
+      <a:lvl6pPr lvl="5" marR="0" rtl="0" algn="l">
         <a:lnSpc>
           <a:spcPct val="100000"/>
         </a:lnSpc>
@@ -14013,7 +13770,7 @@
           <a:srgbClr val="000000"/>
         </a:buClr>
         <a:buFont typeface="Arial"/>
-        <a:defRPr sz="1400" b="0" i="0" u="none" strike="noStrike" cap="none">
+        <a:defRPr b="0" i="0" sz="1400" u="none" cap="none" strike="noStrike">
           <a:solidFill>
             <a:srgbClr val="000000"/>
           </a:solidFill>
@@ -14023,7 +13780,7 @@
           <a:sym typeface="Arial"/>
         </a:defRPr>
       </a:lvl6pPr>
-      <a:lvl7pPr marR="0" lvl="6" algn="l" rtl="0">
+      <a:lvl7pPr lvl="6" marR="0" rtl="0" algn="l">
         <a:lnSpc>
           <a:spcPct val="100000"/>
         </a:lnSpc>
@@ -14037,7 +13794,7 @@
           <a:srgbClr val="000000"/>
         </a:buClr>
         <a:buFont typeface="Arial"/>
-        <a:defRPr sz="1400" b="0" i="0" u="none" strike="noStrike" cap="none">
+        <a:defRPr b="0" i="0" sz="1400" u="none" cap="none" strike="noStrike">
           <a:solidFill>
             <a:srgbClr val="000000"/>
           </a:solidFill>
@@ -14047,7 +13804,7 @@
           <a:sym typeface="Arial"/>
         </a:defRPr>
       </a:lvl7pPr>
-      <a:lvl8pPr marR="0" lvl="7" algn="l" rtl="0">
+      <a:lvl8pPr lvl="7" marR="0" rtl="0" algn="l">
         <a:lnSpc>
           <a:spcPct val="100000"/>
         </a:lnSpc>
@@ -14061,7 +13818,7 @@
           <a:srgbClr val="000000"/>
         </a:buClr>
         <a:buFont typeface="Arial"/>
-        <a:defRPr sz="1400" b="0" i="0" u="none" strike="noStrike" cap="none">
+        <a:defRPr b="0" i="0" sz="1400" u="none" cap="none" strike="noStrike">
           <a:solidFill>
             <a:srgbClr val="000000"/>
           </a:solidFill>
@@ -14071,7 +13828,7 @@
           <a:sym typeface="Arial"/>
         </a:defRPr>
       </a:lvl8pPr>
-      <a:lvl9pPr marR="0" lvl="8" algn="l" rtl="0">
+      <a:lvl9pPr lvl="8" marR="0" rtl="0" algn="l">
         <a:lnSpc>
           <a:spcPct val="100000"/>
         </a:lnSpc>
@@ -14085,7 +13842,7 @@
           <a:srgbClr val="000000"/>
         </a:buClr>
         <a:buFont typeface="Arial"/>
-        <a:defRPr sz="1400" b="0" i="0" u="none" strike="noStrike" cap="none">
+        <a:defRPr b="0" i="0" sz="1400" u="none" cap="none" strike="noStrike">
           <a:solidFill>
             <a:srgbClr val="000000"/>
           </a:solidFill>
@@ -14097,7 +13854,7 @@
       </a:lvl9pPr>
     </p:bodyStyle>
     <p:otherStyle>
-      <a:defPPr marR="0" lvl="0" algn="l" rtl="0">
+      <a:defPPr lvl="0" marR="0" rtl="0" algn="l">
         <a:lnSpc>
           <a:spcPct val="100000"/>
         </a:lnSpc>
@@ -14108,7 +13865,7 @@
           <a:spcPts val="0"/>
         </a:spcAft>
       </a:defPPr>
-      <a:lvl1pPr marR="0" lvl="0" algn="l" rtl="0">
+      <a:lvl1pPr lvl="0" marR="0" rtl="0" algn="l">
         <a:lnSpc>
           <a:spcPct val="100000"/>
         </a:lnSpc>
@@ -14122,7 +13879,7 @@
           <a:srgbClr val="000000"/>
         </a:buClr>
         <a:buFont typeface="Arial"/>
-        <a:defRPr sz="1400" b="0" i="0" u="none" strike="noStrike" cap="none">
+        <a:defRPr b="0" i="0" sz="1400" u="none" cap="none" strike="noStrike">
           <a:solidFill>
             <a:srgbClr val="000000"/>
           </a:solidFill>
@@ -14132,7 +13889,7 @@
           <a:sym typeface="Arial"/>
         </a:defRPr>
       </a:lvl1pPr>
-      <a:lvl2pPr marR="0" lvl="1" algn="l" rtl="0">
+      <a:lvl2pPr lvl="1" marR="0" rtl="0" algn="l">
         <a:lnSpc>
           <a:spcPct val="100000"/>
         </a:lnSpc>
@@ -14146,7 +13903,7 @@
           <a:srgbClr val="000000"/>
         </a:buClr>
         <a:buFont typeface="Arial"/>
-        <a:defRPr sz="1400" b="0" i="0" u="none" strike="noStrike" cap="none">
+        <a:defRPr b="0" i="0" sz="1400" u="none" cap="none" strike="noStrike">
           <a:solidFill>
             <a:srgbClr val="000000"/>
           </a:solidFill>
@@ -14156,7 +13913,7 @@
           <a:sym typeface="Arial"/>
         </a:defRPr>
       </a:lvl2pPr>
-      <a:lvl3pPr marR="0" lvl="2" algn="l" rtl="0">
+      <a:lvl3pPr lvl="2" marR="0" rtl="0" algn="l">
         <a:lnSpc>
           <a:spcPct val="100000"/>
         </a:lnSpc>
@@ -14170,7 +13927,7 @@
           <a:srgbClr val="000000"/>
         </a:buClr>
         <a:buFont typeface="Arial"/>
-        <a:defRPr sz="1400" b="0" i="0" u="none" strike="noStrike" cap="none">
+        <a:defRPr b="0" i="0" sz="1400" u="none" cap="none" strike="noStrike">
           <a:solidFill>
             <a:srgbClr val="000000"/>
           </a:solidFill>
@@ -14180,7 +13937,7 @@
           <a:sym typeface="Arial"/>
         </a:defRPr>
       </a:lvl3pPr>
-      <a:lvl4pPr marR="0" lvl="3" algn="l" rtl="0">
+      <a:lvl4pPr lvl="3" marR="0" rtl="0" algn="l">
         <a:lnSpc>
           <a:spcPct val="100000"/>
         </a:lnSpc>
@@ -14194,7 +13951,7 @@
           <a:srgbClr val="000000"/>
         </a:buClr>
         <a:buFont typeface="Arial"/>
-        <a:defRPr sz="1400" b="0" i="0" u="none" strike="noStrike" cap="none">
+        <a:defRPr b="0" i="0" sz="1400" u="none" cap="none" strike="noStrike">
           <a:solidFill>
             <a:srgbClr val="000000"/>
           </a:solidFill>
@@ -14204,7 +13961,7 @@
           <a:sym typeface="Arial"/>
         </a:defRPr>
       </a:lvl4pPr>
-      <a:lvl5pPr marR="0" lvl="4" algn="l" rtl="0">
+      <a:lvl5pPr lvl="4" marR="0" rtl="0" algn="l">
         <a:lnSpc>
           <a:spcPct val="100000"/>
         </a:lnSpc>
@@ -14218,7 +13975,7 @@
           <a:srgbClr val="000000"/>
         </a:buClr>
         <a:buFont typeface="Arial"/>
-        <a:defRPr sz="1400" b="0" i="0" u="none" strike="noStrike" cap="none">
+        <a:defRPr b="0" i="0" sz="1400" u="none" cap="none" strike="noStrike">
           <a:solidFill>
             <a:srgbClr val="000000"/>
           </a:solidFill>
@@ -14228,7 +13985,7 @@
           <a:sym typeface="Arial"/>
         </a:defRPr>
       </a:lvl5pPr>
-      <a:lvl6pPr marR="0" lvl="5" algn="l" rtl="0">
+      <a:lvl6pPr lvl="5" marR="0" rtl="0" algn="l">
         <a:lnSpc>
           <a:spcPct val="100000"/>
         </a:lnSpc>
@@ -14242,7 +13999,7 @@
           <a:srgbClr val="000000"/>
         </a:buClr>
         <a:buFont typeface="Arial"/>
-        <a:defRPr sz="1400" b="0" i="0" u="none" strike="noStrike" cap="none">
+        <a:defRPr b="0" i="0" sz="1400" u="none" cap="none" strike="noStrike">
           <a:solidFill>
             <a:srgbClr val="000000"/>
           </a:solidFill>
@@ -14252,7 +14009,7 @@
           <a:sym typeface="Arial"/>
         </a:defRPr>
       </a:lvl6pPr>
-      <a:lvl7pPr marR="0" lvl="6" algn="l" rtl="0">
+      <a:lvl7pPr lvl="6" marR="0" rtl="0" algn="l">
         <a:lnSpc>
           <a:spcPct val="100000"/>
         </a:lnSpc>
@@ -14266,7 +14023,7 @@
           <a:srgbClr val="000000"/>
         </a:buClr>
         <a:buFont typeface="Arial"/>
-        <a:defRPr sz="1400" b="0" i="0" u="none" strike="noStrike" cap="none">
+        <a:defRPr b="0" i="0" sz="1400" u="none" cap="none" strike="noStrike">
           <a:solidFill>
             <a:srgbClr val="000000"/>
           </a:solidFill>
@@ -14276,7 +14033,7 @@
           <a:sym typeface="Arial"/>
         </a:defRPr>
       </a:lvl7pPr>
-      <a:lvl8pPr marR="0" lvl="7" algn="l" rtl="0">
+      <a:lvl8pPr lvl="7" marR="0" rtl="0" algn="l">
         <a:lnSpc>
           <a:spcPct val="100000"/>
         </a:lnSpc>
@@ -14290,7 +14047,7 @@
           <a:srgbClr val="000000"/>
         </a:buClr>
         <a:buFont typeface="Arial"/>
-        <a:defRPr sz="1400" b="0" i="0" u="none" strike="noStrike" cap="none">
+        <a:defRPr b="0" i="0" sz="1400" u="none" cap="none" strike="noStrike">
           <a:solidFill>
             <a:srgbClr val="000000"/>
           </a:solidFill>
@@ -14300,7 +14057,7 @@
           <a:sym typeface="Arial"/>
         </a:defRPr>
       </a:lvl8pPr>
-      <a:lvl9pPr marR="0" lvl="8" algn="l" rtl="0">
+      <a:lvl9pPr lvl="8" marR="0" rtl="0" algn="l">
         <a:lnSpc>
           <a:spcPct val="100000"/>
         </a:lnSpc>
@@ -14314,7 +14071,7 @@
           <a:srgbClr val="000000"/>
         </a:buClr>
         <a:buFont typeface="Arial"/>
-        <a:defRPr sz="1400" b="0" i="0" u="none" strike="noStrike" cap="none">
+        <a:defRPr b="0" i="0" sz="1400" u="none" cap="none" strike="noStrike">
           <a:solidFill>
             <a:srgbClr val="000000"/>
           </a:solidFill>
@@ -14330,11 +14087,11 @@
 </file>
 
 <file path=ppt/slides/slide1.xml><?xml version="1.0" encoding="utf-8"?>
-<p:sld xmlns:a="http://schemas.openxmlformats.org/drawingml/2006/main" xmlns:r="http://schemas.openxmlformats.org/officeDocument/2006/relationships" xmlns:p="http://schemas.openxmlformats.org/presentationml/2006/main">
+<p:sld xmlns:a="http://schemas.openxmlformats.org/drawingml/2006/main" xmlns:r="http://schemas.openxmlformats.org/officeDocument/2006/relationships" xmlns:mc="http://schemas.openxmlformats.org/markup-compatibility/2006" xmlns:mv="urn:schemas-microsoft-com:mac:vml" xmlns:p="http://schemas.openxmlformats.org/presentationml/2006/main" xmlns:c="http://schemas.openxmlformats.org/drawingml/2006/chart" xmlns:dgm="http://schemas.openxmlformats.org/drawingml/2006/diagram" xmlns:o="urn:schemas-microsoft-com:office:office" xmlns:v="urn:schemas-microsoft-com:vml" xmlns:pvml="urn:schemas-microsoft-com:office:powerpoint" xmlns:com="http://schemas.openxmlformats.org/drawingml/2006/compatibility" xmlns:p14="http://schemas.microsoft.com/office/powerpoint/2010/main" xmlns:p15="http://schemas.microsoft.com/office/powerpoint/2012/main" xmlns:ahyp="http://schemas.microsoft.com/office/drawing/2018/hyperlinkcolor">
   <p:cSld>
     <p:spTree>
       <p:nvGrpSpPr>
-        <p:cNvPr id="1" name="Shape 86"/>
+        <p:cNvPr id="86" name="Shape 86"/>
         <p:cNvGrpSpPr/>
         <p:nvPr/>
       </p:nvGrpSpPr>
@@ -14375,23 +14132,23 @@
               <a:avLst/>
             </a:prstGeom>
             <a:noFill/>
-            <a:ln w="76200" cap="flat" cmpd="sng">
+            <a:ln cap="flat" cmpd="sng" w="76200">
               <a:solidFill>
                 <a:srgbClr val="FFC000"/>
               </a:solidFill>
               <a:prstDash val="solid"/>
               <a:round/>
-              <a:headEnd type="none" w="sm" len="sm"/>
-              <a:tailEnd type="none" w="sm" len="sm"/>
+              <a:headEnd len="sm" w="sm" type="none"/>
+              <a:tailEnd len="sm" w="sm" type="none"/>
             </a:ln>
           </p:spPr>
           <p:txBody>
-            <a:bodyPr spcFirstLastPara="1" wrap="square" lIns="457200" tIns="457200" rIns="457200" bIns="228600" anchor="t" anchorCtr="0">
+            <a:bodyPr anchorCtr="0" anchor="t" bIns="228600" lIns="457200" spcFirstLastPara="1" rIns="457200" wrap="square" tIns="457200">
               <a:spAutoFit/>
             </a:bodyPr>
             <a:lstStyle/>
             <a:p>
-              <a:pPr marL="457200" marR="0" lvl="0" indent="-457200" algn="l" rtl="0">
+              <a:pPr indent="-457200" lvl="0" marL="457200" marR="0" rtl="0" algn="l">
                 <a:lnSpc>
                   <a:spcPct val="100000"/>
                 </a:lnSpc>
@@ -14409,7 +14166,7 @@
                 <a:buChar char="●"/>
               </a:pPr>
               <a:r>
-                <a:rPr lang="en-US" sz="3600" b="0" i="0" u="none" strike="noStrike" cap="none">
+                <a:rPr b="0" i="0" lang="en-US" sz="3600" u="none" cap="none" strike="noStrike">
                   <a:solidFill>
                     <a:schemeClr val="dk1"/>
                   </a:solidFill>
@@ -14421,7 +14178,7 @@
                 <a:t>Use </a:t>
               </a:r>
               <a:r>
-                <a:rPr lang="en-US" sz="3600" b="1" i="0" u="none" strike="noStrike" cap="none">
+                <a:rPr b="1" i="0" lang="en-US" sz="3600" u="none" cap="none" strike="noStrike">
                   <a:solidFill>
                     <a:schemeClr val="dk1"/>
                   </a:solidFill>
@@ -14433,7 +14190,7 @@
                 <a:t>Open edX </a:t>
               </a:r>
               <a:r>
-                <a:rPr lang="en-US" sz="3600" b="0" i="0" u="none" strike="noStrike" cap="none">
+                <a:rPr b="0" i="0" lang="en-US" sz="3600" u="none" cap="none" strike="noStrike">
                   <a:solidFill>
                     <a:schemeClr val="dk1"/>
                   </a:solidFill>
@@ -14444,10 +14201,18 @@
                 </a:rPr>
                 <a:t>– Open source LMS developed for online learning</a:t>
               </a:r>
-              <a:endParaRPr/>
+              <a:endParaRPr b="0" i="0" sz="1400" u="none" cap="none" strike="noStrike">
+                <a:solidFill>
+                  <a:srgbClr val="000000"/>
+                </a:solidFill>
+                <a:latin typeface="Arial"/>
+                <a:ea typeface="Arial"/>
+                <a:cs typeface="Arial"/>
+                <a:sym typeface="Arial"/>
+              </a:endParaRPr>
             </a:p>
             <a:p>
-              <a:pPr marL="0" marR="0" lvl="0" indent="0" algn="l" rtl="0">
+              <a:pPr indent="0" lvl="0" marL="0" marR="0" rtl="0" algn="l">
                 <a:lnSpc>
                   <a:spcPct val="100000"/>
                 </a:lnSpc>
@@ -14464,7 +14229,10 @@
                 <a:buFont typeface="Arial"/>
                 <a:buNone/>
               </a:pPr>
-              <a:endParaRPr sz="3600" b="0" i="0" u="none" strike="noStrike" cap="none">
+              <a:r>
+                <a:t/>
+              </a:r>
+              <a:endParaRPr b="0" i="0" sz="3600" u="none" cap="none" strike="noStrike">
                 <a:solidFill>
                   <a:schemeClr val="dk1"/>
                 </a:solidFill>
@@ -14475,7 +14243,7 @@
               </a:endParaRPr>
             </a:p>
             <a:p>
-              <a:pPr marL="457200" marR="0" lvl="0" indent="-457200" algn="l" rtl="0">
+              <a:pPr indent="-457200" lvl="0" marL="457200" marR="0" rtl="0" algn="l">
                 <a:lnSpc>
                   <a:spcPct val="100000"/>
                 </a:lnSpc>
@@ -14493,7 +14261,7 @@
                 <a:buChar char="●"/>
               </a:pPr>
               <a:r>
-                <a:rPr lang="en-US" sz="3600" b="0" i="0" u="none" strike="noStrike" cap="none">
+                <a:rPr b="0" i="0" lang="en-US" sz="3600" u="none" cap="none" strike="noStrike">
                   <a:solidFill>
                     <a:schemeClr val="dk1"/>
                   </a:solidFill>
@@ -14504,10 +14272,18 @@
                 </a:rPr>
                 <a:t>Create small learning modules for online learning.  Modules include interactive experiential learning techniques.</a:t>
               </a:r>
-              <a:endParaRPr/>
+              <a:endParaRPr b="0" i="0" sz="1400" u="none" cap="none" strike="noStrike">
+                <a:solidFill>
+                  <a:srgbClr val="000000"/>
+                </a:solidFill>
+                <a:latin typeface="Arial"/>
+                <a:ea typeface="Arial"/>
+                <a:cs typeface="Arial"/>
+                <a:sym typeface="Arial"/>
+              </a:endParaRPr>
             </a:p>
             <a:p>
-              <a:pPr marL="457200" marR="0" lvl="0" indent="-203200" algn="l" rtl="0">
+              <a:pPr indent="-203200" lvl="0" marL="457200" marR="0" rtl="0" algn="l">
                 <a:lnSpc>
                   <a:spcPct val="100000"/>
                 </a:lnSpc>
@@ -14524,7 +14300,10 @@
                 <a:buFont typeface="Arial"/>
                 <a:buNone/>
               </a:pPr>
-              <a:endParaRPr sz="3600" b="0" i="0" u="none" strike="noStrike" cap="none">
+              <a:r>
+                <a:t/>
+              </a:r>
+              <a:endParaRPr b="0" i="0" sz="3600" u="none" cap="none" strike="noStrike">
                 <a:solidFill>
                   <a:schemeClr val="dk1"/>
                 </a:solidFill>
@@ -14535,7 +14314,7 @@
               </a:endParaRPr>
             </a:p>
             <a:p>
-              <a:pPr marL="457200" marR="0" lvl="0" indent="-457200" algn="l" rtl="0">
+              <a:pPr indent="-457200" lvl="0" marL="457200" marR="0" rtl="0" algn="l">
                 <a:lnSpc>
                   <a:spcPct val="100000"/>
                 </a:lnSpc>
@@ -14553,7 +14332,7 @@
                 <a:buChar char="●"/>
               </a:pPr>
               <a:r>
-                <a:rPr lang="en-US" sz="3600" b="0" i="0" u="none" strike="noStrike" cap="none">
+                <a:rPr b="0" i="0" lang="en-US" sz="3600" u="none" cap="none" strike="noStrike">
                   <a:solidFill>
                     <a:schemeClr val="dk1"/>
                   </a:solidFill>
@@ -14564,7 +14343,7 @@
                 </a:rPr>
                 <a:t>Users learn at their own pace and receive digital certifications once successfully complete course.</a:t>
               </a:r>
-              <a:endParaRPr sz="3600" b="0" i="0" u="none" strike="noStrike" cap="none">
+              <a:endParaRPr b="0" i="0" sz="3600" u="none" cap="none" strike="noStrike">
                 <a:solidFill>
                   <a:schemeClr val="dk1"/>
                 </a:solidFill>
@@ -14589,29 +14368,29 @@
             </a:xfrm>
             <a:prstGeom prst="parallelogram">
               <a:avLst>
-                <a:gd name="adj" fmla="val 25000"/>
+                <a:gd fmla="val 25000" name="adj"/>
               </a:avLst>
             </a:prstGeom>
             <a:solidFill>
               <a:srgbClr val="FFC000"/>
             </a:solidFill>
-            <a:ln w="9525" cap="flat" cmpd="sng">
+            <a:ln cap="flat" cmpd="sng" w="9525">
               <a:solidFill>
                 <a:schemeClr val="dk1"/>
               </a:solidFill>
               <a:prstDash val="solid"/>
               <a:round/>
-              <a:headEnd type="none" w="sm" len="sm"/>
-              <a:tailEnd type="none" w="sm" len="sm"/>
+              <a:headEnd len="sm" w="sm" type="none"/>
+              <a:tailEnd len="sm" w="sm" type="none"/>
             </a:ln>
           </p:spPr>
           <p:txBody>
-            <a:bodyPr spcFirstLastPara="1" wrap="square" lIns="91425" tIns="91425" rIns="91425" bIns="91425" anchor="ctr" anchorCtr="0">
+            <a:bodyPr anchorCtr="0" anchor="ctr" bIns="91425" lIns="91425" spcFirstLastPara="1" rIns="91425" wrap="square" tIns="91425">
               <a:noAutofit/>
             </a:bodyPr>
             <a:lstStyle/>
             <a:p>
-              <a:pPr marL="0" marR="0" lvl="0" indent="0" algn="ctr" rtl="0">
+              <a:pPr indent="0" lvl="0" marL="0" marR="0" rtl="0" algn="ctr">
                 <a:lnSpc>
                   <a:spcPct val="100000"/>
                 </a:lnSpc>
@@ -14629,7 +14408,7 @@
                 <a:buNone/>
               </a:pPr>
               <a:r>
-                <a:rPr lang="en-US" sz="4800" b="1" i="0" u="none" strike="noStrike" cap="none">
+                <a:rPr b="1" i="0" lang="en-US" sz="4800" u="none" cap="none" strike="noStrike">
                   <a:solidFill>
                     <a:srgbClr val="000000"/>
                   </a:solidFill>
@@ -14640,7 +14419,7 @@
                 </a:rPr>
                 <a:t>Methodology</a:t>
               </a:r>
-              <a:endParaRPr sz="4800" b="1" i="0" u="none" strike="noStrike" cap="none">
+              <a:endParaRPr b="1" i="0" sz="4800" u="none" cap="none" strike="noStrike">
                 <a:solidFill>
                   <a:srgbClr val="000000"/>
                 </a:solidFill>
@@ -14673,12 +14452,12 @@
           </a:ln>
         </p:spPr>
         <p:txBody>
-          <a:bodyPr spcFirstLastPara="1" wrap="square" lIns="91425" tIns="45700" rIns="91425" bIns="45700" anchor="t" anchorCtr="0">
+          <a:bodyPr anchorCtr="0" anchor="t" bIns="45700" lIns="91425" spcFirstLastPara="1" rIns="91425" wrap="square" tIns="45700">
             <a:spAutoFit/>
           </a:bodyPr>
           <a:lstStyle/>
           <a:p>
-            <a:pPr marL="0" marR="0" lvl="0" indent="0" algn="l" rtl="0">
+            <a:pPr indent="0" lvl="0" marL="0" marR="0" rtl="0" algn="l">
               <a:lnSpc>
                 <a:spcPct val="100000"/>
               </a:lnSpc>
@@ -14696,7 +14475,7 @@
               <a:buNone/>
             </a:pPr>
             <a:r>
-              <a:rPr lang="en-US" sz="11000" b="1" i="0" u="none" strike="noStrike" cap="none">
+              <a:rPr b="1" i="0" lang="en-US" sz="11000" u="none" cap="none" strike="noStrike">
                 <a:solidFill>
                   <a:schemeClr val="dk1"/>
                 </a:solidFill>
@@ -14707,7 +14486,7 @@
               </a:rPr>
               <a:t>Mainframe Curriculum</a:t>
             </a:r>
-            <a:endParaRPr sz="1400" b="0" i="0" u="none" strike="noStrike" cap="none">
+            <a:endParaRPr b="0" i="0" sz="1400" u="none" cap="none" strike="noStrike">
               <a:solidFill>
                 <a:srgbClr val="000000"/>
               </a:solidFill>
@@ -14718,7 +14497,7 @@
             </a:endParaRPr>
           </a:p>
           <a:p>
-            <a:pPr marL="0" marR="0" lvl="0" indent="0" algn="l" rtl="0">
+            <a:pPr indent="0" lvl="0" marL="0" marR="0" rtl="0" algn="l">
               <a:lnSpc>
                 <a:spcPct val="100000"/>
               </a:lnSpc>
@@ -14735,7 +14514,10 @@
               <a:buFont typeface="Arial"/>
               <a:buNone/>
             </a:pPr>
-            <a:endParaRPr sz="2400" b="1" i="0" u="none" strike="noStrike" cap="none">
+            <a:r>
+              <a:t/>
+            </a:r>
+            <a:endParaRPr b="1" i="0" sz="2400" u="none" cap="none" strike="noStrike">
               <a:solidFill>
                 <a:schemeClr val="dk1"/>
               </a:solidFill>
@@ -14746,7 +14528,7 @@
             </a:endParaRPr>
           </a:p>
           <a:p>
-            <a:pPr marL="0" marR="0" lvl="0" indent="0" algn="l" rtl="0">
+            <a:pPr indent="0" lvl="0" marL="0" marR="0" rtl="0" algn="l">
               <a:lnSpc>
                 <a:spcPct val="100000"/>
               </a:lnSpc>
@@ -14764,7 +14546,7 @@
               <a:buNone/>
             </a:pPr>
             <a:r>
-              <a:rPr lang="en-US" sz="3600" b="1" i="0" u="none" strike="noStrike" cap="none">
+              <a:rPr b="1" i="0" lang="en-US" sz="3600" u="none" cap="none" strike="noStrike">
                 <a:solidFill>
                   <a:srgbClr val="3C3C3B"/>
                 </a:solidFill>
@@ -14776,7 +14558,7 @@
               <a:t>Team members: </a:t>
             </a:r>
             <a:r>
-              <a:rPr lang="en-US" sz="3600" b="0" i="0" u="none" strike="noStrike" cap="none">
+              <a:rPr b="0" i="0" lang="en-US" sz="3600" u="none" cap="none" strike="noStrike">
                 <a:solidFill>
                   <a:srgbClr val="3C3C3B"/>
                 </a:solidFill>
@@ -14785,10 +14567,18 @@
                 <a:cs typeface="Arial"/>
                 <a:sym typeface="Arial"/>
               </a:rPr>
-              <a:t>Osman Zafar, Long Le, Arbab Arif   </a:t>
+              <a:t>Osman Zafar, Long Le, Arbab Arif</a:t>
             </a:r>
             <a:r>
-              <a:rPr lang="en-US" sz="3600" b="1" i="0" u="none" strike="noStrike" cap="none">
+              <a:rPr lang="en-US" sz="3600">
+                <a:solidFill>
+                  <a:srgbClr val="3C3C3B"/>
+                </a:solidFill>
+              </a:rPr>
+              <a:t>,</a:t>
+            </a:r>
+            <a:r>
+              <a:rPr b="0" i="0" lang="en-US" sz="3600" u="none" cap="none" strike="noStrike">
                 <a:solidFill>
                   <a:srgbClr val="3C3C3B"/>
                 </a:solidFill>
@@ -14797,18 +14587,10 @@
                 <a:cs typeface="Arial"/>
                 <a:sym typeface="Arial"/>
               </a:rPr>
-              <a:t>Faculty adviser: </a:t>
+              <a:t> </a:t>
             </a:r>
             <a:r>
-              <a:rPr lang="en-US" sz="3600" i="0" u="none" strike="noStrike" cap="none">
-                <a:solidFill>
-                  <a:srgbClr val="3C3C3B"/>
-                </a:solidFill>
-              </a:rPr>
-              <a:t>Robert Dahlberg</a:t>
-            </a:r>
-            <a:r>
-              <a:rPr lang="en-US" sz="3600" b="0" i="0" u="none" strike="noStrike" cap="none">
+              <a:rPr b="1" i="0" lang="en-US" sz="3600" u="none" cap="none" strike="noStrike">
                 <a:solidFill>
                   <a:srgbClr val="3C3C3B"/>
                 </a:solidFill>
@@ -14817,7 +14599,74 @@
                 <a:cs typeface="Arial"/>
                 <a:sym typeface="Arial"/>
               </a:rPr>
-              <a:t>, Ph.D.</a:t>
+              <a:t>Faculty </a:t>
+            </a:r>
+            <a:r>
+              <a:rPr b="1" lang="en-US" sz="3600">
+                <a:solidFill>
+                  <a:srgbClr val="3C3C3B"/>
+                </a:solidFill>
+              </a:rPr>
+              <a:t>A</a:t>
+            </a:r>
+            <a:r>
+              <a:rPr b="1" i="0" lang="en-US" sz="3600" u="none" cap="none" strike="noStrike">
+                <a:solidFill>
+                  <a:srgbClr val="3C3C3B"/>
+                </a:solidFill>
+                <a:latin typeface="Arial"/>
+                <a:ea typeface="Arial"/>
+                <a:cs typeface="Arial"/>
+                <a:sym typeface="Arial"/>
+                <a:extLst>
+                  <a:ext uri="http://customooxmlschemas.google.com/">
+                    <go:slidesCustomData xmlns:go="http://customooxmlschemas.google.com/" textRoundtripDataId="0"/>
+                  </a:ext>
+                </a:extLst>
+              </a:rPr>
+              <a:t>dvis</a:t>
+            </a:r>
+            <a:r>
+              <a:rPr b="1" lang="en-US" sz="3600">
+                <a:solidFill>
+                  <a:srgbClr val="3C3C3B"/>
+                </a:solidFill>
+                <a:extLst>
+                  <a:ext uri="http://customooxmlschemas.google.com/">
+                    <go:slidesCustomData xmlns:go="http://customooxmlschemas.google.com/" textRoundtripDataId="1"/>
+                  </a:ext>
+                </a:extLst>
+              </a:rPr>
+              <a:t>o</a:t>
+            </a:r>
+            <a:r>
+              <a:rPr b="1" i="0" lang="en-US" sz="3600" u="none" cap="none" strike="noStrike">
+                <a:solidFill>
+                  <a:srgbClr val="3C3C3B"/>
+                </a:solidFill>
+                <a:latin typeface="Arial"/>
+                <a:ea typeface="Arial"/>
+                <a:cs typeface="Arial"/>
+                <a:sym typeface="Arial"/>
+                <a:extLst>
+                  <a:ext uri="http://customooxmlschemas.google.com/">
+                    <go:slidesCustomData xmlns:go="http://customooxmlschemas.google.com/" textRoundtripDataId="2"/>
+                  </a:ext>
+                </a:extLst>
+              </a:rPr>
+              <a:t>r</a:t>
+            </a:r>
+            <a:r>
+              <a:rPr b="1" i="0" lang="en-US" sz="3600" u="none" cap="none" strike="noStrike">
+                <a:solidFill>
+                  <a:srgbClr val="3C3C3B"/>
+                </a:solidFill>
+                <a:latin typeface="Arial"/>
+                <a:ea typeface="Arial"/>
+                <a:cs typeface="Arial"/>
+                <a:sym typeface="Arial"/>
+              </a:rPr>
+              <a:t>: </a:t>
             </a:r>
             <a:r>
               <a:rPr lang="en-US" sz="3600">
@@ -14825,13 +14674,29 @@
                   <a:srgbClr val="3C3C3B"/>
                 </a:solidFill>
               </a:rPr>
-              <a:t>  </a:t>
+              <a:t>Ahmet Sonmez</a:t>
             </a:r>
             <a:r>
-              <a:rPr lang="en-US" sz="3600" b="1">
+              <a:rPr b="0" i="0" lang="en-US" sz="3600" u="none" cap="none" strike="noStrike">
                 <a:solidFill>
                   <a:srgbClr val="3C3C3B"/>
                 </a:solidFill>
+                <a:latin typeface="Arial"/>
+                <a:ea typeface="Arial"/>
+                <a:cs typeface="Arial"/>
+                <a:sym typeface="Arial"/>
+              </a:rPr>
+              <a:t>, Ph.D. </a:t>
+            </a:r>
+            <a:r>
+              <a:rPr b="1" i="0" lang="en-US" sz="3600" u="none" cap="none" strike="noStrike">
+                <a:solidFill>
+                  <a:srgbClr val="3C3C3B"/>
+                </a:solidFill>
+                <a:latin typeface="Arial"/>
+                <a:ea typeface="Arial"/>
+                <a:cs typeface="Arial"/>
+                <a:sym typeface="Arial"/>
               </a:rPr>
               <a:t>Sponsor: </a:t>
             </a:r>
@@ -14841,9 +14706,45 @@
                   <a:srgbClr val="3C3C3B"/>
                 </a:solidFill>
               </a:rPr>
-              <a:t>Commonwealth Center for Advanced Computing</a:t>
+              <a:t>VCU</a:t>
             </a:r>
-            <a:endParaRPr sz="4800" b="1" i="0" u="none" strike="noStrike" cap="none">
+            <a:r>
+              <a:rPr b="0" i="0" lang="en-US" sz="3600" u="none" cap="none" strike="noStrike">
+                <a:solidFill>
+                  <a:srgbClr val="3C3C3B"/>
+                </a:solidFill>
+                <a:latin typeface="Arial"/>
+                <a:ea typeface="Arial"/>
+                <a:cs typeface="Arial"/>
+                <a:sym typeface="Arial"/>
+              </a:rPr>
+              <a:t>, </a:t>
+            </a:r>
+            <a:r>
+              <a:rPr b="1" lang="en-US" sz="3600">
+                <a:solidFill>
+                  <a:srgbClr val="3C3C3B"/>
+                </a:solidFill>
+              </a:rPr>
+              <a:t>Mentor</a:t>
+            </a:r>
+            <a:r>
+              <a:rPr b="1" lang="en-US" sz="3600">
+                <a:solidFill>
+                  <a:srgbClr val="3C3C3B"/>
+                </a:solidFill>
+              </a:rPr>
+              <a:t>: </a:t>
+            </a:r>
+            <a:r>
+              <a:rPr lang="en-US" sz="3600">
+                <a:solidFill>
+                  <a:srgbClr val="3C3C3B"/>
+                </a:solidFill>
+              </a:rPr>
+              <a:t>Robert Dahlberg, Ph.D</a:t>
+            </a:r>
+            <a:endParaRPr b="1" i="0" sz="4800" u="none" cap="none" strike="noStrike">
               <a:solidFill>
                 <a:schemeClr val="dk1"/>
               </a:solidFill>
@@ -14875,12 +14776,12 @@
           </a:ln>
         </p:spPr>
         <p:txBody>
-          <a:bodyPr spcFirstLastPara="1" wrap="square" lIns="91425" tIns="45700" rIns="91425" bIns="45700" anchor="t" anchorCtr="0">
+          <a:bodyPr anchorCtr="0" anchor="t" bIns="45700" lIns="91425" spcFirstLastPara="1" rIns="91425" wrap="square" tIns="45700">
             <a:spAutoFit/>
           </a:bodyPr>
           <a:lstStyle/>
           <a:p>
-            <a:pPr marL="0" marR="0" lvl="0" indent="0" algn="l" rtl="0">
+            <a:pPr indent="0" lvl="0" marL="0" marR="0" rtl="0" algn="l">
               <a:lnSpc>
                 <a:spcPct val="100000"/>
               </a:lnSpc>
@@ -14898,7 +14799,7 @@
               <a:buNone/>
             </a:pPr>
             <a:r>
-              <a:rPr lang="en-US" sz="8000" b="0" i="0" u="none" strike="noStrike" cap="none">
+              <a:rPr b="0" i="0" lang="en-US" sz="8000" u="none" cap="none" strike="noStrike">
                 <a:solidFill>
                   <a:srgbClr val="77C159"/>
                 </a:solidFill>
@@ -14909,7 +14810,7 @@
               </a:rPr>
               <a:t>25-330</a:t>
             </a:r>
-            <a:endParaRPr sz="8000" b="0" i="0" u="none" strike="noStrike" cap="none">
+            <a:endParaRPr b="0" i="0" sz="8000" u="none" cap="none" strike="noStrike">
               <a:solidFill>
                 <a:srgbClr val="77C159"/>
               </a:solidFill>
@@ -14931,34 +14832,7 @@
           <a:blip r:embed="rId3">
             <a:alphaModFix/>
           </a:blip>
-          <a:srcRect/>
-          <a:stretch/>
-        </p:blipFill>
-        <p:spPr>
-          <a:xfrm>
-            <a:off x="14995740" y="20591708"/>
-            <a:ext cx="14898601" cy="9217608"/>
-          </a:xfrm>
-          <a:prstGeom prst="rect">
-            <a:avLst/>
-          </a:prstGeom>
-          <a:noFill/>
-          <a:ln>
-            <a:noFill/>
-          </a:ln>
-        </p:spPr>
-      </p:pic>
-      <p:pic>
-        <p:nvPicPr>
-          <p:cNvPr id="93" name="Google Shape;93;g3141e128008_0_0"/>
-          <p:cNvPicPr preferRelativeResize="0"/>
-          <p:nvPr/>
-        </p:nvPicPr>
-        <p:blipFill rotWithShape="1">
-          <a:blip r:embed="rId4">
-            <a:alphaModFix/>
-          </a:blip>
-          <a:srcRect/>
+          <a:srcRect b="0" l="0" r="0" t="0"/>
           <a:stretch/>
         </p:blipFill>
         <p:spPr>
@@ -14977,7 +14851,7 @@
       </p:pic>
       <p:grpSp>
         <p:nvGrpSpPr>
-          <p:cNvPr id="94" name="Google Shape;94;g3141e128008_0_0"/>
+          <p:cNvPr id="93" name="Google Shape;93;g3141e128008_0_0"/>
           <p:cNvGrpSpPr/>
           <p:nvPr/>
         </p:nvGrpSpPr>
@@ -14991,7 +14865,7 @@
         </p:grpSpPr>
         <p:sp>
           <p:nvSpPr>
-            <p:cNvPr id="95" name="Google Shape;95;g3141e128008_0_0"/>
+            <p:cNvPr id="94" name="Google Shape;94;g3141e128008_0_0"/>
             <p:cNvSpPr/>
             <p:nvPr/>
           </p:nvSpPr>
@@ -15002,29 +14876,29 @@
             </a:xfrm>
             <a:prstGeom prst="parallelogram">
               <a:avLst>
-                <a:gd name="adj" fmla="val 25000"/>
+                <a:gd fmla="val 25000" name="adj"/>
               </a:avLst>
             </a:prstGeom>
             <a:solidFill>
               <a:srgbClr val="FFC000"/>
             </a:solidFill>
-            <a:ln w="9525" cap="flat" cmpd="sng">
+            <a:ln cap="flat" cmpd="sng" w="9525">
               <a:solidFill>
                 <a:schemeClr val="dk1"/>
               </a:solidFill>
               <a:prstDash val="solid"/>
               <a:round/>
-              <a:headEnd type="none" w="sm" len="sm"/>
-              <a:tailEnd type="none" w="sm" len="sm"/>
+              <a:headEnd len="sm" w="sm" type="none"/>
+              <a:tailEnd len="sm" w="sm" type="none"/>
             </a:ln>
           </p:spPr>
           <p:txBody>
-            <a:bodyPr spcFirstLastPara="1" wrap="square" lIns="91425" tIns="91425" rIns="91425" bIns="91425" anchor="ctr" anchorCtr="0">
+            <a:bodyPr anchorCtr="0" anchor="ctr" bIns="91425" lIns="91425" spcFirstLastPara="1" rIns="91425" wrap="square" tIns="91425">
               <a:noAutofit/>
             </a:bodyPr>
             <a:lstStyle/>
             <a:p>
-              <a:pPr marL="0" marR="0" lvl="0" indent="0" algn="ctr" rtl="0">
+              <a:pPr indent="0" lvl="0" marL="0" marR="0" rtl="0" algn="ctr">
                 <a:lnSpc>
                   <a:spcPct val="100000"/>
                 </a:lnSpc>
@@ -15042,7 +14916,7 @@
                 <a:buNone/>
               </a:pPr>
               <a:r>
-                <a:rPr lang="en-US" sz="4800" b="1" i="0" u="none" strike="noStrike" cap="none">
+                <a:rPr b="1" i="0" lang="en-US" sz="4800" u="none" cap="none" strike="noStrike">
                   <a:solidFill>
                     <a:srgbClr val="000000"/>
                   </a:solidFill>
@@ -15053,7 +14927,7 @@
                 </a:rPr>
                 <a:t>Problem Statement</a:t>
               </a:r>
-              <a:endParaRPr sz="4800" b="1" i="0" u="none" strike="noStrike" cap="none">
+              <a:endParaRPr b="1" i="0" sz="4800" u="none" cap="none" strike="noStrike">
                 <a:solidFill>
                   <a:srgbClr val="000000"/>
                 </a:solidFill>
@@ -15067,7 +14941,7 @@
         </p:sp>
         <p:sp>
           <p:nvSpPr>
-            <p:cNvPr id="96" name="Google Shape;96;g3141e128008_0_0"/>
+            <p:cNvPr id="95" name="Google Shape;95;g3141e128008_0_0"/>
             <p:cNvSpPr txBox="1"/>
             <p:nvPr/>
           </p:nvSpPr>
@@ -15080,23 +14954,23 @@
               <a:avLst/>
             </a:prstGeom>
             <a:noFill/>
-            <a:ln w="76200" cap="flat" cmpd="sng">
+            <a:ln cap="flat" cmpd="sng" w="76200">
               <a:solidFill>
                 <a:srgbClr val="FFC000"/>
               </a:solidFill>
               <a:prstDash val="solid"/>
               <a:round/>
-              <a:headEnd type="none" w="sm" len="sm"/>
-              <a:tailEnd type="none" w="sm" len="sm"/>
+              <a:headEnd len="sm" w="sm" type="none"/>
+              <a:tailEnd len="sm" w="sm" type="none"/>
             </a:ln>
           </p:spPr>
           <p:txBody>
-            <a:bodyPr spcFirstLastPara="1" wrap="square" lIns="457200" tIns="457200" rIns="457200" bIns="228600" anchor="t" anchorCtr="0">
+            <a:bodyPr anchorCtr="0" anchor="t" bIns="228600" lIns="457200" spcFirstLastPara="1" rIns="457200" wrap="square" tIns="457200">
               <a:spAutoFit/>
             </a:bodyPr>
             <a:lstStyle/>
             <a:p>
-              <a:pPr marL="457200" marR="0" lvl="0" indent="-457200" algn="l" rtl="0">
+              <a:pPr indent="-457200" lvl="0" marL="457200" marR="0" rtl="0" algn="l">
                 <a:lnSpc>
                   <a:spcPct val="100000"/>
                 </a:lnSpc>
@@ -15114,7 +14988,7 @@
                 <a:buChar char="●"/>
               </a:pPr>
               <a:r>
-                <a:rPr lang="en-US" sz="3600" b="0" i="0" u="none" strike="noStrike" cap="none" dirty="0">
+                <a:rPr b="0" i="0" lang="en-US" sz="3600" u="none" cap="none" strike="noStrike">
                   <a:solidFill>
                     <a:srgbClr val="000000"/>
                   </a:solidFill>
@@ -15125,10 +14999,18 @@
                 </a:rPr>
                 <a:t>Financial, government, retail, healthcare, logistics and insurance companies in the world use Mainframes</a:t>
               </a:r>
-              <a:endParaRPr dirty="0"/>
+              <a:endParaRPr b="0" i="0" sz="1400" u="none" cap="none" strike="noStrike">
+                <a:solidFill>
+                  <a:srgbClr val="000000"/>
+                </a:solidFill>
+                <a:latin typeface="Arial"/>
+                <a:ea typeface="Arial"/>
+                <a:cs typeface="Arial"/>
+                <a:sym typeface="Arial"/>
+              </a:endParaRPr>
             </a:p>
             <a:p>
-              <a:pPr marL="1028700" marR="0" lvl="1" indent="-571500" algn="l" rtl="0">
+              <a:pPr indent="-571500" lvl="1" marL="1028700" marR="0" rtl="0" algn="l">
                 <a:lnSpc>
                   <a:spcPct val="100000"/>
                 </a:lnSpc>
@@ -15142,11 +15024,11 @@
                   <a:srgbClr val="000000"/>
                 </a:buClr>
                 <a:buSzPts val="3600"/>
-                <a:buFont typeface="Wingdings" pitchFamily="2" charset="2"/>
-                <a:buChar char="Ø"/>
+                <a:buFont typeface="Noto Sans Symbols"/>
+                <a:buChar char="⮚"/>
               </a:pPr>
               <a:r>
-                <a:rPr lang="en-US" sz="3600" b="0" i="0" u="none" strike="noStrike" cap="none" dirty="0">
+                <a:rPr b="0" i="0" lang="en-US" sz="3600" u="none" cap="none" strike="noStrike">
                   <a:solidFill>
                     <a:srgbClr val="000000"/>
                   </a:solidFill>
@@ -15157,7 +15039,7 @@
                 </a:rPr>
                 <a:t>71% of Fortune 500 companies use them</a:t>
               </a:r>
-              <a:endParaRPr sz="3600" b="0" i="0" u="none" strike="noStrike" cap="none" dirty="0">
+              <a:endParaRPr b="0" i="0" sz="3600" u="none" cap="none" strike="noStrike">
                 <a:solidFill>
                   <a:srgbClr val="000000"/>
                 </a:solidFill>
@@ -15168,7 +15050,7 @@
               </a:endParaRPr>
             </a:p>
             <a:p>
-              <a:pPr marL="1028700" marR="0" lvl="1" indent="-571500" algn="l" rtl="0">
+              <a:pPr indent="-571500" lvl="1" marL="1028700" marR="0" rtl="0" algn="l">
                 <a:lnSpc>
                   <a:spcPct val="100000"/>
                 </a:lnSpc>
@@ -15182,11 +15064,11 @@
                   <a:srgbClr val="000000"/>
                 </a:buClr>
                 <a:buSzPts val="3600"/>
-                <a:buFont typeface="Wingdings" pitchFamily="2" charset="2"/>
-                <a:buChar char="Ø"/>
+                <a:buFont typeface="Noto Sans Symbols"/>
+                <a:buChar char="⮚"/>
               </a:pPr>
               <a:r>
-                <a:rPr lang="en-US" sz="3600" b="0" i="0" u="none" strike="noStrike" cap="none" dirty="0">
+                <a:rPr b="0" i="0" lang="en-US" sz="3600" u="none" cap="none" strike="noStrike">
                   <a:solidFill>
                     <a:srgbClr val="000000"/>
                   </a:solidFill>
@@ -15197,10 +15079,18 @@
                 </a:rPr>
                 <a:t>70-80% of the world’s data and 90% of all credit card transactions</a:t>
               </a:r>
-              <a:endParaRPr dirty="0"/>
+              <a:endParaRPr b="0" i="0" sz="1400" u="none" cap="none" strike="noStrike">
+                <a:solidFill>
+                  <a:srgbClr val="000000"/>
+                </a:solidFill>
+                <a:latin typeface="Arial"/>
+                <a:ea typeface="Arial"/>
+                <a:cs typeface="Arial"/>
+                <a:sym typeface="Arial"/>
+              </a:endParaRPr>
             </a:p>
             <a:p>
-              <a:pPr marL="914400" marR="0" lvl="0" indent="0" algn="l" rtl="0">
+              <a:pPr indent="0" lvl="0" marL="914400" marR="0" rtl="0" algn="l">
                 <a:lnSpc>
                   <a:spcPct val="100000"/>
                 </a:lnSpc>
@@ -15210,9 +15100,17 @@
                 <a:spcAft>
                   <a:spcPts val="0"/>
                 </a:spcAft>
+                <a:buClr>
+                  <a:srgbClr val="000000"/>
+                </a:buClr>
+                <a:buSzPts val="3600"/>
+                <a:buFont typeface="Arial"/>
                 <a:buNone/>
               </a:pPr>
-              <a:endParaRPr sz="3600" b="0" i="0" u="none" strike="noStrike" cap="none" dirty="0">
+              <a:r>
+                <a:t/>
+              </a:r>
+              <a:endParaRPr b="0" i="0" sz="3600" u="none" cap="none" strike="noStrike">
                 <a:solidFill>
                   <a:srgbClr val="000000"/>
                 </a:solidFill>
@@ -15223,7 +15121,7 @@
               </a:endParaRPr>
             </a:p>
             <a:p>
-              <a:pPr marL="457200" marR="0" lvl="0" indent="-457200" algn="l" rtl="0">
+              <a:pPr indent="-457200" lvl="0" marL="457200" marR="0" rtl="0" algn="l">
                 <a:lnSpc>
                   <a:spcPct val="100000"/>
                 </a:lnSpc>
@@ -15241,7 +15139,7 @@
                 <a:buChar char="●"/>
               </a:pPr>
               <a:r>
-                <a:rPr lang="en-US" sz="3600" b="0" i="0" u="none" strike="noStrike" cap="none" dirty="0">
+                <a:rPr b="0" i="0" lang="en-US" sz="3600" u="none" cap="none" strike="noStrike">
                   <a:solidFill>
                     <a:srgbClr val="000000"/>
                   </a:solidFill>
@@ -15250,28 +15148,20 @@
                   <a:cs typeface="Arial"/>
                   <a:sym typeface="Arial"/>
                 </a:rPr>
-                <a:t>There is a severe lack of Mainframe talent to replace the current aging workforce with are retiring at </a:t>
+                <a:t>There is a severe lack of Mainframe talent to replace the current aging workforce with are retiring at accelerating rate</a:t>
               </a:r>
-              <a:r>
-                <a:rPr lang="en-US" sz="3600" dirty="0"/>
-                <a:t>accelerating</a:t>
-              </a:r>
-              <a:r>
-                <a:rPr lang="en-US" sz="3600" b="0" i="0" u="none" strike="noStrike" cap="none" dirty="0">
-                  <a:solidFill>
-                    <a:srgbClr val="000000"/>
-                  </a:solidFill>
-                  <a:latin typeface="Arial"/>
-                  <a:ea typeface="Arial"/>
-                  <a:cs typeface="Arial"/>
-                  <a:sym typeface="Arial"/>
-                </a:rPr>
-                <a:t> rate</a:t>
-              </a:r>
-              <a:endParaRPr dirty="0"/>
+              <a:endParaRPr b="0" i="0" sz="1400" u="none" cap="none" strike="noStrike">
+                <a:solidFill>
+                  <a:srgbClr val="000000"/>
+                </a:solidFill>
+                <a:latin typeface="Arial"/>
+                <a:ea typeface="Arial"/>
+                <a:cs typeface="Arial"/>
+                <a:sym typeface="Arial"/>
+              </a:endParaRPr>
             </a:p>
             <a:p>
-              <a:pPr marL="457200" marR="0" lvl="0" indent="0" algn="l" rtl="0">
+              <a:pPr indent="0" lvl="0" marL="457200" marR="0" rtl="0" algn="l">
                 <a:lnSpc>
                   <a:spcPct val="100000"/>
                 </a:lnSpc>
@@ -15281,9 +15171,17 @@
                 <a:spcAft>
                   <a:spcPts val="0"/>
                 </a:spcAft>
+                <a:buClr>
+                  <a:srgbClr val="000000"/>
+                </a:buClr>
+                <a:buSzPts val="3600"/>
+                <a:buFont typeface="Arial"/>
                 <a:buNone/>
               </a:pPr>
-              <a:endParaRPr sz="3600" b="0" i="0" u="none" strike="noStrike" cap="none" dirty="0">
+              <a:r>
+                <a:t/>
+              </a:r>
+              <a:endParaRPr b="0" i="0" sz="3600" u="none" cap="none" strike="noStrike">
                 <a:solidFill>
                   <a:srgbClr val="000000"/>
                 </a:solidFill>
@@ -15294,7 +15192,7 @@
               </a:endParaRPr>
             </a:p>
             <a:p>
-              <a:pPr marL="457200" marR="0" lvl="0" indent="-457200" algn="l" rtl="0">
+              <a:pPr indent="-457200" lvl="0" marL="457200" marR="0" rtl="0" algn="l">
                 <a:lnSpc>
                   <a:spcPct val="100000"/>
                 </a:lnSpc>
@@ -15312,7 +15210,7 @@
                 <a:buChar char="●"/>
               </a:pPr>
               <a:r>
-                <a:rPr lang="en-US" sz="3600" b="0" i="0" u="none" strike="noStrike" cap="none" dirty="0">
+                <a:rPr b="0" i="0" lang="en-US" sz="3600" u="none" cap="none" strike="noStrike">
                   <a:solidFill>
                     <a:srgbClr val="000000"/>
                   </a:solidFill>
@@ -15323,7 +15221,7 @@
                 </a:rPr>
                 <a:t>Continued existence of Mainframe dependent on maintaining skills in the workforce</a:t>
               </a:r>
-              <a:endParaRPr sz="3600" b="0" i="0" u="none" strike="noStrike" cap="none" dirty="0">
+              <a:endParaRPr b="0" i="0" sz="3600" u="none" cap="none" strike="noStrike">
                 <a:solidFill>
                   <a:schemeClr val="dk1"/>
                 </a:solidFill>
@@ -15338,7 +15236,7 @@
       </p:grpSp>
       <p:grpSp>
         <p:nvGrpSpPr>
-          <p:cNvPr id="97" name="Google Shape;97;g3141e128008_0_0"/>
+          <p:cNvPr id="96" name="Google Shape;96;g3141e128008_0_0"/>
           <p:cNvGrpSpPr/>
           <p:nvPr/>
         </p:nvGrpSpPr>
@@ -15352,7 +15250,7 @@
         </p:grpSpPr>
         <p:sp>
           <p:nvSpPr>
-            <p:cNvPr id="98" name="Google Shape;98;g3141e128008_0_0"/>
+            <p:cNvPr id="97" name="Google Shape;97;g3141e128008_0_0"/>
             <p:cNvSpPr/>
             <p:nvPr/>
           </p:nvSpPr>
@@ -15363,29 +15261,29 @@
             </a:xfrm>
             <a:prstGeom prst="parallelogram">
               <a:avLst>
-                <a:gd name="adj" fmla="val 25000"/>
+                <a:gd fmla="val 25000" name="adj"/>
               </a:avLst>
             </a:prstGeom>
             <a:solidFill>
               <a:srgbClr val="FFC000"/>
             </a:solidFill>
-            <a:ln w="9525" cap="flat" cmpd="sng">
+            <a:ln cap="flat" cmpd="sng" w="9525">
               <a:solidFill>
                 <a:schemeClr val="dk1"/>
               </a:solidFill>
               <a:prstDash val="solid"/>
               <a:round/>
-              <a:headEnd type="none" w="sm" len="sm"/>
-              <a:tailEnd type="none" w="sm" len="sm"/>
+              <a:headEnd len="sm" w="sm" type="none"/>
+              <a:tailEnd len="sm" w="sm" type="none"/>
             </a:ln>
           </p:spPr>
           <p:txBody>
-            <a:bodyPr spcFirstLastPara="1" wrap="square" lIns="91425" tIns="91425" rIns="91425" bIns="91425" anchor="ctr" anchorCtr="0">
+            <a:bodyPr anchorCtr="0" anchor="ctr" bIns="91425" lIns="91425" spcFirstLastPara="1" rIns="91425" wrap="square" tIns="91425">
               <a:noAutofit/>
             </a:bodyPr>
             <a:lstStyle/>
             <a:p>
-              <a:pPr marL="0" marR="0" lvl="0" indent="0" algn="ctr" rtl="0">
+              <a:pPr indent="0" lvl="0" marL="0" marR="0" rtl="0" algn="ctr">
                 <a:lnSpc>
                   <a:spcPct val="100000"/>
                 </a:lnSpc>
@@ -15403,7 +15301,7 @@
                 <a:buNone/>
               </a:pPr>
               <a:r>
-                <a:rPr lang="en-US" sz="4800" b="1" i="0" u="none" strike="noStrike" cap="none">
+                <a:rPr b="1" i="0" lang="en-US" sz="4800" u="none" cap="none" strike="noStrike">
                   <a:solidFill>
                     <a:srgbClr val="000000"/>
                   </a:solidFill>
@@ -15414,7 +15312,7 @@
                 </a:rPr>
                 <a:t>Existing Solutions</a:t>
               </a:r>
-              <a:endParaRPr sz="4800" b="1" i="0" u="none" strike="noStrike" cap="none">
+              <a:endParaRPr b="1" i="0" sz="4800" u="none" cap="none" strike="noStrike">
                 <a:solidFill>
                   <a:srgbClr val="000000"/>
                 </a:solidFill>
@@ -15428,7 +15326,7 @@
         </p:sp>
         <p:sp>
           <p:nvSpPr>
-            <p:cNvPr id="99" name="Google Shape;99;g3141e128008_0_0"/>
+            <p:cNvPr id="98" name="Google Shape;98;g3141e128008_0_0"/>
             <p:cNvSpPr txBox="1"/>
             <p:nvPr/>
           </p:nvSpPr>
@@ -15441,23 +15339,23 @@
               <a:avLst/>
             </a:prstGeom>
             <a:noFill/>
-            <a:ln w="76200" cap="flat" cmpd="sng">
+            <a:ln cap="flat" cmpd="sng" w="76200">
               <a:solidFill>
                 <a:srgbClr val="FFC000"/>
               </a:solidFill>
               <a:prstDash val="solid"/>
               <a:round/>
-              <a:headEnd type="none" w="sm" len="sm"/>
-              <a:tailEnd type="none" w="sm" len="sm"/>
+              <a:headEnd len="sm" w="sm" type="none"/>
+              <a:tailEnd len="sm" w="sm" type="none"/>
             </a:ln>
           </p:spPr>
           <p:txBody>
-            <a:bodyPr spcFirstLastPara="1" wrap="square" lIns="457200" tIns="457200" rIns="457200" bIns="228600" anchor="t" anchorCtr="0">
+            <a:bodyPr anchorCtr="0" anchor="t" bIns="228600" lIns="457200" spcFirstLastPara="1" rIns="457200" wrap="square" tIns="457200">
               <a:spAutoFit/>
             </a:bodyPr>
             <a:lstStyle/>
             <a:p>
-              <a:pPr marL="457200" marR="0" lvl="0" indent="-457200" algn="l" rtl="0">
+              <a:pPr indent="-457200" lvl="0" marL="457200" marR="0" rtl="0" algn="l">
                 <a:lnSpc>
                   <a:spcPct val="100000"/>
                 </a:lnSpc>
@@ -15475,7 +15373,7 @@
                 <a:buChar char="●"/>
               </a:pPr>
               <a:r>
-                <a:rPr lang="en-US" sz="3600" b="0" i="0" u="none" strike="noStrike" cap="none" dirty="0">
+                <a:rPr b="0" i="0" lang="en-US" sz="3600" u="none" cap="none" strike="noStrike">
                   <a:solidFill>
                     <a:schemeClr val="dk1"/>
                   </a:solidFill>
@@ -15484,44 +15382,20 @@
                   <a:cs typeface="Arial"/>
                   <a:sym typeface="Arial"/>
                 </a:rPr>
-                <a:t>IBM </a:t>
+                <a:t>IBM Z Xplorer Certification – not reflective of industry usage</a:t>
               </a:r>
-              <a:r>
-                <a:rPr lang="en-US" sz="3600" dirty="0">
-                  <a:solidFill>
-                    <a:schemeClr val="dk1"/>
-                  </a:solidFill>
-                </a:rPr>
-                <a:t>Z </a:t>
-              </a:r>
-              <a:r>
-                <a:rPr lang="en-US" sz="3600" b="0" i="0" u="none" strike="noStrike" cap="none" dirty="0" err="1">
-                  <a:solidFill>
-                    <a:schemeClr val="dk1"/>
-                  </a:solidFill>
-                  <a:latin typeface="Arial"/>
-                  <a:ea typeface="Arial"/>
-                  <a:cs typeface="Arial"/>
-                  <a:sym typeface="Arial"/>
-                </a:rPr>
-                <a:t>Xplorer</a:t>
-              </a:r>
-              <a:r>
-                <a:rPr lang="en-US" sz="3600" b="0" i="0" u="none" strike="noStrike" cap="none" dirty="0">
-                  <a:solidFill>
-                    <a:schemeClr val="dk1"/>
-                  </a:solidFill>
-                  <a:latin typeface="Arial"/>
-                  <a:ea typeface="Arial"/>
-                  <a:cs typeface="Arial"/>
-                  <a:sym typeface="Arial"/>
-                </a:rPr>
-                <a:t> Certification – not reflective of industry usage</a:t>
-              </a:r>
-              <a:endParaRPr dirty="0"/>
+              <a:endParaRPr b="0" i="0" sz="1400" u="none" cap="none" strike="noStrike">
+                <a:solidFill>
+                  <a:srgbClr val="000000"/>
+                </a:solidFill>
+                <a:latin typeface="Arial"/>
+                <a:ea typeface="Arial"/>
+                <a:cs typeface="Arial"/>
+                <a:sym typeface="Arial"/>
+              </a:endParaRPr>
             </a:p>
             <a:p>
-              <a:pPr marL="457200" marR="0" lvl="0" indent="0" algn="l" rtl="0">
+              <a:pPr indent="0" lvl="0" marL="457200" marR="0" rtl="0" algn="l">
                 <a:lnSpc>
                   <a:spcPct val="100000"/>
                 </a:lnSpc>
@@ -15531,9 +15405,17 @@
                 <a:spcAft>
                   <a:spcPts val="0"/>
                 </a:spcAft>
+                <a:buClr>
+                  <a:srgbClr val="000000"/>
+                </a:buClr>
+                <a:buSzPts val="3600"/>
+                <a:buFont typeface="Arial"/>
                 <a:buNone/>
               </a:pPr>
-              <a:endParaRPr sz="3600" b="0" i="0" u="none" strike="noStrike" cap="none" dirty="0">
+              <a:r>
+                <a:t/>
+              </a:r>
+              <a:endParaRPr b="0" i="0" sz="3600" u="none" cap="none" strike="noStrike">
                 <a:solidFill>
                   <a:schemeClr val="dk1"/>
                 </a:solidFill>
@@ -15544,7 +15426,7 @@
               </a:endParaRPr>
             </a:p>
             <a:p>
-              <a:pPr marL="457200" marR="0" lvl="0" indent="-457200" algn="l" rtl="0">
+              <a:pPr indent="-457200" lvl="0" marL="457200" marR="0" rtl="0" algn="l">
                 <a:lnSpc>
                   <a:spcPct val="100000"/>
                 </a:lnSpc>
@@ -15562,7 +15444,7 @@
                 <a:buChar char="●"/>
               </a:pPr>
               <a:r>
-                <a:rPr lang="en-US" sz="3600" b="0" i="0" u="none" strike="noStrike" cap="none" dirty="0">
+                <a:rPr b="0" i="0" lang="en-US" sz="3600" u="none" cap="none" strike="noStrike">
                   <a:solidFill>
                     <a:schemeClr val="dk1"/>
                   </a:solidFill>
@@ -15573,24 +15455,9 @@
                 </a:rPr>
                 <a:t>IBM Skills certification – hard to find and confusing</a:t>
               </a:r>
-              <a:endParaRPr dirty="0"/>
-            </a:p>
-            <a:p>
-              <a:pPr marL="457200" marR="0" lvl="0" indent="0" algn="l" rtl="0">
-                <a:lnSpc>
-                  <a:spcPct val="100000"/>
-                </a:lnSpc>
-                <a:spcBef>
-                  <a:spcPts val="0"/>
-                </a:spcBef>
-                <a:spcAft>
-                  <a:spcPts val="0"/>
-                </a:spcAft>
-                <a:buNone/>
-              </a:pPr>
-              <a:endParaRPr sz="3600" b="0" i="0" u="none" strike="noStrike" cap="none" dirty="0">
-                <a:solidFill>
-                  <a:schemeClr val="dk1"/>
+              <a:endParaRPr b="0" i="0" sz="1400" u="none" cap="none" strike="noStrike">
+                <a:solidFill>
+                  <a:srgbClr val="000000"/>
                 </a:solidFill>
                 <a:latin typeface="Arial"/>
                 <a:ea typeface="Arial"/>
@@ -15599,7 +15466,7 @@
               </a:endParaRPr>
             </a:p>
             <a:p>
-              <a:pPr marL="457200" marR="0" lvl="0" indent="-457200" algn="l" rtl="0">
+              <a:pPr indent="0" lvl="0" marL="457200" marR="0" rtl="0" algn="l">
                 <a:lnSpc>
                   <a:spcPct val="100000"/>
                 </a:lnSpc>
@@ -15610,111 +15477,16 @@
                   <a:spcPts val="0"/>
                 </a:spcAft>
                 <a:buClr>
-                  <a:schemeClr val="dk1"/>
+                  <a:srgbClr val="000000"/>
                 </a:buClr>
                 <a:buSzPts val="3600"/>
-                <a:buChar char="●"/>
-              </a:pPr>
-              <a:r>
-                <a:rPr lang="en-US" sz="3600" b="0" i="0" u="none" strike="noStrike" cap="none" dirty="0">
-                  <a:solidFill>
-                    <a:schemeClr val="dk1"/>
-                  </a:solidFill>
-                  <a:latin typeface="Arial"/>
-                  <a:ea typeface="Arial"/>
-                  <a:cs typeface="Arial"/>
-                  <a:sym typeface="Arial"/>
-                </a:rPr>
-                <a:t>A few Universities have  Mainframe courses: @ </a:t>
-              </a:r>
-              <a:r>
-                <a:rPr lang="en-US" sz="3600" dirty="0">
-                  <a:solidFill>
-                    <a:schemeClr val="dk1"/>
-                  </a:solidFill>
-                </a:rPr>
-                <a:t>7</a:t>
-              </a:r>
-              <a:r>
-                <a:rPr lang="en-US" sz="3600" b="0" i="0" u="none" strike="noStrike" cap="none" dirty="0">
-                  <a:solidFill>
-                    <a:schemeClr val="dk1"/>
-                  </a:solidFill>
-                  <a:latin typeface="Arial"/>
-                  <a:ea typeface="Arial"/>
-                  <a:cs typeface="Arial"/>
-                  <a:sym typeface="Arial"/>
-                </a:rPr>
-                <a:t> universities in US</a:t>
-              </a:r>
-              <a:endParaRPr dirty="0"/>
-            </a:p>
-          </p:txBody>
-        </p:sp>
-      </p:grpSp>
-      <p:grpSp>
-        <p:nvGrpSpPr>
-          <p:cNvPr id="100" name="Google Shape;100;g3141e128008_0_0"/>
-          <p:cNvGrpSpPr/>
-          <p:nvPr/>
-        </p:nvGrpSpPr>
-        <p:grpSpPr>
-          <a:xfrm>
-            <a:off x="1528847" y="22725957"/>
-            <a:ext cx="11713500" cy="6529362"/>
-            <a:chOff x="1528847" y="22916321"/>
-            <a:chExt cx="11713500" cy="6529362"/>
-          </a:xfrm>
-        </p:grpSpPr>
-        <p:sp>
-          <p:nvSpPr>
-            <p:cNvPr id="101" name="Google Shape;101;g3141e128008_0_0"/>
-            <p:cNvSpPr txBox="1"/>
-            <p:nvPr/>
-          </p:nvSpPr>
-          <p:spPr>
-            <a:xfrm>
-              <a:off x="1528847" y="23765783"/>
-              <a:ext cx="11713500" cy="5679900"/>
-            </a:xfrm>
-            <a:prstGeom prst="rect">
-              <a:avLst/>
-            </a:prstGeom>
-            <a:noFill/>
-            <a:ln w="76200" cap="flat" cmpd="sng">
-              <a:solidFill>
-                <a:srgbClr val="FFC000"/>
-              </a:solidFill>
-              <a:prstDash val="solid"/>
-              <a:round/>
-              <a:headEnd type="none" w="sm" len="sm"/>
-              <a:tailEnd type="none" w="sm" len="sm"/>
-            </a:ln>
-          </p:spPr>
-          <p:txBody>
-            <a:bodyPr spcFirstLastPara="1" wrap="square" lIns="457200" tIns="457200" rIns="457200" bIns="228600" anchor="t" anchorCtr="0">
-              <a:spAutoFit/>
-            </a:bodyPr>
-            <a:lstStyle/>
-            <a:p>
-              <a:pPr marL="457200" marR="0" lvl="0" indent="-203200" algn="l" rtl="0">
-                <a:lnSpc>
-                  <a:spcPct val="100000"/>
-                </a:lnSpc>
-                <a:spcBef>
-                  <a:spcPts val="0"/>
-                </a:spcBef>
-                <a:spcAft>
-                  <a:spcPts val="0"/>
-                </a:spcAft>
-                <a:buClr>
-                  <a:schemeClr val="dk1"/>
-                </a:buClr>
-                <a:buSzPts val="4000"/>
                 <a:buFont typeface="Arial"/>
                 <a:buNone/>
               </a:pPr>
-              <a:endParaRPr sz="3600" b="0" i="0" u="none" strike="noStrike" cap="none" dirty="0">
+              <a:r>
+                <a:t/>
+              </a:r>
+              <a:endParaRPr b="0" i="0" sz="3600" u="none" cap="none" strike="noStrike">
                 <a:solidFill>
                   <a:schemeClr val="dk1"/>
                 </a:solidFill>
@@ -15725,7 +15497,7 @@
               </a:endParaRPr>
             </a:p>
             <a:p>
-              <a:pPr marL="457200" marR="0" lvl="0" indent="-457200" algn="l" rtl="0">
+              <a:pPr indent="-457200" lvl="0" marL="457200" marR="0" rtl="0" algn="l">
                 <a:lnSpc>
                   <a:spcPct val="100000"/>
                 </a:lnSpc>
@@ -15743,7 +15515,7 @@
                 <a:buChar char="●"/>
               </a:pPr>
               <a:r>
-                <a:rPr lang="en-US" sz="3600" b="0" i="0" u="none" strike="noStrike" cap="none" dirty="0">
+                <a:rPr b="0" i="0" lang="en-US" sz="3600" u="none" cap="none" strike="noStrike">
                   <a:solidFill>
                     <a:schemeClr val="dk1"/>
                   </a:solidFill>
@@ -15752,11 +15524,11 @@
                   <a:cs typeface="Arial"/>
                   <a:sym typeface="Arial"/>
                 </a:rPr>
-                <a:t>Support more environmentally friendly system </a:t>
+                <a:t>A few Universities have  Mainframe courses: @ 7 universities in US</a:t>
               </a:r>
-              <a:endParaRPr sz="1400" b="0" i="0" u="none" strike="noStrike" cap="none" dirty="0">
-                <a:solidFill>
-                  <a:schemeClr val="dk1"/>
+              <a:endParaRPr b="0" i="0" sz="1400" u="none" cap="none" strike="noStrike">
+                <a:solidFill>
+                  <a:srgbClr val="000000"/>
                 </a:solidFill>
                 <a:latin typeface="Arial"/>
                 <a:ea typeface="Arial"/>
@@ -15764,8 +15536,55 @@
                 <a:sym typeface="Arial"/>
               </a:endParaRPr>
             </a:p>
+          </p:txBody>
+        </p:sp>
+      </p:grpSp>
+      <p:grpSp>
+        <p:nvGrpSpPr>
+          <p:cNvPr id="99" name="Google Shape;99;g3141e128008_0_0"/>
+          <p:cNvGrpSpPr/>
+          <p:nvPr/>
+        </p:nvGrpSpPr>
+        <p:grpSpPr>
+          <a:xfrm>
+            <a:off x="1528847" y="22725957"/>
+            <a:ext cx="11713500" cy="6529362"/>
+            <a:chOff x="1528847" y="22916321"/>
+            <a:chExt cx="11713500" cy="6529362"/>
+          </a:xfrm>
+        </p:grpSpPr>
+        <p:sp>
+          <p:nvSpPr>
+            <p:cNvPr id="100" name="Google Shape;100;g3141e128008_0_0"/>
+            <p:cNvSpPr txBox="1"/>
+            <p:nvPr/>
+          </p:nvSpPr>
+          <p:spPr>
+            <a:xfrm>
+              <a:off x="1528847" y="23765783"/>
+              <a:ext cx="11713500" cy="5679900"/>
+            </a:xfrm>
+            <a:prstGeom prst="rect">
+              <a:avLst/>
+            </a:prstGeom>
+            <a:noFill/>
+            <a:ln cap="flat" cmpd="sng" w="76200">
+              <a:solidFill>
+                <a:srgbClr val="FFC000"/>
+              </a:solidFill>
+              <a:prstDash val="solid"/>
+              <a:round/>
+              <a:headEnd len="sm" w="sm" type="none"/>
+              <a:tailEnd len="sm" w="sm" type="none"/>
+            </a:ln>
+          </p:spPr>
+          <p:txBody>
+            <a:bodyPr anchorCtr="0" anchor="t" bIns="228600" lIns="457200" spcFirstLastPara="1" rIns="457200" wrap="square" tIns="457200">
+              <a:spAutoFit/>
+            </a:bodyPr>
+            <a:lstStyle/>
             <a:p>
-              <a:pPr marL="1028700" marR="0" lvl="1" indent="-571500" algn="l" rtl="0">
+              <a:pPr indent="-203200" lvl="0" marL="457200" marR="0" rtl="0" algn="l">
                 <a:lnSpc>
                   <a:spcPct val="100000"/>
                 </a:lnSpc>
@@ -15778,70 +15597,14 @@
                 <a:buClr>
                   <a:schemeClr val="dk1"/>
                 </a:buClr>
-                <a:buSzPts val="3600"/>
-                <a:buFont typeface="Wingdings" pitchFamily="2" charset="2"/>
-                <a:buChar char="Ø"/>
+                <a:buSzPts val="4000"/>
+                <a:buFont typeface="Arial"/>
+                <a:buNone/>
               </a:pPr>
               <a:r>
-                <a:rPr lang="en-US" sz="3600" b="0" i="0" u="none" strike="noStrike" cap="none" dirty="0">
-                  <a:solidFill>
-                    <a:schemeClr val="dk1"/>
-                  </a:solidFill>
-                  <a:latin typeface="Arial"/>
-                  <a:ea typeface="Arial"/>
-                  <a:cs typeface="Arial"/>
-                  <a:sym typeface="Arial"/>
-                </a:rPr>
-                <a:t>70% more energy efficiency</a:t>
+                <a:t/>
               </a:r>
-              <a:endParaRPr dirty="0"/>
-            </a:p>
-            <a:p>
-              <a:pPr marL="1028700" marR="0" lvl="1" indent="-571500" algn="l" rtl="0">
-                <a:lnSpc>
-                  <a:spcPct val="100000"/>
-                </a:lnSpc>
-                <a:spcBef>
-                  <a:spcPts val="0"/>
-                </a:spcBef>
-                <a:spcAft>
-                  <a:spcPts val="0"/>
-                </a:spcAft>
-                <a:buClr>
-                  <a:schemeClr val="dk1"/>
-                </a:buClr>
-                <a:buSzPts val="3600"/>
-                <a:buFont typeface="Wingdings" pitchFamily="2" charset="2"/>
-                <a:buChar char="Ø"/>
-              </a:pPr>
-              <a:r>
-                <a:rPr lang="en-US" sz="3600" b="0" i="0" u="none" strike="noStrike" cap="none" dirty="0">
-                  <a:solidFill>
-                    <a:schemeClr val="dk1"/>
-                  </a:solidFill>
-                  <a:latin typeface="Arial"/>
-                  <a:ea typeface="Arial"/>
-                  <a:cs typeface="Arial"/>
-                  <a:sym typeface="Arial"/>
-                </a:rPr>
-                <a:t>75% less heat production</a:t>
-              </a:r>
-              <a:endParaRPr dirty="0"/>
-            </a:p>
-            <a:p>
-              <a:pPr marL="914400" marR="0" lvl="0" indent="0" algn="l" rtl="0">
-                <a:lnSpc>
-                  <a:spcPct val="100000"/>
-                </a:lnSpc>
-                <a:spcBef>
-                  <a:spcPts val="0"/>
-                </a:spcBef>
-                <a:spcAft>
-                  <a:spcPts val="0"/>
-                </a:spcAft>
-                <a:buNone/>
-              </a:pPr>
-              <a:endParaRPr sz="3600" b="0" i="0" u="none" strike="noStrike" cap="none" dirty="0">
+              <a:endParaRPr b="0" i="0" sz="3600" u="none" cap="none" strike="noStrike">
                 <a:solidFill>
                   <a:schemeClr val="dk1"/>
                 </a:solidFill>
@@ -15852,7 +15615,7 @@
               </a:endParaRPr>
             </a:p>
             <a:p>
-              <a:pPr marL="457200" marR="0" lvl="0" indent="-457200" algn="l" rtl="0">
+              <a:pPr indent="-457200" lvl="0" marL="457200" marR="0" rtl="0" algn="l">
                 <a:lnSpc>
                   <a:spcPct val="100000"/>
                 </a:lnSpc>
@@ -15870,7 +15633,7 @@
                 <a:buChar char="●"/>
               </a:pPr>
               <a:r>
-                <a:rPr lang="en-US" sz="3600" b="0" i="0" u="none" strike="noStrike" cap="none" dirty="0">
+                <a:rPr b="0" i="0" lang="en-US" sz="3600" u="none" cap="none" strike="noStrike">
                   <a:solidFill>
                     <a:schemeClr val="dk1"/>
                   </a:solidFill>
@@ -15879,12 +15642,131 @@
                   <a:cs typeface="Arial"/>
                   <a:sym typeface="Arial"/>
                 </a:rPr>
-                <a:t>Support 70% smaller footprint</a:t>
+                <a:t>Support more environmentally friendly system </a:t>
               </a:r>
-              <a:endParaRPr dirty="0"/>
+              <a:endParaRPr b="0" i="0" sz="1400" u="none" cap="none" strike="noStrike">
+                <a:solidFill>
+                  <a:schemeClr val="dk1"/>
+                </a:solidFill>
+                <a:latin typeface="Arial"/>
+                <a:ea typeface="Arial"/>
+                <a:cs typeface="Arial"/>
+                <a:sym typeface="Arial"/>
+              </a:endParaRPr>
             </a:p>
             <a:p>
-              <a:pPr marL="457200" marR="0" lvl="0" indent="-457200" algn="l" rtl="0">
+              <a:pPr indent="-571500" lvl="1" marL="1028700" marR="0" rtl="0" algn="l">
+                <a:lnSpc>
+                  <a:spcPct val="100000"/>
+                </a:lnSpc>
+                <a:spcBef>
+                  <a:spcPts val="0"/>
+                </a:spcBef>
+                <a:spcAft>
+                  <a:spcPts val="0"/>
+                </a:spcAft>
+                <a:buClr>
+                  <a:schemeClr val="dk1"/>
+                </a:buClr>
+                <a:buSzPts val="3600"/>
+                <a:buFont typeface="Noto Sans Symbols"/>
+                <a:buChar char="⮚"/>
+              </a:pPr>
+              <a:r>
+                <a:rPr b="0" i="0" lang="en-US" sz="3600" u="none" cap="none" strike="noStrike">
+                  <a:solidFill>
+                    <a:schemeClr val="dk1"/>
+                  </a:solidFill>
+                  <a:latin typeface="Arial"/>
+                  <a:ea typeface="Arial"/>
+                  <a:cs typeface="Arial"/>
+                  <a:sym typeface="Arial"/>
+                </a:rPr>
+                <a:t>70% more energy efficiency</a:t>
+              </a:r>
+              <a:endParaRPr b="0" i="0" sz="1400" u="none" cap="none" strike="noStrike">
+                <a:solidFill>
+                  <a:srgbClr val="000000"/>
+                </a:solidFill>
+                <a:latin typeface="Arial"/>
+                <a:ea typeface="Arial"/>
+                <a:cs typeface="Arial"/>
+                <a:sym typeface="Arial"/>
+              </a:endParaRPr>
+            </a:p>
+            <a:p>
+              <a:pPr indent="-571500" lvl="1" marL="1028700" marR="0" rtl="0" algn="l">
+                <a:lnSpc>
+                  <a:spcPct val="100000"/>
+                </a:lnSpc>
+                <a:spcBef>
+                  <a:spcPts val="0"/>
+                </a:spcBef>
+                <a:spcAft>
+                  <a:spcPts val="0"/>
+                </a:spcAft>
+                <a:buClr>
+                  <a:schemeClr val="dk1"/>
+                </a:buClr>
+                <a:buSzPts val="3600"/>
+                <a:buFont typeface="Noto Sans Symbols"/>
+                <a:buChar char="⮚"/>
+              </a:pPr>
+              <a:r>
+                <a:rPr b="0" i="0" lang="en-US" sz="3600" u="none" cap="none" strike="noStrike">
+                  <a:solidFill>
+                    <a:schemeClr val="dk1"/>
+                  </a:solidFill>
+                  <a:latin typeface="Arial"/>
+                  <a:ea typeface="Arial"/>
+                  <a:cs typeface="Arial"/>
+                  <a:sym typeface="Arial"/>
+                </a:rPr>
+                <a:t>75% less heat production</a:t>
+              </a:r>
+              <a:endParaRPr b="0" i="0" sz="1400" u="none" cap="none" strike="noStrike">
+                <a:solidFill>
+                  <a:srgbClr val="000000"/>
+                </a:solidFill>
+                <a:latin typeface="Arial"/>
+                <a:ea typeface="Arial"/>
+                <a:cs typeface="Arial"/>
+                <a:sym typeface="Arial"/>
+              </a:endParaRPr>
+            </a:p>
+            <a:p>
+              <a:pPr indent="0" lvl="0" marL="914400" marR="0" rtl="0" algn="l">
+                <a:lnSpc>
+                  <a:spcPct val="100000"/>
+                </a:lnSpc>
+                <a:spcBef>
+                  <a:spcPts val="0"/>
+                </a:spcBef>
+                <a:spcAft>
+                  <a:spcPts val="0"/>
+                </a:spcAft>
+                <a:buClr>
+                  <a:srgbClr val="000000"/>
+                </a:buClr>
+                <a:buSzPts val="3600"/>
+                <a:buFont typeface="Arial"/>
+                <a:buNone/>
+              </a:pPr>
+              <a:r>
+                <a:t/>
+              </a:r>
+              <a:endParaRPr b="0" i="0" sz="3600" u="none" cap="none" strike="noStrike">
+                <a:solidFill>
+                  <a:schemeClr val="dk1"/>
+                </a:solidFill>
+                <a:latin typeface="Arial"/>
+                <a:ea typeface="Arial"/>
+                <a:cs typeface="Arial"/>
+                <a:sym typeface="Arial"/>
+              </a:endParaRPr>
+            </a:p>
+            <a:p>
+              <a:pPr indent="-457200" lvl="0" marL="457200" marR="0" rtl="0" algn="l">
                 <a:lnSpc>
                   <a:spcPct val="100000"/>
                 </a:lnSpc>
@@ -15902,7 +15784,7 @@
                 <a:buChar char="●"/>
               </a:pPr>
               <a:r>
-                <a:rPr lang="en-US" sz="3600" b="0" i="0" u="none" strike="noStrike" cap="none" dirty="0">
+                <a:rPr b="0" i="0" lang="en-US" sz="3600" u="none" cap="none" strike="noStrike">
                   <a:solidFill>
                     <a:schemeClr val="dk1"/>
                   </a:solidFill>
@@ -15911,11 +15793,11 @@
                   <a:cs typeface="Arial"/>
                   <a:sym typeface="Arial"/>
                 </a:rPr>
-                <a:t>Support a higher efficient system</a:t>
+                <a:t>Support 70% smaller footprint</a:t>
               </a:r>
-              <a:endParaRPr sz="3600" b="0" i="0" u="none" strike="noStrike" cap="none" dirty="0">
-                <a:solidFill>
-                  <a:schemeClr val="dk1"/>
+              <a:endParaRPr b="0" i="0" sz="1400" u="none" cap="none" strike="noStrike">
+                <a:solidFill>
+                  <a:srgbClr val="000000"/>
                 </a:solidFill>
                 <a:latin typeface="Arial"/>
                 <a:ea typeface="Arial"/>
@@ -15924,7 +15806,7 @@
               </a:endParaRPr>
             </a:p>
             <a:p>
-              <a:pPr marL="1028700" marR="0" lvl="1" indent="-571500" algn="l" rtl="0">
+              <a:pPr indent="-457200" lvl="0" marL="457200" marR="0" rtl="0" algn="l">
                 <a:lnSpc>
                   <a:spcPct val="100000"/>
                 </a:lnSpc>
@@ -15938,11 +15820,11 @@
                   <a:schemeClr val="dk1"/>
                 </a:buClr>
                 <a:buSzPts val="3600"/>
-                <a:buFont typeface="Wingdings" pitchFamily="2" charset="2"/>
-                <a:buChar char="Ø"/>
+                <a:buFont typeface="Arial"/>
+                <a:buChar char="●"/>
               </a:pPr>
               <a:r>
-                <a:rPr lang="en-US" sz="3600" b="0" i="0" u="none" strike="noStrike" cap="none" dirty="0">
+                <a:rPr b="0" i="0" lang="en-US" sz="3600" u="none" cap="none" strike="noStrike">
                   <a:solidFill>
                     <a:schemeClr val="dk1"/>
                   </a:solidFill>
@@ -15951,12 +15833,20 @@
                   <a:cs typeface="Arial"/>
                   <a:sym typeface="Arial"/>
                 </a:rPr>
-                <a:t>99.999% more reliable </a:t>
+                <a:t>Support a higher efficient system</a:t>
               </a:r>
-              <a:endParaRPr dirty="0"/>
+              <a:endParaRPr b="0" i="0" sz="3600" u="none" cap="none" strike="noStrike">
+                <a:solidFill>
+                  <a:schemeClr val="dk1"/>
+                </a:solidFill>
+                <a:latin typeface="Arial"/>
+                <a:ea typeface="Arial"/>
+                <a:cs typeface="Arial"/>
+                <a:sym typeface="Arial"/>
+              </a:endParaRPr>
             </a:p>
             <a:p>
-              <a:pPr marL="1028700" marR="0" lvl="1" indent="-571500" algn="l" rtl="0">
+              <a:pPr indent="-571500" lvl="1" marL="1028700" marR="0" rtl="0" algn="l">
                 <a:lnSpc>
                   <a:spcPct val="100000"/>
                 </a:lnSpc>
@@ -15970,11 +15860,51 @@
                   <a:schemeClr val="dk1"/>
                 </a:buClr>
                 <a:buSzPts val="3600"/>
-                <a:buFont typeface="Wingdings" pitchFamily="2" charset="2"/>
-                <a:buChar char="Ø"/>
+                <a:buFont typeface="Noto Sans Symbols"/>
+                <a:buChar char="⮚"/>
               </a:pPr>
               <a:r>
-                <a:rPr lang="en-US" sz="3600" b="0" i="0" u="none" strike="noStrike" cap="none" dirty="0">
+                <a:rPr b="0" i="0" lang="en-US" sz="3600" u="none" cap="none" strike="noStrike">
+                  <a:solidFill>
+                    <a:schemeClr val="dk1"/>
+                  </a:solidFill>
+                  <a:latin typeface="Arial"/>
+                  <a:ea typeface="Arial"/>
+                  <a:cs typeface="Arial"/>
+                  <a:sym typeface="Arial"/>
+                </a:rPr>
+                <a:t>99.999% more reliable </a:t>
+              </a:r>
+              <a:endParaRPr b="0" i="0" sz="1400" u="none" cap="none" strike="noStrike">
+                <a:solidFill>
+                  <a:srgbClr val="000000"/>
+                </a:solidFill>
+                <a:latin typeface="Arial"/>
+                <a:ea typeface="Arial"/>
+                <a:cs typeface="Arial"/>
+                <a:sym typeface="Arial"/>
+              </a:endParaRPr>
+            </a:p>
+            <a:p>
+              <a:pPr indent="-571500" lvl="1" marL="1028700" marR="0" rtl="0" algn="l">
+                <a:lnSpc>
+                  <a:spcPct val="100000"/>
+                </a:lnSpc>
+                <a:spcBef>
+                  <a:spcPts val="0"/>
+                </a:spcBef>
+                <a:spcAft>
+                  <a:spcPts val="0"/>
+                </a:spcAft>
+                <a:buClr>
+                  <a:schemeClr val="dk1"/>
+                </a:buClr>
+                <a:buSzPts val="3600"/>
+                <a:buFont typeface="Noto Sans Symbols"/>
+                <a:buChar char="⮚"/>
+              </a:pPr>
+              <a:r>
+                <a:rPr b="0" i="0" lang="en-US" sz="3600" u="none" cap="none" strike="noStrike">
                   <a:solidFill>
                     <a:schemeClr val="dk1"/>
                   </a:solidFill>
@@ -15985,13 +15915,21 @@
                 </a:rPr>
                 <a:t>Never been hacked – Quantum Safe</a:t>
               </a:r>
-              <a:endParaRPr dirty="0"/>
+              <a:endParaRPr b="0" i="0" sz="1400" u="none" cap="none" strike="noStrike">
+                <a:solidFill>
+                  <a:srgbClr val="000000"/>
+                </a:solidFill>
+                <a:latin typeface="Arial"/>
+                <a:ea typeface="Arial"/>
+                <a:cs typeface="Arial"/>
+                <a:sym typeface="Arial"/>
+              </a:endParaRPr>
             </a:p>
           </p:txBody>
         </p:sp>
         <p:sp>
           <p:nvSpPr>
-            <p:cNvPr id="102" name="Google Shape;102;g3141e128008_0_0"/>
+            <p:cNvPr id="101" name="Google Shape;101;g3141e128008_0_0"/>
             <p:cNvSpPr/>
             <p:nvPr/>
           </p:nvSpPr>
@@ -16002,29 +15940,29 @@
             </a:xfrm>
             <a:prstGeom prst="parallelogram">
               <a:avLst>
-                <a:gd name="adj" fmla="val 25000"/>
+                <a:gd fmla="val 25000" name="adj"/>
               </a:avLst>
             </a:prstGeom>
             <a:solidFill>
               <a:srgbClr val="FFC000"/>
             </a:solidFill>
-            <a:ln w="9525" cap="flat" cmpd="sng">
+            <a:ln cap="flat" cmpd="sng" w="9525">
               <a:solidFill>
                 <a:schemeClr val="dk1"/>
               </a:solidFill>
               <a:prstDash val="solid"/>
               <a:round/>
-              <a:headEnd type="none" w="sm" len="sm"/>
-              <a:tailEnd type="none" w="sm" len="sm"/>
+              <a:headEnd len="sm" w="sm" type="none"/>
+              <a:tailEnd len="sm" w="sm" type="none"/>
             </a:ln>
           </p:spPr>
           <p:txBody>
-            <a:bodyPr spcFirstLastPara="1" wrap="square" lIns="91425" tIns="91425" rIns="91425" bIns="91425" anchor="ctr" anchorCtr="0">
+            <a:bodyPr anchorCtr="0" anchor="ctr" bIns="91425" lIns="91425" spcFirstLastPara="1" rIns="91425" wrap="square" tIns="91425">
               <a:noAutofit/>
             </a:bodyPr>
             <a:lstStyle/>
             <a:p>
-              <a:pPr marL="0" marR="0" lvl="0" indent="0" algn="ctr" rtl="0">
+              <a:pPr indent="0" lvl="0" marL="0" marR="0" rtl="0" algn="ctr">
                 <a:lnSpc>
                   <a:spcPct val="100000"/>
                 </a:lnSpc>
@@ -16042,7 +15980,7 @@
                 <a:buNone/>
               </a:pPr>
               <a:r>
-                <a:rPr lang="en-US" sz="4800" b="1" i="0" u="none" strike="noStrike" cap="none">
+                <a:rPr b="1" i="0" lang="en-US" sz="4800" u="none" cap="none" strike="noStrike">
                   <a:solidFill>
                     <a:srgbClr val="000000"/>
                   </a:solidFill>
@@ -16053,7 +15991,7 @@
                 </a:rPr>
                 <a:t>Social Value</a:t>
               </a:r>
-              <a:endParaRPr sz="4800" b="1" i="0" u="none" strike="noStrike" cap="none">
+              <a:endParaRPr b="1" i="0" sz="4800" u="none" cap="none" strike="noStrike">
                 <a:solidFill>
                   <a:srgbClr val="000000"/>
                 </a:solidFill>
@@ -16068,7 +16006,7 @@
       </p:grpSp>
       <p:grpSp>
         <p:nvGrpSpPr>
-          <p:cNvPr id="103" name="Google Shape;103;g3141e128008_0_0"/>
+          <p:cNvPr id="102" name="Google Shape;102;g3141e128008_0_0"/>
           <p:cNvGrpSpPr/>
           <p:nvPr/>
         </p:nvGrpSpPr>
@@ -16082,7 +16020,7 @@
         </p:grpSpPr>
         <p:sp>
           <p:nvSpPr>
-            <p:cNvPr id="104" name="Google Shape;104;g3141e128008_0_0"/>
+            <p:cNvPr id="103" name="Google Shape;103;g3141e128008_0_0"/>
             <p:cNvSpPr txBox="1"/>
             <p:nvPr/>
           </p:nvSpPr>
@@ -16095,23 +16033,23 @@
               <a:avLst/>
             </a:prstGeom>
             <a:noFill/>
-            <a:ln w="76200" cap="flat" cmpd="sng">
+            <a:ln cap="flat" cmpd="sng" w="76200">
               <a:solidFill>
                 <a:srgbClr val="FFC000"/>
               </a:solidFill>
               <a:prstDash val="solid"/>
               <a:round/>
-              <a:headEnd type="none" w="sm" len="sm"/>
-              <a:tailEnd type="none" w="sm" len="sm"/>
+              <a:headEnd len="sm" w="sm" type="none"/>
+              <a:tailEnd len="sm" w="sm" type="none"/>
             </a:ln>
           </p:spPr>
           <p:txBody>
-            <a:bodyPr spcFirstLastPara="1" wrap="square" lIns="457200" tIns="457200" rIns="457200" bIns="228600" anchor="t" anchorCtr="0">
+            <a:bodyPr anchorCtr="0" anchor="t" bIns="228600" lIns="457200" spcFirstLastPara="1" rIns="457200" wrap="square" tIns="457200">
               <a:spAutoFit/>
             </a:bodyPr>
             <a:lstStyle/>
             <a:p>
-              <a:pPr marL="457200" marR="0" lvl="0" indent="-457200" algn="l" rtl="0">
+              <a:pPr indent="-457200" lvl="0" marL="457200" marR="0" rtl="0" algn="l">
                 <a:lnSpc>
                   <a:spcPct val="100000"/>
                 </a:lnSpc>
@@ -16129,7 +16067,7 @@
                 <a:buChar char="●"/>
               </a:pPr>
               <a:r>
-                <a:rPr lang="en-US" sz="3600" b="0" i="0" u="none" strike="noStrike" cap="none">
+                <a:rPr b="0" i="0" lang="en-US" sz="3600" u="none" cap="none" strike="noStrike">
                   <a:solidFill>
                     <a:schemeClr val="dk1"/>
                   </a:solidFill>
@@ -16140,7 +16078,7 @@
                 </a:rPr>
                 <a:t>General Concepts</a:t>
               </a:r>
-              <a:endParaRPr sz="3600" b="0" i="0" u="none" strike="noStrike" cap="none">
+              <a:endParaRPr b="0" i="0" sz="3600" u="none" cap="none" strike="noStrike">
                 <a:solidFill>
                   <a:schemeClr val="dk1"/>
                 </a:solidFill>
@@ -16151,7 +16089,7 @@
               </a:endParaRPr>
             </a:p>
             <a:p>
-              <a:pPr marL="0" marR="0" lvl="0" indent="0" algn="l" rtl="0">
+              <a:pPr indent="0" lvl="0" marL="0" marR="0" rtl="0" algn="l">
                 <a:lnSpc>
                   <a:spcPct val="100000"/>
                 </a:lnSpc>
@@ -16161,16 +16099,28 @@
                 <a:spcAft>
                   <a:spcPts val="0"/>
                 </a:spcAft>
+                <a:buClr>
+                  <a:srgbClr val="000000"/>
+                </a:buClr>
+                <a:buSzPts val="3600"/>
+                <a:buFont typeface="Arial"/>
                 <a:buNone/>
               </a:pPr>
-              <a:endParaRPr sz="3600">
+              <a:r>
+                <a:t/>
+              </a:r>
+              <a:endParaRPr b="0" i="0" sz="3600" u="none" cap="none" strike="noStrike">
                 <a:solidFill>
                   <a:schemeClr val="dk1"/>
                 </a:solidFill>
+                <a:latin typeface="Arial"/>
+                <a:ea typeface="Arial"/>
+                <a:cs typeface="Arial"/>
+                <a:sym typeface="Arial"/>
               </a:endParaRPr>
             </a:p>
             <a:p>
-              <a:pPr marL="457200" marR="0" lvl="0" indent="-457200" algn="l" rtl="0">
+              <a:pPr indent="-457200" lvl="0" marL="457200" marR="0" rtl="0" algn="l">
                 <a:lnSpc>
                   <a:spcPct val="100000"/>
                 </a:lnSpc>
@@ -16188,15 +16138,7 @@
                 <a:buChar char="●"/>
               </a:pPr>
               <a:r>
-                <a:rPr lang="en-US" sz="3600">
-                  <a:solidFill>
-                    <a:schemeClr val="dk1"/>
-                  </a:solidFill>
-                </a:rPr>
-                <a:t>B</a:t>
-              </a:r>
-              <a:r>
-                <a:rPr lang="en-US" sz="3600" b="0" i="0" u="none" strike="noStrike" cap="none">
+                <a:rPr b="0" i="0" lang="en-US" sz="3600" u="none" cap="none" strike="noStrike">
                   <a:solidFill>
                     <a:schemeClr val="dk1"/>
                   </a:solidFill>
@@ -16205,9 +16147,9 @@
                   <a:cs typeface="Arial"/>
                   <a:sym typeface="Arial"/>
                 </a:rPr>
-                <a:t>asic z/OS architecture</a:t>
+                <a:t>Basic z/OS architecture</a:t>
               </a:r>
-              <a:endParaRPr sz="3600" b="0" i="0" u="none" strike="noStrike" cap="none">
+              <a:endParaRPr b="0" i="0" sz="3600" u="none" cap="none" strike="noStrike">
                 <a:solidFill>
                   <a:schemeClr val="dk1"/>
                 </a:solidFill>
@@ -16218,7 +16160,7 @@
               </a:endParaRPr>
             </a:p>
             <a:p>
-              <a:pPr marL="0" marR="0" lvl="0" indent="0" algn="l" rtl="0">
+              <a:pPr indent="0" lvl="0" marL="0" marR="0" rtl="0" algn="l">
                 <a:lnSpc>
                   <a:spcPct val="100000"/>
                 </a:lnSpc>
@@ -16228,16 +16170,28 @@
                 <a:spcAft>
                   <a:spcPts val="0"/>
                 </a:spcAft>
+                <a:buClr>
+                  <a:srgbClr val="000000"/>
+                </a:buClr>
+                <a:buSzPts val="3600"/>
+                <a:buFont typeface="Arial"/>
                 <a:buNone/>
               </a:pPr>
-              <a:endParaRPr sz="3600">
+              <a:r>
+                <a:t/>
+              </a:r>
+              <a:endParaRPr b="0" i="0" sz="3600" u="none" cap="none" strike="noStrike">
                 <a:solidFill>
                   <a:schemeClr val="dk1"/>
                 </a:solidFill>
+                <a:latin typeface="Arial"/>
+                <a:ea typeface="Arial"/>
+                <a:cs typeface="Arial"/>
+                <a:sym typeface="Arial"/>
               </a:endParaRPr>
             </a:p>
             <a:p>
-              <a:pPr marL="457200" marR="0" lvl="0" indent="-457200" algn="l" rtl="0">
+              <a:pPr indent="-457200" lvl="0" marL="457200" marR="0" rtl="0" algn="l">
                 <a:lnSpc>
                   <a:spcPct val="100000"/>
                 </a:lnSpc>
@@ -16255,7 +16209,7 @@
                 <a:buChar char="●"/>
               </a:pPr>
               <a:r>
-                <a:rPr lang="en-US" sz="3600" b="0" i="0" u="none" strike="noStrike" cap="none">
+                <a:rPr b="0" i="0" lang="en-US" sz="3600" u="none" cap="none" strike="noStrike">
                   <a:solidFill>
                     <a:schemeClr val="dk1"/>
                   </a:solidFill>
@@ -16266,7 +16220,7 @@
                 </a:rPr>
                 <a:t>Interactive System Productivity Facility (ISPF)</a:t>
               </a:r>
-              <a:endParaRPr sz="3600" b="0" i="0" u="none" strike="noStrike" cap="none">
+              <a:endParaRPr b="0" i="0" sz="3600" u="none" cap="none" strike="noStrike">
                 <a:solidFill>
                   <a:schemeClr val="dk1"/>
                 </a:solidFill>
@@ -16277,7 +16231,7 @@
               </a:endParaRPr>
             </a:p>
             <a:p>
-              <a:pPr marL="0" marR="0" lvl="0" indent="0" algn="l" rtl="0">
+              <a:pPr indent="0" lvl="0" marL="0" marR="0" rtl="0" algn="l">
                 <a:lnSpc>
                   <a:spcPct val="100000"/>
                 </a:lnSpc>
@@ -16287,16 +16241,28 @@
                 <a:spcAft>
                   <a:spcPts val="0"/>
                 </a:spcAft>
+                <a:buClr>
+                  <a:srgbClr val="000000"/>
+                </a:buClr>
+                <a:buSzPts val="3600"/>
+                <a:buFont typeface="Arial"/>
                 <a:buNone/>
               </a:pPr>
-              <a:endParaRPr sz="3600">
+              <a:r>
+                <a:t/>
+              </a:r>
+              <a:endParaRPr b="0" i="0" sz="3600" u="none" cap="none" strike="noStrike">
                 <a:solidFill>
                   <a:schemeClr val="dk1"/>
                 </a:solidFill>
+                <a:latin typeface="Arial"/>
+                <a:ea typeface="Arial"/>
+                <a:cs typeface="Arial"/>
+                <a:sym typeface="Arial"/>
               </a:endParaRPr>
             </a:p>
             <a:p>
-              <a:pPr marL="457200" marR="0" lvl="0" indent="-457200" algn="l" rtl="0">
+              <a:pPr indent="-457200" lvl="0" marL="457200" marR="0" rtl="0" algn="l">
                 <a:lnSpc>
                   <a:spcPct val="100000"/>
                 </a:lnSpc>
@@ -16314,7 +16280,7 @@
                 <a:buChar char="●"/>
               </a:pPr>
               <a:r>
-                <a:rPr lang="en-US" sz="3600" b="0" i="0" u="none" strike="noStrike" cap="none">
+                <a:rPr b="0" i="0" lang="en-US" sz="3600" u="none" cap="none" strike="noStrike">
                   <a:solidFill>
                     <a:schemeClr val="dk1"/>
                   </a:solidFill>
@@ -16325,10 +16291,18 @@
                 </a:rPr>
                 <a:t>System Display and Search Facility (SDSF) </a:t>
               </a:r>
-              <a:endParaRPr/>
+              <a:endParaRPr b="0" i="0" sz="1400" u="none" cap="none" strike="noStrike">
+                <a:solidFill>
+                  <a:srgbClr val="000000"/>
+                </a:solidFill>
+                <a:latin typeface="Arial"/>
+                <a:ea typeface="Arial"/>
+                <a:cs typeface="Arial"/>
+                <a:sym typeface="Arial"/>
+              </a:endParaRPr>
             </a:p>
             <a:p>
-              <a:pPr marL="457200" marR="0" lvl="0" indent="-203200" algn="l" rtl="0">
+              <a:pPr indent="-203200" lvl="0" marL="457200" marR="0" rtl="0" algn="l">
                 <a:lnSpc>
                   <a:spcPct val="100000"/>
                 </a:lnSpc>
@@ -16345,7 +16319,10 @@
                 <a:buFont typeface="Arial"/>
                 <a:buNone/>
               </a:pPr>
-              <a:endParaRPr sz="3600" b="0" i="0" u="none" strike="noStrike" cap="none">
+              <a:r>
+                <a:t/>
+              </a:r>
+              <a:endParaRPr b="0" i="0" sz="3600" u="none" cap="none" strike="noStrike">
                 <a:solidFill>
                   <a:schemeClr val="dk1"/>
                 </a:solidFill>
@@ -16356,7 +16333,7 @@
               </a:endParaRPr>
             </a:p>
             <a:p>
-              <a:pPr marL="457200" marR="0" lvl="0" indent="-457200" algn="l" rtl="0">
+              <a:pPr indent="-457200" lvl="0" marL="457200" marR="0" rtl="0" algn="l">
                 <a:lnSpc>
                   <a:spcPct val="100000"/>
                 </a:lnSpc>
@@ -16374,7 +16351,7 @@
                 <a:buChar char="●"/>
               </a:pPr>
               <a:r>
-                <a:rPr lang="en-US" sz="3600" b="0" i="0" u="none" strike="noStrike" cap="none">
+                <a:rPr b="0" i="0" lang="en-US" sz="3600" u="none" cap="none" strike="noStrike">
                   <a:solidFill>
                     <a:schemeClr val="dk1"/>
                   </a:solidFill>
@@ -16385,10 +16362,18 @@
                 </a:rPr>
                 <a:t>TSO (Time Share Option)</a:t>
               </a:r>
-              <a:endParaRPr/>
+              <a:endParaRPr b="0" i="0" sz="1400" u="none" cap="none" strike="noStrike">
+                <a:solidFill>
+                  <a:srgbClr val="000000"/>
+                </a:solidFill>
+                <a:latin typeface="Arial"/>
+                <a:ea typeface="Arial"/>
+                <a:cs typeface="Arial"/>
+                <a:sym typeface="Arial"/>
+              </a:endParaRPr>
             </a:p>
             <a:p>
-              <a:pPr marL="457200" marR="0" lvl="0" indent="-203200" algn="l" rtl="0">
+              <a:pPr indent="-203200" lvl="0" marL="457200" marR="0" rtl="0" algn="l">
                 <a:lnSpc>
                   <a:spcPct val="100000"/>
                 </a:lnSpc>
@@ -16405,7 +16390,10 @@
                 <a:buFont typeface="Arial"/>
                 <a:buNone/>
               </a:pPr>
-              <a:endParaRPr sz="3600" b="0" i="0" u="none" strike="noStrike" cap="none">
+              <a:r>
+                <a:t/>
+              </a:r>
+              <a:endParaRPr b="0" i="0" sz="3600" u="none" cap="none" strike="noStrike">
                 <a:solidFill>
                   <a:schemeClr val="dk1"/>
                 </a:solidFill>
@@ -16416,7 +16404,7 @@
               </a:endParaRPr>
             </a:p>
             <a:p>
-              <a:pPr marL="457200" marR="0" lvl="0" indent="-457200" algn="l" rtl="0">
+              <a:pPr indent="-457200" lvl="0" marL="457200" marR="0" rtl="0" algn="l">
                 <a:lnSpc>
                   <a:spcPct val="100000"/>
                 </a:lnSpc>
@@ -16434,7 +16422,7 @@
                 <a:buChar char="●"/>
               </a:pPr>
               <a:r>
-                <a:rPr lang="en-US" sz="3600" b="0" i="0" u="none" strike="noStrike" cap="none">
+                <a:rPr b="0" i="0" lang="en-US" sz="3600" u="none" cap="none" strike="noStrike">
                   <a:solidFill>
                     <a:schemeClr val="dk1"/>
                   </a:solidFill>
@@ -16445,10 +16433,18 @@
                 </a:rPr>
                 <a:t>Job Control Language (JCL)</a:t>
               </a:r>
-              <a:endParaRPr/>
+              <a:endParaRPr b="0" i="0" sz="1400" u="none" cap="none" strike="noStrike">
+                <a:solidFill>
+                  <a:srgbClr val="000000"/>
+                </a:solidFill>
+                <a:latin typeface="Arial"/>
+                <a:ea typeface="Arial"/>
+                <a:cs typeface="Arial"/>
+                <a:sym typeface="Arial"/>
+              </a:endParaRPr>
             </a:p>
             <a:p>
-              <a:pPr marL="457200" marR="0" lvl="0" indent="-203200" algn="l" rtl="0">
+              <a:pPr indent="-203200" lvl="0" marL="457200" marR="0" rtl="0" algn="l">
                 <a:lnSpc>
                   <a:spcPct val="100000"/>
                 </a:lnSpc>
@@ -16465,7 +16461,10 @@
                 <a:buFont typeface="Arial"/>
                 <a:buNone/>
               </a:pPr>
-              <a:endParaRPr sz="3600" b="0" i="0" u="none" strike="noStrike" cap="none">
+              <a:r>
+                <a:t/>
+              </a:r>
+              <a:endParaRPr b="0" i="0" sz="3600" u="none" cap="none" strike="noStrike">
                 <a:solidFill>
                   <a:schemeClr val="dk1"/>
                 </a:solidFill>
@@ -16476,7 +16475,7 @@
               </a:endParaRPr>
             </a:p>
             <a:p>
-              <a:pPr marL="457200" marR="0" lvl="0" indent="-457200" algn="l" rtl="0">
+              <a:pPr indent="-457200" lvl="0" marL="457200" marR="0" rtl="0" algn="l">
                 <a:lnSpc>
                   <a:spcPct val="100000"/>
                 </a:lnSpc>
@@ -16494,7 +16493,7 @@
                 <a:buChar char="●"/>
               </a:pPr>
               <a:r>
-                <a:rPr lang="en-US" sz="3600" b="0" i="0" u="none" strike="noStrike" cap="none">
+                <a:rPr b="0" i="0" lang="en-US" sz="3600" u="none" cap="none" strike="noStrike">
                   <a:solidFill>
                     <a:schemeClr val="dk1"/>
                   </a:solidFill>
@@ -16505,13 +16504,21 @@
                 </a:rPr>
                 <a:t>Unix Systems Services (USS)</a:t>
               </a:r>
-              <a:endParaRPr/>
+              <a:endParaRPr b="0" i="0" sz="1400" u="none" cap="none" strike="noStrike">
+                <a:solidFill>
+                  <a:srgbClr val="000000"/>
+                </a:solidFill>
+                <a:latin typeface="Arial"/>
+                <a:ea typeface="Arial"/>
+                <a:cs typeface="Arial"/>
+                <a:sym typeface="Arial"/>
+              </a:endParaRPr>
             </a:p>
           </p:txBody>
         </p:sp>
         <p:sp>
           <p:nvSpPr>
-            <p:cNvPr id="105" name="Google Shape;105;g3141e128008_0_0"/>
+            <p:cNvPr id="104" name="Google Shape;104;g3141e128008_0_0"/>
             <p:cNvSpPr/>
             <p:nvPr/>
           </p:nvSpPr>
@@ -16522,29 +16529,29 @@
             </a:xfrm>
             <a:prstGeom prst="parallelogram">
               <a:avLst>
-                <a:gd name="adj" fmla="val 25000"/>
+                <a:gd fmla="val 25000" name="adj"/>
               </a:avLst>
             </a:prstGeom>
             <a:solidFill>
               <a:srgbClr val="FFC000"/>
             </a:solidFill>
-            <a:ln w="9525" cap="flat" cmpd="sng">
+            <a:ln cap="flat" cmpd="sng" w="9525">
               <a:solidFill>
                 <a:schemeClr val="dk1"/>
               </a:solidFill>
               <a:prstDash val="solid"/>
               <a:round/>
-              <a:headEnd type="none" w="sm" len="sm"/>
-              <a:tailEnd type="none" w="sm" len="sm"/>
+              <a:headEnd len="sm" w="sm" type="none"/>
+              <a:tailEnd len="sm" w="sm" type="none"/>
             </a:ln>
           </p:spPr>
           <p:txBody>
-            <a:bodyPr spcFirstLastPara="1" wrap="square" lIns="91425" tIns="91425" rIns="91425" bIns="91425" anchor="ctr" anchorCtr="0">
+            <a:bodyPr anchorCtr="0" anchor="ctr" bIns="91425" lIns="91425" spcFirstLastPara="1" rIns="91425" wrap="square" tIns="91425">
               <a:noAutofit/>
             </a:bodyPr>
             <a:lstStyle/>
             <a:p>
-              <a:pPr marL="0" marR="0" lvl="0" indent="0" algn="ctr" rtl="0">
+              <a:pPr indent="0" lvl="0" marL="0" marR="0" rtl="0" algn="ctr">
                 <a:lnSpc>
                   <a:spcPct val="100000"/>
                 </a:lnSpc>
@@ -16562,7 +16569,7 @@
                 <a:buNone/>
               </a:pPr>
               <a:r>
-                <a:rPr lang="en-US" sz="4800" b="1" i="0" u="none" strike="noStrike" cap="none">
+                <a:rPr b="1" i="0" lang="en-US" sz="4800" u="none" cap="none" strike="noStrike">
                   <a:solidFill>
                     <a:srgbClr val="000000"/>
                   </a:solidFill>
@@ -16573,7 +16580,7 @@
                 </a:rPr>
                 <a:t>Curriculum</a:t>
               </a:r>
-              <a:endParaRPr sz="4800" b="1" i="0" u="none" strike="noStrike" cap="none">
+              <a:endParaRPr b="1" i="0" sz="4800" u="none" cap="none" strike="noStrike">
                 <a:solidFill>
                   <a:srgbClr val="000000"/>
                 </a:solidFill>
@@ -16588,7 +16595,7 @@
       </p:grpSp>
       <p:grpSp>
         <p:nvGrpSpPr>
-          <p:cNvPr id="106" name="Google Shape;106;g3141e128008_0_0"/>
+          <p:cNvPr id="105" name="Google Shape;105;g3141e128008_0_0"/>
           <p:cNvGrpSpPr/>
           <p:nvPr/>
         </p:nvGrpSpPr>
@@ -16602,7 +16609,7 @@
         </p:grpSpPr>
         <p:sp>
           <p:nvSpPr>
-            <p:cNvPr id="107" name="Google Shape;107;g3141e128008_0_0"/>
+            <p:cNvPr id="106" name="Google Shape;106;g3141e128008_0_0"/>
             <p:cNvSpPr/>
             <p:nvPr/>
           </p:nvSpPr>
@@ -16613,29 +16620,29 @@
             </a:xfrm>
             <a:prstGeom prst="parallelogram">
               <a:avLst>
-                <a:gd name="adj" fmla="val 25000"/>
+                <a:gd fmla="val 25000" name="adj"/>
               </a:avLst>
             </a:prstGeom>
             <a:solidFill>
               <a:srgbClr val="FFC000"/>
             </a:solidFill>
-            <a:ln w="9525" cap="flat" cmpd="sng">
+            <a:ln cap="flat" cmpd="sng" w="9525">
               <a:solidFill>
                 <a:schemeClr val="dk1"/>
               </a:solidFill>
               <a:prstDash val="solid"/>
               <a:round/>
-              <a:headEnd type="none" w="sm" len="sm"/>
-              <a:tailEnd type="none" w="sm" len="sm"/>
+              <a:headEnd len="sm" w="sm" type="none"/>
+              <a:tailEnd len="sm" w="sm" type="none"/>
             </a:ln>
           </p:spPr>
           <p:txBody>
-            <a:bodyPr spcFirstLastPara="1" wrap="square" lIns="91425" tIns="91425" rIns="91425" bIns="91425" anchor="ctr" anchorCtr="0">
+            <a:bodyPr anchorCtr="0" anchor="ctr" bIns="91425" lIns="91425" spcFirstLastPara="1" rIns="91425" wrap="square" tIns="91425">
               <a:noAutofit/>
             </a:bodyPr>
             <a:lstStyle/>
             <a:p>
-              <a:pPr marL="0" marR="0" lvl="0" indent="0" algn="ctr" rtl="0">
+              <a:pPr indent="0" lvl="0" marL="0" marR="0" rtl="0" algn="ctr">
                 <a:lnSpc>
                   <a:spcPct val="100000"/>
                 </a:lnSpc>
@@ -16653,7 +16660,7 @@
                 <a:buNone/>
               </a:pPr>
               <a:r>
-                <a:rPr lang="en-US" sz="4800" b="1" i="0" u="none" strike="noStrike" cap="none">
+                <a:rPr b="1" i="0" lang="en-US" sz="4800" u="none" cap="none" strike="noStrike">
                   <a:solidFill>
                     <a:srgbClr val="000000"/>
                   </a:solidFill>
@@ -16664,7 +16671,7 @@
                 </a:rPr>
                 <a:t>Next Steps</a:t>
               </a:r>
-              <a:endParaRPr sz="4800" b="1" i="0" u="none" strike="noStrike" cap="none">
+              <a:endParaRPr b="1" i="0" sz="4800" u="none" cap="none" strike="noStrike">
                 <a:solidFill>
                   <a:srgbClr val="000000"/>
                 </a:solidFill>
@@ -16678,7 +16685,7 @@
         </p:sp>
         <p:sp>
           <p:nvSpPr>
-            <p:cNvPr id="108" name="Google Shape;108;g3141e128008_0_0"/>
+            <p:cNvPr id="107" name="Google Shape;107;g3141e128008_0_0"/>
             <p:cNvSpPr txBox="1"/>
             <p:nvPr/>
           </p:nvSpPr>
@@ -16691,23 +16698,23 @@
               <a:avLst/>
             </a:prstGeom>
             <a:noFill/>
-            <a:ln w="76200" cap="flat" cmpd="sng">
+            <a:ln cap="flat" cmpd="sng" w="76200">
               <a:solidFill>
                 <a:srgbClr val="FFC000"/>
               </a:solidFill>
               <a:prstDash val="solid"/>
               <a:round/>
-              <a:headEnd type="none" w="sm" len="sm"/>
-              <a:tailEnd type="none" w="sm" len="sm"/>
+              <a:headEnd len="sm" w="sm" type="none"/>
+              <a:tailEnd len="sm" w="sm" type="none"/>
             </a:ln>
           </p:spPr>
           <p:txBody>
-            <a:bodyPr spcFirstLastPara="1" wrap="square" lIns="457200" tIns="457200" rIns="457200" bIns="228600" anchor="t" anchorCtr="0">
+            <a:bodyPr anchorCtr="0" anchor="t" bIns="228600" lIns="457200" spcFirstLastPara="1" rIns="457200" wrap="square" tIns="457200">
               <a:spAutoFit/>
             </a:bodyPr>
             <a:lstStyle/>
             <a:p>
-              <a:pPr marL="457200" marR="0" lvl="0" indent="-457200" algn="l" rtl="0">
+              <a:pPr indent="-457200" lvl="0" marL="457200" marR="0" rtl="0" algn="l">
                 <a:lnSpc>
                   <a:spcPct val="100000"/>
                 </a:lnSpc>
@@ -16725,7 +16732,7 @@
                 <a:buChar char="●"/>
               </a:pPr>
               <a:r>
-                <a:rPr lang="en-US" sz="3600" b="0" i="0" u="none" strike="noStrike" cap="none">
+                <a:rPr b="0" i="0" lang="en-US" sz="3600" u="none" cap="none" strike="noStrike">
                   <a:solidFill>
                     <a:schemeClr val="dk1"/>
                   </a:solidFill>
@@ -16736,10 +16743,18 @@
                 </a:rPr>
                 <a:t>Review and integrate with Bank of America, East Carolina University, and Northern Illinois University </a:t>
               </a:r>
-              <a:endParaRPr/>
+              <a:endParaRPr b="0" i="0" sz="1400" u="none" cap="none" strike="noStrike">
+                <a:solidFill>
+                  <a:srgbClr val="000000"/>
+                </a:solidFill>
+                <a:latin typeface="Arial"/>
+                <a:ea typeface="Arial"/>
+                <a:cs typeface="Arial"/>
+                <a:sym typeface="Arial"/>
+              </a:endParaRPr>
             </a:p>
             <a:p>
-              <a:pPr marL="0" marR="0" lvl="0" indent="0" algn="l" rtl="0">
+              <a:pPr indent="0" lvl="0" marL="0" marR="0" rtl="0" algn="l">
                 <a:lnSpc>
                   <a:spcPct val="100000"/>
                 </a:lnSpc>
@@ -16756,7 +16771,10 @@
                 <a:buFont typeface="Arial"/>
                 <a:buNone/>
               </a:pPr>
-              <a:endParaRPr sz="3600" b="0" i="0" u="none" strike="noStrike" cap="none">
+              <a:r>
+                <a:t/>
+              </a:r>
+              <a:endParaRPr b="0" i="0" sz="3600" u="none" cap="none" strike="noStrike">
                 <a:solidFill>
                   <a:schemeClr val="dk1"/>
                 </a:solidFill>
@@ -16767,7 +16785,7 @@
               </a:endParaRPr>
             </a:p>
             <a:p>
-              <a:pPr marL="457200" marR="0" lvl="0" indent="-457200" algn="l" rtl="0">
+              <a:pPr indent="-457200" lvl="0" marL="457200" marR="0" rtl="0" algn="l">
                 <a:lnSpc>
                   <a:spcPct val="100000"/>
                 </a:lnSpc>
@@ -16785,7 +16803,7 @@
                 <a:buChar char="●"/>
               </a:pPr>
               <a:r>
-                <a:rPr lang="en-US" sz="3600" b="0" i="0" u="none" strike="noStrike" cap="none">
+                <a:rPr b="0" i="0" lang="en-US" sz="3600" u="none" cap="none" strike="noStrike">
                   <a:solidFill>
                     <a:schemeClr val="dk1"/>
                   </a:solidFill>
@@ -16796,7 +16814,7 @@
                 </a:rPr>
                 <a:t>Integrate labs on the z/16 into the learning modules</a:t>
               </a:r>
-              <a:endParaRPr sz="3600" b="0" i="0" u="none" strike="noStrike" cap="none">
+              <a:endParaRPr b="0" i="0" sz="3600" u="none" cap="none" strike="noStrike">
                 <a:solidFill>
                   <a:schemeClr val="dk1"/>
                 </a:solidFill>
@@ -16811,15 +16829,15 @@
       </p:grpSp>
       <p:pic>
         <p:nvPicPr>
-          <p:cNvPr id="109" name="Google Shape;109;g3141e128008_0_0"/>
+          <p:cNvPr id="108" name="Google Shape;108;g3141e128008_0_0"/>
           <p:cNvPicPr preferRelativeResize="0"/>
           <p:nvPr/>
         </p:nvPicPr>
         <p:blipFill rotWithShape="1">
-          <a:blip r:embed="rId5">
+          <a:blip r:embed="rId4">
             <a:alphaModFix/>
           </a:blip>
-          <a:srcRect/>
+          <a:srcRect b="0" l="0" r="0" t="0"/>
           <a:stretch/>
         </p:blipFill>
         <p:spPr>
@@ -16838,15 +16856,15 @@
       </p:pic>
       <p:pic>
         <p:nvPicPr>
-          <p:cNvPr id="110" name="Google Shape;110;g3141e128008_0_0"/>
+          <p:cNvPr id="109" name="Google Shape;109;g3141e128008_0_0"/>
           <p:cNvPicPr preferRelativeResize="0"/>
           <p:nvPr/>
         </p:nvPicPr>
         <p:blipFill rotWithShape="1">
-          <a:blip r:embed="rId6">
+          <a:blip r:embed="rId5">
             <a:alphaModFix/>
           </a:blip>
-          <a:srcRect/>
+          <a:srcRect b="0" l="0" r="0" t="0"/>
           <a:stretch/>
         </p:blipFill>
         <p:spPr>
@@ -16865,7 +16883,7 @@
       </p:pic>
       <p:sp>
         <p:nvSpPr>
-          <p:cNvPr id="111" name="Google Shape;111;g3141e128008_0_0"/>
+          <p:cNvPr id="110" name="Google Shape;110;g3141e128008_0_0"/>
           <p:cNvSpPr/>
           <p:nvPr/>
         </p:nvSpPr>
@@ -16876,29 +16894,29 @@
           </a:xfrm>
           <a:prstGeom prst="parallelogram">
             <a:avLst>
-              <a:gd name="adj" fmla="val 25000"/>
+              <a:gd fmla="val 25000" name="adj"/>
             </a:avLst>
           </a:prstGeom>
           <a:solidFill>
             <a:srgbClr val="FFC000"/>
           </a:solidFill>
-          <a:ln w="9525" cap="flat" cmpd="sng">
+          <a:ln cap="flat" cmpd="sng" w="9525">
             <a:solidFill>
               <a:schemeClr val="dk1"/>
             </a:solidFill>
             <a:prstDash val="solid"/>
             <a:round/>
-            <a:headEnd type="none" w="sm" len="sm"/>
-            <a:tailEnd type="none" w="sm" len="sm"/>
+            <a:headEnd len="sm" w="sm" type="none"/>
+            <a:tailEnd len="sm" w="sm" type="none"/>
           </a:ln>
         </p:spPr>
         <p:txBody>
-          <a:bodyPr spcFirstLastPara="1" wrap="square" lIns="91425" tIns="91425" rIns="91425" bIns="91425" anchor="ctr" anchorCtr="0">
+          <a:bodyPr anchorCtr="0" anchor="ctr" bIns="91425" lIns="91425" spcFirstLastPara="1" rIns="91425" wrap="square" tIns="91425">
             <a:noAutofit/>
           </a:bodyPr>
           <a:lstStyle/>
           <a:p>
-            <a:pPr marL="0" marR="0" lvl="0" indent="0" algn="ctr" rtl="0">
+            <a:pPr indent="0" lvl="0" marL="0" marR="0" rtl="0" algn="ctr">
               <a:lnSpc>
                 <a:spcPct val="100000"/>
               </a:lnSpc>
@@ -16916,7 +16934,7 @@
               <a:buNone/>
             </a:pPr>
             <a:r>
-              <a:rPr lang="en-US" sz="4800" b="1" i="0" u="none" strike="noStrike" cap="none">
+              <a:rPr b="1" i="0" lang="en-US" sz="4800" u="none" cap="none" strike="noStrike">
                 <a:solidFill>
                   <a:srgbClr val="000000"/>
                 </a:solidFill>
@@ -16927,7 +16945,7 @@
               </a:rPr>
               <a:t>Illustrations</a:t>
             </a:r>
-            <a:endParaRPr sz="4800" b="1" i="0" u="none" strike="noStrike" cap="none">
+            <a:endParaRPr b="1" i="0" sz="4800" u="none" cap="none" strike="noStrike">
               <a:solidFill>
                 <a:srgbClr val="000000"/>
               </a:solidFill>
@@ -16941,21 +16959,49 @@
       </p:sp>
       <p:pic>
         <p:nvPicPr>
-          <p:cNvPr id="112" name="Google Shape;112;g3141e128008_0_0" descr="A room with rows of computer servers&#10;&#10;Description automatically generated"/>
+          <p:cNvPr descr="A room with rows of computer servers&#10;&#10;Description automatically generated" id="111" name="Google Shape;111;g3141e128008_0_0"/>
           <p:cNvPicPr preferRelativeResize="0"/>
           <p:nvPr/>
         </p:nvPicPr>
         <p:blipFill rotWithShape="1">
-          <a:blip r:embed="rId7">
+          <a:blip r:embed="rId6">
             <a:alphaModFix/>
           </a:blip>
-          <a:srcRect/>
+          <a:srcRect b="0" l="0" r="0" t="0"/>
           <a:stretch/>
         </p:blipFill>
         <p:spPr>
           <a:xfrm>
             <a:off x="15181408" y="15428526"/>
             <a:ext cx="14883590" cy="4771759"/>
+          </a:xfrm>
+          <a:prstGeom prst="rect">
+            <a:avLst/>
+          </a:prstGeom>
+          <a:noFill/>
+          <a:ln>
+            <a:noFill/>
+          </a:ln>
+        </p:spPr>
+      </p:pic>
+      <p:pic>
+        <p:nvPicPr>
+          <p:cNvPr id="112" name="Google Shape;112;g3141e128008_0_0" title="Screenshot 2025-03-25 141852.png"/>
+          <p:cNvPicPr preferRelativeResize="0"/>
+          <p:nvPr/>
+        </p:nvPicPr>
+        <p:blipFill>
+          <a:blip r:embed="rId7">
+            <a:alphaModFix/>
+          </a:blip>
+          <a:stretch>
+            <a:fillRect/>
+          </a:stretch>
+        </p:blipFill>
+        <p:spPr>
+          <a:xfrm>
+            <a:off x="15172175" y="21394328"/>
+            <a:ext cx="14883601" cy="7864498"/>
           </a:xfrm>
           <a:prstGeom prst="rect">
             <a:avLst/>
@@ -16975,7 +17021,7 @@
 </file>
 
 <file path=ppt/theme/theme1.xml><?xml version="1.0" encoding="utf-8"?>
-<a:theme xmlns:a="http://schemas.openxmlformats.org/drawingml/2006/main" name="Office 2013 - 2022 Theme">
+<a:theme xmlns:a="http://schemas.openxmlformats.org/drawingml/2006/main" xmlns:r="http://schemas.openxmlformats.org/officeDocument/2006/relationships" name="Office 2013 - 2022 Theme">
   <a:themeElements>
     <a:clrScheme name="Office 2013 - 2022 Theme">
       <a:dk1>
@@ -17250,13 +17296,11 @@
       </a:bgFillStyleLst>
     </a:fmtScheme>
   </a:themeElements>
-  <a:objectDefaults/>
-  <a:extraClrSchemeLst/>
 </a:theme>
 </file>
 
 <file path=ppt/theme/theme2.xml><?xml version="1.0" encoding="utf-8"?>
-<a:theme xmlns:a="http://schemas.openxmlformats.org/drawingml/2006/main">
+<a:theme xmlns:a="http://schemas.openxmlformats.org/drawingml/2006/main" xmlns:r="http://schemas.openxmlformats.org/officeDocument/2006/relationships">
   <a:themeElements>
     <a:clrScheme name="Default">
       <a:dk1>
@@ -17531,7 +17575,5 @@
       </a:bgFillStyleLst>
     </a:fmtScheme>
   </a:themeElements>
-  <a:objectDefaults/>
-  <a:extraClrSchemeLst/>
 </a:theme>
 </file>